--- a/assets/showcase/business-review/Annual-Review.pptx
+++ b/assets/showcase/business-review/Annual-Review.pptx
@@ -16,9 +16,11 @@
     <p:sldId id="264" r:id="rId10"/>
     <p:sldId id="265" r:id="rId11"/>
     <p:sldId id="266" r:id="rId12"/>
+    <p:sldId id="267" r:id="rId13"/>
+    <p:sldId id="268" r:id="rId14"/>
   </p:sldIdLst>
   <p:notesMasterIdLst>
-    <p:notesMasterId r:id="rId13"/>
+    <p:notesMasterId r:id="rId15"/>
   </p:notesMasterIdLst>
   <p:sldSz cx="12192000" cy="6858000"/>
   <p:notesSz cx="6858000" cy="12192000"/>
@@ -512,7 +514,7 @@
           <a:p>
             <a:r>
               <a:rPr lang="en-US" dirty="0"/>
-              <a:t/>
+              <a:t>开场 30 秒：先讲翻倍结果，再讲怎么做到的。全程控制在 15 分钟。</a:t>
             </a:r>
             <a:endParaRPr lang="en-US" dirty="0"/>
           </a:p>
@@ -730,6 +732,182 @@
 </p:notes>
 </file>
 
+<file path=ppt/notesSlides/notesSlide12.xml><?xml version="1.0" encoding="utf-8"?>
+<p:notes xmlns:a="http://schemas.openxmlformats.org/drawingml/2006/main" xmlns:r="http://schemas.openxmlformats.org/officeDocument/2006/relationships" xmlns:p="http://schemas.openxmlformats.org/presentationml/2006/main">
+  <p:cSld>
+    <p:spTree>
+      <p:nvGrpSpPr>
+        <p:cNvPr id="1" name=""/>
+        <p:cNvGrpSpPr/>
+        <p:nvPr/>
+      </p:nvGrpSpPr>
+      <p:grpSpPr>
+        <a:xfrm>
+          <a:off x="0" y="0"/>
+          <a:ext cx="0" cy="0"/>
+          <a:chOff x="0" y="0"/>
+          <a:chExt cx="0" cy="0"/>
+        </a:xfrm>
+      </p:grpSpPr>
+      <p:sp>
+        <p:nvSpPr>
+          <p:cNvPr id="2" name="Slide Image Placeholder 1"/>
+          <p:cNvSpPr>
+            <a:spLocks noGrp="1" noRot="1" noChangeAspect="1"/>
+          </p:cNvSpPr>
+          <p:nvPr>
+            <p:ph type="sldImg"/>
+          </p:nvPr>
+        </p:nvSpPr>
+        <p:spPr/>
+      </p:sp>
+      <p:sp>
+        <p:nvSpPr>
+          <p:cNvPr id="3" name="Notes Placeholder 2"/>
+          <p:cNvSpPr>
+            <a:spLocks noGrp="1"/>
+          </p:cNvSpPr>
+          <p:nvPr>
+            <p:ph type="body" idx="1"/>
+          </p:nvPr>
+        </p:nvSpPr>
+        <p:spPr/>
+        <p:txBody>
+          <a:bodyPr/>
+          <a:lstStyle/>
+          <a:p>
+            <a:r>
+              <a:rPr lang="en-US" dirty="0"/>
+              <a:t>逐条和对应负责人确认资源到位时间，会后发会议纪要。</a:t>
+            </a:r>
+            <a:endParaRPr lang="en-US" dirty="0"/>
+          </a:p>
+        </p:txBody>
+      </p:sp>
+      <p:sp>
+        <p:nvSpPr>
+          <p:cNvPr id="4" name="Slide Number Placeholder 3"/>
+          <p:cNvSpPr>
+            <a:spLocks noGrp="1"/>
+          </p:cNvSpPr>
+          <p:nvPr>
+            <p:ph type="sldNum" sz="quarter" idx="10"/>
+          </p:nvPr>
+        </p:nvSpPr>
+        <p:spPr/>
+        <p:txBody>
+          <a:bodyPr/>
+          <a:lstStyle/>
+          <a:p>
+            <a:fld id="{F7021451-1387-4CA6-816F-3879F97B5CBC}" type="slidenum">
+              <a:rPr lang="en-US"/>
+              <a:t>12</a:t>
+            </a:fld>
+            <a:endParaRPr lang="en-US"/>
+          </a:p>
+        </p:txBody>
+      </p:sp>
+    </p:spTree>
+    <p:extLst>
+      <p:ext uri="{BB962C8B-B14F-4D97-AF65-F5344CB8AC3E}">
+        <p14:creationId xmlns:p14="http://schemas.microsoft.com/office/powerpoint/2010/main" val="1024086991"/>
+      </p:ext>
+    </p:extLst>
+  </p:cSld>
+  <p:clrMapOvr>
+    <a:masterClrMapping/>
+  </p:clrMapOvr>
+</p:notes>
+</file>
+
+<file path=ppt/notesSlides/notesSlide13.xml><?xml version="1.0" encoding="utf-8"?>
+<p:notes xmlns:a="http://schemas.openxmlformats.org/drawingml/2006/main" xmlns:r="http://schemas.openxmlformats.org/officeDocument/2006/relationships" xmlns:p="http://schemas.openxmlformats.org/presentationml/2006/main">
+  <p:cSld>
+    <p:spTree>
+      <p:nvGrpSpPr>
+        <p:cNvPr id="1" name=""/>
+        <p:cNvGrpSpPr/>
+        <p:nvPr/>
+      </p:nvGrpSpPr>
+      <p:grpSpPr>
+        <a:xfrm>
+          <a:off x="0" y="0"/>
+          <a:ext cx="0" cy="0"/>
+          <a:chOff x="0" y="0"/>
+          <a:chExt cx="0" cy="0"/>
+        </a:xfrm>
+      </p:grpSpPr>
+      <p:sp>
+        <p:nvSpPr>
+          <p:cNvPr id="2" name="Slide Image Placeholder 1"/>
+          <p:cNvSpPr>
+            <a:spLocks noGrp="1" noRot="1" noChangeAspect="1"/>
+          </p:cNvSpPr>
+          <p:nvPr>
+            <p:ph type="sldImg"/>
+          </p:nvPr>
+        </p:nvSpPr>
+        <p:spPr/>
+      </p:sp>
+      <p:sp>
+        <p:nvSpPr>
+          <p:cNvPr id="3" name="Notes Placeholder 2"/>
+          <p:cNvSpPr>
+            <a:spLocks noGrp="1"/>
+          </p:cNvSpPr>
+          <p:nvPr>
+            <p:ph type="body" idx="1"/>
+          </p:nvPr>
+        </p:nvSpPr>
+        <p:spPr/>
+        <p:txBody>
+          <a:bodyPr/>
+          <a:lstStyle/>
+          <a:p>
+            <a:r>
+              <a:rPr lang="en-US" dirty="0"/>
+              <a:t>以 CEO 年度信金句收尾，把讨论引向 2026 预算分配。</a:t>
+            </a:r>
+            <a:endParaRPr lang="en-US" dirty="0"/>
+          </a:p>
+        </p:txBody>
+      </p:sp>
+      <p:sp>
+        <p:nvSpPr>
+          <p:cNvPr id="4" name="Slide Number Placeholder 3"/>
+          <p:cNvSpPr>
+            <a:spLocks noGrp="1"/>
+          </p:cNvSpPr>
+          <p:nvPr>
+            <p:ph type="sldNum" sz="quarter" idx="10"/>
+          </p:nvPr>
+        </p:nvSpPr>
+        <p:spPr/>
+        <p:txBody>
+          <a:bodyPr/>
+          <a:lstStyle/>
+          <a:p>
+            <a:fld id="{F7021451-1387-4CA6-816F-3879F97B5CBC}" type="slidenum">
+              <a:rPr lang="en-US"/>
+              <a:t>13</a:t>
+            </a:fld>
+            <a:endParaRPr lang="en-US"/>
+          </a:p>
+        </p:txBody>
+      </p:sp>
+    </p:spTree>
+    <p:extLst>
+      <p:ext uri="{BB962C8B-B14F-4D97-AF65-F5344CB8AC3E}">
+        <p14:creationId xmlns:p14="http://schemas.microsoft.com/office/powerpoint/2010/main" val="1024086991"/>
+      </p:ext>
+    </p:extLst>
+  </p:cSld>
+  <p:clrMapOvr>
+    <a:masterClrMapping/>
+  </p:clrMapOvr>
+</p:notes>
+</file>
+
 <file path=ppt/notesSlides/notesSlide2.xml><?xml version="1.0" encoding="utf-8"?>
 <p:notes xmlns:a="http://schemas.openxmlformats.org/drawingml/2006/main" xmlns:r="http://schemas.openxmlformats.org/officeDocument/2006/relationships" xmlns:p="http://schemas.openxmlformats.org/presentationml/2006/main">
   <p:cSld>
@@ -1128,7 +1306,7 @@
           <a:p>
             <a:r>
               <a:rPr lang="en-US" dirty="0"/>
-              <a:t/>
+              <a:t>强调 Q4 单季占全年 1/3 以上：旺季打法已被验证，可以复制。</a:t>
             </a:r>
             <a:endParaRPr lang="en-US" dirty="0"/>
           </a:p>
@@ -1961,8 +2139,8 @@
         </p:nvSpPr>
         <p:spPr>
           <a:xfrm>
-            <a:off x="1005840" y="868680"/>
-            <a:ext cx="9601200" cy="731520"/>
+            <a:off x="1005840" y="1234440"/>
+            <a:ext cx="4572000" cy="1554480"/>
           </a:xfrm>
           <a:prstGeom prst="rect">
             <a:avLst/>
@@ -1978,7 +2156,46 @@
               <a:buNone/>
             </a:pPr>
             <a:r>
-              <a:rPr lang="en-US" sz="3400" b="1" dirty="0">
+              <a:rPr lang="en-US" sz="9600" b="1" dirty="0">
+                <a:solidFill>
+                  <a:srgbClr val="86868B"/>
+                </a:solidFill>
+                <a:latin typeface="Segoe UI" pitchFamily="34" charset="0"/>
+                <a:ea typeface="Segoe UI" pitchFamily="34" charset="-122"/>
+                <a:cs typeface="Segoe UI" pitchFamily="34" charset="-120"/>
+              </a:rPr>
+              <a:t>02</a:t>
+            </a:r>
+            <a:endParaRPr lang="en-US" sz="9600" dirty="0"/>
+          </a:p>
+        </p:txBody>
+      </p:sp>
+      <p:sp>
+        <p:nvSpPr>
+          <p:cNvPr id="3" name="Text 1"/>
+          <p:cNvSpPr/>
+          <p:nvPr/>
+        </p:nvSpPr>
+        <p:spPr>
+          <a:xfrm>
+            <a:off x="1005840" y="2880360"/>
+            <a:ext cx="9601200" cy="1188720"/>
+          </a:xfrm>
+          <a:prstGeom prst="rect">
+            <a:avLst/>
+          </a:prstGeom>
+          <a:noFill/>
+          <a:ln/>
+        </p:spPr>
+        <p:txBody>
+          <a:bodyPr wrap="square" rtlCol="0" anchor="ctr"/>
+          <a:lstStyle/>
+          <a:p>
+            <a:pPr indent="0" marL="0">
+              <a:buNone/>
+            </a:pPr>
+            <a:r>
+              <a:rPr lang="en-US" sz="4800" b="1" dirty="0">
                 <a:solidFill>
                   <a:srgbClr val="1D1D1F"/>
                 </a:solidFill>
@@ -1986,22 +2203,22 @@
                 <a:ea typeface="Microsoft YaHei" pitchFamily="34" charset="-122"/>
                 <a:cs typeface="Microsoft YaHei" pitchFamily="34" charset="-120"/>
               </a:rPr>
-              <a:t>2026 增长主线</a:t>
-            </a:r>
-            <a:endParaRPr lang="en-US" sz="3400" dirty="0"/>
-          </a:p>
-        </p:txBody>
-      </p:sp>
-      <p:sp>
-        <p:nvSpPr>
-          <p:cNvPr id="3" name="Text 1"/>
-          <p:cNvSpPr/>
-          <p:nvPr/>
-        </p:nvSpPr>
-        <p:spPr>
-          <a:xfrm>
-            <a:off x="1005840" y="2651760"/>
-            <a:ext cx="3179064" cy="548640"/>
+              <a:t>2026 三条主线</a:t>
+            </a:r>
+            <a:endParaRPr lang="en-US" sz="4800" dirty="0"/>
+          </a:p>
+        </p:txBody>
+      </p:sp>
+      <p:sp>
+        <p:nvSpPr>
+          <p:cNvPr id="4" name="Text 2"/>
+          <p:cNvSpPr/>
+          <p:nvPr/>
+        </p:nvSpPr>
+        <p:spPr>
+          <a:xfrm>
+            <a:off x="1005840" y="4160520"/>
+            <a:ext cx="9144000" cy="548640"/>
           </a:xfrm>
           <a:prstGeom prst="rect">
             <a:avLst/>
@@ -2017,221 +2234,17 @@
               <a:buNone/>
             </a:pPr>
             <a:r>
-              <a:rPr lang="en-US" sz="2100" b="1" dirty="0">
-                <a:solidFill>
-                  <a:srgbClr val="1D1D1F"/>
+              <a:rPr lang="en-US" sz="2000" dirty="0">
+                <a:solidFill>
+                  <a:srgbClr val="86868B"/>
                 </a:solidFill>
                 <a:latin typeface="Microsoft YaHei" pitchFamily="34" charset="0"/>
                 <a:ea typeface="Microsoft YaHei" pitchFamily="34" charset="-122"/>
                 <a:cs typeface="Microsoft YaHei" pitchFamily="34" charset="-120"/>
               </a:rPr>
-              <a:t>产品线扩展</a:t>
-            </a:r>
-            <a:endParaRPr lang="en-US" sz="2100" dirty="0"/>
-          </a:p>
-        </p:txBody>
-      </p:sp>
-      <p:sp>
-        <p:nvSpPr>
-          <p:cNvPr id="4" name="Text 2"/>
-          <p:cNvSpPr/>
-          <p:nvPr/>
-        </p:nvSpPr>
-        <p:spPr>
-          <a:xfrm>
-            <a:off x="1005840" y="3246120"/>
-            <a:ext cx="3179064" cy="2194560"/>
-          </a:xfrm>
-          <a:prstGeom prst="rect">
-            <a:avLst/>
-          </a:prstGeom>
-          <a:noFill/>
-          <a:ln/>
-        </p:spPr>
-        <p:txBody>
-          <a:bodyPr wrap="square" rtlCol="0" anchor="ctr"/>
-          <a:lstStyle/>
-          <a:p>
-            <a:pPr indent="0" marL="0">
-              <a:lnSpc>
-                <a:spcPct val="135000"/>
-              </a:lnSpc>
-              <a:buNone/>
-            </a:pPr>
-            <a:r>
-              <a:rPr lang="en-US" sz="1600" dirty="0">
-                <a:solidFill>
-                  <a:srgbClr val="86868B"/>
-                </a:solidFill>
-                <a:latin typeface="Microsoft YaHei" pitchFamily="34" charset="0"/>
-                <a:ea typeface="Microsoft YaHei" pitchFamily="34" charset="-122"/>
-                <a:cs typeface="Microsoft YaHei" pitchFamily="34" charset="-120"/>
-              </a:rPr>
-              <a:t>Q2 上新入门系列，覆盖百元价格带。</a:t>
-            </a:r>
-            <a:endParaRPr lang="en-US" sz="1600" dirty="0"/>
-          </a:p>
-        </p:txBody>
-      </p:sp>
-      <p:sp>
-        <p:nvSpPr>
-          <p:cNvPr id="5" name="Text 3"/>
-          <p:cNvSpPr/>
-          <p:nvPr/>
-        </p:nvSpPr>
-        <p:spPr>
-          <a:xfrm>
-            <a:off x="4504944" y="2651760"/>
-            <a:ext cx="3179064" cy="548640"/>
-          </a:xfrm>
-          <a:prstGeom prst="rect">
-            <a:avLst/>
-          </a:prstGeom>
-          <a:noFill/>
-          <a:ln/>
-        </p:spPr>
-        <p:txBody>
-          <a:bodyPr wrap="square" rtlCol="0" anchor="ctr"/>
-          <a:lstStyle/>
-          <a:p>
-            <a:pPr indent="0" marL="0">
-              <a:buNone/>
-            </a:pPr>
-            <a:r>
-              <a:rPr lang="en-US" sz="2100" b="1" dirty="0">
-                <a:solidFill>
-                  <a:srgbClr val="1D1D1F"/>
-                </a:solidFill>
-                <a:latin typeface="Microsoft YaHei" pitchFamily="34" charset="0"/>
-                <a:ea typeface="Microsoft YaHei" pitchFamily="34" charset="-122"/>
-                <a:cs typeface="Microsoft YaHei" pitchFamily="34" charset="-120"/>
-              </a:rPr>
-              <a:t>渠道纵深</a:t>
-            </a:r>
-            <a:endParaRPr lang="en-US" sz="2100" dirty="0"/>
-          </a:p>
-        </p:txBody>
-      </p:sp>
-      <p:sp>
-        <p:nvSpPr>
-          <p:cNvPr id="6" name="Text 4"/>
-          <p:cNvSpPr/>
-          <p:nvPr/>
-        </p:nvSpPr>
-        <p:spPr>
-          <a:xfrm>
-            <a:off x="4504944" y="3246120"/>
-            <a:ext cx="3179064" cy="2194560"/>
-          </a:xfrm>
-          <a:prstGeom prst="rect">
-            <a:avLst/>
-          </a:prstGeom>
-          <a:noFill/>
-          <a:ln/>
-        </p:spPr>
-        <p:txBody>
-          <a:bodyPr wrap="square" rtlCol="0" anchor="ctr"/>
-          <a:lstStyle/>
-          <a:p>
-            <a:pPr indent="0" marL="0">
-              <a:lnSpc>
-                <a:spcPct val="135000"/>
-              </a:lnSpc>
-              <a:buNone/>
-            </a:pPr>
-            <a:r>
-              <a:rPr lang="en-US" sz="1600" dirty="0">
-                <a:solidFill>
-                  <a:srgbClr val="86868B"/>
-                </a:solidFill>
-                <a:latin typeface="Microsoft YaHei" pitchFamily="34" charset="0"/>
-                <a:ea typeface="Microsoft YaHei" pitchFamily="34" charset="-122"/>
-                <a:cs typeface="Microsoft YaHei" pitchFamily="34" charset="-120"/>
-              </a:rPr>
-              <a:t>线下体验店 5 城 10 店，线上线下库存打通。</a:t>
-            </a:r>
-            <a:endParaRPr lang="en-US" sz="1600" dirty="0"/>
-          </a:p>
-        </p:txBody>
-      </p:sp>
-      <p:sp>
-        <p:nvSpPr>
-          <p:cNvPr id="7" name="Text 5"/>
-          <p:cNvSpPr/>
-          <p:nvPr/>
-        </p:nvSpPr>
-        <p:spPr>
-          <a:xfrm>
-            <a:off x="8004048" y="2651760"/>
-            <a:ext cx="3179064" cy="548640"/>
-          </a:xfrm>
-          <a:prstGeom prst="rect">
-            <a:avLst/>
-          </a:prstGeom>
-          <a:noFill/>
-          <a:ln/>
-        </p:spPr>
-        <p:txBody>
-          <a:bodyPr wrap="square" rtlCol="0" anchor="ctr"/>
-          <a:lstStyle/>
-          <a:p>
-            <a:pPr indent="0" marL="0">
-              <a:buNone/>
-            </a:pPr>
-            <a:r>
-              <a:rPr lang="en-US" sz="2100" b="1" dirty="0">
-                <a:solidFill>
-                  <a:srgbClr val="1D1D1F"/>
-                </a:solidFill>
-                <a:latin typeface="Microsoft YaHei" pitchFamily="34" charset="0"/>
-                <a:ea typeface="Microsoft YaHei" pitchFamily="34" charset="-122"/>
-                <a:cs typeface="Microsoft YaHei" pitchFamily="34" charset="-120"/>
-              </a:rPr>
-              <a:t>出海加速</a:t>
-            </a:r>
-            <a:endParaRPr lang="en-US" sz="2100" dirty="0"/>
-          </a:p>
-        </p:txBody>
-      </p:sp>
-      <p:sp>
-        <p:nvSpPr>
-          <p:cNvPr id="8" name="Text 6"/>
-          <p:cNvSpPr/>
-          <p:nvPr/>
-        </p:nvSpPr>
-        <p:spPr>
-          <a:xfrm>
-            <a:off x="8004048" y="3246120"/>
-            <a:ext cx="3179064" cy="2194560"/>
-          </a:xfrm>
-          <a:prstGeom prst="rect">
-            <a:avLst/>
-          </a:prstGeom>
-          <a:noFill/>
-          <a:ln/>
-        </p:spPr>
-        <p:txBody>
-          <a:bodyPr wrap="square" rtlCol="0" anchor="ctr"/>
-          <a:lstStyle/>
-          <a:p>
-            <a:pPr indent="0" marL="0">
-              <a:lnSpc>
-                <a:spcPct val="135000"/>
-              </a:lnSpc>
-              <a:buNone/>
-            </a:pPr>
-            <a:r>
-              <a:rPr lang="en-US" sz="1600" dirty="0">
-                <a:solidFill>
-                  <a:srgbClr val="86868B"/>
-                </a:solidFill>
-                <a:latin typeface="Microsoft YaHei" pitchFamily="34" charset="0"/>
-                <a:ea typeface="Microsoft YaHei" pitchFamily="34" charset="-122"/>
-                <a:cs typeface="Microsoft YaHei" pitchFamily="34" charset="-120"/>
-              </a:rPr>
-              <a:t>东南亚 GMV 目标 1.2 亿，组建本地化团队。</a:t>
-            </a:r>
-            <a:endParaRPr lang="en-US" sz="1600" dirty="0"/>
+              <a:t>把翻倍，变成习惯。</a:t>
+            </a:r>
+            <a:endParaRPr lang="en-US" sz="2000" dirty="0"/>
           </a:p>
         </p:txBody>
       </p:sp>
@@ -2275,6 +2288,1010 @@
         </p:nvSpPr>
         <p:spPr>
           <a:xfrm>
+            <a:off x="1005840" y="868680"/>
+            <a:ext cx="9601200" cy="731520"/>
+          </a:xfrm>
+          <a:prstGeom prst="rect">
+            <a:avLst/>
+          </a:prstGeom>
+          <a:noFill/>
+          <a:ln/>
+        </p:spPr>
+        <p:txBody>
+          <a:bodyPr wrap="square" rtlCol="0" anchor="ctr"/>
+          <a:lstStyle/>
+          <a:p>
+            <a:pPr indent="0" marL="0">
+              <a:buNone/>
+            </a:pPr>
+            <a:r>
+              <a:rPr lang="en-US" sz="3400" b="1" dirty="0">
+                <a:solidFill>
+                  <a:srgbClr val="1D1D1F"/>
+                </a:solidFill>
+                <a:latin typeface="Microsoft YaHei" pitchFamily="34" charset="0"/>
+                <a:ea typeface="Microsoft YaHei" pitchFamily="34" charset="-122"/>
+                <a:cs typeface="Microsoft YaHei" pitchFamily="34" charset="-120"/>
+              </a:rPr>
+              <a:t>2026 增长主线</a:t>
+            </a:r>
+            <a:endParaRPr lang="en-US" sz="3400" dirty="0"/>
+          </a:p>
+        </p:txBody>
+      </p:sp>
+      <p:sp>
+        <p:nvSpPr>
+          <p:cNvPr id="3" name="Text 1"/>
+          <p:cNvSpPr/>
+          <p:nvPr/>
+        </p:nvSpPr>
+        <p:spPr>
+          <a:xfrm>
+            <a:off x="1005840" y="2651760"/>
+            <a:ext cx="3179064" cy="548640"/>
+          </a:xfrm>
+          <a:prstGeom prst="rect">
+            <a:avLst/>
+          </a:prstGeom>
+          <a:noFill/>
+          <a:ln/>
+        </p:spPr>
+        <p:txBody>
+          <a:bodyPr wrap="square" rtlCol="0" anchor="ctr"/>
+          <a:lstStyle/>
+          <a:p>
+            <a:pPr indent="0" marL="0">
+              <a:buNone/>
+            </a:pPr>
+            <a:r>
+              <a:rPr lang="en-US" sz="2100" b="1" dirty="0">
+                <a:solidFill>
+                  <a:srgbClr val="1D1D1F"/>
+                </a:solidFill>
+                <a:latin typeface="Microsoft YaHei" pitchFamily="34" charset="0"/>
+                <a:ea typeface="Microsoft YaHei" pitchFamily="34" charset="-122"/>
+                <a:cs typeface="Microsoft YaHei" pitchFamily="34" charset="-120"/>
+              </a:rPr>
+              <a:t>产品线扩展</a:t>
+            </a:r>
+            <a:endParaRPr lang="en-US" sz="2100" dirty="0"/>
+          </a:p>
+        </p:txBody>
+      </p:sp>
+      <p:sp>
+        <p:nvSpPr>
+          <p:cNvPr id="4" name="Text 2"/>
+          <p:cNvSpPr/>
+          <p:nvPr/>
+        </p:nvSpPr>
+        <p:spPr>
+          <a:xfrm>
+            <a:off x="1005840" y="3246120"/>
+            <a:ext cx="3179064" cy="2194560"/>
+          </a:xfrm>
+          <a:prstGeom prst="rect">
+            <a:avLst/>
+          </a:prstGeom>
+          <a:noFill/>
+          <a:ln/>
+        </p:spPr>
+        <p:txBody>
+          <a:bodyPr wrap="square" rtlCol="0" anchor="t"/>
+          <a:lstStyle/>
+          <a:p>
+            <a:pPr indent="0" marL="0">
+              <a:lnSpc>
+                <a:spcPct val="135000"/>
+              </a:lnSpc>
+              <a:buNone/>
+            </a:pPr>
+            <a:r>
+              <a:rPr lang="en-US" sz="1600" dirty="0">
+                <a:solidFill>
+                  <a:srgbClr val="86868B"/>
+                </a:solidFill>
+                <a:latin typeface="Microsoft YaHei" pitchFamily="34" charset="0"/>
+                <a:ea typeface="Microsoft YaHei" pitchFamily="34" charset="-122"/>
+                <a:cs typeface="Microsoft YaHei" pitchFamily="34" charset="-120"/>
+              </a:rPr>
+              <a:t>Q2 上新入门系列，覆盖百元价格带。</a:t>
+            </a:r>
+            <a:endParaRPr lang="en-US" sz="1600" dirty="0"/>
+          </a:p>
+        </p:txBody>
+      </p:sp>
+      <p:sp>
+        <p:nvSpPr>
+          <p:cNvPr id="5" name="Text 3"/>
+          <p:cNvSpPr/>
+          <p:nvPr/>
+        </p:nvSpPr>
+        <p:spPr>
+          <a:xfrm>
+            <a:off x="4504944" y="2651760"/>
+            <a:ext cx="3179064" cy="548640"/>
+          </a:xfrm>
+          <a:prstGeom prst="rect">
+            <a:avLst/>
+          </a:prstGeom>
+          <a:noFill/>
+          <a:ln/>
+        </p:spPr>
+        <p:txBody>
+          <a:bodyPr wrap="square" rtlCol="0" anchor="ctr"/>
+          <a:lstStyle/>
+          <a:p>
+            <a:pPr indent="0" marL="0">
+              <a:buNone/>
+            </a:pPr>
+            <a:r>
+              <a:rPr lang="en-US" sz="2100" b="1" dirty="0">
+                <a:solidFill>
+                  <a:srgbClr val="1D1D1F"/>
+                </a:solidFill>
+                <a:latin typeface="Microsoft YaHei" pitchFamily="34" charset="0"/>
+                <a:ea typeface="Microsoft YaHei" pitchFamily="34" charset="-122"/>
+                <a:cs typeface="Microsoft YaHei" pitchFamily="34" charset="-120"/>
+              </a:rPr>
+              <a:t>渠道纵深</a:t>
+            </a:r>
+            <a:endParaRPr lang="en-US" sz="2100" dirty="0"/>
+          </a:p>
+        </p:txBody>
+      </p:sp>
+      <p:sp>
+        <p:nvSpPr>
+          <p:cNvPr id="6" name="Text 4"/>
+          <p:cNvSpPr/>
+          <p:nvPr/>
+        </p:nvSpPr>
+        <p:spPr>
+          <a:xfrm>
+            <a:off x="4504944" y="3246120"/>
+            <a:ext cx="3179064" cy="2194560"/>
+          </a:xfrm>
+          <a:prstGeom prst="rect">
+            <a:avLst/>
+          </a:prstGeom>
+          <a:noFill/>
+          <a:ln/>
+        </p:spPr>
+        <p:txBody>
+          <a:bodyPr wrap="square" rtlCol="0" anchor="t"/>
+          <a:lstStyle/>
+          <a:p>
+            <a:pPr indent="0" marL="0">
+              <a:lnSpc>
+                <a:spcPct val="135000"/>
+              </a:lnSpc>
+              <a:buNone/>
+            </a:pPr>
+            <a:r>
+              <a:rPr lang="en-US" sz="1600" dirty="0">
+                <a:solidFill>
+                  <a:srgbClr val="86868B"/>
+                </a:solidFill>
+                <a:latin typeface="Microsoft YaHei" pitchFamily="34" charset="0"/>
+                <a:ea typeface="Microsoft YaHei" pitchFamily="34" charset="-122"/>
+                <a:cs typeface="Microsoft YaHei" pitchFamily="34" charset="-120"/>
+              </a:rPr>
+              <a:t>线下体验店 5 城 10 店，线上线下库存打通。</a:t>
+            </a:r>
+            <a:endParaRPr lang="en-US" sz="1600" dirty="0"/>
+          </a:p>
+        </p:txBody>
+      </p:sp>
+      <p:sp>
+        <p:nvSpPr>
+          <p:cNvPr id="7" name="Text 5"/>
+          <p:cNvSpPr/>
+          <p:nvPr/>
+        </p:nvSpPr>
+        <p:spPr>
+          <a:xfrm>
+            <a:off x="8004048" y="2651760"/>
+            <a:ext cx="3179064" cy="548640"/>
+          </a:xfrm>
+          <a:prstGeom prst="rect">
+            <a:avLst/>
+          </a:prstGeom>
+          <a:noFill/>
+          <a:ln/>
+        </p:spPr>
+        <p:txBody>
+          <a:bodyPr wrap="square" rtlCol="0" anchor="ctr"/>
+          <a:lstStyle/>
+          <a:p>
+            <a:pPr indent="0" marL="0">
+              <a:buNone/>
+            </a:pPr>
+            <a:r>
+              <a:rPr lang="en-US" sz="2100" b="1" dirty="0">
+                <a:solidFill>
+                  <a:srgbClr val="1D1D1F"/>
+                </a:solidFill>
+                <a:latin typeface="Microsoft YaHei" pitchFamily="34" charset="0"/>
+                <a:ea typeface="Microsoft YaHei" pitchFamily="34" charset="-122"/>
+                <a:cs typeface="Microsoft YaHei" pitchFamily="34" charset="-120"/>
+              </a:rPr>
+              <a:t>出海加速</a:t>
+            </a:r>
+            <a:endParaRPr lang="en-US" sz="2100" dirty="0"/>
+          </a:p>
+        </p:txBody>
+      </p:sp>
+      <p:sp>
+        <p:nvSpPr>
+          <p:cNvPr id="8" name="Text 6"/>
+          <p:cNvSpPr/>
+          <p:nvPr/>
+        </p:nvSpPr>
+        <p:spPr>
+          <a:xfrm>
+            <a:off x="8004048" y="3246120"/>
+            <a:ext cx="3179064" cy="2194560"/>
+          </a:xfrm>
+          <a:prstGeom prst="rect">
+            <a:avLst/>
+          </a:prstGeom>
+          <a:noFill/>
+          <a:ln/>
+        </p:spPr>
+        <p:txBody>
+          <a:bodyPr wrap="square" rtlCol="0" anchor="t"/>
+          <a:lstStyle/>
+          <a:p>
+            <a:pPr indent="0" marL="0">
+              <a:lnSpc>
+                <a:spcPct val="135000"/>
+              </a:lnSpc>
+              <a:buNone/>
+            </a:pPr>
+            <a:r>
+              <a:rPr lang="en-US" sz="1600" dirty="0">
+                <a:solidFill>
+                  <a:srgbClr val="86868B"/>
+                </a:solidFill>
+                <a:latin typeface="Microsoft YaHei" pitchFamily="34" charset="0"/>
+                <a:ea typeface="Microsoft YaHei" pitchFamily="34" charset="-122"/>
+                <a:cs typeface="Microsoft YaHei" pitchFamily="34" charset="-120"/>
+              </a:rPr>
+              <a:t>东南亚 GMV 目标 1.2 亿，组建本地化团队。</a:t>
+            </a:r>
+            <a:endParaRPr lang="en-US" sz="1600" dirty="0"/>
+          </a:p>
+        </p:txBody>
+      </p:sp>
+    </p:spTree>
+  </p:cSld>
+  <p:clrMapOvr>
+    <a:masterClrMapping/>
+  </p:clrMapOvr>
+</p:sld>
+</file>
+
+<file path=ppt/slides/slide12.xml><?xml version="1.0" encoding="utf-8"?>
+<p:sld xmlns:a="http://schemas.openxmlformats.org/drawingml/2006/main" xmlns:r="http://schemas.openxmlformats.org/officeDocument/2006/relationships" xmlns:p="http://schemas.openxmlformats.org/presentationml/2006/main">
+  <p:cSld name="Slide 12">
+    <p:bg>
+      <p:bgPr>
+        <a:solidFill>
+          <a:srgbClr val="FBFBFD"/>
+        </a:solidFill>
+      </p:bgPr>
+    </p:bg>
+    <p:spTree>
+      <p:nvGrpSpPr>
+        <p:cNvPr id="1" name=""/>
+        <p:cNvGrpSpPr/>
+        <p:nvPr/>
+      </p:nvGrpSpPr>
+      <p:grpSpPr>
+        <a:xfrm>
+          <a:off x="0" y="0"/>
+          <a:ext cx="0" cy="0"/>
+          <a:chOff x="0" y="0"/>
+          <a:chExt cx="0" cy="0"/>
+        </a:xfrm>
+      </p:grpSpPr>
+      <p:sp>
+        <p:nvSpPr>
+          <p:cNvPr id="2" name="Text 0"/>
+          <p:cNvSpPr/>
+          <p:nvPr/>
+        </p:nvSpPr>
+        <p:spPr>
+          <a:xfrm>
+            <a:off x="1005840" y="548640"/>
+            <a:ext cx="9601200" cy="320040"/>
+          </a:xfrm>
+          <a:prstGeom prst="rect">
+            <a:avLst/>
+          </a:prstGeom>
+          <a:noFill/>
+          <a:ln/>
+        </p:spPr>
+        <p:txBody>
+          <a:bodyPr wrap="square" rtlCol="0" anchor="ctr"/>
+          <a:lstStyle/>
+          <a:p>
+            <a:pPr indent="0" marL="0">
+              <a:buNone/>
+            </a:pPr>
+            <a:r>
+              <a:rPr lang="en-US" sz="1500" spc="300" kern="0" dirty="0">
+                <a:solidFill>
+                  <a:srgbClr val="86868B"/>
+                </a:solidFill>
+                <a:latin typeface="Microsoft YaHei" pitchFamily="34" charset="0"/>
+                <a:ea typeface="Microsoft YaHei" pitchFamily="34" charset="-122"/>
+                <a:cs typeface="Microsoft YaHei" pitchFamily="34" charset="-120"/>
+              </a:rPr>
+              <a:t>里程碑</a:t>
+            </a:r>
+            <a:endParaRPr lang="en-US" sz="1500" dirty="0"/>
+          </a:p>
+        </p:txBody>
+      </p:sp>
+      <p:sp>
+        <p:nvSpPr>
+          <p:cNvPr id="3" name="Text 1"/>
+          <p:cNvSpPr/>
+          <p:nvPr/>
+        </p:nvSpPr>
+        <p:spPr>
+          <a:xfrm>
+            <a:off x="1005840" y="868680"/>
+            <a:ext cx="9601200" cy="731520"/>
+          </a:xfrm>
+          <a:prstGeom prst="rect">
+            <a:avLst/>
+          </a:prstGeom>
+          <a:noFill/>
+          <a:ln/>
+        </p:spPr>
+        <p:txBody>
+          <a:bodyPr wrap="square" rtlCol="0" anchor="t"/>
+          <a:lstStyle/>
+          <a:p>
+            <a:pPr indent="0" marL="0">
+              <a:buNone/>
+            </a:pPr>
+            <a:r>
+              <a:rPr lang="en-US" sz="3400" b="1" dirty="0">
+                <a:solidFill>
+                  <a:srgbClr val="1D1D1F"/>
+                </a:solidFill>
+                <a:latin typeface="Microsoft YaHei" pitchFamily="34" charset="0"/>
+                <a:ea typeface="Microsoft YaHei" pitchFamily="34" charset="-122"/>
+                <a:cs typeface="Microsoft YaHei" pitchFamily="34" charset="-120"/>
+              </a:rPr>
+              <a:t>2026 节奏表</a:t>
+            </a:r>
+            <a:endParaRPr lang="en-US" sz="3400" dirty="0"/>
+          </a:p>
+        </p:txBody>
+      </p:sp>
+      <p:sp>
+        <p:nvSpPr>
+          <p:cNvPr id="4" name="Shape 2"/>
+          <p:cNvSpPr/>
+          <p:nvPr/>
+        </p:nvSpPr>
+        <p:spPr>
+          <a:xfrm>
+            <a:off x="1463040" y="3291840"/>
+            <a:ext cx="9262872" cy="10973"/>
+          </a:xfrm>
+          <a:prstGeom prst="rect">
+            <a:avLst/>
+          </a:prstGeom>
+          <a:solidFill>
+            <a:srgbClr val="D2D2D7"/>
+          </a:solidFill>
+          <a:ln/>
+        </p:spPr>
+      </p:sp>
+      <p:sp>
+        <p:nvSpPr>
+          <p:cNvPr id="5" name="Shape 3"/>
+          <p:cNvSpPr/>
+          <p:nvPr/>
+        </p:nvSpPr>
+        <p:spPr>
+          <a:xfrm>
+            <a:off x="2547747" y="3224174"/>
+            <a:ext cx="146304" cy="146304"/>
+          </a:xfrm>
+          <a:prstGeom prst="ellipse">
+            <a:avLst/>
+          </a:prstGeom>
+          <a:solidFill>
+            <a:srgbClr val="1D1D1F"/>
+          </a:solidFill>
+          <a:ln/>
+        </p:spPr>
+      </p:sp>
+      <p:sp>
+        <p:nvSpPr>
+          <p:cNvPr id="6" name="Text 4"/>
+          <p:cNvSpPr/>
+          <p:nvPr/>
+        </p:nvSpPr>
+        <p:spPr>
+          <a:xfrm>
+            <a:off x="1615059" y="2423160"/>
+            <a:ext cx="2011680" cy="457200"/>
+          </a:xfrm>
+          <a:prstGeom prst="rect">
+            <a:avLst/>
+          </a:prstGeom>
+          <a:noFill/>
+          <a:ln/>
+        </p:spPr>
+        <p:txBody>
+          <a:bodyPr wrap="square" rtlCol="0" anchor="ctr"/>
+          <a:lstStyle/>
+          <a:p>
+            <a:pPr algn="ctr" indent="0" marL="0">
+              <a:buNone/>
+            </a:pPr>
+            <a:r>
+              <a:rPr lang="en-US" sz="2200" b="1" dirty="0">
+                <a:solidFill>
+                  <a:srgbClr val="1D1D1F"/>
+                </a:solidFill>
+                <a:latin typeface="Segoe UI" pitchFamily="34" charset="0"/>
+                <a:ea typeface="Segoe UI" pitchFamily="34" charset="-122"/>
+                <a:cs typeface="Segoe UI" pitchFamily="34" charset="-120"/>
+              </a:rPr>
+              <a:t>Q1</a:t>
+            </a:r>
+            <a:endParaRPr lang="en-US" sz="2200" dirty="0"/>
+          </a:p>
+        </p:txBody>
+      </p:sp>
+      <p:sp>
+        <p:nvSpPr>
+          <p:cNvPr id="7" name="Text 5"/>
+          <p:cNvSpPr/>
+          <p:nvPr/>
+        </p:nvSpPr>
+        <p:spPr>
+          <a:xfrm>
+            <a:off x="1615059" y="3611880"/>
+            <a:ext cx="2011680" cy="457200"/>
+          </a:xfrm>
+          <a:prstGeom prst="rect">
+            <a:avLst/>
+          </a:prstGeom>
+          <a:noFill/>
+          <a:ln/>
+        </p:spPr>
+        <p:txBody>
+          <a:bodyPr wrap="square" rtlCol="0" anchor="t"/>
+          <a:lstStyle/>
+          <a:p>
+            <a:pPr algn="ctr" indent="0" marL="0">
+              <a:buNone/>
+            </a:pPr>
+            <a:r>
+              <a:rPr lang="en-US" sz="1600" b="1" dirty="0">
+                <a:solidFill>
+                  <a:srgbClr val="1D1D1F"/>
+                </a:solidFill>
+                <a:latin typeface="Microsoft YaHei" pitchFamily="34" charset="0"/>
+                <a:ea typeface="Microsoft YaHei" pitchFamily="34" charset="-122"/>
+                <a:cs typeface="Microsoft YaHei" pitchFamily="34" charset="-120"/>
+              </a:rPr>
+              <a:t>新品立项</a:t>
+            </a:r>
+            <a:endParaRPr lang="en-US" sz="1600" dirty="0"/>
+          </a:p>
+        </p:txBody>
+      </p:sp>
+      <p:sp>
+        <p:nvSpPr>
+          <p:cNvPr id="8" name="Text 6"/>
+          <p:cNvSpPr/>
+          <p:nvPr/>
+        </p:nvSpPr>
+        <p:spPr>
+          <a:xfrm>
+            <a:off x="1615059" y="4114800"/>
+            <a:ext cx="2011680" cy="1554480"/>
+          </a:xfrm>
+          <a:prstGeom prst="rect">
+            <a:avLst/>
+          </a:prstGeom>
+          <a:noFill/>
+          <a:ln/>
+        </p:spPr>
+        <p:txBody>
+          <a:bodyPr wrap="square" rtlCol="0" anchor="t"/>
+          <a:lstStyle/>
+          <a:p>
+            <a:pPr algn="ctr" indent="0" marL="0">
+              <a:lnSpc>
+                <a:spcPct val="130000"/>
+              </a:lnSpc>
+              <a:buNone/>
+            </a:pPr>
+            <a:r>
+              <a:rPr lang="en-US" sz="1400" dirty="0">
+                <a:solidFill>
+                  <a:srgbClr val="86868B"/>
+                </a:solidFill>
+                <a:latin typeface="Microsoft YaHei" pitchFamily="34" charset="0"/>
+                <a:ea typeface="Microsoft YaHei" pitchFamily="34" charset="-122"/>
+                <a:cs typeface="Microsoft YaHei" pitchFamily="34" charset="-120"/>
+              </a:rPr>
+              <a:t>入门系列定稿，供应链锁价</a:t>
+            </a:r>
+            <a:endParaRPr lang="en-US" sz="1400" dirty="0"/>
+          </a:p>
+        </p:txBody>
+      </p:sp>
+      <p:sp>
+        <p:nvSpPr>
+          <p:cNvPr id="9" name="Shape 7"/>
+          <p:cNvSpPr/>
+          <p:nvPr/>
+        </p:nvSpPr>
+        <p:spPr>
+          <a:xfrm>
+            <a:off x="4863465" y="3224174"/>
+            <a:ext cx="146304" cy="146304"/>
+          </a:xfrm>
+          <a:prstGeom prst="ellipse">
+            <a:avLst/>
+          </a:prstGeom>
+          <a:solidFill>
+            <a:srgbClr val="1D1D1F"/>
+          </a:solidFill>
+          <a:ln/>
+        </p:spPr>
+      </p:sp>
+      <p:sp>
+        <p:nvSpPr>
+          <p:cNvPr id="10" name="Text 8"/>
+          <p:cNvSpPr/>
+          <p:nvPr/>
+        </p:nvSpPr>
+        <p:spPr>
+          <a:xfrm>
+            <a:off x="3930777" y="2423160"/>
+            <a:ext cx="2011680" cy="457200"/>
+          </a:xfrm>
+          <a:prstGeom prst="rect">
+            <a:avLst/>
+          </a:prstGeom>
+          <a:noFill/>
+          <a:ln/>
+        </p:spPr>
+        <p:txBody>
+          <a:bodyPr wrap="square" rtlCol="0" anchor="ctr"/>
+          <a:lstStyle/>
+          <a:p>
+            <a:pPr algn="ctr" indent="0" marL="0">
+              <a:buNone/>
+            </a:pPr>
+            <a:r>
+              <a:rPr lang="en-US" sz="2200" b="1" dirty="0">
+                <a:solidFill>
+                  <a:srgbClr val="1D1D1F"/>
+                </a:solidFill>
+                <a:latin typeface="Segoe UI" pitchFamily="34" charset="0"/>
+                <a:ea typeface="Segoe UI" pitchFamily="34" charset="-122"/>
+                <a:cs typeface="Segoe UI" pitchFamily="34" charset="-120"/>
+              </a:rPr>
+              <a:t>Q2</a:t>
+            </a:r>
+            <a:endParaRPr lang="en-US" sz="2200" dirty="0"/>
+          </a:p>
+        </p:txBody>
+      </p:sp>
+      <p:sp>
+        <p:nvSpPr>
+          <p:cNvPr id="11" name="Text 9"/>
+          <p:cNvSpPr/>
+          <p:nvPr/>
+        </p:nvSpPr>
+        <p:spPr>
+          <a:xfrm>
+            <a:off x="3930777" y="3611880"/>
+            <a:ext cx="2011680" cy="457200"/>
+          </a:xfrm>
+          <a:prstGeom prst="rect">
+            <a:avLst/>
+          </a:prstGeom>
+          <a:noFill/>
+          <a:ln/>
+        </p:spPr>
+        <p:txBody>
+          <a:bodyPr wrap="square" rtlCol="0" anchor="t"/>
+          <a:lstStyle/>
+          <a:p>
+            <a:pPr algn="ctr" indent="0" marL="0">
+              <a:buNone/>
+            </a:pPr>
+            <a:r>
+              <a:rPr lang="en-US" sz="1600" b="1" dirty="0">
+                <a:solidFill>
+                  <a:srgbClr val="1D1D1F"/>
+                </a:solidFill>
+                <a:latin typeface="Microsoft YaHei" pitchFamily="34" charset="0"/>
+                <a:ea typeface="Microsoft YaHei" pitchFamily="34" charset="-122"/>
+                <a:cs typeface="Microsoft YaHei" pitchFamily="34" charset="-120"/>
+              </a:rPr>
+              <a:t>上市开卖</a:t>
+            </a:r>
+            <a:endParaRPr lang="en-US" sz="1600" dirty="0"/>
+          </a:p>
+        </p:txBody>
+      </p:sp>
+      <p:sp>
+        <p:nvSpPr>
+          <p:cNvPr id="12" name="Text 10"/>
+          <p:cNvSpPr/>
+          <p:nvPr/>
+        </p:nvSpPr>
+        <p:spPr>
+          <a:xfrm>
+            <a:off x="3930777" y="4114800"/>
+            <a:ext cx="2011680" cy="1554480"/>
+          </a:xfrm>
+          <a:prstGeom prst="rect">
+            <a:avLst/>
+          </a:prstGeom>
+          <a:noFill/>
+          <a:ln/>
+        </p:spPr>
+        <p:txBody>
+          <a:bodyPr wrap="square" rtlCol="0" anchor="t"/>
+          <a:lstStyle/>
+          <a:p>
+            <a:pPr algn="ctr" indent="0" marL="0">
+              <a:lnSpc>
+                <a:spcPct val="130000"/>
+              </a:lnSpc>
+              <a:buNone/>
+            </a:pPr>
+            <a:r>
+              <a:rPr lang="en-US" sz="1400" dirty="0">
+                <a:solidFill>
+                  <a:srgbClr val="86868B"/>
+                </a:solidFill>
+                <a:latin typeface="Microsoft YaHei" pitchFamily="34" charset="0"/>
+                <a:ea typeface="Microsoft YaHei" pitchFamily="34" charset="-122"/>
+                <a:cs typeface="Microsoft YaHei" pitchFamily="34" charset="-120"/>
+              </a:rPr>
+              <a:t>入门系列上线 5 大平台</a:t>
+            </a:r>
+            <a:endParaRPr lang="en-US" sz="1400" dirty="0"/>
+          </a:p>
+        </p:txBody>
+      </p:sp>
+      <p:sp>
+        <p:nvSpPr>
+          <p:cNvPr id="13" name="Shape 11"/>
+          <p:cNvSpPr/>
+          <p:nvPr/>
+        </p:nvSpPr>
+        <p:spPr>
+          <a:xfrm>
+            <a:off x="7179183" y="3224174"/>
+            <a:ext cx="146304" cy="146304"/>
+          </a:xfrm>
+          <a:prstGeom prst="ellipse">
+            <a:avLst/>
+          </a:prstGeom>
+          <a:solidFill>
+            <a:srgbClr val="1D1D1F"/>
+          </a:solidFill>
+          <a:ln/>
+        </p:spPr>
+      </p:sp>
+      <p:sp>
+        <p:nvSpPr>
+          <p:cNvPr id="14" name="Text 12"/>
+          <p:cNvSpPr/>
+          <p:nvPr/>
+        </p:nvSpPr>
+        <p:spPr>
+          <a:xfrm>
+            <a:off x="6246495" y="2423160"/>
+            <a:ext cx="2011680" cy="457200"/>
+          </a:xfrm>
+          <a:prstGeom prst="rect">
+            <a:avLst/>
+          </a:prstGeom>
+          <a:noFill/>
+          <a:ln/>
+        </p:spPr>
+        <p:txBody>
+          <a:bodyPr wrap="square" rtlCol="0" anchor="ctr"/>
+          <a:lstStyle/>
+          <a:p>
+            <a:pPr algn="ctr" indent="0" marL="0">
+              <a:buNone/>
+            </a:pPr>
+            <a:r>
+              <a:rPr lang="en-US" sz="2200" b="1" dirty="0">
+                <a:solidFill>
+                  <a:srgbClr val="1D1D1F"/>
+                </a:solidFill>
+                <a:latin typeface="Segoe UI" pitchFamily="34" charset="0"/>
+                <a:ea typeface="Segoe UI" pitchFamily="34" charset="-122"/>
+                <a:cs typeface="Segoe UI" pitchFamily="34" charset="-120"/>
+              </a:rPr>
+              <a:t>Q3</a:t>
+            </a:r>
+            <a:endParaRPr lang="en-US" sz="2200" dirty="0"/>
+          </a:p>
+        </p:txBody>
+      </p:sp>
+      <p:sp>
+        <p:nvSpPr>
+          <p:cNvPr id="15" name="Text 13"/>
+          <p:cNvSpPr/>
+          <p:nvPr/>
+        </p:nvSpPr>
+        <p:spPr>
+          <a:xfrm>
+            <a:off x="6246495" y="3611880"/>
+            <a:ext cx="2011680" cy="457200"/>
+          </a:xfrm>
+          <a:prstGeom prst="rect">
+            <a:avLst/>
+          </a:prstGeom>
+          <a:noFill/>
+          <a:ln/>
+        </p:spPr>
+        <p:txBody>
+          <a:bodyPr wrap="square" rtlCol="0" anchor="t"/>
+          <a:lstStyle/>
+          <a:p>
+            <a:pPr algn="ctr" indent="0" marL="0">
+              <a:buNone/>
+            </a:pPr>
+            <a:r>
+              <a:rPr lang="en-US" sz="1600" b="1" dirty="0">
+                <a:solidFill>
+                  <a:srgbClr val="1D1D1F"/>
+                </a:solidFill>
+                <a:latin typeface="Microsoft YaHei" pitchFamily="34" charset="0"/>
+                <a:ea typeface="Microsoft YaHei" pitchFamily="34" charset="-122"/>
+                <a:cs typeface="Microsoft YaHei" pitchFamily="34" charset="-120"/>
+              </a:rPr>
+              <a:t>体验店落地</a:t>
+            </a:r>
+            <a:endParaRPr lang="en-US" sz="1600" dirty="0"/>
+          </a:p>
+        </p:txBody>
+      </p:sp>
+      <p:sp>
+        <p:nvSpPr>
+          <p:cNvPr id="16" name="Text 14"/>
+          <p:cNvSpPr/>
+          <p:nvPr/>
+        </p:nvSpPr>
+        <p:spPr>
+          <a:xfrm>
+            <a:off x="6246495" y="4114800"/>
+            <a:ext cx="2011680" cy="1554480"/>
+          </a:xfrm>
+          <a:prstGeom prst="rect">
+            <a:avLst/>
+          </a:prstGeom>
+          <a:noFill/>
+          <a:ln/>
+        </p:spPr>
+        <p:txBody>
+          <a:bodyPr wrap="square" rtlCol="0" anchor="t"/>
+          <a:lstStyle/>
+          <a:p>
+            <a:pPr algn="ctr" indent="0" marL="0">
+              <a:lnSpc>
+                <a:spcPct val="130000"/>
+              </a:lnSpc>
+              <a:buNone/>
+            </a:pPr>
+            <a:r>
+              <a:rPr lang="en-US" sz="1400" dirty="0">
+                <a:solidFill>
+                  <a:srgbClr val="86868B"/>
+                </a:solidFill>
+                <a:latin typeface="Microsoft YaHei" pitchFamily="34" charset="0"/>
+                <a:ea typeface="Microsoft YaHei" pitchFamily="34" charset="-122"/>
+                <a:cs typeface="Microsoft YaHei" pitchFamily="34" charset="-120"/>
+              </a:rPr>
+              <a:t>5 城 10 店，库存全渠道打通</a:t>
+            </a:r>
+            <a:endParaRPr lang="en-US" sz="1400" dirty="0"/>
+          </a:p>
+        </p:txBody>
+      </p:sp>
+      <p:sp>
+        <p:nvSpPr>
+          <p:cNvPr id="17" name="Shape 15"/>
+          <p:cNvSpPr/>
+          <p:nvPr/>
+        </p:nvSpPr>
+        <p:spPr>
+          <a:xfrm>
+            <a:off x="9467469" y="3196742"/>
+            <a:ext cx="201168" cy="201168"/>
+          </a:xfrm>
+          <a:prstGeom prst="ellipse">
+            <a:avLst/>
+          </a:prstGeom>
+          <a:solidFill>
+            <a:srgbClr val="0071E3"/>
+          </a:solidFill>
+          <a:ln/>
+        </p:spPr>
+      </p:sp>
+      <p:sp>
+        <p:nvSpPr>
+          <p:cNvPr id="18" name="Text 16"/>
+          <p:cNvSpPr/>
+          <p:nvPr/>
+        </p:nvSpPr>
+        <p:spPr>
+          <a:xfrm>
+            <a:off x="8562213" y="2423160"/>
+            <a:ext cx="2011680" cy="457200"/>
+          </a:xfrm>
+          <a:prstGeom prst="rect">
+            <a:avLst/>
+          </a:prstGeom>
+          <a:noFill/>
+          <a:ln/>
+        </p:spPr>
+        <p:txBody>
+          <a:bodyPr wrap="square" rtlCol="0" anchor="ctr"/>
+          <a:lstStyle/>
+          <a:p>
+            <a:pPr algn="ctr" indent="0" marL="0">
+              <a:buNone/>
+            </a:pPr>
+            <a:r>
+              <a:rPr lang="en-US" sz="2200" b="1" dirty="0">
+                <a:solidFill>
+                  <a:srgbClr val="0071E3"/>
+                </a:solidFill>
+                <a:latin typeface="Segoe UI" pitchFamily="34" charset="0"/>
+                <a:ea typeface="Segoe UI" pitchFamily="34" charset="-122"/>
+                <a:cs typeface="Segoe UI" pitchFamily="34" charset="-120"/>
+              </a:rPr>
+              <a:t>Q4</a:t>
+            </a:r>
+            <a:endParaRPr lang="en-US" sz="2200" dirty="0"/>
+          </a:p>
+        </p:txBody>
+      </p:sp>
+      <p:sp>
+        <p:nvSpPr>
+          <p:cNvPr id="19" name="Text 17"/>
+          <p:cNvSpPr/>
+          <p:nvPr/>
+        </p:nvSpPr>
+        <p:spPr>
+          <a:xfrm>
+            <a:off x="8562213" y="3611880"/>
+            <a:ext cx="2011680" cy="457200"/>
+          </a:xfrm>
+          <a:prstGeom prst="rect">
+            <a:avLst/>
+          </a:prstGeom>
+          <a:noFill/>
+          <a:ln/>
+        </p:spPr>
+        <p:txBody>
+          <a:bodyPr wrap="square" rtlCol="0" anchor="t"/>
+          <a:lstStyle/>
+          <a:p>
+            <a:pPr algn="ctr" indent="0" marL="0">
+              <a:buNone/>
+            </a:pPr>
+            <a:r>
+              <a:rPr lang="en-US" sz="1600" b="1" dirty="0">
+                <a:solidFill>
+                  <a:srgbClr val="1D1D1F"/>
+                </a:solidFill>
+                <a:latin typeface="Microsoft YaHei" pitchFamily="34" charset="0"/>
+                <a:ea typeface="Microsoft YaHei" pitchFamily="34" charset="-122"/>
+                <a:cs typeface="Microsoft YaHei" pitchFamily="34" charset="-120"/>
+              </a:rPr>
+              <a:t>出海冲刺</a:t>
+            </a:r>
+            <a:endParaRPr lang="en-US" sz="1600" dirty="0"/>
+          </a:p>
+        </p:txBody>
+      </p:sp>
+      <p:sp>
+        <p:nvSpPr>
+          <p:cNvPr id="20" name="Text 18"/>
+          <p:cNvSpPr/>
+          <p:nvPr/>
+        </p:nvSpPr>
+        <p:spPr>
+          <a:xfrm>
+            <a:off x="8562213" y="4114800"/>
+            <a:ext cx="2011680" cy="1554480"/>
+          </a:xfrm>
+          <a:prstGeom prst="rect">
+            <a:avLst/>
+          </a:prstGeom>
+          <a:noFill/>
+          <a:ln/>
+        </p:spPr>
+        <p:txBody>
+          <a:bodyPr wrap="square" rtlCol="0" anchor="t"/>
+          <a:lstStyle/>
+          <a:p>
+            <a:pPr algn="ctr" indent="0" marL="0">
+              <a:lnSpc>
+                <a:spcPct val="130000"/>
+              </a:lnSpc>
+              <a:buNone/>
+            </a:pPr>
+            <a:r>
+              <a:rPr lang="en-US" sz="1400" dirty="0">
+                <a:solidFill>
+                  <a:srgbClr val="86868B"/>
+                </a:solidFill>
+                <a:latin typeface="Microsoft YaHei" pitchFamily="34" charset="0"/>
+                <a:ea typeface="Microsoft YaHei" pitchFamily="34" charset="-122"/>
+                <a:cs typeface="Microsoft YaHei" pitchFamily="34" charset="-120"/>
+              </a:rPr>
+              <a:t>东南亚 GMV 1.2 亿</a:t>
+            </a:r>
+            <a:endParaRPr lang="en-US" sz="1400" dirty="0"/>
+          </a:p>
+        </p:txBody>
+      </p:sp>
+    </p:spTree>
+  </p:cSld>
+  <p:clrMapOvr>
+    <a:masterClrMapping/>
+  </p:clrMapOvr>
+</p:sld>
+</file>
+
+<file path=ppt/slides/slide13.xml><?xml version="1.0" encoding="utf-8"?>
+<p:sld xmlns:a="http://schemas.openxmlformats.org/drawingml/2006/main" xmlns:r="http://schemas.openxmlformats.org/officeDocument/2006/relationships" xmlns:p="http://schemas.openxmlformats.org/presentationml/2006/main">
+  <p:cSld name="Slide 13">
+    <p:bg>
+      <p:bgPr>
+        <a:solidFill>
+          <a:srgbClr val="FBFBFD"/>
+        </a:solidFill>
+      </p:bgPr>
+    </p:bg>
+    <p:spTree>
+      <p:nvGrpSpPr>
+        <p:cNvPr id="1" name=""/>
+        <p:cNvGrpSpPr/>
+        <p:nvPr/>
+      </p:nvGrpSpPr>
+      <p:grpSpPr>
+        <a:xfrm>
+          <a:off x="0" y="0"/>
+          <a:ext cx="0" cy="0"/>
+          <a:chOff x="0" y="0"/>
+          <a:chExt cx="0" cy="0"/>
+        </a:xfrm>
+      </p:grpSpPr>
+      <p:sp>
+        <p:nvSpPr>
+          <p:cNvPr id="2" name="Text 0"/>
+          <p:cNvSpPr/>
+          <p:nvPr/>
+        </p:nvSpPr>
+        <p:spPr>
+          <a:xfrm>
             <a:off x="612648" y="2468880"/>
             <a:ext cx="10972800" cy="1371600"/>
           </a:xfrm>
@@ -3051,8 +4068,8 @@
         </p:nvSpPr>
         <p:spPr>
           <a:xfrm>
-            <a:off x="1005840" y="868680"/>
-            <a:ext cx="9601200" cy="731520"/>
+            <a:off x="1005840" y="548640"/>
+            <a:ext cx="9601200" cy="320040"/>
           </a:xfrm>
           <a:prstGeom prst="rect">
             <a:avLst/>
@@ -3068,17 +4085,17 @@
               <a:buNone/>
             </a:pPr>
             <a:r>
-              <a:rPr lang="en-US" sz="3400" b="1" dirty="0">
-                <a:solidFill>
-                  <a:srgbClr val="1D1D1F"/>
+              <a:rPr lang="en-US" sz="1500" spc="300" kern="0" dirty="0">
+                <a:solidFill>
+                  <a:srgbClr val="86868B"/>
                 </a:solidFill>
                 <a:latin typeface="Microsoft YaHei" pitchFamily="34" charset="0"/>
                 <a:ea typeface="Microsoft YaHei" pitchFamily="34" charset="-122"/>
                 <a:cs typeface="Microsoft YaHei" pitchFamily="34" charset="-120"/>
               </a:rPr>
-              <a:t>三大增长引擎</a:t>
-            </a:r>
-            <a:endParaRPr lang="en-US" sz="3400" dirty="0"/>
+              <a:t>季度轨迹</a:t>
+            </a:r>
+            <a:endParaRPr lang="en-US" sz="1500" dirty="0"/>
           </a:p>
         </p:txBody>
       </p:sp>
@@ -3090,24 +4107,24 @@
         </p:nvSpPr>
         <p:spPr>
           <a:xfrm>
-            <a:off x="1005840" y="2651760"/>
-            <a:ext cx="3179064" cy="548640"/>
-          </a:xfrm>
-          <a:prstGeom prst="rect">
-            <a:avLst/>
-          </a:prstGeom>
-          <a:noFill/>
-          <a:ln/>
-        </p:spPr>
-        <p:txBody>
-          <a:bodyPr wrap="square" rtlCol="0" anchor="ctr"/>
+            <a:off x="1005840" y="868680"/>
+            <a:ext cx="9601200" cy="731520"/>
+          </a:xfrm>
+          <a:prstGeom prst="rect">
+            <a:avLst/>
+          </a:prstGeom>
+          <a:noFill/>
+          <a:ln/>
+        </p:spPr>
+        <p:txBody>
+          <a:bodyPr wrap="square" rtlCol="0" anchor="t"/>
           <a:lstStyle/>
           <a:p>
             <a:pPr indent="0" marL="0">
               <a:buNone/>
             </a:pPr>
             <a:r>
-              <a:rPr lang="en-US" sz="2100" b="1" dirty="0">
+              <a:rPr lang="en-US" sz="3400" b="1" dirty="0">
                 <a:solidFill>
                   <a:srgbClr val="1D1D1F"/>
                 </a:solidFill>
@@ -3115,9 +4132,9 @@
                 <a:ea typeface="Microsoft YaHei" pitchFamily="34" charset="-122"/>
                 <a:cs typeface="Microsoft YaHei" pitchFamily="34" charset="-120"/>
               </a:rPr>
-              <a:t>内容种草</a:t>
-            </a:r>
-            <a:endParaRPr lang="en-US" sz="2100" dirty="0"/>
+              <a:t>每个季度，都在上一个季度的台阶上。</a:t>
+            </a:r>
+            <a:endParaRPr lang="en-US" sz="3400" dirty="0"/>
           </a:p>
         </p:txBody>
       </p:sp>
@@ -3129,8 +4146,8 @@
         </p:nvSpPr>
         <p:spPr>
           <a:xfrm>
-            <a:off x="1005840" y="3246120"/>
-            <a:ext cx="3179064" cy="2194560"/>
+            <a:off x="1005840" y="2148840"/>
+            <a:ext cx="2468880" cy="676656"/>
           </a:xfrm>
           <a:prstGeom prst="rect">
             <a:avLst/>
@@ -3143,21 +4160,136 @@
           <a:lstStyle/>
           <a:p>
             <a:pPr indent="0" marL="0">
-              <a:lnSpc>
-                <a:spcPct val="135000"/>
-              </a:lnSpc>
-              <a:buNone/>
-            </a:pPr>
-            <a:r>
-              <a:rPr lang="en-US" sz="1600" dirty="0">
-                <a:solidFill>
-                  <a:srgbClr val="86868B"/>
+              <a:buNone/>
+            </a:pPr>
+            <a:r>
+              <a:rPr lang="en-US" sz="1600" b="1" dirty="0">
+                <a:solidFill>
+                  <a:srgbClr val="1D1D1F"/>
+                </a:solidFill>
+                <a:latin typeface="Segoe UI" pitchFamily="34" charset="0"/>
+                <a:ea typeface="Segoe UI" pitchFamily="34" charset="-122"/>
+                <a:cs typeface="Segoe UI" pitchFamily="34" charset="-120"/>
+              </a:rPr>
+              <a:t>Q1</a:t>
+            </a:r>
+            <a:endParaRPr lang="en-US" sz="1600" dirty="0"/>
+          </a:p>
+        </p:txBody>
+      </p:sp>
+      <p:sp>
+        <p:nvSpPr>
+          <p:cNvPr id="5" name="Shape 3"/>
+          <p:cNvSpPr/>
+          <p:nvPr/>
+        </p:nvSpPr>
+        <p:spPr>
+          <a:xfrm>
+            <a:off x="3657600" y="2301088"/>
+            <a:ext cx="6309360" cy="372161"/>
+          </a:xfrm>
+          <a:prstGeom prst="rect">
+            <a:avLst/>
+          </a:prstGeom>
+          <a:solidFill>
+            <a:srgbClr val="FFFFFF"/>
+          </a:solidFill>
+          <a:ln/>
+        </p:spPr>
+      </p:sp>
+      <p:sp>
+        <p:nvSpPr>
+          <p:cNvPr id="6" name="Shape 4"/>
+          <p:cNvSpPr/>
+          <p:nvPr/>
+        </p:nvSpPr>
+        <p:spPr>
+          <a:xfrm>
+            <a:off x="3657600" y="2301088"/>
+            <a:ext cx="2903422" cy="372161"/>
+          </a:xfrm>
+          <a:prstGeom prst="rect">
+            <a:avLst/>
+          </a:prstGeom>
+          <a:solidFill>
+            <a:srgbClr val="86868B"/>
+          </a:solidFill>
+          <a:ln/>
+        </p:spPr>
+      </p:sp>
+      <p:sp>
+        <p:nvSpPr>
+          <p:cNvPr id="7" name="Text 5"/>
+          <p:cNvSpPr/>
+          <p:nvPr/>
+        </p:nvSpPr>
+        <p:spPr>
+          <a:xfrm>
+            <a:off x="6698182" y="2148840"/>
+            <a:ext cx="1737360" cy="676656"/>
+          </a:xfrm>
+          <a:prstGeom prst="rect">
+            <a:avLst/>
+          </a:prstGeom>
+          <a:noFill/>
+          <a:ln/>
+        </p:spPr>
+        <p:txBody>
+          <a:bodyPr wrap="square" rtlCol="0" anchor="ctr"/>
+          <a:lstStyle/>
+          <a:p>
+            <a:pPr indent="0" marL="0">
+              <a:buNone/>
+            </a:pPr>
+            <a:r>
+              <a:rPr lang="en-US" sz="1800" b="1" dirty="0">
+                <a:solidFill>
+                  <a:srgbClr val="1D1D1F"/>
                 </a:solidFill>
                 <a:latin typeface="Microsoft YaHei" pitchFamily="34" charset="0"/>
                 <a:ea typeface="Microsoft YaHei" pitchFamily="34" charset="-122"/>
                 <a:cs typeface="Microsoft YaHei" pitchFamily="34" charset="-120"/>
               </a:rPr>
-              <a:t>小红书 + 抖音双平台 1,200 篇爆文，带来 41% 新客。</a:t>
+              <a:t>0.52 亿</a:t>
+            </a:r>
+            <a:endParaRPr lang="en-US" sz="1800" dirty="0"/>
+          </a:p>
+        </p:txBody>
+      </p:sp>
+      <p:sp>
+        <p:nvSpPr>
+          <p:cNvPr id="8" name="Text 6"/>
+          <p:cNvSpPr/>
+          <p:nvPr/>
+        </p:nvSpPr>
+        <p:spPr>
+          <a:xfrm>
+            <a:off x="1005840" y="3172968"/>
+            <a:ext cx="2468880" cy="676656"/>
+          </a:xfrm>
+          <a:prstGeom prst="rect">
+            <a:avLst/>
+          </a:prstGeom>
+          <a:noFill/>
+          <a:ln/>
+        </p:spPr>
+        <p:txBody>
+          <a:bodyPr wrap="square" rtlCol="0" anchor="ctr"/>
+          <a:lstStyle/>
+          <a:p>
+            <a:pPr indent="0" marL="0">
+              <a:buNone/>
+            </a:pPr>
+            <a:r>
+              <a:rPr lang="en-US" sz="1600" b="1" dirty="0">
+                <a:solidFill>
+                  <a:srgbClr val="1D1D1F"/>
+                </a:solidFill>
+                <a:latin typeface="Segoe UI" pitchFamily="34" charset="0"/>
+                <a:ea typeface="Segoe UI" pitchFamily="34" charset="-122"/>
+                <a:cs typeface="Segoe UI" pitchFamily="34" charset="-120"/>
+              </a:rPr>
+              <a:t>Q2</a:t>
             </a:r>
             <a:endParaRPr lang="en-US" sz="1600" dirty="0"/>
           </a:p>
@@ -3165,14 +4297,54 @@
       </p:sp>
       <p:sp>
         <p:nvSpPr>
-          <p:cNvPr id="5" name="Text 3"/>
-          <p:cNvSpPr/>
-          <p:nvPr/>
-        </p:nvSpPr>
-        <p:spPr>
-          <a:xfrm>
-            <a:off x="4504944" y="2651760"/>
-            <a:ext cx="3179064" cy="548640"/>
+          <p:cNvPr id="9" name="Shape 7"/>
+          <p:cNvSpPr/>
+          <p:nvPr/>
+        </p:nvSpPr>
+        <p:spPr>
+          <a:xfrm>
+            <a:off x="3657600" y="3325216"/>
+            <a:ext cx="6309360" cy="372161"/>
+          </a:xfrm>
+          <a:prstGeom prst="rect">
+            <a:avLst/>
+          </a:prstGeom>
+          <a:solidFill>
+            <a:srgbClr val="FFFFFF"/>
+          </a:solidFill>
+          <a:ln/>
+        </p:spPr>
+      </p:sp>
+      <p:sp>
+        <p:nvSpPr>
+          <p:cNvPr id="10" name="Shape 8"/>
+          <p:cNvSpPr/>
+          <p:nvPr/>
+        </p:nvSpPr>
+        <p:spPr>
+          <a:xfrm>
+            <a:off x="3657600" y="3325216"/>
+            <a:ext cx="3796783" cy="372161"/>
+          </a:xfrm>
+          <a:prstGeom prst="rect">
+            <a:avLst/>
+          </a:prstGeom>
+          <a:solidFill>
+            <a:srgbClr val="86868B"/>
+          </a:solidFill>
+          <a:ln/>
+        </p:spPr>
+      </p:sp>
+      <p:sp>
+        <p:nvSpPr>
+          <p:cNvPr id="11" name="Text 9"/>
+          <p:cNvSpPr/>
+          <p:nvPr/>
+        </p:nvSpPr>
+        <p:spPr>
+          <a:xfrm>
+            <a:off x="7591543" y="3172968"/>
+            <a:ext cx="1737360" cy="676656"/>
           </a:xfrm>
           <a:prstGeom prst="rect">
             <a:avLst/>
@@ -3188,7 +4360,7 @@
               <a:buNone/>
             </a:pPr>
             <a:r>
-              <a:rPr lang="en-US" sz="2100" b="1" dirty="0">
+              <a:rPr lang="en-US" sz="1800" b="1" dirty="0">
                 <a:solidFill>
                   <a:srgbClr val="1D1D1F"/>
                 </a:solidFill>
@@ -3196,22 +4368,22 @@
                 <a:ea typeface="Microsoft YaHei" pitchFamily="34" charset="-122"/>
                 <a:cs typeface="Microsoft YaHei" pitchFamily="34" charset="-120"/>
               </a:rPr>
-              <a:t>私域复购</a:t>
-            </a:r>
-            <a:endParaRPr lang="en-US" sz="2100" dirty="0"/>
-          </a:p>
-        </p:txBody>
-      </p:sp>
-      <p:sp>
-        <p:nvSpPr>
-          <p:cNvPr id="6" name="Text 4"/>
-          <p:cNvSpPr/>
-          <p:nvPr/>
-        </p:nvSpPr>
-        <p:spPr>
-          <a:xfrm>
-            <a:off x="4504944" y="3246120"/>
-            <a:ext cx="3179064" cy="2194560"/>
+              <a:t>0.68 亿</a:t>
+            </a:r>
+            <a:endParaRPr lang="en-US" sz="1800" dirty="0"/>
+          </a:p>
+        </p:txBody>
+      </p:sp>
+      <p:sp>
+        <p:nvSpPr>
+          <p:cNvPr id="12" name="Text 10"/>
+          <p:cNvSpPr/>
+          <p:nvPr/>
+        </p:nvSpPr>
+        <p:spPr>
+          <a:xfrm>
+            <a:off x="1005840" y="4197096"/>
+            <a:ext cx="2468880" cy="676656"/>
           </a:xfrm>
           <a:prstGeom prst="rect">
             <a:avLst/>
@@ -3224,21 +4396,136 @@
           <a:lstStyle/>
           <a:p>
             <a:pPr indent="0" marL="0">
-              <a:lnSpc>
-                <a:spcPct val="135000"/>
-              </a:lnSpc>
-              <a:buNone/>
-            </a:pPr>
-            <a:r>
-              <a:rPr lang="en-US" sz="1600" dirty="0">
-                <a:solidFill>
-                  <a:srgbClr val="86868B"/>
+              <a:buNone/>
+            </a:pPr>
+            <a:r>
+              <a:rPr lang="en-US" sz="1600" b="1" dirty="0">
+                <a:solidFill>
+                  <a:srgbClr val="1D1D1F"/>
+                </a:solidFill>
+                <a:latin typeface="Segoe UI" pitchFamily="34" charset="0"/>
+                <a:ea typeface="Segoe UI" pitchFamily="34" charset="-122"/>
+                <a:cs typeface="Segoe UI" pitchFamily="34" charset="-120"/>
+              </a:rPr>
+              <a:t>Q3</a:t>
+            </a:r>
+            <a:endParaRPr lang="en-US" sz="1600" dirty="0"/>
+          </a:p>
+        </p:txBody>
+      </p:sp>
+      <p:sp>
+        <p:nvSpPr>
+          <p:cNvPr id="13" name="Shape 11"/>
+          <p:cNvSpPr/>
+          <p:nvPr/>
+        </p:nvSpPr>
+        <p:spPr>
+          <a:xfrm>
+            <a:off x="3657600" y="4349344"/>
+            <a:ext cx="6309360" cy="372161"/>
+          </a:xfrm>
+          <a:prstGeom prst="rect">
+            <a:avLst/>
+          </a:prstGeom>
+          <a:solidFill>
+            <a:srgbClr val="FFFFFF"/>
+          </a:solidFill>
+          <a:ln/>
+        </p:spPr>
+      </p:sp>
+      <p:sp>
+        <p:nvSpPr>
+          <p:cNvPr id="14" name="Shape 12"/>
+          <p:cNvSpPr/>
+          <p:nvPr/>
+        </p:nvSpPr>
+        <p:spPr>
+          <a:xfrm>
+            <a:off x="3657600" y="4349344"/>
+            <a:ext cx="4857649" cy="372161"/>
+          </a:xfrm>
+          <a:prstGeom prst="rect">
+            <a:avLst/>
+          </a:prstGeom>
+          <a:solidFill>
+            <a:srgbClr val="86868B"/>
+          </a:solidFill>
+          <a:ln/>
+        </p:spPr>
+      </p:sp>
+      <p:sp>
+        <p:nvSpPr>
+          <p:cNvPr id="15" name="Text 13"/>
+          <p:cNvSpPr/>
+          <p:nvPr/>
+        </p:nvSpPr>
+        <p:spPr>
+          <a:xfrm>
+            <a:off x="8652409" y="4197096"/>
+            <a:ext cx="1737360" cy="676656"/>
+          </a:xfrm>
+          <a:prstGeom prst="rect">
+            <a:avLst/>
+          </a:prstGeom>
+          <a:noFill/>
+          <a:ln/>
+        </p:spPr>
+        <p:txBody>
+          <a:bodyPr wrap="square" rtlCol="0" anchor="ctr"/>
+          <a:lstStyle/>
+          <a:p>
+            <a:pPr indent="0" marL="0">
+              <a:buNone/>
+            </a:pPr>
+            <a:r>
+              <a:rPr lang="en-US" sz="1800" b="1" dirty="0">
+                <a:solidFill>
+                  <a:srgbClr val="1D1D1F"/>
                 </a:solidFill>
                 <a:latin typeface="Microsoft YaHei" pitchFamily="34" charset="0"/>
                 <a:ea typeface="Microsoft YaHei" pitchFamily="34" charset="-122"/>
                 <a:cs typeface="Microsoft YaHei" pitchFamily="34" charset="-120"/>
               </a:rPr>
-              <a:t>12 万企业微信好友，复购率从 19% 提升至 37%。</a:t>
+              <a:t>0.87 亿</a:t>
+            </a:r>
+            <a:endParaRPr lang="en-US" sz="1800" dirty="0"/>
+          </a:p>
+        </p:txBody>
+      </p:sp>
+      <p:sp>
+        <p:nvSpPr>
+          <p:cNvPr id="16" name="Text 14"/>
+          <p:cNvSpPr/>
+          <p:nvPr/>
+        </p:nvSpPr>
+        <p:spPr>
+          <a:xfrm>
+            <a:off x="1005840" y="5221224"/>
+            <a:ext cx="2468880" cy="676656"/>
+          </a:xfrm>
+          <a:prstGeom prst="rect">
+            <a:avLst/>
+          </a:prstGeom>
+          <a:noFill/>
+          <a:ln/>
+        </p:spPr>
+        <p:txBody>
+          <a:bodyPr wrap="square" rtlCol="0" anchor="ctr"/>
+          <a:lstStyle/>
+          <a:p>
+            <a:pPr indent="0" marL="0">
+              <a:buNone/>
+            </a:pPr>
+            <a:r>
+              <a:rPr lang="en-US" sz="1600" b="1" dirty="0">
+                <a:solidFill>
+                  <a:srgbClr val="1D1D1F"/>
+                </a:solidFill>
+                <a:latin typeface="Segoe UI" pitchFamily="34" charset="0"/>
+                <a:ea typeface="Segoe UI" pitchFamily="34" charset="-122"/>
+                <a:cs typeface="Segoe UI" pitchFamily="34" charset="-120"/>
+              </a:rPr>
+              <a:t>Q4</a:t>
             </a:r>
             <a:endParaRPr lang="en-US" sz="1600" dirty="0"/>
           </a:p>
@@ -3246,14 +4533,54 @@
       </p:sp>
       <p:sp>
         <p:nvSpPr>
-          <p:cNvPr id="7" name="Text 5"/>
-          <p:cNvSpPr/>
-          <p:nvPr/>
-        </p:nvSpPr>
-        <p:spPr>
-          <a:xfrm>
-            <a:off x="8004048" y="2651760"/>
-            <a:ext cx="3179064" cy="548640"/>
+          <p:cNvPr id="17" name="Shape 15"/>
+          <p:cNvSpPr/>
+          <p:nvPr/>
+        </p:nvSpPr>
+        <p:spPr>
+          <a:xfrm>
+            <a:off x="3657600" y="5373472"/>
+            <a:ext cx="6309360" cy="372161"/>
+          </a:xfrm>
+          <a:prstGeom prst="rect">
+            <a:avLst/>
+          </a:prstGeom>
+          <a:solidFill>
+            <a:srgbClr val="FFFFFF"/>
+          </a:solidFill>
+          <a:ln/>
+        </p:spPr>
+      </p:sp>
+      <p:sp>
+        <p:nvSpPr>
+          <p:cNvPr id="18" name="Shape 16"/>
+          <p:cNvSpPr/>
+          <p:nvPr/>
+        </p:nvSpPr>
+        <p:spPr>
+          <a:xfrm>
+            <a:off x="3657600" y="5373472"/>
+            <a:ext cx="6309360" cy="372161"/>
+          </a:xfrm>
+          <a:prstGeom prst="rect">
+            <a:avLst/>
+          </a:prstGeom>
+          <a:solidFill>
+            <a:srgbClr val="0071E3"/>
+          </a:solidFill>
+          <a:ln/>
+        </p:spPr>
+      </p:sp>
+      <p:sp>
+        <p:nvSpPr>
+          <p:cNvPr id="19" name="Text 17"/>
+          <p:cNvSpPr/>
+          <p:nvPr/>
+        </p:nvSpPr>
+        <p:spPr>
+          <a:xfrm>
+            <a:off x="10104120" y="5221224"/>
+            <a:ext cx="1737360" cy="676656"/>
           </a:xfrm>
           <a:prstGeom prst="rect">
             <a:avLst/>
@@ -3269,59 +4596,17 @@
               <a:buNone/>
             </a:pPr>
             <a:r>
-              <a:rPr lang="en-US" sz="2100" b="1" dirty="0">
-                <a:solidFill>
-                  <a:srgbClr val="1D1D1F"/>
+              <a:rPr lang="en-US" sz="1800" b="1" dirty="0">
+                <a:solidFill>
+                  <a:srgbClr val="0071E3"/>
                 </a:solidFill>
                 <a:latin typeface="Microsoft YaHei" pitchFamily="34" charset="0"/>
                 <a:ea typeface="Microsoft YaHei" pitchFamily="34" charset="-122"/>
                 <a:cs typeface="Microsoft YaHei" pitchFamily="34" charset="-120"/>
               </a:rPr>
-              <a:t>出海试水</a:t>
-            </a:r>
-            <a:endParaRPr lang="en-US" sz="2100" dirty="0"/>
-          </a:p>
-        </p:txBody>
-      </p:sp>
-      <p:sp>
-        <p:nvSpPr>
-          <p:cNvPr id="8" name="Text 6"/>
-          <p:cNvSpPr/>
-          <p:nvPr/>
-        </p:nvSpPr>
-        <p:spPr>
-          <a:xfrm>
-            <a:off x="8004048" y="3246120"/>
-            <a:ext cx="3179064" cy="2194560"/>
-          </a:xfrm>
-          <a:prstGeom prst="rect">
-            <a:avLst/>
-          </a:prstGeom>
-          <a:noFill/>
-          <a:ln/>
-        </p:spPr>
-        <p:txBody>
-          <a:bodyPr wrap="square" rtlCol="0" anchor="ctr"/>
-          <a:lstStyle/>
-          <a:p>
-            <a:pPr indent="0" marL="0">
-              <a:lnSpc>
-                <a:spcPct val="135000"/>
-              </a:lnSpc>
-              <a:buNone/>
-            </a:pPr>
-            <a:r>
-              <a:rPr lang="en-US" sz="1600" dirty="0">
-                <a:solidFill>
-                  <a:srgbClr val="86868B"/>
-                </a:solidFill>
-                <a:latin typeface="Microsoft YaHei" pitchFamily="34" charset="0"/>
-                <a:ea typeface="Microsoft YaHei" pitchFamily="34" charset="-122"/>
-                <a:cs typeface="Microsoft YaHei" pitchFamily="34" charset="-120"/>
-              </a:rPr>
-              <a:t>东南亚三国上线，首年贡献 GMV 2,800 万。</a:t>
-            </a:r>
-            <a:endParaRPr lang="en-US" sz="1600" dirty="0"/>
+              <a:t>1.13 亿</a:t>
+            </a:r>
+            <a:endParaRPr lang="en-US" sz="1800" dirty="0"/>
           </a:p>
         </p:txBody>
       </p:sp>
@@ -3365,8 +4650,8 @@
         </p:nvSpPr>
         <p:spPr>
           <a:xfrm>
-            <a:off x="1188720" y="1371600"/>
-            <a:ext cx="4389120" cy="365760"/>
+            <a:off x="1005840" y="868680"/>
+            <a:ext cx="9601200" cy="731520"/>
           </a:xfrm>
           <a:prstGeom prst="rect">
             <a:avLst/>
@@ -3382,108 +4667,30 @@
               <a:buNone/>
             </a:pPr>
             <a:r>
-              <a:rPr lang="en-US" sz="1600" spc="200" kern="0" dirty="0">
-                <a:solidFill>
-                  <a:srgbClr val="86868B"/>
-                </a:solidFill>
-                <a:latin typeface="Segoe UI" pitchFamily="34" charset="0"/>
-                <a:ea typeface="Segoe UI" pitchFamily="34" charset="-122"/>
-                <a:cs typeface="Segoe UI" pitchFamily="34" charset="-120"/>
-              </a:rPr>
-              <a:t>2024</a:t>
-            </a:r>
-            <a:endParaRPr lang="en-US" sz="1600" dirty="0"/>
-          </a:p>
-        </p:txBody>
-      </p:sp>
-      <p:sp>
-        <p:nvSpPr>
-          <p:cNvPr id="3" name="Text 1"/>
-          <p:cNvSpPr/>
-          <p:nvPr/>
-        </p:nvSpPr>
-        <p:spPr>
-          <a:xfrm>
-            <a:off x="6611112" y="1371600"/>
-            <a:ext cx="4937760" cy="365760"/>
-          </a:xfrm>
-          <a:prstGeom prst="rect">
-            <a:avLst/>
-          </a:prstGeom>
-          <a:noFill/>
-          <a:ln/>
-        </p:spPr>
-        <p:txBody>
-          <a:bodyPr wrap="square" rtlCol="0" anchor="ctr"/>
-          <a:lstStyle/>
-          <a:p>
-            <a:pPr indent="0" marL="0">
-              <a:buNone/>
-            </a:pPr>
-            <a:r>
-              <a:rPr lang="en-US" sz="1600" spc="200" kern="0" dirty="0">
-                <a:solidFill>
-                  <a:srgbClr val="0071E3"/>
-                </a:solidFill>
-                <a:latin typeface="Segoe UI" pitchFamily="34" charset="0"/>
-                <a:ea typeface="Segoe UI" pitchFamily="34" charset="-122"/>
-                <a:cs typeface="Segoe UI" pitchFamily="34" charset="-120"/>
-              </a:rPr>
-              <a:t>2025</a:t>
-            </a:r>
-            <a:endParaRPr lang="en-US" sz="1600" dirty="0"/>
-          </a:p>
-        </p:txBody>
-      </p:sp>
-      <p:sp>
-        <p:nvSpPr>
-          <p:cNvPr id="4" name="Text 2"/>
-          <p:cNvSpPr/>
-          <p:nvPr/>
-        </p:nvSpPr>
-        <p:spPr>
-          <a:xfrm>
-            <a:off x="1188720" y="1828800"/>
-            <a:ext cx="4389120" cy="1005840"/>
-          </a:xfrm>
-          <a:prstGeom prst="rect">
-            <a:avLst/>
-          </a:prstGeom>
-          <a:noFill/>
-          <a:ln/>
-        </p:spPr>
-        <p:txBody>
-          <a:bodyPr wrap="square" rtlCol="0" anchor="ctr"/>
-          <a:lstStyle/>
-          <a:p>
-            <a:pPr indent="0" marL="0">
-              <a:buNone/>
-            </a:pPr>
-            <a:r>
-              <a:rPr lang="en-US" sz="4000" b="1" dirty="0">
-                <a:solidFill>
-                  <a:srgbClr val="86868B"/>
+              <a:rPr lang="en-US" sz="3400" b="1" dirty="0">
+                <a:solidFill>
+                  <a:srgbClr val="1D1D1F"/>
                 </a:solidFill>
                 <a:latin typeface="Microsoft YaHei" pitchFamily="34" charset="0"/>
                 <a:ea typeface="Microsoft YaHei" pitchFamily="34" charset="-122"/>
                 <a:cs typeface="Microsoft YaHei" pitchFamily="34" charset="-120"/>
               </a:rPr>
-              <a:t>1.0亿</a:t>
-            </a:r>
-            <a:endParaRPr lang="en-US" sz="4000" dirty="0"/>
-          </a:p>
-        </p:txBody>
-      </p:sp>
-      <p:sp>
-        <p:nvSpPr>
-          <p:cNvPr id="5" name="Text 3"/>
-          <p:cNvSpPr/>
-          <p:nvPr/>
-        </p:nvSpPr>
-        <p:spPr>
-          <a:xfrm>
-            <a:off x="6611112" y="1828800"/>
-            <a:ext cx="4937760" cy="1005840"/>
+              <a:t>三大增长引擎</a:t>
+            </a:r>
+            <a:endParaRPr lang="en-US" sz="3400" dirty="0"/>
+          </a:p>
+        </p:txBody>
+      </p:sp>
+      <p:sp>
+        <p:nvSpPr>
+          <p:cNvPr id="3" name="Text 1"/>
+          <p:cNvSpPr/>
+          <p:nvPr/>
+        </p:nvSpPr>
+        <p:spPr>
+          <a:xfrm>
+            <a:off x="1005840" y="2651760"/>
+            <a:ext cx="3179064" cy="548640"/>
           </a:xfrm>
           <a:prstGeom prst="rect">
             <a:avLst/>
@@ -3499,7 +4706,7 @@
               <a:buNone/>
             </a:pPr>
             <a:r>
-              <a:rPr lang="en-US" sz="4800" b="1" dirty="0">
+              <a:rPr lang="en-US" sz="2100" b="1" dirty="0">
                 <a:solidFill>
                   <a:srgbClr val="1D1D1F"/>
                 </a:solidFill>
@@ -3507,41 +4714,41 @@
                 <a:ea typeface="Microsoft YaHei" pitchFamily="34" charset="-122"/>
                 <a:cs typeface="Microsoft YaHei" pitchFamily="34" charset="-120"/>
               </a:rPr>
-              <a:t>3.2亿</a:t>
-            </a:r>
-            <a:endParaRPr lang="en-US" sz="4800" dirty="0"/>
-          </a:p>
-        </p:txBody>
-      </p:sp>
-      <p:sp>
-        <p:nvSpPr>
-          <p:cNvPr id="6" name="Text 4"/>
-          <p:cNvSpPr/>
-          <p:nvPr/>
-        </p:nvSpPr>
-        <p:spPr>
-          <a:xfrm>
-            <a:off x="1188720" y="3108960"/>
-            <a:ext cx="4389120" cy="2926080"/>
-          </a:xfrm>
-          <a:prstGeom prst="rect">
-            <a:avLst/>
-          </a:prstGeom>
-          <a:noFill/>
-          <a:ln/>
-        </p:spPr>
-        <p:txBody>
-          <a:bodyPr wrap="square" rtlCol="0" anchor="ctr"/>
+              <a:t>内容种草</a:t>
+            </a:r>
+            <a:endParaRPr lang="en-US" sz="2100" dirty="0"/>
+          </a:p>
+        </p:txBody>
+      </p:sp>
+      <p:sp>
+        <p:nvSpPr>
+          <p:cNvPr id="4" name="Text 2"/>
+          <p:cNvSpPr/>
+          <p:nvPr/>
+        </p:nvSpPr>
+        <p:spPr>
+          <a:xfrm>
+            <a:off x="1005840" y="3246120"/>
+            <a:ext cx="3179064" cy="2194560"/>
+          </a:xfrm>
+          <a:prstGeom prst="rect">
+            <a:avLst/>
+          </a:prstGeom>
+          <a:noFill/>
+          <a:ln/>
+        </p:spPr>
+        <p:txBody>
+          <a:bodyPr wrap="square" rtlCol="0" anchor="t"/>
           <a:lstStyle/>
           <a:p>
             <a:pPr indent="0" marL="0">
-              <a:spcAft>
-                <a:spcPts val="800"/>
-              </a:spcAft>
-              <a:buNone/>
-            </a:pPr>
-            <a:r>
-              <a:rPr lang="en-US" sz="1500" dirty="0">
+              <a:lnSpc>
+                <a:spcPct val="135000"/>
+              </a:lnSpc>
+              <a:buNone/>
+            </a:pPr>
+            <a:r>
+              <a:rPr lang="en-US" sz="1600" dirty="0">
                 <a:solidFill>
                   <a:srgbClr val="86868B"/>
                 </a:solidFill>
@@ -3549,39 +4756,80 @@
                 <a:ea typeface="Microsoft YaHei" pitchFamily="34" charset="-122"/>
                 <a:cs typeface="Microsoft YaHei" pitchFamily="34" charset="-120"/>
               </a:rPr>
-              <a:t>投放驱动，费用率 42%</a:t>
-            </a:r>
-            <a:endParaRPr lang="en-US" sz="1500" dirty="0"/>
-          </a:p>
+              <a:t>小红书 + 抖音双平台 1,200 篇爆文，带来 41% 新客。</a:t>
+            </a:r>
+            <a:endParaRPr lang="en-US" sz="1600" dirty="0"/>
+          </a:p>
+        </p:txBody>
+      </p:sp>
+      <p:sp>
+        <p:nvSpPr>
+          <p:cNvPr id="5" name="Text 3"/>
+          <p:cNvSpPr/>
+          <p:nvPr/>
+        </p:nvSpPr>
+        <p:spPr>
+          <a:xfrm>
+            <a:off x="4504944" y="2651760"/>
+            <a:ext cx="3179064" cy="548640"/>
+          </a:xfrm>
+          <a:prstGeom prst="rect">
+            <a:avLst/>
+          </a:prstGeom>
+          <a:noFill/>
+          <a:ln/>
+        </p:spPr>
+        <p:txBody>
+          <a:bodyPr wrap="square" rtlCol="0" anchor="ctr"/>
+          <a:lstStyle/>
           <a:p>
             <a:pPr indent="0" marL="0">
-              <a:spcAft>
-                <a:spcPts val="800"/>
-              </a:spcAft>
-              <a:buNone/>
-            </a:pPr>
-            <a:r>
-              <a:rPr lang="en-US" sz="1500" dirty="0">
-                <a:solidFill>
-                  <a:srgbClr val="86868B"/>
+              <a:buNone/>
+            </a:pPr>
+            <a:r>
+              <a:rPr lang="en-US" sz="2100" b="1" dirty="0">
+                <a:solidFill>
+                  <a:srgbClr val="1D1D1F"/>
                 </a:solidFill>
                 <a:latin typeface="Microsoft YaHei" pitchFamily="34" charset="0"/>
                 <a:ea typeface="Microsoft YaHei" pitchFamily="34" charset="-122"/>
                 <a:cs typeface="Microsoft YaHei" pitchFamily="34" charset="-120"/>
               </a:rPr>
-              <a:t>复购率 19%</a:t>
-            </a:r>
-            <a:endParaRPr lang="en-US" sz="1500" dirty="0"/>
-          </a:p>
+              <a:t>私域复购</a:t>
+            </a:r>
+            <a:endParaRPr lang="en-US" sz="2100" dirty="0"/>
+          </a:p>
+        </p:txBody>
+      </p:sp>
+      <p:sp>
+        <p:nvSpPr>
+          <p:cNvPr id="6" name="Text 4"/>
+          <p:cNvSpPr/>
+          <p:nvPr/>
+        </p:nvSpPr>
+        <p:spPr>
+          <a:xfrm>
+            <a:off x="4504944" y="3246120"/>
+            <a:ext cx="3179064" cy="2194560"/>
+          </a:xfrm>
+          <a:prstGeom prst="rect">
+            <a:avLst/>
+          </a:prstGeom>
+          <a:noFill/>
+          <a:ln/>
+        </p:spPr>
+        <p:txBody>
+          <a:bodyPr wrap="square" rtlCol="0" anchor="t"/>
+          <a:lstStyle/>
           <a:p>
             <a:pPr indent="0" marL="0">
-              <a:spcAft>
-                <a:spcPts val="800"/>
-              </a:spcAft>
-              <a:buNone/>
-            </a:pPr>
-            <a:r>
-              <a:rPr lang="en-US" sz="1500" dirty="0">
+              <a:lnSpc>
+                <a:spcPct val="135000"/>
+              </a:lnSpc>
+              <a:buNone/>
+            </a:pPr>
+            <a:r>
+              <a:rPr lang="en-US" sz="1600" dirty="0">
                 <a:solidFill>
                   <a:srgbClr val="86868B"/>
                 </a:solidFill>
@@ -3589,9 +4837,9 @@
                 <a:ea typeface="Microsoft YaHei" pitchFamily="34" charset="-122"/>
                 <a:cs typeface="Microsoft YaHei" pitchFamily="34" charset="-120"/>
               </a:rPr>
-              <a:t>单一国内渠道</a:t>
-            </a:r>
-            <a:endParaRPr lang="en-US" sz="1500" dirty="0"/>
+              <a:t>12 万企业微信好友，复购率从 19% 提升至 37%。</a:t>
+            </a:r>
+            <a:endParaRPr lang="en-US" sz="1600" dirty="0"/>
           </a:p>
         </p:txBody>
       </p:sp>
@@ -3603,8 +4851,8 @@
         </p:nvSpPr>
         <p:spPr>
           <a:xfrm>
-            <a:off x="6611112" y="3108960"/>
-            <a:ext cx="4937760" cy="2926080"/>
+            <a:off x="8004048" y="2651760"/>
+            <a:ext cx="3179064" cy="548640"/>
           </a:xfrm>
           <a:prstGeom prst="rect">
             <a:avLst/>
@@ -3617,13 +4865,10 @@
           <a:lstStyle/>
           <a:p>
             <a:pPr indent="0" marL="0">
-              <a:spcAft>
-                <a:spcPts val="800"/>
-              </a:spcAft>
-              <a:buNone/>
-            </a:pPr>
-            <a:r>
-              <a:rPr lang="en-US" sz="1600" dirty="0">
+              <a:buNone/>
+            </a:pPr>
+            <a:r>
+              <a:rPr lang="en-US" sz="2100" b="1" dirty="0">
                 <a:solidFill>
                   <a:srgbClr val="1D1D1F"/>
                 </a:solidFill>
@@ -3631,71 +4876,53 @@
                 <a:ea typeface="Microsoft YaHei" pitchFamily="34" charset="-122"/>
                 <a:cs typeface="Microsoft YaHei" pitchFamily="34" charset="-120"/>
               </a:rPr>
-              <a:t>内容驱动，费用率 24%</a:t>
-            </a:r>
-            <a:endParaRPr lang="en-US" sz="1600" dirty="0"/>
-          </a:p>
+              <a:t>出海试水</a:t>
+            </a:r>
+            <a:endParaRPr lang="en-US" sz="2100" dirty="0"/>
+          </a:p>
+        </p:txBody>
+      </p:sp>
+      <p:sp>
+        <p:nvSpPr>
+          <p:cNvPr id="8" name="Text 6"/>
+          <p:cNvSpPr/>
+          <p:nvPr/>
+        </p:nvSpPr>
+        <p:spPr>
+          <a:xfrm>
+            <a:off x="8004048" y="3246120"/>
+            <a:ext cx="3179064" cy="2194560"/>
+          </a:xfrm>
+          <a:prstGeom prst="rect">
+            <a:avLst/>
+          </a:prstGeom>
+          <a:noFill/>
+          <a:ln/>
+        </p:spPr>
+        <p:txBody>
+          <a:bodyPr wrap="square" rtlCol="0" anchor="t"/>
+          <a:lstStyle/>
           <a:p>
             <a:pPr indent="0" marL="0">
-              <a:spcAft>
-                <a:spcPts val="800"/>
-              </a:spcAft>
+              <a:lnSpc>
+                <a:spcPct val="135000"/>
+              </a:lnSpc>
               <a:buNone/>
             </a:pPr>
             <a:r>
               <a:rPr lang="en-US" sz="1600" dirty="0">
                 <a:solidFill>
-                  <a:srgbClr val="1D1D1F"/>
+                  <a:srgbClr val="86868B"/>
                 </a:solidFill>
                 <a:latin typeface="Microsoft YaHei" pitchFamily="34" charset="0"/>
                 <a:ea typeface="Microsoft YaHei" pitchFamily="34" charset="-122"/>
                 <a:cs typeface="Microsoft YaHei" pitchFamily="34" charset="-120"/>
               </a:rPr>
-              <a:t>复购率 37%</a:t>
+              <a:t>东南亚三国上线，首年贡献 GMV 2,800 万。</a:t>
             </a:r>
             <a:endParaRPr lang="en-US" sz="1600" dirty="0"/>
           </a:p>
-          <a:p>
-            <a:pPr indent="0" marL="0">
-              <a:spcAft>
-                <a:spcPts val="800"/>
-              </a:spcAft>
-              <a:buNone/>
-            </a:pPr>
-            <a:r>
-              <a:rPr lang="en-US" sz="1600" dirty="0">
-                <a:solidFill>
-                  <a:srgbClr val="1D1D1F"/>
-                </a:solidFill>
-                <a:latin typeface="Microsoft YaHei" pitchFamily="34" charset="0"/>
-                <a:ea typeface="Microsoft YaHei" pitchFamily="34" charset="-122"/>
-                <a:cs typeface="Microsoft YaHei" pitchFamily="34" charset="-120"/>
-              </a:rPr>
-              <a:t>国内 + 出海双曲线</a:t>
-            </a:r>
-            <a:endParaRPr lang="en-US" sz="1600" dirty="0"/>
-          </a:p>
-        </p:txBody>
-      </p:sp>
-      <p:sp>
-        <p:nvSpPr>
-          <p:cNvPr id="8" name="Shape 6"/>
-          <p:cNvSpPr/>
-          <p:nvPr/>
-        </p:nvSpPr>
-        <p:spPr>
-          <a:xfrm>
-            <a:off x="6094476" y="1554480"/>
-            <a:ext cx="7315" cy="3291840"/>
-          </a:xfrm>
-          <a:prstGeom prst="rect">
-            <a:avLst/>
-          </a:prstGeom>
-          <a:solidFill>
-            <a:srgbClr val="D2D2D7"/>
-          </a:solidFill>
-          <a:ln/>
-        </p:spPr>
+        </p:txBody>
       </p:sp>
     </p:spTree>
   </p:cSld>
@@ -3737,8 +4964,8 @@
         </p:nvSpPr>
         <p:spPr>
           <a:xfrm>
-            <a:off x="1527048" y="1920240"/>
-            <a:ext cx="9144000" cy="2194560"/>
+            <a:off x="1188720" y="1371600"/>
+            <a:ext cx="4389120" cy="365760"/>
           </a:xfrm>
           <a:prstGeom prst="rect">
             <a:avLst/>
@@ -3750,37 +4977,112 @@
           <a:bodyPr wrap="square" rtlCol="0" anchor="ctr"/>
           <a:lstStyle/>
           <a:p>
-            <a:pPr algn="ctr" indent="0" marL="0">
-              <a:lnSpc>
-                <a:spcPct val="120000"/>
-              </a:lnSpc>
-              <a:buNone/>
-            </a:pPr>
-            <a:r>
-              <a:rPr lang="en-US" sz="3200" b="1" dirty="0">
-                <a:solidFill>
-                  <a:srgbClr val="1D1D1F"/>
+            <a:pPr indent="0" marL="0">
+              <a:buNone/>
+            </a:pPr>
+            <a:r>
+              <a:rPr lang="en-US" sz="1600" spc="200" kern="0" dirty="0">
+                <a:solidFill>
+                  <a:srgbClr val="86868B"/>
+                </a:solidFill>
+                <a:latin typeface="Segoe UI" pitchFamily="34" charset="0"/>
+                <a:ea typeface="Segoe UI" pitchFamily="34" charset="-122"/>
+                <a:cs typeface="Segoe UI" pitchFamily="34" charset="-120"/>
+              </a:rPr>
+              <a:t>2024</a:t>
+            </a:r>
+            <a:endParaRPr lang="en-US" sz="1600" dirty="0"/>
+          </a:p>
+        </p:txBody>
+      </p:sp>
+      <p:sp>
+        <p:nvSpPr>
+          <p:cNvPr id="3" name="Text 1"/>
+          <p:cNvSpPr/>
+          <p:nvPr/>
+        </p:nvSpPr>
+        <p:spPr>
+          <a:xfrm>
+            <a:off x="6611112" y="1371600"/>
+            <a:ext cx="4937760" cy="365760"/>
+          </a:xfrm>
+          <a:prstGeom prst="rect">
+            <a:avLst/>
+          </a:prstGeom>
+          <a:noFill/>
+          <a:ln/>
+        </p:spPr>
+        <p:txBody>
+          <a:bodyPr wrap="square" rtlCol="0" anchor="ctr"/>
+          <a:lstStyle/>
+          <a:p>
+            <a:pPr indent="0" marL="0">
+              <a:buNone/>
+            </a:pPr>
+            <a:r>
+              <a:rPr lang="en-US" sz="1600" spc="200" kern="0" dirty="0">
+                <a:solidFill>
+                  <a:srgbClr val="0071E3"/>
+                </a:solidFill>
+                <a:latin typeface="Segoe UI" pitchFamily="34" charset="0"/>
+                <a:ea typeface="Segoe UI" pitchFamily="34" charset="-122"/>
+                <a:cs typeface="Segoe UI" pitchFamily="34" charset="-120"/>
+              </a:rPr>
+              <a:t>2025</a:t>
+            </a:r>
+            <a:endParaRPr lang="en-US" sz="1600" dirty="0"/>
+          </a:p>
+        </p:txBody>
+      </p:sp>
+      <p:sp>
+        <p:nvSpPr>
+          <p:cNvPr id="4" name="Text 2"/>
+          <p:cNvSpPr/>
+          <p:nvPr/>
+        </p:nvSpPr>
+        <p:spPr>
+          <a:xfrm>
+            <a:off x="1188720" y="1828800"/>
+            <a:ext cx="4389120" cy="1005840"/>
+          </a:xfrm>
+          <a:prstGeom prst="rect">
+            <a:avLst/>
+          </a:prstGeom>
+          <a:noFill/>
+          <a:ln/>
+        </p:spPr>
+        <p:txBody>
+          <a:bodyPr wrap="square" rtlCol="0" anchor="ctr"/>
+          <a:lstStyle/>
+          <a:p>
+            <a:pPr indent="0" marL="0">
+              <a:buNone/>
+            </a:pPr>
+            <a:r>
+              <a:rPr lang="en-US" sz="4000" b="1" dirty="0">
+                <a:solidFill>
+                  <a:srgbClr val="86868B"/>
                 </a:solidFill>
                 <a:latin typeface="Microsoft YaHei" pitchFamily="34" charset="0"/>
                 <a:ea typeface="Microsoft YaHei" pitchFamily="34" charset="-122"/>
                 <a:cs typeface="Microsoft YaHei" pitchFamily="34" charset="-120"/>
               </a:rPr>
-              <a:t>今年最正确的决定，是把预算从投放搬到了内容。</a:t>
-            </a:r>
-            <a:endParaRPr lang="en-US" sz="3200" dirty="0"/>
-          </a:p>
-        </p:txBody>
-      </p:sp>
-      <p:sp>
-        <p:nvSpPr>
-          <p:cNvPr id="3" name="Text 1"/>
-          <p:cNvSpPr/>
-          <p:nvPr/>
-        </p:nvSpPr>
-        <p:spPr>
-          <a:xfrm>
-            <a:off x="0" y="4480560"/>
-            <a:ext cx="12188952" cy="457200"/>
+              <a:t>1.0亿</a:t>
+            </a:r>
+            <a:endParaRPr lang="en-US" sz="4000" dirty="0"/>
+          </a:p>
+        </p:txBody>
+      </p:sp>
+      <p:sp>
+        <p:nvSpPr>
+          <p:cNvPr id="5" name="Text 3"/>
+          <p:cNvSpPr/>
+          <p:nvPr/>
+        </p:nvSpPr>
+        <p:spPr>
+          <a:xfrm>
+            <a:off x="6611112" y="1828800"/>
+            <a:ext cx="4937760" cy="1005840"/>
           </a:xfrm>
           <a:prstGeom prst="rect">
             <a:avLst/>
@@ -3792,23 +5094,207 @@
           <a:bodyPr wrap="square" rtlCol="0" anchor="ctr"/>
           <a:lstStyle/>
           <a:p>
-            <a:pPr algn="ctr" indent="0" marL="0">
-              <a:buNone/>
-            </a:pPr>
-            <a:r>
-              <a:rPr lang="en-US" sz="1700" dirty="0">
-                <a:solidFill>
-                  <a:srgbClr val="86868B"/>
+            <a:pPr indent="0" marL="0">
+              <a:buNone/>
+            </a:pPr>
+            <a:r>
+              <a:rPr lang="en-US" sz="4800" b="1" dirty="0">
+                <a:solidFill>
+                  <a:srgbClr val="1D1D1F"/>
                 </a:solidFill>
                 <a:latin typeface="Microsoft YaHei" pitchFamily="34" charset="0"/>
                 <a:ea typeface="Microsoft YaHei" pitchFamily="34" charset="-122"/>
                 <a:cs typeface="Microsoft YaHei" pitchFamily="34" charset="-120"/>
               </a:rPr>
-              <a:t>—— CEO 年度信</a:t>
-            </a:r>
-            <a:endParaRPr lang="en-US" sz="1700" dirty="0"/>
-          </a:p>
-        </p:txBody>
+              <a:t>3.2亿</a:t>
+            </a:r>
+            <a:endParaRPr lang="en-US" sz="4800" dirty="0"/>
+          </a:p>
+        </p:txBody>
+      </p:sp>
+      <p:sp>
+        <p:nvSpPr>
+          <p:cNvPr id="6" name="Text 4"/>
+          <p:cNvSpPr/>
+          <p:nvPr/>
+        </p:nvSpPr>
+        <p:spPr>
+          <a:xfrm>
+            <a:off x="1188720" y="3108960"/>
+            <a:ext cx="4389120" cy="2926080"/>
+          </a:xfrm>
+          <a:prstGeom prst="rect">
+            <a:avLst/>
+          </a:prstGeom>
+          <a:noFill/>
+          <a:ln/>
+        </p:spPr>
+        <p:txBody>
+          <a:bodyPr wrap="square" rtlCol="0" anchor="t"/>
+          <a:lstStyle/>
+          <a:p>
+            <a:pPr indent="0" marL="0">
+              <a:spcAft>
+                <a:spcPts val="800"/>
+              </a:spcAft>
+              <a:buNone/>
+            </a:pPr>
+            <a:r>
+              <a:rPr lang="en-US" sz="1500" dirty="0">
+                <a:solidFill>
+                  <a:srgbClr val="86868B"/>
+                </a:solidFill>
+                <a:latin typeface="Microsoft YaHei" pitchFamily="34" charset="0"/>
+                <a:ea typeface="Microsoft YaHei" pitchFamily="34" charset="-122"/>
+                <a:cs typeface="Microsoft YaHei" pitchFamily="34" charset="-120"/>
+              </a:rPr>
+              <a:t>投放驱动，费用率 42%</a:t>
+            </a:r>
+            <a:endParaRPr lang="en-US" sz="1500" dirty="0"/>
+          </a:p>
+          <a:p>
+            <a:pPr indent="0" marL="0">
+              <a:spcAft>
+                <a:spcPts val="800"/>
+              </a:spcAft>
+              <a:buNone/>
+            </a:pPr>
+            <a:r>
+              <a:rPr lang="en-US" sz="1500" dirty="0">
+                <a:solidFill>
+                  <a:srgbClr val="86868B"/>
+                </a:solidFill>
+                <a:latin typeface="Microsoft YaHei" pitchFamily="34" charset="0"/>
+                <a:ea typeface="Microsoft YaHei" pitchFamily="34" charset="-122"/>
+                <a:cs typeface="Microsoft YaHei" pitchFamily="34" charset="-120"/>
+              </a:rPr>
+              <a:t>复购率 19%</a:t>
+            </a:r>
+            <a:endParaRPr lang="en-US" sz="1500" dirty="0"/>
+          </a:p>
+          <a:p>
+            <a:pPr indent="0" marL="0">
+              <a:spcAft>
+                <a:spcPts val="800"/>
+              </a:spcAft>
+              <a:buNone/>
+            </a:pPr>
+            <a:r>
+              <a:rPr lang="en-US" sz="1500" dirty="0">
+                <a:solidFill>
+                  <a:srgbClr val="86868B"/>
+                </a:solidFill>
+                <a:latin typeface="Microsoft YaHei" pitchFamily="34" charset="0"/>
+                <a:ea typeface="Microsoft YaHei" pitchFamily="34" charset="-122"/>
+                <a:cs typeface="Microsoft YaHei" pitchFamily="34" charset="-120"/>
+              </a:rPr>
+              <a:t>单一国内渠道</a:t>
+            </a:r>
+            <a:endParaRPr lang="en-US" sz="1500" dirty="0"/>
+          </a:p>
+        </p:txBody>
+      </p:sp>
+      <p:sp>
+        <p:nvSpPr>
+          <p:cNvPr id="7" name="Text 5"/>
+          <p:cNvSpPr/>
+          <p:nvPr/>
+        </p:nvSpPr>
+        <p:spPr>
+          <a:xfrm>
+            <a:off x="6611112" y="3108960"/>
+            <a:ext cx="4937760" cy="2926080"/>
+          </a:xfrm>
+          <a:prstGeom prst="rect">
+            <a:avLst/>
+          </a:prstGeom>
+          <a:noFill/>
+          <a:ln/>
+        </p:spPr>
+        <p:txBody>
+          <a:bodyPr wrap="square" rtlCol="0" anchor="t"/>
+          <a:lstStyle/>
+          <a:p>
+            <a:pPr indent="0" marL="0">
+              <a:spcAft>
+                <a:spcPts val="800"/>
+              </a:spcAft>
+              <a:buNone/>
+            </a:pPr>
+            <a:r>
+              <a:rPr lang="en-US" sz="1600" dirty="0">
+                <a:solidFill>
+                  <a:srgbClr val="1D1D1F"/>
+                </a:solidFill>
+                <a:latin typeface="Microsoft YaHei" pitchFamily="34" charset="0"/>
+                <a:ea typeface="Microsoft YaHei" pitchFamily="34" charset="-122"/>
+                <a:cs typeface="Microsoft YaHei" pitchFamily="34" charset="-120"/>
+              </a:rPr>
+              <a:t>内容驱动，费用率 24%</a:t>
+            </a:r>
+            <a:endParaRPr lang="en-US" sz="1600" dirty="0"/>
+          </a:p>
+          <a:p>
+            <a:pPr indent="0" marL="0">
+              <a:spcAft>
+                <a:spcPts val="800"/>
+              </a:spcAft>
+              <a:buNone/>
+            </a:pPr>
+            <a:r>
+              <a:rPr lang="en-US" sz="1600" dirty="0">
+                <a:solidFill>
+                  <a:srgbClr val="1D1D1F"/>
+                </a:solidFill>
+                <a:latin typeface="Microsoft YaHei" pitchFamily="34" charset="0"/>
+                <a:ea typeface="Microsoft YaHei" pitchFamily="34" charset="-122"/>
+                <a:cs typeface="Microsoft YaHei" pitchFamily="34" charset="-120"/>
+              </a:rPr>
+              <a:t>复购率 37%</a:t>
+            </a:r>
+            <a:endParaRPr lang="en-US" sz="1600" dirty="0"/>
+          </a:p>
+          <a:p>
+            <a:pPr indent="0" marL="0">
+              <a:spcAft>
+                <a:spcPts val="800"/>
+              </a:spcAft>
+              <a:buNone/>
+            </a:pPr>
+            <a:r>
+              <a:rPr lang="en-US" sz="1600" dirty="0">
+                <a:solidFill>
+                  <a:srgbClr val="1D1D1F"/>
+                </a:solidFill>
+                <a:latin typeface="Microsoft YaHei" pitchFamily="34" charset="0"/>
+                <a:ea typeface="Microsoft YaHei" pitchFamily="34" charset="-122"/>
+                <a:cs typeface="Microsoft YaHei" pitchFamily="34" charset="-120"/>
+              </a:rPr>
+              <a:t>国内 + 出海双曲线</a:t>
+            </a:r>
+            <a:endParaRPr lang="en-US" sz="1600" dirty="0"/>
+          </a:p>
+        </p:txBody>
+      </p:sp>
+      <p:sp>
+        <p:nvSpPr>
+          <p:cNvPr id="8" name="Shape 6"/>
+          <p:cNvSpPr/>
+          <p:nvPr/>
+        </p:nvSpPr>
+        <p:spPr>
+          <a:xfrm>
+            <a:off x="6094476" y="1554480"/>
+            <a:ext cx="7315" cy="3291840"/>
+          </a:xfrm>
+          <a:prstGeom prst="rect">
+            <a:avLst/>
+          </a:prstGeom>
+          <a:solidFill>
+            <a:srgbClr val="D2D2D7"/>
+          </a:solidFill>
+          <a:ln/>
+        </p:spPr>
       </p:sp>
     </p:spTree>
   </p:cSld>
@@ -3850,8 +5336,8 @@
         </p:nvSpPr>
         <p:spPr>
           <a:xfrm>
-            <a:off x="1005840" y="1234440"/>
-            <a:ext cx="4572000" cy="1554480"/>
+            <a:off x="1527048" y="1920240"/>
+            <a:ext cx="9144000" cy="2194560"/>
           </a:xfrm>
           <a:prstGeom prst="rect">
             <a:avLst/>
@@ -3863,50 +5349,14 @@
           <a:bodyPr wrap="square" rtlCol="0" anchor="ctr"/>
           <a:lstStyle/>
           <a:p>
-            <a:pPr indent="0" marL="0">
-              <a:buNone/>
-            </a:pPr>
-            <a:r>
-              <a:rPr lang="en-US" sz="9600" b="1" dirty="0">
-                <a:solidFill>
-                  <a:srgbClr val="86868B"/>
-                </a:solidFill>
-                <a:latin typeface="Segoe UI" pitchFamily="34" charset="0"/>
-                <a:ea typeface="Segoe UI" pitchFamily="34" charset="-122"/>
-                <a:cs typeface="Segoe UI" pitchFamily="34" charset="-120"/>
-              </a:rPr>
-              <a:t>02</a:t>
-            </a:r>
-            <a:endParaRPr lang="en-US" sz="9600" dirty="0"/>
-          </a:p>
-        </p:txBody>
-      </p:sp>
-      <p:sp>
-        <p:nvSpPr>
-          <p:cNvPr id="3" name="Text 1"/>
-          <p:cNvSpPr/>
-          <p:nvPr/>
-        </p:nvSpPr>
-        <p:spPr>
-          <a:xfrm>
-            <a:off x="1005840" y="2880360"/>
-            <a:ext cx="9601200" cy="1188720"/>
-          </a:xfrm>
-          <a:prstGeom prst="rect">
-            <a:avLst/>
-          </a:prstGeom>
-          <a:noFill/>
-          <a:ln/>
-        </p:spPr>
-        <p:txBody>
-          <a:bodyPr wrap="square" rtlCol="0" anchor="ctr"/>
-          <a:lstStyle/>
-          <a:p>
-            <a:pPr indent="0" marL="0">
-              <a:buNone/>
-            </a:pPr>
-            <a:r>
-              <a:rPr lang="en-US" sz="4800" b="1" dirty="0">
+            <a:pPr algn="ctr" indent="0" marL="0">
+              <a:lnSpc>
+                <a:spcPct val="120000"/>
+              </a:lnSpc>
+              <a:buNone/>
+            </a:pPr>
+            <a:r>
+              <a:rPr lang="en-US" sz="3200" b="1" dirty="0">
                 <a:solidFill>
                   <a:srgbClr val="1D1D1F"/>
                 </a:solidFill>
@@ -3914,22 +5364,22 @@
                 <a:ea typeface="Microsoft YaHei" pitchFamily="34" charset="-122"/>
                 <a:cs typeface="Microsoft YaHei" pitchFamily="34" charset="-120"/>
               </a:rPr>
-              <a:t>2026 三条主线</a:t>
-            </a:r>
-            <a:endParaRPr lang="en-US" sz="4800" dirty="0"/>
-          </a:p>
-        </p:txBody>
-      </p:sp>
-      <p:sp>
-        <p:nvSpPr>
-          <p:cNvPr id="4" name="Text 2"/>
-          <p:cNvSpPr/>
-          <p:nvPr/>
-        </p:nvSpPr>
-        <p:spPr>
-          <a:xfrm>
-            <a:off x="1005840" y="4160520"/>
-            <a:ext cx="9144000" cy="548640"/>
+              <a:t>今年最正确的决定，是把预算从投放搬到了内容。</a:t>
+            </a:r>
+            <a:endParaRPr lang="en-US" sz="3200" dirty="0"/>
+          </a:p>
+        </p:txBody>
+      </p:sp>
+      <p:sp>
+        <p:nvSpPr>
+          <p:cNvPr id="3" name="Text 1"/>
+          <p:cNvSpPr/>
+          <p:nvPr/>
+        </p:nvSpPr>
+        <p:spPr>
+          <a:xfrm>
+            <a:off x="0" y="4480560"/>
+            <a:ext cx="12188952" cy="457200"/>
           </a:xfrm>
           <a:prstGeom prst="rect">
             <a:avLst/>
@@ -3941,11 +5391,11 @@
           <a:bodyPr wrap="square" rtlCol="0" anchor="ctr"/>
           <a:lstStyle/>
           <a:p>
-            <a:pPr indent="0" marL="0">
-              <a:buNone/>
-            </a:pPr>
-            <a:r>
-              <a:rPr lang="en-US" sz="2000" dirty="0">
+            <a:pPr algn="ctr" indent="0" marL="0">
+              <a:buNone/>
+            </a:pPr>
+            <a:r>
+              <a:rPr lang="en-US" sz="1700" dirty="0">
                 <a:solidFill>
                   <a:srgbClr val="86868B"/>
                 </a:solidFill>
@@ -3953,9 +5403,9 @@
                 <a:ea typeface="Microsoft YaHei" pitchFamily="34" charset="-122"/>
                 <a:cs typeface="Microsoft YaHei" pitchFamily="34" charset="-120"/>
               </a:rPr>
-              <a:t>把翻倍，变成习惯。</a:t>
-            </a:r>
-            <a:endParaRPr lang="en-US" sz="2000" dirty="0"/>
+              <a:t>—— CEO 年度信</a:t>
+            </a:r>
+            <a:endParaRPr lang="en-US" sz="1700" dirty="0"/>
           </a:p>
         </p:txBody>
       </p:sp>

--- a/assets/showcase/business-review/Annual-Review.pptx
+++ b/assets/showcase/business-review/Annual-Review.pptx
@@ -2104,6 +2104,298 @@
   <p:clrMapOvr>
     <a:masterClrMapping/>
   </p:clrMapOvr>
+  <p:transition xmlns:p14="http://schemas.microsoft.com/office/powerpoint/2010/main" spd="slow" p14:dur="700">
+    <p:fade/>
+  </p:transition>
+  <p:timing xmlns:p="http://schemas.openxmlformats.org/presentationml/2006/main">
+    <p:tnLst>
+      <p:par>
+        <p:cTn id="1" dur="indefinite" restart="never" nodeType="tmRoot">
+          <p:childTnLst>
+            <p:seq concurrent="1" nextAc="seek">
+              <p:cTn id="2" dur="indefinite" nodeType="mainSeq">
+                <p:childTnLst>
+                  <p:par>
+                    <p:cTn id="3" fill="hold">
+                      <p:stCondLst>
+                        <p:cond delay="indefinite"/>
+                        <p:cond evt="onBegin" delay="0">
+                          <p:tn val="2"/>
+                        </p:cond>
+                      </p:stCondLst>
+                      <p:childTnLst>
+                        <p:par>
+                          <p:cTn id="4" fill="hold">
+                            <p:stCondLst>
+                              <p:cond delay="0"/>
+                            </p:stCondLst>
+                            <p:childTnLst>
+                              <p:par>
+                                <p:cTn id="5" presetID="10" presetClass="entr" presetSubtype="0" fill="hold" grpId="0" nodeType="withEffect">
+                                  <p:stCondLst>
+                                    <p:cond delay="0"/>
+                                  </p:stCondLst>
+                                  <p:childTnLst>
+                                    <p:set>
+                                      <p:cBhvr>
+                                        <p:cTn id="6" dur="1" fill="hold">
+                                          <p:stCondLst>
+                                            <p:cond delay="0"/>
+                                          </p:stCondLst>
+                                        </p:cTn>
+                                        <p:tgtEl>
+                                          <p:spTgt spid="2"/>
+                                        </p:tgtEl>
+                                        <p:attrNameLst>
+                                          <p:attrName>style.visibility</p:attrName>
+                                        </p:attrNameLst>
+                                      </p:cBhvr>
+                                      <p:to>
+                                        <p:strVal val="visible"/>
+                                      </p:to>
+                                    </p:set>
+                                    <p:animEffect transition="in" filter="fade">
+                                      <p:cBhvr>
+                                        <p:cTn id="7" dur="450"/>
+                                        <p:tgtEl>
+                                          <p:spTgt spid="2"/>
+                                        </p:tgtEl>
+                                      </p:cBhvr>
+                                    </p:animEffect>
+                                    <p:anim calcmode="lin" valueType="num">
+                                      <p:cBhvr additive="base">
+                                        <p:cTn id="8" dur="450" fill="hold"/>
+                                        <p:tgtEl>
+                                          <p:spTgt spid="2"/>
+                                        </p:tgtEl>
+                                        <p:attrNameLst>
+                                          <p:attrName>ppt_y</p:attrName>
+                                        </p:attrNameLst>
+                                      </p:cBhvr>
+                                      <p:tavLst>
+                                        <p:tav tm="0">
+                                          <p:val>
+                                            <p:strVal val="#ppt_y+0.025"/>
+                                          </p:val>
+                                        </p:tav>
+                                        <p:tav tm="100000">
+                                          <p:val>
+                                            <p:strVal val="#ppt_y"/>
+                                          </p:val>
+                                        </p:tav>
+                                      </p:tavLst>
+                                    </p:anim>
+                                  </p:childTnLst>
+                                </p:cTn>
+                              </p:par>
+                              <p:par>
+                                <p:cTn id="9" presetID="10" presetClass="entr" presetSubtype="0" fill="hold" grpId="0" nodeType="withEffect">
+                                  <p:stCondLst>
+                                    <p:cond delay="160"/>
+                                  </p:stCondLst>
+                                  <p:childTnLst>
+                                    <p:set>
+                                      <p:cBhvr>
+                                        <p:cTn id="10" dur="1" fill="hold">
+                                          <p:stCondLst>
+                                            <p:cond delay="0"/>
+                                          </p:stCondLst>
+                                        </p:cTn>
+                                        <p:tgtEl>
+                                          <p:spTgt spid="3"/>
+                                        </p:tgtEl>
+                                        <p:attrNameLst>
+                                          <p:attrName>style.visibility</p:attrName>
+                                        </p:attrNameLst>
+                                      </p:cBhvr>
+                                      <p:to>
+                                        <p:strVal val="visible"/>
+                                      </p:to>
+                                    </p:set>
+                                    <p:animEffect transition="in" filter="fade">
+                                      <p:cBhvr>
+                                        <p:cTn id="11" dur="450"/>
+                                        <p:tgtEl>
+                                          <p:spTgt spid="3"/>
+                                        </p:tgtEl>
+                                      </p:cBhvr>
+                                    </p:animEffect>
+                                    <p:anim calcmode="lin" valueType="num">
+                                      <p:cBhvr additive="base">
+                                        <p:cTn id="12" dur="450" fill="hold"/>
+                                        <p:tgtEl>
+                                          <p:spTgt spid="3"/>
+                                        </p:tgtEl>
+                                        <p:attrNameLst>
+                                          <p:attrName>ppt_y</p:attrName>
+                                        </p:attrNameLst>
+                                      </p:cBhvr>
+                                      <p:tavLst>
+                                        <p:tav tm="0">
+                                          <p:val>
+                                            <p:strVal val="#ppt_y+0.025"/>
+                                          </p:val>
+                                        </p:tav>
+                                        <p:tav tm="100000">
+                                          <p:val>
+                                            <p:strVal val="#ppt_y"/>
+                                          </p:val>
+                                        </p:tav>
+                                      </p:tavLst>
+                                    </p:anim>
+                                  </p:childTnLst>
+                                </p:cTn>
+                              </p:par>
+                              <p:par>
+                                <p:cTn id="13" presetID="10" presetClass="entr" presetSubtype="0" fill="hold" grpId="0" nodeType="withEffect">
+                                  <p:stCondLst>
+                                    <p:cond delay="320"/>
+                                  </p:stCondLst>
+                                  <p:childTnLst>
+                                    <p:set>
+                                      <p:cBhvr>
+                                        <p:cTn id="14" dur="1" fill="hold">
+                                          <p:stCondLst>
+                                            <p:cond delay="0"/>
+                                          </p:stCondLst>
+                                        </p:cTn>
+                                        <p:tgtEl>
+                                          <p:spTgt spid="4"/>
+                                        </p:tgtEl>
+                                        <p:attrNameLst>
+                                          <p:attrName>style.visibility</p:attrName>
+                                        </p:attrNameLst>
+                                      </p:cBhvr>
+                                      <p:to>
+                                        <p:strVal val="visible"/>
+                                      </p:to>
+                                    </p:set>
+                                    <p:animEffect transition="in" filter="fade">
+                                      <p:cBhvr>
+                                        <p:cTn id="15" dur="450"/>
+                                        <p:tgtEl>
+                                          <p:spTgt spid="4"/>
+                                        </p:tgtEl>
+                                      </p:cBhvr>
+                                    </p:animEffect>
+                                    <p:anim calcmode="lin" valueType="num">
+                                      <p:cBhvr additive="base">
+                                        <p:cTn id="16" dur="450" fill="hold"/>
+                                        <p:tgtEl>
+                                          <p:spTgt spid="4"/>
+                                        </p:tgtEl>
+                                        <p:attrNameLst>
+                                          <p:attrName>ppt_y</p:attrName>
+                                        </p:attrNameLst>
+                                      </p:cBhvr>
+                                      <p:tavLst>
+                                        <p:tav tm="0">
+                                          <p:val>
+                                            <p:strVal val="#ppt_y+0.025"/>
+                                          </p:val>
+                                        </p:tav>
+                                        <p:tav tm="100000">
+                                          <p:val>
+                                            <p:strVal val="#ppt_y"/>
+                                          </p:val>
+                                        </p:tav>
+                                      </p:tavLst>
+                                    </p:anim>
+                                  </p:childTnLst>
+                                </p:cTn>
+                              </p:par>
+                              <p:par>
+                                <p:cTn id="17" presetID="10" presetClass="entr" presetSubtype="0" fill="hold" grpId="0" nodeType="withEffect">
+                                  <p:stCondLst>
+                                    <p:cond delay="480"/>
+                                  </p:stCondLst>
+                                  <p:childTnLst>
+                                    <p:set>
+                                      <p:cBhvr>
+                                        <p:cTn id="18" dur="1" fill="hold">
+                                          <p:stCondLst>
+                                            <p:cond delay="0"/>
+                                          </p:stCondLst>
+                                        </p:cTn>
+                                        <p:tgtEl>
+                                          <p:spTgt spid="5"/>
+                                        </p:tgtEl>
+                                        <p:attrNameLst>
+                                          <p:attrName>style.visibility</p:attrName>
+                                        </p:attrNameLst>
+                                      </p:cBhvr>
+                                      <p:to>
+                                        <p:strVal val="visible"/>
+                                      </p:to>
+                                    </p:set>
+                                    <p:animEffect transition="in" filter="fade">
+                                      <p:cBhvr>
+                                        <p:cTn id="19" dur="450"/>
+                                        <p:tgtEl>
+                                          <p:spTgt spid="5"/>
+                                        </p:tgtEl>
+                                      </p:cBhvr>
+                                    </p:animEffect>
+                                    <p:anim calcmode="lin" valueType="num">
+                                      <p:cBhvr additive="base">
+                                        <p:cTn id="20" dur="450" fill="hold"/>
+                                        <p:tgtEl>
+                                          <p:spTgt spid="5"/>
+                                        </p:tgtEl>
+                                        <p:attrNameLst>
+                                          <p:attrName>ppt_y</p:attrName>
+                                        </p:attrNameLst>
+                                      </p:cBhvr>
+                                      <p:tavLst>
+                                        <p:tav tm="0">
+                                          <p:val>
+                                            <p:strVal val="#ppt_y+0.025"/>
+                                          </p:val>
+                                        </p:tav>
+                                        <p:tav tm="100000">
+                                          <p:val>
+                                            <p:strVal val="#ppt_y"/>
+                                          </p:val>
+                                        </p:tav>
+                                      </p:tavLst>
+                                    </p:anim>
+                                  </p:childTnLst>
+                                </p:cTn>
+                              </p:par>
+                            </p:childTnLst>
+                          </p:cTn>
+                        </p:par>
+                      </p:childTnLst>
+                    </p:cTn>
+                  </p:par>
+                </p:childTnLst>
+              </p:cTn>
+              <p:prevCondLst>
+                <p:cond evt="onPrev" delay="0">
+                  <p:tgtEl>
+                    <p:sldTgt/>
+                  </p:tgtEl>
+                </p:cond>
+              </p:prevCondLst>
+              <p:nextCondLst>
+                <p:cond evt="onNext" delay="0">
+                  <p:tgtEl>
+                    <p:sldTgt/>
+                  </p:tgtEl>
+                </p:cond>
+              </p:nextCondLst>
+            </p:seq>
+          </p:childTnLst>
+        </p:cTn>
+      </p:par>
+    </p:tnLst>
+    <p:bldLst>
+      <p:bldP spid="2" grpId="0"/>
+      <p:bldP spid="3" grpId="0"/>
+      <p:bldP spid="4" grpId="0"/>
+      <p:bldP spid="5" grpId="0"/>
+    </p:bldLst>
+  </p:timing>
 </p:sld>
 </file>
 
@@ -2253,6 +2545,239 @@
   <p:clrMapOvr>
     <a:masterClrMapping/>
   </p:clrMapOvr>
+  <p:transition xmlns:p14="http://schemas.microsoft.com/office/powerpoint/2010/main" spd="slow" p14:dur="700">
+    <p:fade/>
+  </p:transition>
+  <p:timing xmlns:p="http://schemas.openxmlformats.org/presentationml/2006/main">
+    <p:tnLst>
+      <p:par>
+        <p:cTn id="1" dur="indefinite" restart="never" nodeType="tmRoot">
+          <p:childTnLst>
+            <p:seq concurrent="1" nextAc="seek">
+              <p:cTn id="2" dur="indefinite" nodeType="mainSeq">
+                <p:childTnLst>
+                  <p:par>
+                    <p:cTn id="3" fill="hold">
+                      <p:stCondLst>
+                        <p:cond delay="indefinite"/>
+                        <p:cond evt="onBegin" delay="0">
+                          <p:tn val="2"/>
+                        </p:cond>
+                      </p:stCondLst>
+                      <p:childTnLst>
+                        <p:par>
+                          <p:cTn id="4" fill="hold">
+                            <p:stCondLst>
+                              <p:cond delay="0"/>
+                            </p:stCondLst>
+                            <p:childTnLst>
+                              <p:par>
+                                <p:cTn id="5" presetID="10" presetClass="entr" presetSubtype="0" fill="hold" grpId="0" nodeType="withEffect">
+                                  <p:stCondLst>
+                                    <p:cond delay="0"/>
+                                  </p:stCondLst>
+                                  <p:childTnLst>
+                                    <p:set>
+                                      <p:cBhvr>
+                                        <p:cTn id="6" dur="1" fill="hold">
+                                          <p:stCondLst>
+                                            <p:cond delay="0"/>
+                                          </p:stCondLst>
+                                        </p:cTn>
+                                        <p:tgtEl>
+                                          <p:spTgt spid="2"/>
+                                        </p:tgtEl>
+                                        <p:attrNameLst>
+                                          <p:attrName>style.visibility</p:attrName>
+                                        </p:attrNameLst>
+                                      </p:cBhvr>
+                                      <p:to>
+                                        <p:strVal val="visible"/>
+                                      </p:to>
+                                    </p:set>
+                                    <p:animEffect transition="in" filter="fade">
+                                      <p:cBhvr>
+                                        <p:cTn id="7" dur="450"/>
+                                        <p:tgtEl>
+                                          <p:spTgt spid="2"/>
+                                        </p:tgtEl>
+                                      </p:cBhvr>
+                                    </p:animEffect>
+                                    <p:anim calcmode="lin" valueType="num">
+                                      <p:cBhvr additive="base">
+                                        <p:cTn id="8" dur="450" fill="hold"/>
+                                        <p:tgtEl>
+                                          <p:spTgt spid="2"/>
+                                        </p:tgtEl>
+                                        <p:attrNameLst>
+                                          <p:attrName>ppt_y</p:attrName>
+                                        </p:attrNameLst>
+                                      </p:cBhvr>
+                                      <p:tavLst>
+                                        <p:tav tm="0">
+                                          <p:val>
+                                            <p:strVal val="#ppt_y+0.025"/>
+                                          </p:val>
+                                        </p:tav>
+                                        <p:tav tm="100000">
+                                          <p:val>
+                                            <p:strVal val="#ppt_y"/>
+                                          </p:val>
+                                        </p:tav>
+                                      </p:tavLst>
+                                    </p:anim>
+                                  </p:childTnLst>
+                                </p:cTn>
+                              </p:par>
+                              <p:par>
+                                <p:cTn id="9" presetID="10" presetClass="entr" presetSubtype="0" fill="hold" grpId="0" nodeType="withEffect">
+                                  <p:stCondLst>
+                                    <p:cond delay="160"/>
+                                  </p:stCondLst>
+                                  <p:childTnLst>
+                                    <p:set>
+                                      <p:cBhvr>
+                                        <p:cTn id="10" dur="1" fill="hold">
+                                          <p:stCondLst>
+                                            <p:cond delay="0"/>
+                                          </p:stCondLst>
+                                        </p:cTn>
+                                        <p:tgtEl>
+                                          <p:spTgt spid="3"/>
+                                        </p:tgtEl>
+                                        <p:attrNameLst>
+                                          <p:attrName>style.visibility</p:attrName>
+                                        </p:attrNameLst>
+                                      </p:cBhvr>
+                                      <p:to>
+                                        <p:strVal val="visible"/>
+                                      </p:to>
+                                    </p:set>
+                                    <p:animEffect transition="in" filter="fade">
+                                      <p:cBhvr>
+                                        <p:cTn id="11" dur="450"/>
+                                        <p:tgtEl>
+                                          <p:spTgt spid="3"/>
+                                        </p:tgtEl>
+                                      </p:cBhvr>
+                                    </p:animEffect>
+                                    <p:anim calcmode="lin" valueType="num">
+                                      <p:cBhvr additive="base">
+                                        <p:cTn id="12" dur="450" fill="hold"/>
+                                        <p:tgtEl>
+                                          <p:spTgt spid="3"/>
+                                        </p:tgtEl>
+                                        <p:attrNameLst>
+                                          <p:attrName>ppt_y</p:attrName>
+                                        </p:attrNameLst>
+                                      </p:cBhvr>
+                                      <p:tavLst>
+                                        <p:tav tm="0">
+                                          <p:val>
+                                            <p:strVal val="#ppt_y+0.025"/>
+                                          </p:val>
+                                        </p:tav>
+                                        <p:tav tm="100000">
+                                          <p:val>
+                                            <p:strVal val="#ppt_y"/>
+                                          </p:val>
+                                        </p:tav>
+                                      </p:tavLst>
+                                    </p:anim>
+                                  </p:childTnLst>
+                                </p:cTn>
+                              </p:par>
+                              <p:par>
+                                <p:cTn id="13" presetID="10" presetClass="entr" presetSubtype="0" fill="hold" grpId="0" nodeType="withEffect">
+                                  <p:stCondLst>
+                                    <p:cond delay="320"/>
+                                  </p:stCondLst>
+                                  <p:childTnLst>
+                                    <p:set>
+                                      <p:cBhvr>
+                                        <p:cTn id="14" dur="1" fill="hold">
+                                          <p:stCondLst>
+                                            <p:cond delay="0"/>
+                                          </p:stCondLst>
+                                        </p:cTn>
+                                        <p:tgtEl>
+                                          <p:spTgt spid="4"/>
+                                        </p:tgtEl>
+                                        <p:attrNameLst>
+                                          <p:attrName>style.visibility</p:attrName>
+                                        </p:attrNameLst>
+                                      </p:cBhvr>
+                                      <p:to>
+                                        <p:strVal val="visible"/>
+                                      </p:to>
+                                    </p:set>
+                                    <p:animEffect transition="in" filter="fade">
+                                      <p:cBhvr>
+                                        <p:cTn id="15" dur="450"/>
+                                        <p:tgtEl>
+                                          <p:spTgt spid="4"/>
+                                        </p:tgtEl>
+                                      </p:cBhvr>
+                                    </p:animEffect>
+                                    <p:anim calcmode="lin" valueType="num">
+                                      <p:cBhvr additive="base">
+                                        <p:cTn id="16" dur="450" fill="hold"/>
+                                        <p:tgtEl>
+                                          <p:spTgt spid="4"/>
+                                        </p:tgtEl>
+                                        <p:attrNameLst>
+                                          <p:attrName>ppt_y</p:attrName>
+                                        </p:attrNameLst>
+                                      </p:cBhvr>
+                                      <p:tavLst>
+                                        <p:tav tm="0">
+                                          <p:val>
+                                            <p:strVal val="#ppt_y+0.025"/>
+                                          </p:val>
+                                        </p:tav>
+                                        <p:tav tm="100000">
+                                          <p:val>
+                                            <p:strVal val="#ppt_y"/>
+                                          </p:val>
+                                        </p:tav>
+                                      </p:tavLst>
+                                    </p:anim>
+                                  </p:childTnLst>
+                                </p:cTn>
+                              </p:par>
+                            </p:childTnLst>
+                          </p:cTn>
+                        </p:par>
+                      </p:childTnLst>
+                    </p:cTn>
+                  </p:par>
+                </p:childTnLst>
+              </p:cTn>
+              <p:prevCondLst>
+                <p:cond evt="onPrev" delay="0">
+                  <p:tgtEl>
+                    <p:sldTgt/>
+                  </p:tgtEl>
+                </p:cond>
+              </p:prevCondLst>
+              <p:nextCondLst>
+                <p:cond evt="onNext" delay="0">
+                  <p:tgtEl>
+                    <p:sldTgt/>
+                  </p:tgtEl>
+                </p:cond>
+              </p:nextCondLst>
+            </p:seq>
+          </p:childTnLst>
+        </p:cTn>
+      </p:par>
+    </p:tnLst>
+    <p:bldLst>
+      <p:bldP spid="2" grpId="0"/>
+      <p:bldP spid="3" grpId="0"/>
+      <p:bldP spid="4" grpId="0"/>
+    </p:bldLst>
+  </p:timing>
 </p:sld>
 </file>
 
@@ -2567,6 +3092,475 @@
   <p:clrMapOvr>
     <a:masterClrMapping/>
   </p:clrMapOvr>
+  <p:transition xmlns:p14="http://schemas.microsoft.com/office/powerpoint/2010/main" spd="slow" p14:dur="700">
+    <p:fade/>
+  </p:transition>
+  <p:timing xmlns:p="http://schemas.openxmlformats.org/presentationml/2006/main">
+    <p:tnLst>
+      <p:par>
+        <p:cTn id="1" dur="indefinite" restart="never" nodeType="tmRoot">
+          <p:childTnLst>
+            <p:seq concurrent="1" nextAc="seek">
+              <p:cTn id="2" dur="indefinite" nodeType="mainSeq">
+                <p:childTnLst>
+                  <p:par>
+                    <p:cTn id="3" fill="hold">
+                      <p:stCondLst>
+                        <p:cond delay="indefinite"/>
+                        <p:cond evt="onBegin" delay="0">
+                          <p:tn val="2"/>
+                        </p:cond>
+                      </p:stCondLst>
+                      <p:childTnLst>
+                        <p:par>
+                          <p:cTn id="4" fill="hold">
+                            <p:stCondLst>
+                              <p:cond delay="0"/>
+                            </p:stCondLst>
+                            <p:childTnLst>
+                              <p:par>
+                                <p:cTn id="5" presetID="10" presetClass="entr" presetSubtype="0" fill="hold" grpId="0" nodeType="withEffect">
+                                  <p:stCondLst>
+                                    <p:cond delay="0"/>
+                                  </p:stCondLst>
+                                  <p:childTnLst>
+                                    <p:set>
+                                      <p:cBhvr>
+                                        <p:cTn id="6" dur="1" fill="hold">
+                                          <p:stCondLst>
+                                            <p:cond delay="0"/>
+                                          </p:stCondLst>
+                                        </p:cTn>
+                                        <p:tgtEl>
+                                          <p:spTgt spid="2"/>
+                                        </p:tgtEl>
+                                        <p:attrNameLst>
+                                          <p:attrName>style.visibility</p:attrName>
+                                        </p:attrNameLst>
+                                      </p:cBhvr>
+                                      <p:to>
+                                        <p:strVal val="visible"/>
+                                      </p:to>
+                                    </p:set>
+                                    <p:animEffect transition="in" filter="fade">
+                                      <p:cBhvr>
+                                        <p:cTn id="7" dur="450"/>
+                                        <p:tgtEl>
+                                          <p:spTgt spid="2"/>
+                                        </p:tgtEl>
+                                      </p:cBhvr>
+                                    </p:animEffect>
+                                    <p:anim calcmode="lin" valueType="num">
+                                      <p:cBhvr additive="base">
+                                        <p:cTn id="8" dur="450" fill="hold"/>
+                                        <p:tgtEl>
+                                          <p:spTgt spid="2"/>
+                                        </p:tgtEl>
+                                        <p:attrNameLst>
+                                          <p:attrName>ppt_y</p:attrName>
+                                        </p:attrNameLst>
+                                      </p:cBhvr>
+                                      <p:tavLst>
+                                        <p:tav tm="0">
+                                          <p:val>
+                                            <p:strVal val="#ppt_y+0.025"/>
+                                          </p:val>
+                                        </p:tav>
+                                        <p:tav tm="100000">
+                                          <p:val>
+                                            <p:strVal val="#ppt_y"/>
+                                          </p:val>
+                                        </p:tav>
+                                      </p:tavLst>
+                                    </p:anim>
+                                  </p:childTnLst>
+                                </p:cTn>
+                              </p:par>
+                              <p:par>
+                                <p:cTn id="9" presetID="10" presetClass="entr" presetSubtype="0" fill="hold" grpId="0" nodeType="withEffect">
+                                  <p:stCondLst>
+                                    <p:cond delay="160"/>
+                                  </p:stCondLst>
+                                  <p:childTnLst>
+                                    <p:set>
+                                      <p:cBhvr>
+                                        <p:cTn id="10" dur="1" fill="hold">
+                                          <p:stCondLst>
+                                            <p:cond delay="0"/>
+                                          </p:stCondLst>
+                                        </p:cTn>
+                                        <p:tgtEl>
+                                          <p:spTgt spid="3"/>
+                                        </p:tgtEl>
+                                        <p:attrNameLst>
+                                          <p:attrName>style.visibility</p:attrName>
+                                        </p:attrNameLst>
+                                      </p:cBhvr>
+                                      <p:to>
+                                        <p:strVal val="visible"/>
+                                      </p:to>
+                                    </p:set>
+                                    <p:animEffect transition="in" filter="fade">
+                                      <p:cBhvr>
+                                        <p:cTn id="11" dur="450"/>
+                                        <p:tgtEl>
+                                          <p:spTgt spid="3"/>
+                                        </p:tgtEl>
+                                      </p:cBhvr>
+                                    </p:animEffect>
+                                    <p:anim calcmode="lin" valueType="num">
+                                      <p:cBhvr additive="base">
+                                        <p:cTn id="12" dur="450" fill="hold"/>
+                                        <p:tgtEl>
+                                          <p:spTgt spid="3"/>
+                                        </p:tgtEl>
+                                        <p:attrNameLst>
+                                          <p:attrName>ppt_y</p:attrName>
+                                        </p:attrNameLst>
+                                      </p:cBhvr>
+                                      <p:tavLst>
+                                        <p:tav tm="0">
+                                          <p:val>
+                                            <p:strVal val="#ppt_y+0.025"/>
+                                          </p:val>
+                                        </p:tav>
+                                        <p:tav tm="100000">
+                                          <p:val>
+                                            <p:strVal val="#ppt_y"/>
+                                          </p:val>
+                                        </p:tav>
+                                      </p:tavLst>
+                                    </p:anim>
+                                  </p:childTnLst>
+                                </p:cTn>
+                              </p:par>
+                              <p:par>
+                                <p:cTn id="13" presetID="10" presetClass="entr" presetSubtype="0" fill="hold" grpId="0" nodeType="withEffect">
+                                  <p:stCondLst>
+                                    <p:cond delay="320"/>
+                                  </p:stCondLst>
+                                  <p:childTnLst>
+                                    <p:set>
+                                      <p:cBhvr>
+                                        <p:cTn id="14" dur="1" fill="hold">
+                                          <p:stCondLst>
+                                            <p:cond delay="0"/>
+                                          </p:stCondLst>
+                                        </p:cTn>
+                                        <p:tgtEl>
+                                          <p:spTgt spid="5"/>
+                                        </p:tgtEl>
+                                        <p:attrNameLst>
+                                          <p:attrName>style.visibility</p:attrName>
+                                        </p:attrNameLst>
+                                      </p:cBhvr>
+                                      <p:to>
+                                        <p:strVal val="visible"/>
+                                      </p:to>
+                                    </p:set>
+                                    <p:animEffect transition="in" filter="fade">
+                                      <p:cBhvr>
+                                        <p:cTn id="15" dur="450"/>
+                                        <p:tgtEl>
+                                          <p:spTgt spid="5"/>
+                                        </p:tgtEl>
+                                      </p:cBhvr>
+                                    </p:animEffect>
+                                    <p:anim calcmode="lin" valueType="num">
+                                      <p:cBhvr additive="base">
+                                        <p:cTn id="16" dur="450" fill="hold"/>
+                                        <p:tgtEl>
+                                          <p:spTgt spid="5"/>
+                                        </p:tgtEl>
+                                        <p:attrNameLst>
+                                          <p:attrName>ppt_y</p:attrName>
+                                        </p:attrNameLst>
+                                      </p:cBhvr>
+                                      <p:tavLst>
+                                        <p:tav tm="0">
+                                          <p:val>
+                                            <p:strVal val="#ppt_y+0.025"/>
+                                          </p:val>
+                                        </p:tav>
+                                        <p:tav tm="100000">
+                                          <p:val>
+                                            <p:strVal val="#ppt_y"/>
+                                          </p:val>
+                                        </p:tav>
+                                      </p:tavLst>
+                                    </p:anim>
+                                  </p:childTnLst>
+                                </p:cTn>
+                              </p:par>
+                              <p:par>
+                                <p:cTn id="17" presetID="10" presetClass="entr" presetSubtype="0" fill="hold" grpId="0" nodeType="withEffect">
+                                  <p:stCondLst>
+                                    <p:cond delay="480"/>
+                                  </p:stCondLst>
+                                  <p:childTnLst>
+                                    <p:set>
+                                      <p:cBhvr>
+                                        <p:cTn id="18" dur="1" fill="hold">
+                                          <p:stCondLst>
+                                            <p:cond delay="0"/>
+                                          </p:stCondLst>
+                                        </p:cTn>
+                                        <p:tgtEl>
+                                          <p:spTgt spid="7"/>
+                                        </p:tgtEl>
+                                        <p:attrNameLst>
+                                          <p:attrName>style.visibility</p:attrName>
+                                        </p:attrNameLst>
+                                      </p:cBhvr>
+                                      <p:to>
+                                        <p:strVal val="visible"/>
+                                      </p:to>
+                                    </p:set>
+                                    <p:animEffect transition="in" filter="fade">
+                                      <p:cBhvr>
+                                        <p:cTn id="19" dur="450"/>
+                                        <p:tgtEl>
+                                          <p:spTgt spid="7"/>
+                                        </p:tgtEl>
+                                      </p:cBhvr>
+                                    </p:animEffect>
+                                    <p:anim calcmode="lin" valueType="num">
+                                      <p:cBhvr additive="base">
+                                        <p:cTn id="20" dur="450" fill="hold"/>
+                                        <p:tgtEl>
+                                          <p:spTgt spid="7"/>
+                                        </p:tgtEl>
+                                        <p:attrNameLst>
+                                          <p:attrName>ppt_y</p:attrName>
+                                        </p:attrNameLst>
+                                      </p:cBhvr>
+                                      <p:tavLst>
+                                        <p:tav tm="0">
+                                          <p:val>
+                                            <p:strVal val="#ppt_y+0.025"/>
+                                          </p:val>
+                                        </p:tav>
+                                        <p:tav tm="100000">
+                                          <p:val>
+                                            <p:strVal val="#ppt_y"/>
+                                          </p:val>
+                                        </p:tav>
+                                      </p:tavLst>
+                                    </p:anim>
+                                  </p:childTnLst>
+                                </p:cTn>
+                              </p:par>
+                              <p:par>
+                                <p:cTn id="21" presetID="10" presetClass="entr" presetSubtype="0" fill="hold" grpId="0" nodeType="withEffect">
+                                  <p:stCondLst>
+                                    <p:cond delay="640"/>
+                                  </p:stCondLst>
+                                  <p:childTnLst>
+                                    <p:set>
+                                      <p:cBhvr>
+                                        <p:cTn id="22" dur="1" fill="hold">
+                                          <p:stCondLst>
+                                            <p:cond delay="0"/>
+                                          </p:stCondLst>
+                                        </p:cTn>
+                                        <p:tgtEl>
+                                          <p:spTgt spid="4"/>
+                                        </p:tgtEl>
+                                        <p:attrNameLst>
+                                          <p:attrName>style.visibility</p:attrName>
+                                        </p:attrNameLst>
+                                      </p:cBhvr>
+                                      <p:to>
+                                        <p:strVal val="visible"/>
+                                      </p:to>
+                                    </p:set>
+                                    <p:animEffect transition="in" filter="fade">
+                                      <p:cBhvr>
+                                        <p:cTn id="23" dur="450"/>
+                                        <p:tgtEl>
+                                          <p:spTgt spid="4"/>
+                                        </p:tgtEl>
+                                      </p:cBhvr>
+                                    </p:animEffect>
+                                    <p:anim calcmode="lin" valueType="num">
+                                      <p:cBhvr additive="base">
+                                        <p:cTn id="24" dur="450" fill="hold"/>
+                                        <p:tgtEl>
+                                          <p:spTgt spid="4"/>
+                                        </p:tgtEl>
+                                        <p:attrNameLst>
+                                          <p:attrName>ppt_y</p:attrName>
+                                        </p:attrNameLst>
+                                      </p:cBhvr>
+                                      <p:tavLst>
+                                        <p:tav tm="0">
+                                          <p:val>
+                                            <p:strVal val="#ppt_y+0.025"/>
+                                          </p:val>
+                                        </p:tav>
+                                        <p:tav tm="100000">
+                                          <p:val>
+                                            <p:strVal val="#ppt_y"/>
+                                          </p:val>
+                                        </p:tav>
+                                      </p:tavLst>
+                                    </p:anim>
+                                  </p:childTnLst>
+                                </p:cTn>
+                              </p:par>
+                              <p:par>
+                                <p:cTn id="25" presetID="10" presetClass="entr" presetSubtype="0" fill="hold" grpId="0" nodeType="withEffect">
+                                  <p:stCondLst>
+                                    <p:cond delay="800"/>
+                                  </p:stCondLst>
+                                  <p:childTnLst>
+                                    <p:set>
+                                      <p:cBhvr>
+                                        <p:cTn id="26" dur="1" fill="hold">
+                                          <p:stCondLst>
+                                            <p:cond delay="0"/>
+                                          </p:stCondLst>
+                                        </p:cTn>
+                                        <p:tgtEl>
+                                          <p:spTgt spid="6"/>
+                                        </p:tgtEl>
+                                        <p:attrNameLst>
+                                          <p:attrName>style.visibility</p:attrName>
+                                        </p:attrNameLst>
+                                      </p:cBhvr>
+                                      <p:to>
+                                        <p:strVal val="visible"/>
+                                      </p:to>
+                                    </p:set>
+                                    <p:animEffect transition="in" filter="fade">
+                                      <p:cBhvr>
+                                        <p:cTn id="27" dur="450"/>
+                                        <p:tgtEl>
+                                          <p:spTgt spid="6"/>
+                                        </p:tgtEl>
+                                      </p:cBhvr>
+                                    </p:animEffect>
+                                    <p:anim calcmode="lin" valueType="num">
+                                      <p:cBhvr additive="base">
+                                        <p:cTn id="28" dur="450" fill="hold"/>
+                                        <p:tgtEl>
+                                          <p:spTgt spid="6"/>
+                                        </p:tgtEl>
+                                        <p:attrNameLst>
+                                          <p:attrName>ppt_y</p:attrName>
+                                        </p:attrNameLst>
+                                      </p:cBhvr>
+                                      <p:tavLst>
+                                        <p:tav tm="0">
+                                          <p:val>
+                                            <p:strVal val="#ppt_y+0.025"/>
+                                          </p:val>
+                                        </p:tav>
+                                        <p:tav tm="100000">
+                                          <p:val>
+                                            <p:strVal val="#ppt_y"/>
+                                          </p:val>
+                                        </p:tav>
+                                      </p:tavLst>
+                                    </p:anim>
+                                  </p:childTnLst>
+                                </p:cTn>
+                              </p:par>
+                              <p:par>
+                                <p:cTn id="29" presetID="10" presetClass="entr" presetSubtype="0" fill="hold" grpId="0" nodeType="withEffect">
+                                  <p:stCondLst>
+                                    <p:cond delay="960"/>
+                                  </p:stCondLst>
+                                  <p:childTnLst>
+                                    <p:set>
+                                      <p:cBhvr>
+                                        <p:cTn id="30" dur="1" fill="hold">
+                                          <p:stCondLst>
+                                            <p:cond delay="0"/>
+                                          </p:stCondLst>
+                                        </p:cTn>
+                                        <p:tgtEl>
+                                          <p:spTgt spid="8"/>
+                                        </p:tgtEl>
+                                        <p:attrNameLst>
+                                          <p:attrName>style.visibility</p:attrName>
+                                        </p:attrNameLst>
+                                      </p:cBhvr>
+                                      <p:to>
+                                        <p:strVal val="visible"/>
+                                      </p:to>
+                                    </p:set>
+                                    <p:animEffect transition="in" filter="fade">
+                                      <p:cBhvr>
+                                        <p:cTn id="31" dur="450"/>
+                                        <p:tgtEl>
+                                          <p:spTgt spid="8"/>
+                                        </p:tgtEl>
+                                      </p:cBhvr>
+                                    </p:animEffect>
+                                    <p:anim calcmode="lin" valueType="num">
+                                      <p:cBhvr additive="base">
+                                        <p:cTn id="32" dur="450" fill="hold"/>
+                                        <p:tgtEl>
+                                          <p:spTgt spid="8"/>
+                                        </p:tgtEl>
+                                        <p:attrNameLst>
+                                          <p:attrName>ppt_y</p:attrName>
+                                        </p:attrNameLst>
+                                      </p:cBhvr>
+                                      <p:tavLst>
+                                        <p:tav tm="0">
+                                          <p:val>
+                                            <p:strVal val="#ppt_y+0.025"/>
+                                          </p:val>
+                                        </p:tav>
+                                        <p:tav tm="100000">
+                                          <p:val>
+                                            <p:strVal val="#ppt_y"/>
+                                          </p:val>
+                                        </p:tav>
+                                      </p:tavLst>
+                                    </p:anim>
+                                  </p:childTnLst>
+                                </p:cTn>
+                              </p:par>
+                            </p:childTnLst>
+                          </p:cTn>
+                        </p:par>
+                      </p:childTnLst>
+                    </p:cTn>
+                  </p:par>
+                </p:childTnLst>
+              </p:cTn>
+              <p:prevCondLst>
+                <p:cond evt="onPrev" delay="0">
+                  <p:tgtEl>
+                    <p:sldTgt/>
+                  </p:tgtEl>
+                </p:cond>
+              </p:prevCondLst>
+              <p:nextCondLst>
+                <p:cond evt="onNext" delay="0">
+                  <p:tgtEl>
+                    <p:sldTgt/>
+                  </p:tgtEl>
+                </p:cond>
+              </p:nextCondLst>
+            </p:seq>
+          </p:childTnLst>
+        </p:cTn>
+      </p:par>
+    </p:tnLst>
+    <p:bldLst>
+      <p:bldP spid="2" grpId="0"/>
+      <p:bldP spid="3" grpId="0"/>
+      <p:bldP spid="5" grpId="0"/>
+      <p:bldP spid="7" grpId="0"/>
+      <p:bldP spid="4" grpId="0"/>
+      <p:bldP spid="6" grpId="0"/>
+      <p:bldP spid="8" grpId="0"/>
+    </p:bldLst>
+  </p:timing>
 </p:sld>
 </file>
 
@@ -3257,6 +4251,1178 @@
   <p:clrMapOvr>
     <a:masterClrMapping/>
   </p:clrMapOvr>
+  <p:transition xmlns:p14="http://schemas.microsoft.com/office/powerpoint/2010/main" spd="slow" p14:dur="700">
+    <p:fade/>
+  </p:transition>
+  <p:timing xmlns:p="http://schemas.openxmlformats.org/presentationml/2006/main">
+    <p:tnLst>
+      <p:par>
+        <p:cTn id="1" dur="indefinite" restart="never" nodeType="tmRoot">
+          <p:childTnLst>
+            <p:seq concurrent="1" nextAc="seek">
+              <p:cTn id="2" dur="indefinite" nodeType="mainSeq">
+                <p:childTnLst>
+                  <p:par>
+                    <p:cTn id="3" fill="hold">
+                      <p:stCondLst>
+                        <p:cond delay="indefinite"/>
+                        <p:cond evt="onBegin" delay="0">
+                          <p:tn val="2"/>
+                        </p:cond>
+                      </p:stCondLst>
+                      <p:childTnLst>
+                        <p:par>
+                          <p:cTn id="4" fill="hold">
+                            <p:stCondLst>
+                              <p:cond delay="0"/>
+                            </p:stCondLst>
+                            <p:childTnLst>
+                              <p:par>
+                                <p:cTn id="5" presetID="10" presetClass="entr" presetSubtype="0" fill="hold" grpId="0" nodeType="withEffect">
+                                  <p:stCondLst>
+                                    <p:cond delay="0"/>
+                                  </p:stCondLst>
+                                  <p:childTnLst>
+                                    <p:set>
+                                      <p:cBhvr>
+                                        <p:cTn id="6" dur="1" fill="hold">
+                                          <p:stCondLst>
+                                            <p:cond delay="0"/>
+                                          </p:stCondLst>
+                                        </p:cTn>
+                                        <p:tgtEl>
+                                          <p:spTgt spid="2"/>
+                                        </p:tgtEl>
+                                        <p:attrNameLst>
+                                          <p:attrName>style.visibility</p:attrName>
+                                        </p:attrNameLst>
+                                      </p:cBhvr>
+                                      <p:to>
+                                        <p:strVal val="visible"/>
+                                      </p:to>
+                                    </p:set>
+                                    <p:animEffect transition="in" filter="fade">
+                                      <p:cBhvr>
+                                        <p:cTn id="7" dur="450"/>
+                                        <p:tgtEl>
+                                          <p:spTgt spid="2"/>
+                                        </p:tgtEl>
+                                      </p:cBhvr>
+                                    </p:animEffect>
+                                    <p:anim calcmode="lin" valueType="num">
+                                      <p:cBhvr additive="base">
+                                        <p:cTn id="8" dur="450" fill="hold"/>
+                                        <p:tgtEl>
+                                          <p:spTgt spid="2"/>
+                                        </p:tgtEl>
+                                        <p:attrNameLst>
+                                          <p:attrName>ppt_y</p:attrName>
+                                        </p:attrNameLst>
+                                      </p:cBhvr>
+                                      <p:tavLst>
+                                        <p:tav tm="0">
+                                          <p:val>
+                                            <p:strVal val="#ppt_y+0.025"/>
+                                          </p:val>
+                                        </p:tav>
+                                        <p:tav tm="100000">
+                                          <p:val>
+                                            <p:strVal val="#ppt_y"/>
+                                          </p:val>
+                                        </p:tav>
+                                      </p:tavLst>
+                                    </p:anim>
+                                  </p:childTnLst>
+                                </p:cTn>
+                              </p:par>
+                              <p:par>
+                                <p:cTn id="9" presetID="10" presetClass="entr" presetSubtype="0" fill="hold" grpId="0" nodeType="withEffect">
+                                  <p:stCondLst>
+                                    <p:cond delay="61"/>
+                                  </p:stCondLst>
+                                  <p:childTnLst>
+                                    <p:set>
+                                      <p:cBhvr>
+                                        <p:cTn id="10" dur="1" fill="hold">
+                                          <p:stCondLst>
+                                            <p:cond delay="0"/>
+                                          </p:stCondLst>
+                                        </p:cTn>
+                                        <p:tgtEl>
+                                          <p:spTgt spid="3"/>
+                                        </p:tgtEl>
+                                        <p:attrNameLst>
+                                          <p:attrName>style.visibility</p:attrName>
+                                        </p:attrNameLst>
+                                      </p:cBhvr>
+                                      <p:to>
+                                        <p:strVal val="visible"/>
+                                      </p:to>
+                                    </p:set>
+                                    <p:animEffect transition="in" filter="fade">
+                                      <p:cBhvr>
+                                        <p:cTn id="11" dur="450"/>
+                                        <p:tgtEl>
+                                          <p:spTgt spid="3"/>
+                                        </p:tgtEl>
+                                      </p:cBhvr>
+                                    </p:animEffect>
+                                    <p:anim calcmode="lin" valueType="num">
+                                      <p:cBhvr additive="base">
+                                        <p:cTn id="12" dur="450" fill="hold"/>
+                                        <p:tgtEl>
+                                          <p:spTgt spid="3"/>
+                                        </p:tgtEl>
+                                        <p:attrNameLst>
+                                          <p:attrName>ppt_y</p:attrName>
+                                        </p:attrNameLst>
+                                      </p:cBhvr>
+                                      <p:tavLst>
+                                        <p:tav tm="0">
+                                          <p:val>
+                                            <p:strVal val="#ppt_y+0.025"/>
+                                          </p:val>
+                                        </p:tav>
+                                        <p:tav tm="100000">
+                                          <p:val>
+                                            <p:strVal val="#ppt_y"/>
+                                          </p:val>
+                                        </p:tav>
+                                      </p:tavLst>
+                                    </p:anim>
+                                  </p:childTnLst>
+                                </p:cTn>
+                              </p:par>
+                              <p:par>
+                                <p:cTn id="13" presetID="10" presetClass="entr" presetSubtype="0" fill="hold" grpId="0" nodeType="withEffect">
+                                  <p:stCondLst>
+                                    <p:cond delay="122"/>
+                                  </p:stCondLst>
+                                  <p:childTnLst>
+                                    <p:set>
+                                      <p:cBhvr>
+                                        <p:cTn id="14" dur="1" fill="hold">
+                                          <p:stCondLst>
+                                            <p:cond delay="0"/>
+                                          </p:stCondLst>
+                                        </p:cTn>
+                                        <p:tgtEl>
+                                          <p:spTgt spid="6"/>
+                                        </p:tgtEl>
+                                        <p:attrNameLst>
+                                          <p:attrName>style.visibility</p:attrName>
+                                        </p:attrNameLst>
+                                      </p:cBhvr>
+                                      <p:to>
+                                        <p:strVal val="visible"/>
+                                      </p:to>
+                                    </p:set>
+                                    <p:animEffect transition="in" filter="fade">
+                                      <p:cBhvr>
+                                        <p:cTn id="15" dur="450"/>
+                                        <p:tgtEl>
+                                          <p:spTgt spid="6"/>
+                                        </p:tgtEl>
+                                      </p:cBhvr>
+                                    </p:animEffect>
+                                    <p:anim calcmode="lin" valueType="num">
+                                      <p:cBhvr additive="base">
+                                        <p:cTn id="16" dur="450" fill="hold"/>
+                                        <p:tgtEl>
+                                          <p:spTgt spid="6"/>
+                                        </p:tgtEl>
+                                        <p:attrNameLst>
+                                          <p:attrName>ppt_y</p:attrName>
+                                        </p:attrNameLst>
+                                      </p:cBhvr>
+                                      <p:tavLst>
+                                        <p:tav tm="0">
+                                          <p:val>
+                                            <p:strVal val="#ppt_y+0.025"/>
+                                          </p:val>
+                                        </p:tav>
+                                        <p:tav tm="100000">
+                                          <p:val>
+                                            <p:strVal val="#ppt_y"/>
+                                          </p:val>
+                                        </p:tav>
+                                      </p:tavLst>
+                                    </p:anim>
+                                  </p:childTnLst>
+                                </p:cTn>
+                              </p:par>
+                              <p:par>
+                                <p:cTn id="17" presetID="10" presetClass="entr" presetSubtype="0" fill="hold" grpId="0" nodeType="withEffect">
+                                  <p:stCondLst>
+                                    <p:cond delay="183"/>
+                                  </p:stCondLst>
+                                  <p:childTnLst>
+                                    <p:set>
+                                      <p:cBhvr>
+                                        <p:cTn id="18" dur="1" fill="hold">
+                                          <p:stCondLst>
+                                            <p:cond delay="0"/>
+                                          </p:stCondLst>
+                                        </p:cTn>
+                                        <p:tgtEl>
+                                          <p:spTgt spid="10"/>
+                                        </p:tgtEl>
+                                        <p:attrNameLst>
+                                          <p:attrName>style.visibility</p:attrName>
+                                        </p:attrNameLst>
+                                      </p:cBhvr>
+                                      <p:to>
+                                        <p:strVal val="visible"/>
+                                      </p:to>
+                                    </p:set>
+                                    <p:animEffect transition="in" filter="fade">
+                                      <p:cBhvr>
+                                        <p:cTn id="19" dur="450"/>
+                                        <p:tgtEl>
+                                          <p:spTgt spid="10"/>
+                                        </p:tgtEl>
+                                      </p:cBhvr>
+                                    </p:animEffect>
+                                    <p:anim calcmode="lin" valueType="num">
+                                      <p:cBhvr additive="base">
+                                        <p:cTn id="20" dur="450" fill="hold"/>
+                                        <p:tgtEl>
+                                          <p:spTgt spid="10"/>
+                                        </p:tgtEl>
+                                        <p:attrNameLst>
+                                          <p:attrName>ppt_y</p:attrName>
+                                        </p:attrNameLst>
+                                      </p:cBhvr>
+                                      <p:tavLst>
+                                        <p:tav tm="0">
+                                          <p:val>
+                                            <p:strVal val="#ppt_y+0.025"/>
+                                          </p:val>
+                                        </p:tav>
+                                        <p:tav tm="100000">
+                                          <p:val>
+                                            <p:strVal val="#ppt_y"/>
+                                          </p:val>
+                                        </p:tav>
+                                      </p:tavLst>
+                                    </p:anim>
+                                  </p:childTnLst>
+                                </p:cTn>
+                              </p:par>
+                              <p:par>
+                                <p:cTn id="21" presetID="10" presetClass="entr" presetSubtype="0" fill="hold" grpId="0" nodeType="withEffect">
+                                  <p:stCondLst>
+                                    <p:cond delay="244"/>
+                                  </p:stCondLst>
+                                  <p:childTnLst>
+                                    <p:set>
+                                      <p:cBhvr>
+                                        <p:cTn id="22" dur="1" fill="hold">
+                                          <p:stCondLst>
+                                            <p:cond delay="0"/>
+                                          </p:stCondLst>
+                                        </p:cTn>
+                                        <p:tgtEl>
+                                          <p:spTgt spid="14"/>
+                                        </p:tgtEl>
+                                        <p:attrNameLst>
+                                          <p:attrName>style.visibility</p:attrName>
+                                        </p:attrNameLst>
+                                      </p:cBhvr>
+                                      <p:to>
+                                        <p:strVal val="visible"/>
+                                      </p:to>
+                                    </p:set>
+                                    <p:animEffect transition="in" filter="fade">
+                                      <p:cBhvr>
+                                        <p:cTn id="23" dur="450"/>
+                                        <p:tgtEl>
+                                          <p:spTgt spid="14"/>
+                                        </p:tgtEl>
+                                      </p:cBhvr>
+                                    </p:animEffect>
+                                    <p:anim calcmode="lin" valueType="num">
+                                      <p:cBhvr additive="base">
+                                        <p:cTn id="24" dur="450" fill="hold"/>
+                                        <p:tgtEl>
+                                          <p:spTgt spid="14"/>
+                                        </p:tgtEl>
+                                        <p:attrNameLst>
+                                          <p:attrName>ppt_y</p:attrName>
+                                        </p:attrNameLst>
+                                      </p:cBhvr>
+                                      <p:tavLst>
+                                        <p:tav tm="0">
+                                          <p:val>
+                                            <p:strVal val="#ppt_y+0.025"/>
+                                          </p:val>
+                                        </p:tav>
+                                        <p:tav tm="100000">
+                                          <p:val>
+                                            <p:strVal val="#ppt_y"/>
+                                          </p:val>
+                                        </p:tav>
+                                      </p:tavLst>
+                                    </p:anim>
+                                  </p:childTnLst>
+                                </p:cTn>
+                              </p:par>
+                              <p:par>
+                                <p:cTn id="25" presetID="10" presetClass="entr" presetSubtype="0" fill="hold" grpId="0" nodeType="withEffect">
+                                  <p:stCondLst>
+                                    <p:cond delay="305"/>
+                                  </p:stCondLst>
+                                  <p:childTnLst>
+                                    <p:set>
+                                      <p:cBhvr>
+                                        <p:cTn id="26" dur="1" fill="hold">
+                                          <p:stCondLst>
+                                            <p:cond delay="0"/>
+                                          </p:stCondLst>
+                                        </p:cTn>
+                                        <p:tgtEl>
+                                          <p:spTgt spid="18"/>
+                                        </p:tgtEl>
+                                        <p:attrNameLst>
+                                          <p:attrName>style.visibility</p:attrName>
+                                        </p:attrNameLst>
+                                      </p:cBhvr>
+                                      <p:to>
+                                        <p:strVal val="visible"/>
+                                      </p:to>
+                                    </p:set>
+                                    <p:animEffect transition="in" filter="fade">
+                                      <p:cBhvr>
+                                        <p:cTn id="27" dur="450"/>
+                                        <p:tgtEl>
+                                          <p:spTgt spid="18"/>
+                                        </p:tgtEl>
+                                      </p:cBhvr>
+                                    </p:animEffect>
+                                    <p:anim calcmode="lin" valueType="num">
+                                      <p:cBhvr additive="base">
+                                        <p:cTn id="28" dur="450" fill="hold"/>
+                                        <p:tgtEl>
+                                          <p:spTgt spid="18"/>
+                                        </p:tgtEl>
+                                        <p:attrNameLst>
+                                          <p:attrName>ppt_y</p:attrName>
+                                        </p:attrNameLst>
+                                      </p:cBhvr>
+                                      <p:tavLst>
+                                        <p:tav tm="0">
+                                          <p:val>
+                                            <p:strVal val="#ppt_y+0.025"/>
+                                          </p:val>
+                                        </p:tav>
+                                        <p:tav tm="100000">
+                                          <p:val>
+                                            <p:strVal val="#ppt_y"/>
+                                          </p:val>
+                                        </p:tav>
+                                      </p:tavLst>
+                                    </p:anim>
+                                  </p:childTnLst>
+                                </p:cTn>
+                              </p:par>
+                              <p:par>
+                                <p:cTn id="29" presetID="10" presetClass="entr" presetSubtype="0" fill="hold" grpId="0" nodeType="withEffect">
+                                  <p:stCondLst>
+                                    <p:cond delay="366"/>
+                                  </p:stCondLst>
+                                  <p:childTnLst>
+                                    <p:set>
+                                      <p:cBhvr>
+                                        <p:cTn id="30" dur="1" fill="hold">
+                                          <p:stCondLst>
+                                            <p:cond delay="0"/>
+                                          </p:stCondLst>
+                                        </p:cTn>
+                                        <p:tgtEl>
+                                          <p:spTgt spid="17"/>
+                                        </p:tgtEl>
+                                        <p:attrNameLst>
+                                          <p:attrName>style.visibility</p:attrName>
+                                        </p:attrNameLst>
+                                      </p:cBhvr>
+                                      <p:to>
+                                        <p:strVal val="visible"/>
+                                      </p:to>
+                                    </p:set>
+                                    <p:animEffect transition="in" filter="fade">
+                                      <p:cBhvr>
+                                        <p:cTn id="31" dur="450"/>
+                                        <p:tgtEl>
+                                          <p:spTgt spid="17"/>
+                                        </p:tgtEl>
+                                      </p:cBhvr>
+                                    </p:animEffect>
+                                    <p:anim calcmode="lin" valueType="num">
+                                      <p:cBhvr additive="base">
+                                        <p:cTn id="32" dur="450" fill="hold"/>
+                                        <p:tgtEl>
+                                          <p:spTgt spid="17"/>
+                                        </p:tgtEl>
+                                        <p:attrNameLst>
+                                          <p:attrName>ppt_y</p:attrName>
+                                        </p:attrNameLst>
+                                      </p:cBhvr>
+                                      <p:tavLst>
+                                        <p:tav tm="0">
+                                          <p:val>
+                                            <p:strVal val="#ppt_y+0.025"/>
+                                          </p:val>
+                                        </p:tav>
+                                        <p:tav tm="100000">
+                                          <p:val>
+                                            <p:strVal val="#ppt_y"/>
+                                          </p:val>
+                                        </p:tav>
+                                      </p:tavLst>
+                                    </p:anim>
+                                  </p:childTnLst>
+                                </p:cTn>
+                              </p:par>
+                              <p:par>
+                                <p:cTn id="33" presetID="10" presetClass="entr" presetSubtype="0" fill="hold" grpId="0" nodeType="withEffect">
+                                  <p:stCondLst>
+                                    <p:cond delay="427"/>
+                                  </p:stCondLst>
+                                  <p:childTnLst>
+                                    <p:set>
+                                      <p:cBhvr>
+                                        <p:cTn id="34" dur="1" fill="hold">
+                                          <p:stCondLst>
+                                            <p:cond delay="0"/>
+                                          </p:stCondLst>
+                                        </p:cTn>
+                                        <p:tgtEl>
+                                          <p:spTgt spid="5"/>
+                                        </p:tgtEl>
+                                        <p:attrNameLst>
+                                          <p:attrName>style.visibility</p:attrName>
+                                        </p:attrNameLst>
+                                      </p:cBhvr>
+                                      <p:to>
+                                        <p:strVal val="visible"/>
+                                      </p:to>
+                                    </p:set>
+                                    <p:animEffect transition="in" filter="fade">
+                                      <p:cBhvr>
+                                        <p:cTn id="35" dur="450"/>
+                                        <p:tgtEl>
+                                          <p:spTgt spid="5"/>
+                                        </p:tgtEl>
+                                      </p:cBhvr>
+                                    </p:animEffect>
+                                    <p:anim calcmode="lin" valueType="num">
+                                      <p:cBhvr additive="base">
+                                        <p:cTn id="36" dur="450" fill="hold"/>
+                                        <p:tgtEl>
+                                          <p:spTgt spid="5"/>
+                                        </p:tgtEl>
+                                        <p:attrNameLst>
+                                          <p:attrName>ppt_y</p:attrName>
+                                        </p:attrNameLst>
+                                      </p:cBhvr>
+                                      <p:tavLst>
+                                        <p:tav tm="0">
+                                          <p:val>
+                                            <p:strVal val="#ppt_y+0.025"/>
+                                          </p:val>
+                                        </p:tav>
+                                        <p:tav tm="100000">
+                                          <p:val>
+                                            <p:strVal val="#ppt_y"/>
+                                          </p:val>
+                                        </p:tav>
+                                      </p:tavLst>
+                                    </p:anim>
+                                  </p:childTnLst>
+                                </p:cTn>
+                              </p:par>
+                              <p:par>
+                                <p:cTn id="37" presetID="10" presetClass="entr" presetSubtype="0" fill="hold" grpId="0" nodeType="withEffect">
+                                  <p:stCondLst>
+                                    <p:cond delay="488"/>
+                                  </p:stCondLst>
+                                  <p:childTnLst>
+                                    <p:set>
+                                      <p:cBhvr>
+                                        <p:cTn id="38" dur="1" fill="hold">
+                                          <p:stCondLst>
+                                            <p:cond delay="0"/>
+                                          </p:stCondLst>
+                                        </p:cTn>
+                                        <p:tgtEl>
+                                          <p:spTgt spid="9"/>
+                                        </p:tgtEl>
+                                        <p:attrNameLst>
+                                          <p:attrName>style.visibility</p:attrName>
+                                        </p:attrNameLst>
+                                      </p:cBhvr>
+                                      <p:to>
+                                        <p:strVal val="visible"/>
+                                      </p:to>
+                                    </p:set>
+                                    <p:animEffect transition="in" filter="fade">
+                                      <p:cBhvr>
+                                        <p:cTn id="39" dur="450"/>
+                                        <p:tgtEl>
+                                          <p:spTgt spid="9"/>
+                                        </p:tgtEl>
+                                      </p:cBhvr>
+                                    </p:animEffect>
+                                    <p:anim calcmode="lin" valueType="num">
+                                      <p:cBhvr additive="base">
+                                        <p:cTn id="40" dur="450" fill="hold"/>
+                                        <p:tgtEl>
+                                          <p:spTgt spid="9"/>
+                                        </p:tgtEl>
+                                        <p:attrNameLst>
+                                          <p:attrName>ppt_y</p:attrName>
+                                        </p:attrNameLst>
+                                      </p:cBhvr>
+                                      <p:tavLst>
+                                        <p:tav tm="0">
+                                          <p:val>
+                                            <p:strVal val="#ppt_y+0.025"/>
+                                          </p:val>
+                                        </p:tav>
+                                        <p:tav tm="100000">
+                                          <p:val>
+                                            <p:strVal val="#ppt_y"/>
+                                          </p:val>
+                                        </p:tav>
+                                      </p:tavLst>
+                                    </p:anim>
+                                  </p:childTnLst>
+                                </p:cTn>
+                              </p:par>
+                              <p:par>
+                                <p:cTn id="41" presetID="10" presetClass="entr" presetSubtype="0" fill="hold" grpId="0" nodeType="withEffect">
+                                  <p:stCondLst>
+                                    <p:cond delay="549"/>
+                                  </p:stCondLst>
+                                  <p:childTnLst>
+                                    <p:set>
+                                      <p:cBhvr>
+                                        <p:cTn id="42" dur="1" fill="hold">
+                                          <p:stCondLst>
+                                            <p:cond delay="0"/>
+                                          </p:stCondLst>
+                                        </p:cTn>
+                                        <p:tgtEl>
+                                          <p:spTgt spid="13"/>
+                                        </p:tgtEl>
+                                        <p:attrNameLst>
+                                          <p:attrName>style.visibility</p:attrName>
+                                        </p:attrNameLst>
+                                      </p:cBhvr>
+                                      <p:to>
+                                        <p:strVal val="visible"/>
+                                      </p:to>
+                                    </p:set>
+                                    <p:animEffect transition="in" filter="fade">
+                                      <p:cBhvr>
+                                        <p:cTn id="43" dur="450"/>
+                                        <p:tgtEl>
+                                          <p:spTgt spid="13"/>
+                                        </p:tgtEl>
+                                      </p:cBhvr>
+                                    </p:animEffect>
+                                    <p:anim calcmode="lin" valueType="num">
+                                      <p:cBhvr additive="base">
+                                        <p:cTn id="44" dur="450" fill="hold"/>
+                                        <p:tgtEl>
+                                          <p:spTgt spid="13"/>
+                                        </p:tgtEl>
+                                        <p:attrNameLst>
+                                          <p:attrName>ppt_y</p:attrName>
+                                        </p:attrNameLst>
+                                      </p:cBhvr>
+                                      <p:tavLst>
+                                        <p:tav tm="0">
+                                          <p:val>
+                                            <p:strVal val="#ppt_y+0.025"/>
+                                          </p:val>
+                                        </p:tav>
+                                        <p:tav tm="100000">
+                                          <p:val>
+                                            <p:strVal val="#ppt_y"/>
+                                          </p:val>
+                                        </p:tav>
+                                      </p:tavLst>
+                                    </p:anim>
+                                  </p:childTnLst>
+                                </p:cTn>
+                              </p:par>
+                              <p:par>
+                                <p:cTn id="45" presetID="10" presetClass="entr" presetSubtype="0" fill="hold" grpId="0" nodeType="withEffect">
+                                  <p:stCondLst>
+                                    <p:cond delay="610"/>
+                                  </p:stCondLst>
+                                  <p:childTnLst>
+                                    <p:set>
+                                      <p:cBhvr>
+                                        <p:cTn id="46" dur="1" fill="hold">
+                                          <p:stCondLst>
+                                            <p:cond delay="0"/>
+                                          </p:stCondLst>
+                                        </p:cTn>
+                                        <p:tgtEl>
+                                          <p:spTgt spid="4"/>
+                                        </p:tgtEl>
+                                        <p:attrNameLst>
+                                          <p:attrName>style.visibility</p:attrName>
+                                        </p:attrNameLst>
+                                      </p:cBhvr>
+                                      <p:to>
+                                        <p:strVal val="visible"/>
+                                      </p:to>
+                                    </p:set>
+                                    <p:animEffect transition="in" filter="fade">
+                                      <p:cBhvr>
+                                        <p:cTn id="47" dur="450"/>
+                                        <p:tgtEl>
+                                          <p:spTgt spid="4"/>
+                                        </p:tgtEl>
+                                      </p:cBhvr>
+                                    </p:animEffect>
+                                    <p:anim calcmode="lin" valueType="num">
+                                      <p:cBhvr additive="base">
+                                        <p:cTn id="48" dur="450" fill="hold"/>
+                                        <p:tgtEl>
+                                          <p:spTgt spid="4"/>
+                                        </p:tgtEl>
+                                        <p:attrNameLst>
+                                          <p:attrName>ppt_y</p:attrName>
+                                        </p:attrNameLst>
+                                      </p:cBhvr>
+                                      <p:tavLst>
+                                        <p:tav tm="0">
+                                          <p:val>
+                                            <p:strVal val="#ppt_y+0.025"/>
+                                          </p:val>
+                                        </p:tav>
+                                        <p:tav tm="100000">
+                                          <p:val>
+                                            <p:strVal val="#ppt_y"/>
+                                          </p:val>
+                                        </p:tav>
+                                      </p:tavLst>
+                                    </p:anim>
+                                  </p:childTnLst>
+                                </p:cTn>
+                              </p:par>
+                              <p:par>
+                                <p:cTn id="49" presetID="10" presetClass="entr" presetSubtype="0" fill="hold" grpId="0" nodeType="withEffect">
+                                  <p:stCondLst>
+                                    <p:cond delay="671"/>
+                                  </p:stCondLst>
+                                  <p:childTnLst>
+                                    <p:set>
+                                      <p:cBhvr>
+                                        <p:cTn id="50" dur="1" fill="hold">
+                                          <p:stCondLst>
+                                            <p:cond delay="0"/>
+                                          </p:stCondLst>
+                                        </p:cTn>
+                                        <p:tgtEl>
+                                          <p:spTgt spid="7"/>
+                                        </p:tgtEl>
+                                        <p:attrNameLst>
+                                          <p:attrName>style.visibility</p:attrName>
+                                        </p:attrNameLst>
+                                      </p:cBhvr>
+                                      <p:to>
+                                        <p:strVal val="visible"/>
+                                      </p:to>
+                                    </p:set>
+                                    <p:animEffect transition="in" filter="fade">
+                                      <p:cBhvr>
+                                        <p:cTn id="51" dur="450"/>
+                                        <p:tgtEl>
+                                          <p:spTgt spid="7"/>
+                                        </p:tgtEl>
+                                      </p:cBhvr>
+                                    </p:animEffect>
+                                    <p:anim calcmode="lin" valueType="num">
+                                      <p:cBhvr additive="base">
+                                        <p:cTn id="52" dur="450" fill="hold"/>
+                                        <p:tgtEl>
+                                          <p:spTgt spid="7"/>
+                                        </p:tgtEl>
+                                        <p:attrNameLst>
+                                          <p:attrName>ppt_y</p:attrName>
+                                        </p:attrNameLst>
+                                      </p:cBhvr>
+                                      <p:tavLst>
+                                        <p:tav tm="0">
+                                          <p:val>
+                                            <p:strVal val="#ppt_y+0.025"/>
+                                          </p:val>
+                                        </p:tav>
+                                        <p:tav tm="100000">
+                                          <p:val>
+                                            <p:strVal val="#ppt_y"/>
+                                          </p:val>
+                                        </p:tav>
+                                      </p:tavLst>
+                                    </p:anim>
+                                  </p:childTnLst>
+                                </p:cTn>
+                              </p:par>
+                              <p:par>
+                                <p:cTn id="53" presetID="10" presetClass="entr" presetSubtype="0" fill="hold" grpId="0" nodeType="withEffect">
+                                  <p:stCondLst>
+                                    <p:cond delay="732"/>
+                                  </p:stCondLst>
+                                  <p:childTnLst>
+                                    <p:set>
+                                      <p:cBhvr>
+                                        <p:cTn id="54" dur="1" fill="hold">
+                                          <p:stCondLst>
+                                            <p:cond delay="0"/>
+                                          </p:stCondLst>
+                                        </p:cTn>
+                                        <p:tgtEl>
+                                          <p:spTgt spid="11"/>
+                                        </p:tgtEl>
+                                        <p:attrNameLst>
+                                          <p:attrName>style.visibility</p:attrName>
+                                        </p:attrNameLst>
+                                      </p:cBhvr>
+                                      <p:to>
+                                        <p:strVal val="visible"/>
+                                      </p:to>
+                                    </p:set>
+                                    <p:animEffect transition="in" filter="fade">
+                                      <p:cBhvr>
+                                        <p:cTn id="55" dur="450"/>
+                                        <p:tgtEl>
+                                          <p:spTgt spid="11"/>
+                                        </p:tgtEl>
+                                      </p:cBhvr>
+                                    </p:animEffect>
+                                    <p:anim calcmode="lin" valueType="num">
+                                      <p:cBhvr additive="base">
+                                        <p:cTn id="56" dur="450" fill="hold"/>
+                                        <p:tgtEl>
+                                          <p:spTgt spid="11"/>
+                                        </p:tgtEl>
+                                        <p:attrNameLst>
+                                          <p:attrName>ppt_y</p:attrName>
+                                        </p:attrNameLst>
+                                      </p:cBhvr>
+                                      <p:tavLst>
+                                        <p:tav tm="0">
+                                          <p:val>
+                                            <p:strVal val="#ppt_y+0.025"/>
+                                          </p:val>
+                                        </p:tav>
+                                        <p:tav tm="100000">
+                                          <p:val>
+                                            <p:strVal val="#ppt_y"/>
+                                          </p:val>
+                                        </p:tav>
+                                      </p:tavLst>
+                                    </p:anim>
+                                  </p:childTnLst>
+                                </p:cTn>
+                              </p:par>
+                              <p:par>
+                                <p:cTn id="57" presetID="10" presetClass="entr" presetSubtype="0" fill="hold" grpId="0" nodeType="withEffect">
+                                  <p:stCondLst>
+                                    <p:cond delay="793"/>
+                                  </p:stCondLst>
+                                  <p:childTnLst>
+                                    <p:set>
+                                      <p:cBhvr>
+                                        <p:cTn id="58" dur="1" fill="hold">
+                                          <p:stCondLst>
+                                            <p:cond delay="0"/>
+                                          </p:stCondLst>
+                                        </p:cTn>
+                                        <p:tgtEl>
+                                          <p:spTgt spid="15"/>
+                                        </p:tgtEl>
+                                        <p:attrNameLst>
+                                          <p:attrName>style.visibility</p:attrName>
+                                        </p:attrNameLst>
+                                      </p:cBhvr>
+                                      <p:to>
+                                        <p:strVal val="visible"/>
+                                      </p:to>
+                                    </p:set>
+                                    <p:animEffect transition="in" filter="fade">
+                                      <p:cBhvr>
+                                        <p:cTn id="59" dur="450"/>
+                                        <p:tgtEl>
+                                          <p:spTgt spid="15"/>
+                                        </p:tgtEl>
+                                      </p:cBhvr>
+                                    </p:animEffect>
+                                    <p:anim calcmode="lin" valueType="num">
+                                      <p:cBhvr additive="base">
+                                        <p:cTn id="60" dur="450" fill="hold"/>
+                                        <p:tgtEl>
+                                          <p:spTgt spid="15"/>
+                                        </p:tgtEl>
+                                        <p:attrNameLst>
+                                          <p:attrName>ppt_y</p:attrName>
+                                        </p:attrNameLst>
+                                      </p:cBhvr>
+                                      <p:tavLst>
+                                        <p:tav tm="0">
+                                          <p:val>
+                                            <p:strVal val="#ppt_y+0.025"/>
+                                          </p:val>
+                                        </p:tav>
+                                        <p:tav tm="100000">
+                                          <p:val>
+                                            <p:strVal val="#ppt_y"/>
+                                          </p:val>
+                                        </p:tav>
+                                      </p:tavLst>
+                                    </p:anim>
+                                  </p:childTnLst>
+                                </p:cTn>
+                              </p:par>
+                              <p:par>
+                                <p:cTn id="61" presetID="10" presetClass="entr" presetSubtype="0" fill="hold" grpId="0" nodeType="withEffect">
+                                  <p:stCondLst>
+                                    <p:cond delay="854"/>
+                                  </p:stCondLst>
+                                  <p:childTnLst>
+                                    <p:set>
+                                      <p:cBhvr>
+                                        <p:cTn id="62" dur="1" fill="hold">
+                                          <p:stCondLst>
+                                            <p:cond delay="0"/>
+                                          </p:stCondLst>
+                                        </p:cTn>
+                                        <p:tgtEl>
+                                          <p:spTgt spid="19"/>
+                                        </p:tgtEl>
+                                        <p:attrNameLst>
+                                          <p:attrName>style.visibility</p:attrName>
+                                        </p:attrNameLst>
+                                      </p:cBhvr>
+                                      <p:to>
+                                        <p:strVal val="visible"/>
+                                      </p:to>
+                                    </p:set>
+                                    <p:animEffect transition="in" filter="fade">
+                                      <p:cBhvr>
+                                        <p:cTn id="63" dur="450"/>
+                                        <p:tgtEl>
+                                          <p:spTgt spid="19"/>
+                                        </p:tgtEl>
+                                      </p:cBhvr>
+                                    </p:animEffect>
+                                    <p:anim calcmode="lin" valueType="num">
+                                      <p:cBhvr additive="base">
+                                        <p:cTn id="64" dur="450" fill="hold"/>
+                                        <p:tgtEl>
+                                          <p:spTgt spid="19"/>
+                                        </p:tgtEl>
+                                        <p:attrNameLst>
+                                          <p:attrName>ppt_y</p:attrName>
+                                        </p:attrNameLst>
+                                      </p:cBhvr>
+                                      <p:tavLst>
+                                        <p:tav tm="0">
+                                          <p:val>
+                                            <p:strVal val="#ppt_y+0.025"/>
+                                          </p:val>
+                                        </p:tav>
+                                        <p:tav tm="100000">
+                                          <p:val>
+                                            <p:strVal val="#ppt_y"/>
+                                          </p:val>
+                                        </p:tav>
+                                      </p:tavLst>
+                                    </p:anim>
+                                  </p:childTnLst>
+                                </p:cTn>
+                              </p:par>
+                              <p:par>
+                                <p:cTn id="65" presetID="10" presetClass="entr" presetSubtype="0" fill="hold" grpId="0" nodeType="withEffect">
+                                  <p:stCondLst>
+                                    <p:cond delay="915"/>
+                                  </p:stCondLst>
+                                  <p:childTnLst>
+                                    <p:set>
+                                      <p:cBhvr>
+                                        <p:cTn id="66" dur="1" fill="hold">
+                                          <p:stCondLst>
+                                            <p:cond delay="0"/>
+                                          </p:stCondLst>
+                                        </p:cTn>
+                                        <p:tgtEl>
+                                          <p:spTgt spid="8"/>
+                                        </p:tgtEl>
+                                        <p:attrNameLst>
+                                          <p:attrName>style.visibility</p:attrName>
+                                        </p:attrNameLst>
+                                      </p:cBhvr>
+                                      <p:to>
+                                        <p:strVal val="visible"/>
+                                      </p:to>
+                                    </p:set>
+                                    <p:animEffect transition="in" filter="fade">
+                                      <p:cBhvr>
+                                        <p:cTn id="67" dur="450"/>
+                                        <p:tgtEl>
+                                          <p:spTgt spid="8"/>
+                                        </p:tgtEl>
+                                      </p:cBhvr>
+                                    </p:animEffect>
+                                    <p:anim calcmode="lin" valueType="num">
+                                      <p:cBhvr additive="base">
+                                        <p:cTn id="68" dur="450" fill="hold"/>
+                                        <p:tgtEl>
+                                          <p:spTgt spid="8"/>
+                                        </p:tgtEl>
+                                        <p:attrNameLst>
+                                          <p:attrName>ppt_y</p:attrName>
+                                        </p:attrNameLst>
+                                      </p:cBhvr>
+                                      <p:tavLst>
+                                        <p:tav tm="0">
+                                          <p:val>
+                                            <p:strVal val="#ppt_y+0.025"/>
+                                          </p:val>
+                                        </p:tav>
+                                        <p:tav tm="100000">
+                                          <p:val>
+                                            <p:strVal val="#ppt_y"/>
+                                          </p:val>
+                                        </p:tav>
+                                      </p:tavLst>
+                                    </p:anim>
+                                  </p:childTnLst>
+                                </p:cTn>
+                              </p:par>
+                              <p:par>
+                                <p:cTn id="69" presetID="10" presetClass="entr" presetSubtype="0" fill="hold" grpId="0" nodeType="withEffect">
+                                  <p:stCondLst>
+                                    <p:cond delay="976"/>
+                                  </p:stCondLst>
+                                  <p:childTnLst>
+                                    <p:set>
+                                      <p:cBhvr>
+                                        <p:cTn id="70" dur="1" fill="hold">
+                                          <p:stCondLst>
+                                            <p:cond delay="0"/>
+                                          </p:stCondLst>
+                                        </p:cTn>
+                                        <p:tgtEl>
+                                          <p:spTgt spid="12"/>
+                                        </p:tgtEl>
+                                        <p:attrNameLst>
+                                          <p:attrName>style.visibility</p:attrName>
+                                        </p:attrNameLst>
+                                      </p:cBhvr>
+                                      <p:to>
+                                        <p:strVal val="visible"/>
+                                      </p:to>
+                                    </p:set>
+                                    <p:animEffect transition="in" filter="fade">
+                                      <p:cBhvr>
+                                        <p:cTn id="71" dur="450"/>
+                                        <p:tgtEl>
+                                          <p:spTgt spid="12"/>
+                                        </p:tgtEl>
+                                      </p:cBhvr>
+                                    </p:animEffect>
+                                    <p:anim calcmode="lin" valueType="num">
+                                      <p:cBhvr additive="base">
+                                        <p:cTn id="72" dur="450" fill="hold"/>
+                                        <p:tgtEl>
+                                          <p:spTgt spid="12"/>
+                                        </p:tgtEl>
+                                        <p:attrNameLst>
+                                          <p:attrName>ppt_y</p:attrName>
+                                        </p:attrNameLst>
+                                      </p:cBhvr>
+                                      <p:tavLst>
+                                        <p:tav tm="0">
+                                          <p:val>
+                                            <p:strVal val="#ppt_y+0.025"/>
+                                          </p:val>
+                                        </p:tav>
+                                        <p:tav tm="100000">
+                                          <p:val>
+                                            <p:strVal val="#ppt_y"/>
+                                          </p:val>
+                                        </p:tav>
+                                      </p:tavLst>
+                                    </p:anim>
+                                  </p:childTnLst>
+                                </p:cTn>
+                              </p:par>
+                              <p:par>
+                                <p:cTn id="73" presetID="10" presetClass="entr" presetSubtype="0" fill="hold" grpId="0" nodeType="withEffect">
+                                  <p:stCondLst>
+                                    <p:cond delay="1037"/>
+                                  </p:stCondLst>
+                                  <p:childTnLst>
+                                    <p:set>
+                                      <p:cBhvr>
+                                        <p:cTn id="74" dur="1" fill="hold">
+                                          <p:stCondLst>
+                                            <p:cond delay="0"/>
+                                          </p:stCondLst>
+                                        </p:cTn>
+                                        <p:tgtEl>
+                                          <p:spTgt spid="16"/>
+                                        </p:tgtEl>
+                                        <p:attrNameLst>
+                                          <p:attrName>style.visibility</p:attrName>
+                                        </p:attrNameLst>
+                                      </p:cBhvr>
+                                      <p:to>
+                                        <p:strVal val="visible"/>
+                                      </p:to>
+                                    </p:set>
+                                    <p:animEffect transition="in" filter="fade">
+                                      <p:cBhvr>
+                                        <p:cTn id="75" dur="450"/>
+                                        <p:tgtEl>
+                                          <p:spTgt spid="16"/>
+                                        </p:tgtEl>
+                                      </p:cBhvr>
+                                    </p:animEffect>
+                                    <p:anim calcmode="lin" valueType="num">
+                                      <p:cBhvr additive="base">
+                                        <p:cTn id="76" dur="450" fill="hold"/>
+                                        <p:tgtEl>
+                                          <p:spTgt spid="16"/>
+                                        </p:tgtEl>
+                                        <p:attrNameLst>
+                                          <p:attrName>ppt_y</p:attrName>
+                                        </p:attrNameLst>
+                                      </p:cBhvr>
+                                      <p:tavLst>
+                                        <p:tav tm="0">
+                                          <p:val>
+                                            <p:strVal val="#ppt_y+0.025"/>
+                                          </p:val>
+                                        </p:tav>
+                                        <p:tav tm="100000">
+                                          <p:val>
+                                            <p:strVal val="#ppt_y"/>
+                                          </p:val>
+                                        </p:tav>
+                                      </p:tavLst>
+                                    </p:anim>
+                                  </p:childTnLst>
+                                </p:cTn>
+                              </p:par>
+                              <p:par>
+                                <p:cTn id="77" presetID="10" presetClass="entr" presetSubtype="0" fill="hold" grpId="0" nodeType="withEffect">
+                                  <p:stCondLst>
+                                    <p:cond delay="1098"/>
+                                  </p:stCondLst>
+                                  <p:childTnLst>
+                                    <p:set>
+                                      <p:cBhvr>
+                                        <p:cTn id="78" dur="1" fill="hold">
+                                          <p:stCondLst>
+                                            <p:cond delay="0"/>
+                                          </p:stCondLst>
+                                        </p:cTn>
+                                        <p:tgtEl>
+                                          <p:spTgt spid="20"/>
+                                        </p:tgtEl>
+                                        <p:attrNameLst>
+                                          <p:attrName>style.visibility</p:attrName>
+                                        </p:attrNameLst>
+                                      </p:cBhvr>
+                                      <p:to>
+                                        <p:strVal val="visible"/>
+                                      </p:to>
+                                    </p:set>
+                                    <p:animEffect transition="in" filter="fade">
+                                      <p:cBhvr>
+                                        <p:cTn id="79" dur="450"/>
+                                        <p:tgtEl>
+                                          <p:spTgt spid="20"/>
+                                        </p:tgtEl>
+                                      </p:cBhvr>
+                                    </p:animEffect>
+                                    <p:anim calcmode="lin" valueType="num">
+                                      <p:cBhvr additive="base">
+                                        <p:cTn id="80" dur="450" fill="hold"/>
+                                        <p:tgtEl>
+                                          <p:spTgt spid="20"/>
+                                        </p:tgtEl>
+                                        <p:attrNameLst>
+                                          <p:attrName>ppt_y</p:attrName>
+                                        </p:attrNameLst>
+                                      </p:cBhvr>
+                                      <p:tavLst>
+                                        <p:tav tm="0">
+                                          <p:val>
+                                            <p:strVal val="#ppt_y+0.025"/>
+                                          </p:val>
+                                        </p:tav>
+                                        <p:tav tm="100000">
+                                          <p:val>
+                                            <p:strVal val="#ppt_y"/>
+                                          </p:val>
+                                        </p:tav>
+                                      </p:tavLst>
+                                    </p:anim>
+                                  </p:childTnLst>
+                                </p:cTn>
+                              </p:par>
+                            </p:childTnLst>
+                          </p:cTn>
+                        </p:par>
+                      </p:childTnLst>
+                    </p:cTn>
+                  </p:par>
+                </p:childTnLst>
+              </p:cTn>
+              <p:prevCondLst>
+                <p:cond evt="onPrev" delay="0">
+                  <p:tgtEl>
+                    <p:sldTgt/>
+                  </p:tgtEl>
+                </p:cond>
+              </p:prevCondLst>
+              <p:nextCondLst>
+                <p:cond evt="onNext" delay="0">
+                  <p:tgtEl>
+                    <p:sldTgt/>
+                  </p:tgtEl>
+                </p:cond>
+              </p:nextCondLst>
+            </p:seq>
+          </p:childTnLst>
+        </p:cTn>
+      </p:par>
+    </p:tnLst>
+    <p:bldLst>
+      <p:bldP spid="2" grpId="0"/>
+      <p:bldP spid="3" grpId="0"/>
+      <p:bldP spid="6" grpId="0"/>
+      <p:bldP spid="10" grpId="0"/>
+      <p:bldP spid="14" grpId="0"/>
+      <p:bldP spid="18" grpId="0"/>
+      <p:bldP spid="7" grpId="0"/>
+      <p:bldP spid="11" grpId="0"/>
+      <p:bldP spid="15" grpId="0"/>
+      <p:bldP spid="19" grpId="0"/>
+      <p:bldP spid="8" grpId="0"/>
+      <p:bldP spid="12" grpId="0"/>
+      <p:bldP spid="16" grpId="0"/>
+      <p:bldP spid="20" grpId="0"/>
+    </p:bldLst>
+  </p:timing>
 </p:sld>
 </file>
 
@@ -3406,6 +5572,239 @@
   <p:clrMapOvr>
     <a:masterClrMapping/>
   </p:clrMapOvr>
+  <p:transition xmlns:p14="http://schemas.microsoft.com/office/powerpoint/2010/main" spd="slow" p14:dur="700">
+    <p:fade/>
+  </p:transition>
+  <p:timing xmlns:p="http://schemas.openxmlformats.org/presentationml/2006/main">
+    <p:tnLst>
+      <p:par>
+        <p:cTn id="1" dur="indefinite" restart="never" nodeType="tmRoot">
+          <p:childTnLst>
+            <p:seq concurrent="1" nextAc="seek">
+              <p:cTn id="2" dur="indefinite" nodeType="mainSeq">
+                <p:childTnLst>
+                  <p:par>
+                    <p:cTn id="3" fill="hold">
+                      <p:stCondLst>
+                        <p:cond delay="indefinite"/>
+                        <p:cond evt="onBegin" delay="0">
+                          <p:tn val="2"/>
+                        </p:cond>
+                      </p:stCondLst>
+                      <p:childTnLst>
+                        <p:par>
+                          <p:cTn id="4" fill="hold">
+                            <p:stCondLst>
+                              <p:cond delay="0"/>
+                            </p:stCondLst>
+                            <p:childTnLst>
+                              <p:par>
+                                <p:cTn id="5" presetID="10" presetClass="entr" presetSubtype="0" fill="hold" grpId="0" nodeType="withEffect">
+                                  <p:stCondLst>
+                                    <p:cond delay="0"/>
+                                  </p:stCondLst>
+                                  <p:childTnLst>
+                                    <p:set>
+                                      <p:cBhvr>
+                                        <p:cTn id="6" dur="1" fill="hold">
+                                          <p:stCondLst>
+                                            <p:cond delay="0"/>
+                                          </p:stCondLst>
+                                        </p:cTn>
+                                        <p:tgtEl>
+                                          <p:spTgt spid="2"/>
+                                        </p:tgtEl>
+                                        <p:attrNameLst>
+                                          <p:attrName>style.visibility</p:attrName>
+                                        </p:attrNameLst>
+                                      </p:cBhvr>
+                                      <p:to>
+                                        <p:strVal val="visible"/>
+                                      </p:to>
+                                    </p:set>
+                                    <p:animEffect transition="in" filter="fade">
+                                      <p:cBhvr>
+                                        <p:cTn id="7" dur="450"/>
+                                        <p:tgtEl>
+                                          <p:spTgt spid="2"/>
+                                        </p:tgtEl>
+                                      </p:cBhvr>
+                                    </p:animEffect>
+                                    <p:anim calcmode="lin" valueType="num">
+                                      <p:cBhvr additive="base">
+                                        <p:cTn id="8" dur="450" fill="hold"/>
+                                        <p:tgtEl>
+                                          <p:spTgt spid="2"/>
+                                        </p:tgtEl>
+                                        <p:attrNameLst>
+                                          <p:attrName>ppt_y</p:attrName>
+                                        </p:attrNameLst>
+                                      </p:cBhvr>
+                                      <p:tavLst>
+                                        <p:tav tm="0">
+                                          <p:val>
+                                            <p:strVal val="#ppt_y+0.025"/>
+                                          </p:val>
+                                        </p:tav>
+                                        <p:tav tm="100000">
+                                          <p:val>
+                                            <p:strVal val="#ppt_y"/>
+                                          </p:val>
+                                        </p:tav>
+                                      </p:tavLst>
+                                    </p:anim>
+                                  </p:childTnLst>
+                                </p:cTn>
+                              </p:par>
+                              <p:par>
+                                <p:cTn id="9" presetID="10" presetClass="entr" presetSubtype="0" fill="hold" grpId="0" nodeType="withEffect">
+                                  <p:stCondLst>
+                                    <p:cond delay="160"/>
+                                  </p:stCondLst>
+                                  <p:childTnLst>
+                                    <p:set>
+                                      <p:cBhvr>
+                                        <p:cTn id="10" dur="1" fill="hold">
+                                          <p:stCondLst>
+                                            <p:cond delay="0"/>
+                                          </p:stCondLst>
+                                        </p:cTn>
+                                        <p:tgtEl>
+                                          <p:spTgt spid="3"/>
+                                        </p:tgtEl>
+                                        <p:attrNameLst>
+                                          <p:attrName>style.visibility</p:attrName>
+                                        </p:attrNameLst>
+                                      </p:cBhvr>
+                                      <p:to>
+                                        <p:strVal val="visible"/>
+                                      </p:to>
+                                    </p:set>
+                                    <p:animEffect transition="in" filter="fade">
+                                      <p:cBhvr>
+                                        <p:cTn id="11" dur="450"/>
+                                        <p:tgtEl>
+                                          <p:spTgt spid="3"/>
+                                        </p:tgtEl>
+                                      </p:cBhvr>
+                                    </p:animEffect>
+                                    <p:anim calcmode="lin" valueType="num">
+                                      <p:cBhvr additive="base">
+                                        <p:cTn id="12" dur="450" fill="hold"/>
+                                        <p:tgtEl>
+                                          <p:spTgt spid="3"/>
+                                        </p:tgtEl>
+                                        <p:attrNameLst>
+                                          <p:attrName>ppt_y</p:attrName>
+                                        </p:attrNameLst>
+                                      </p:cBhvr>
+                                      <p:tavLst>
+                                        <p:tav tm="0">
+                                          <p:val>
+                                            <p:strVal val="#ppt_y+0.025"/>
+                                          </p:val>
+                                        </p:tav>
+                                        <p:tav tm="100000">
+                                          <p:val>
+                                            <p:strVal val="#ppt_y"/>
+                                          </p:val>
+                                        </p:tav>
+                                      </p:tavLst>
+                                    </p:anim>
+                                  </p:childTnLst>
+                                </p:cTn>
+                              </p:par>
+                              <p:par>
+                                <p:cTn id="13" presetID="10" presetClass="entr" presetSubtype="0" fill="hold" grpId="0" nodeType="withEffect">
+                                  <p:stCondLst>
+                                    <p:cond delay="320"/>
+                                  </p:stCondLst>
+                                  <p:childTnLst>
+                                    <p:set>
+                                      <p:cBhvr>
+                                        <p:cTn id="14" dur="1" fill="hold">
+                                          <p:stCondLst>
+                                            <p:cond delay="0"/>
+                                          </p:stCondLst>
+                                        </p:cTn>
+                                        <p:tgtEl>
+                                          <p:spTgt spid="4"/>
+                                        </p:tgtEl>
+                                        <p:attrNameLst>
+                                          <p:attrName>style.visibility</p:attrName>
+                                        </p:attrNameLst>
+                                      </p:cBhvr>
+                                      <p:to>
+                                        <p:strVal val="visible"/>
+                                      </p:to>
+                                    </p:set>
+                                    <p:animEffect transition="in" filter="fade">
+                                      <p:cBhvr>
+                                        <p:cTn id="15" dur="450"/>
+                                        <p:tgtEl>
+                                          <p:spTgt spid="4"/>
+                                        </p:tgtEl>
+                                      </p:cBhvr>
+                                    </p:animEffect>
+                                    <p:anim calcmode="lin" valueType="num">
+                                      <p:cBhvr additive="base">
+                                        <p:cTn id="16" dur="450" fill="hold"/>
+                                        <p:tgtEl>
+                                          <p:spTgt spid="4"/>
+                                        </p:tgtEl>
+                                        <p:attrNameLst>
+                                          <p:attrName>ppt_y</p:attrName>
+                                        </p:attrNameLst>
+                                      </p:cBhvr>
+                                      <p:tavLst>
+                                        <p:tav tm="0">
+                                          <p:val>
+                                            <p:strVal val="#ppt_y+0.025"/>
+                                          </p:val>
+                                        </p:tav>
+                                        <p:tav tm="100000">
+                                          <p:val>
+                                            <p:strVal val="#ppt_y"/>
+                                          </p:val>
+                                        </p:tav>
+                                      </p:tavLst>
+                                    </p:anim>
+                                  </p:childTnLst>
+                                </p:cTn>
+                              </p:par>
+                            </p:childTnLst>
+                          </p:cTn>
+                        </p:par>
+                      </p:childTnLst>
+                    </p:cTn>
+                  </p:par>
+                </p:childTnLst>
+              </p:cTn>
+              <p:prevCondLst>
+                <p:cond evt="onPrev" delay="0">
+                  <p:tgtEl>
+                    <p:sldTgt/>
+                  </p:tgtEl>
+                </p:cond>
+              </p:prevCondLst>
+              <p:nextCondLst>
+                <p:cond evt="onNext" delay="0">
+                  <p:tgtEl>
+                    <p:sldTgt/>
+                  </p:tgtEl>
+                </p:cond>
+              </p:nextCondLst>
+            </p:seq>
+          </p:childTnLst>
+        </p:cTn>
+      </p:par>
+    </p:tnLst>
+    <p:bldLst>
+      <p:bldP spid="2" grpId="0"/>
+      <p:bldP spid="3" grpId="0"/>
+      <p:bldP spid="4" grpId="0"/>
+    </p:bldLst>
+  </p:timing>
 </p:sld>
 </file>
 
@@ -3480,6 +5879,121 @@
   <p:clrMapOvr>
     <a:masterClrMapping/>
   </p:clrMapOvr>
+  <p:transition xmlns:p14="http://schemas.microsoft.com/office/powerpoint/2010/main" spd="slow" p14:dur="700">
+    <p:fade/>
+  </p:transition>
+  <p:timing xmlns:p="http://schemas.openxmlformats.org/presentationml/2006/main">
+    <p:tnLst>
+      <p:par>
+        <p:cTn id="1" dur="indefinite" restart="never" nodeType="tmRoot">
+          <p:childTnLst>
+            <p:seq concurrent="1" nextAc="seek">
+              <p:cTn id="2" dur="indefinite" nodeType="mainSeq">
+                <p:childTnLst>
+                  <p:par>
+                    <p:cTn id="3" fill="hold">
+                      <p:stCondLst>
+                        <p:cond delay="indefinite"/>
+                        <p:cond evt="onBegin" delay="0">
+                          <p:tn val="2"/>
+                        </p:cond>
+                      </p:stCondLst>
+                      <p:childTnLst>
+                        <p:par>
+                          <p:cTn id="4" fill="hold">
+                            <p:stCondLst>
+                              <p:cond delay="0"/>
+                            </p:stCondLst>
+                            <p:childTnLst>
+                              <p:par>
+                                <p:cTn id="5" presetID="10" presetClass="entr" presetSubtype="0" fill="hold" grpId="0" nodeType="withEffect">
+                                  <p:stCondLst>
+                                    <p:cond delay="0"/>
+                                  </p:stCondLst>
+                                  <p:childTnLst>
+                                    <p:set>
+                                      <p:cBhvr>
+                                        <p:cTn id="6" dur="1" fill="hold">
+                                          <p:stCondLst>
+                                            <p:cond delay="0"/>
+                                          </p:stCondLst>
+                                        </p:cTn>
+                                        <p:tgtEl>
+                                          <p:spTgt spid="2"/>
+                                        </p:tgtEl>
+                                        <p:attrNameLst>
+                                          <p:attrName>style.visibility</p:attrName>
+                                        </p:attrNameLst>
+                                      </p:cBhvr>
+                                      <p:to>
+                                        <p:strVal val="visible"/>
+                                      </p:to>
+                                    </p:set>
+                                    <p:animEffect transition="in" filter="fade">
+                                      <p:cBhvr>
+                                        <p:cTn id="7" dur="450"/>
+                                        <p:tgtEl>
+                                          <p:spTgt spid="2"/>
+                                        </p:tgtEl>
+                                      </p:cBhvr>
+                                    </p:animEffect>
+                                    <p:anim calcmode="lin" valueType="num">
+                                      <p:cBhvr additive="base">
+                                        <p:cTn id="8" dur="450" fill="hold"/>
+                                        <p:tgtEl>
+                                          <p:spTgt spid="2"/>
+                                        </p:tgtEl>
+                                        <p:attrNameLst>
+                                          <p:attrName>ppt_y</p:attrName>
+                                        </p:attrNameLst>
+                                      </p:cBhvr>
+                                      <p:tavLst>
+                                        <p:tav tm="0">
+                                          <p:val>
+                                            <p:strVal val="#ppt_y+0.025"/>
+                                          </p:val>
+                                        </p:tav>
+                                        <p:tav tm="100000">
+                                          <p:val>
+                                            <p:strVal val="#ppt_y"/>
+                                          </p:val>
+                                        </p:tav>
+                                      </p:tavLst>
+                                    </p:anim>
+                                  </p:childTnLst>
+                                </p:cTn>
+                              </p:par>
+                            </p:childTnLst>
+                          </p:cTn>
+                        </p:par>
+                      </p:childTnLst>
+                    </p:cTn>
+                  </p:par>
+                </p:childTnLst>
+              </p:cTn>
+              <p:prevCondLst>
+                <p:cond evt="onPrev" delay="0">
+                  <p:tgtEl>
+                    <p:sldTgt/>
+                  </p:tgtEl>
+                </p:cond>
+              </p:prevCondLst>
+              <p:nextCondLst>
+                <p:cond evt="onNext" delay="0">
+                  <p:tgtEl>
+                    <p:sldTgt/>
+                  </p:tgtEl>
+                </p:cond>
+              </p:nextCondLst>
+            </p:seq>
+          </p:childTnLst>
+        </p:cTn>
+      </p:par>
+    </p:tnLst>
+    <p:bldLst>
+      <p:bldP spid="2" grpId="0"/>
+    </p:bldLst>
+  </p:timing>
 </p:sld>
 </file>
 
@@ -3629,6 +6143,239 @@
   <p:clrMapOvr>
     <a:masterClrMapping/>
   </p:clrMapOvr>
+  <p:transition xmlns:p14="http://schemas.microsoft.com/office/powerpoint/2010/main" spd="slow" p14:dur="700">
+    <p:fade/>
+  </p:transition>
+  <p:timing xmlns:p="http://schemas.openxmlformats.org/presentationml/2006/main">
+    <p:tnLst>
+      <p:par>
+        <p:cTn id="1" dur="indefinite" restart="never" nodeType="tmRoot">
+          <p:childTnLst>
+            <p:seq concurrent="1" nextAc="seek">
+              <p:cTn id="2" dur="indefinite" nodeType="mainSeq">
+                <p:childTnLst>
+                  <p:par>
+                    <p:cTn id="3" fill="hold">
+                      <p:stCondLst>
+                        <p:cond delay="indefinite"/>
+                        <p:cond evt="onBegin" delay="0">
+                          <p:tn val="2"/>
+                        </p:cond>
+                      </p:stCondLst>
+                      <p:childTnLst>
+                        <p:par>
+                          <p:cTn id="4" fill="hold">
+                            <p:stCondLst>
+                              <p:cond delay="0"/>
+                            </p:stCondLst>
+                            <p:childTnLst>
+                              <p:par>
+                                <p:cTn id="5" presetID="10" presetClass="entr" presetSubtype="0" fill="hold" grpId="0" nodeType="withEffect">
+                                  <p:stCondLst>
+                                    <p:cond delay="0"/>
+                                  </p:stCondLst>
+                                  <p:childTnLst>
+                                    <p:set>
+                                      <p:cBhvr>
+                                        <p:cTn id="6" dur="1" fill="hold">
+                                          <p:stCondLst>
+                                            <p:cond delay="0"/>
+                                          </p:stCondLst>
+                                        </p:cTn>
+                                        <p:tgtEl>
+                                          <p:spTgt spid="2"/>
+                                        </p:tgtEl>
+                                        <p:attrNameLst>
+                                          <p:attrName>style.visibility</p:attrName>
+                                        </p:attrNameLst>
+                                      </p:cBhvr>
+                                      <p:to>
+                                        <p:strVal val="visible"/>
+                                      </p:to>
+                                    </p:set>
+                                    <p:animEffect transition="in" filter="fade">
+                                      <p:cBhvr>
+                                        <p:cTn id="7" dur="450"/>
+                                        <p:tgtEl>
+                                          <p:spTgt spid="2"/>
+                                        </p:tgtEl>
+                                      </p:cBhvr>
+                                    </p:animEffect>
+                                    <p:anim calcmode="lin" valueType="num">
+                                      <p:cBhvr additive="base">
+                                        <p:cTn id="8" dur="450" fill="hold"/>
+                                        <p:tgtEl>
+                                          <p:spTgt spid="2"/>
+                                        </p:tgtEl>
+                                        <p:attrNameLst>
+                                          <p:attrName>ppt_y</p:attrName>
+                                        </p:attrNameLst>
+                                      </p:cBhvr>
+                                      <p:tavLst>
+                                        <p:tav tm="0">
+                                          <p:val>
+                                            <p:strVal val="#ppt_y+0.025"/>
+                                          </p:val>
+                                        </p:tav>
+                                        <p:tav tm="100000">
+                                          <p:val>
+                                            <p:strVal val="#ppt_y"/>
+                                          </p:val>
+                                        </p:tav>
+                                      </p:tavLst>
+                                    </p:anim>
+                                  </p:childTnLst>
+                                </p:cTn>
+                              </p:par>
+                              <p:par>
+                                <p:cTn id="9" presetID="10" presetClass="entr" presetSubtype="0" fill="hold" grpId="0" nodeType="withEffect">
+                                  <p:stCondLst>
+                                    <p:cond delay="160"/>
+                                  </p:stCondLst>
+                                  <p:childTnLst>
+                                    <p:set>
+                                      <p:cBhvr>
+                                        <p:cTn id="10" dur="1" fill="hold">
+                                          <p:stCondLst>
+                                            <p:cond delay="0"/>
+                                          </p:stCondLst>
+                                        </p:cTn>
+                                        <p:tgtEl>
+                                          <p:spTgt spid="3"/>
+                                        </p:tgtEl>
+                                        <p:attrNameLst>
+                                          <p:attrName>style.visibility</p:attrName>
+                                        </p:attrNameLst>
+                                      </p:cBhvr>
+                                      <p:to>
+                                        <p:strVal val="visible"/>
+                                      </p:to>
+                                    </p:set>
+                                    <p:animEffect transition="in" filter="fade">
+                                      <p:cBhvr>
+                                        <p:cTn id="11" dur="450"/>
+                                        <p:tgtEl>
+                                          <p:spTgt spid="3"/>
+                                        </p:tgtEl>
+                                      </p:cBhvr>
+                                    </p:animEffect>
+                                    <p:anim calcmode="lin" valueType="num">
+                                      <p:cBhvr additive="base">
+                                        <p:cTn id="12" dur="450" fill="hold"/>
+                                        <p:tgtEl>
+                                          <p:spTgt spid="3"/>
+                                        </p:tgtEl>
+                                        <p:attrNameLst>
+                                          <p:attrName>ppt_y</p:attrName>
+                                        </p:attrNameLst>
+                                      </p:cBhvr>
+                                      <p:tavLst>
+                                        <p:tav tm="0">
+                                          <p:val>
+                                            <p:strVal val="#ppt_y+0.025"/>
+                                          </p:val>
+                                        </p:tav>
+                                        <p:tav tm="100000">
+                                          <p:val>
+                                            <p:strVal val="#ppt_y"/>
+                                          </p:val>
+                                        </p:tav>
+                                      </p:tavLst>
+                                    </p:anim>
+                                  </p:childTnLst>
+                                </p:cTn>
+                              </p:par>
+                              <p:par>
+                                <p:cTn id="13" presetID="10" presetClass="entr" presetSubtype="0" fill="hold" grpId="0" nodeType="withEffect">
+                                  <p:stCondLst>
+                                    <p:cond delay="320"/>
+                                  </p:stCondLst>
+                                  <p:childTnLst>
+                                    <p:set>
+                                      <p:cBhvr>
+                                        <p:cTn id="14" dur="1" fill="hold">
+                                          <p:stCondLst>
+                                            <p:cond delay="0"/>
+                                          </p:stCondLst>
+                                        </p:cTn>
+                                        <p:tgtEl>
+                                          <p:spTgt spid="4"/>
+                                        </p:tgtEl>
+                                        <p:attrNameLst>
+                                          <p:attrName>style.visibility</p:attrName>
+                                        </p:attrNameLst>
+                                      </p:cBhvr>
+                                      <p:to>
+                                        <p:strVal val="visible"/>
+                                      </p:to>
+                                    </p:set>
+                                    <p:animEffect transition="in" filter="fade">
+                                      <p:cBhvr>
+                                        <p:cTn id="15" dur="450"/>
+                                        <p:tgtEl>
+                                          <p:spTgt spid="4"/>
+                                        </p:tgtEl>
+                                      </p:cBhvr>
+                                    </p:animEffect>
+                                    <p:anim calcmode="lin" valueType="num">
+                                      <p:cBhvr additive="base">
+                                        <p:cTn id="16" dur="450" fill="hold"/>
+                                        <p:tgtEl>
+                                          <p:spTgt spid="4"/>
+                                        </p:tgtEl>
+                                        <p:attrNameLst>
+                                          <p:attrName>ppt_y</p:attrName>
+                                        </p:attrNameLst>
+                                      </p:cBhvr>
+                                      <p:tavLst>
+                                        <p:tav tm="0">
+                                          <p:val>
+                                            <p:strVal val="#ppt_y+0.025"/>
+                                          </p:val>
+                                        </p:tav>
+                                        <p:tav tm="100000">
+                                          <p:val>
+                                            <p:strVal val="#ppt_y"/>
+                                          </p:val>
+                                        </p:tav>
+                                      </p:tavLst>
+                                    </p:anim>
+                                  </p:childTnLst>
+                                </p:cTn>
+                              </p:par>
+                            </p:childTnLst>
+                          </p:cTn>
+                        </p:par>
+                      </p:childTnLst>
+                    </p:cTn>
+                  </p:par>
+                </p:childTnLst>
+              </p:cTn>
+              <p:prevCondLst>
+                <p:cond evt="onPrev" delay="0">
+                  <p:tgtEl>
+                    <p:sldTgt/>
+                  </p:tgtEl>
+                </p:cond>
+              </p:prevCondLst>
+              <p:nextCondLst>
+                <p:cond evt="onNext" delay="0">
+                  <p:tgtEl>
+                    <p:sldTgt/>
+                  </p:tgtEl>
+                </p:cond>
+              </p:nextCondLst>
+            </p:seq>
+          </p:childTnLst>
+        </p:cTn>
+      </p:par>
+    </p:tnLst>
+    <p:bldLst>
+      <p:bldP spid="2" grpId="0"/>
+      <p:bldP spid="3" grpId="0"/>
+      <p:bldP spid="4" grpId="0"/>
+    </p:bldLst>
+  </p:timing>
 </p:sld>
 </file>
 
@@ -3831,6 +6578,298 @@
   <p:clrMapOvr>
     <a:masterClrMapping/>
   </p:clrMapOvr>
+  <p:transition xmlns:p14="http://schemas.microsoft.com/office/powerpoint/2010/main" spd="slow" p14:dur="700">
+    <p:fade/>
+  </p:transition>
+  <p:timing xmlns:p="http://schemas.openxmlformats.org/presentationml/2006/main">
+    <p:tnLst>
+      <p:par>
+        <p:cTn id="1" dur="indefinite" restart="never" nodeType="tmRoot">
+          <p:childTnLst>
+            <p:seq concurrent="1" nextAc="seek">
+              <p:cTn id="2" dur="indefinite" nodeType="mainSeq">
+                <p:childTnLst>
+                  <p:par>
+                    <p:cTn id="3" fill="hold">
+                      <p:stCondLst>
+                        <p:cond delay="indefinite"/>
+                        <p:cond evt="onBegin" delay="0">
+                          <p:tn val="2"/>
+                        </p:cond>
+                      </p:stCondLst>
+                      <p:childTnLst>
+                        <p:par>
+                          <p:cTn id="4" fill="hold">
+                            <p:stCondLst>
+                              <p:cond delay="0"/>
+                            </p:stCondLst>
+                            <p:childTnLst>
+                              <p:par>
+                                <p:cTn id="5" presetID="10" presetClass="entr" presetSubtype="0" fill="hold" grpId="0" nodeType="withEffect">
+                                  <p:stCondLst>
+                                    <p:cond delay="0"/>
+                                  </p:stCondLst>
+                                  <p:childTnLst>
+                                    <p:set>
+                                      <p:cBhvr>
+                                        <p:cTn id="6" dur="1" fill="hold">
+                                          <p:stCondLst>
+                                            <p:cond delay="0"/>
+                                          </p:stCondLst>
+                                        </p:cTn>
+                                        <p:tgtEl>
+                                          <p:spTgt spid="2"/>
+                                        </p:tgtEl>
+                                        <p:attrNameLst>
+                                          <p:attrName>style.visibility</p:attrName>
+                                        </p:attrNameLst>
+                                      </p:cBhvr>
+                                      <p:to>
+                                        <p:strVal val="visible"/>
+                                      </p:to>
+                                    </p:set>
+                                    <p:animEffect transition="in" filter="fade">
+                                      <p:cBhvr>
+                                        <p:cTn id="7" dur="450"/>
+                                        <p:tgtEl>
+                                          <p:spTgt spid="2"/>
+                                        </p:tgtEl>
+                                      </p:cBhvr>
+                                    </p:animEffect>
+                                    <p:anim calcmode="lin" valueType="num">
+                                      <p:cBhvr additive="base">
+                                        <p:cTn id="8" dur="450" fill="hold"/>
+                                        <p:tgtEl>
+                                          <p:spTgt spid="2"/>
+                                        </p:tgtEl>
+                                        <p:attrNameLst>
+                                          <p:attrName>ppt_y</p:attrName>
+                                        </p:attrNameLst>
+                                      </p:cBhvr>
+                                      <p:tavLst>
+                                        <p:tav tm="0">
+                                          <p:val>
+                                            <p:strVal val="#ppt_y+0.025"/>
+                                          </p:val>
+                                        </p:tav>
+                                        <p:tav tm="100000">
+                                          <p:val>
+                                            <p:strVal val="#ppt_y"/>
+                                          </p:val>
+                                        </p:tav>
+                                      </p:tavLst>
+                                    </p:anim>
+                                  </p:childTnLst>
+                                </p:cTn>
+                              </p:par>
+                              <p:par>
+                                <p:cTn id="9" presetID="10" presetClass="entr" presetSubtype="0" fill="hold" grpId="0" nodeType="withEffect">
+                                  <p:stCondLst>
+                                    <p:cond delay="160"/>
+                                  </p:stCondLst>
+                                  <p:childTnLst>
+                                    <p:set>
+                                      <p:cBhvr>
+                                        <p:cTn id="10" dur="1" fill="hold">
+                                          <p:stCondLst>
+                                            <p:cond delay="0"/>
+                                          </p:stCondLst>
+                                        </p:cTn>
+                                        <p:tgtEl>
+                                          <p:spTgt spid="3"/>
+                                        </p:tgtEl>
+                                        <p:attrNameLst>
+                                          <p:attrName>style.visibility</p:attrName>
+                                        </p:attrNameLst>
+                                      </p:cBhvr>
+                                      <p:to>
+                                        <p:strVal val="visible"/>
+                                      </p:to>
+                                    </p:set>
+                                    <p:animEffect transition="in" filter="fade">
+                                      <p:cBhvr>
+                                        <p:cTn id="11" dur="450"/>
+                                        <p:tgtEl>
+                                          <p:spTgt spid="3"/>
+                                        </p:tgtEl>
+                                      </p:cBhvr>
+                                    </p:animEffect>
+                                    <p:anim calcmode="lin" valueType="num">
+                                      <p:cBhvr additive="base">
+                                        <p:cTn id="12" dur="450" fill="hold"/>
+                                        <p:tgtEl>
+                                          <p:spTgt spid="3"/>
+                                        </p:tgtEl>
+                                        <p:attrNameLst>
+                                          <p:attrName>ppt_y</p:attrName>
+                                        </p:attrNameLst>
+                                      </p:cBhvr>
+                                      <p:tavLst>
+                                        <p:tav tm="0">
+                                          <p:val>
+                                            <p:strVal val="#ppt_y+0.025"/>
+                                          </p:val>
+                                        </p:tav>
+                                        <p:tav tm="100000">
+                                          <p:val>
+                                            <p:strVal val="#ppt_y"/>
+                                          </p:val>
+                                        </p:tav>
+                                      </p:tavLst>
+                                    </p:anim>
+                                  </p:childTnLst>
+                                </p:cTn>
+                              </p:par>
+                              <p:par>
+                                <p:cTn id="13" presetID="10" presetClass="entr" presetSubtype="0" fill="hold" grpId="0" nodeType="withEffect">
+                                  <p:stCondLst>
+                                    <p:cond delay="320"/>
+                                  </p:stCondLst>
+                                  <p:childTnLst>
+                                    <p:set>
+                                      <p:cBhvr>
+                                        <p:cTn id="14" dur="1" fill="hold">
+                                          <p:stCondLst>
+                                            <p:cond delay="0"/>
+                                          </p:stCondLst>
+                                        </p:cTn>
+                                        <p:tgtEl>
+                                          <p:spTgt spid="4"/>
+                                        </p:tgtEl>
+                                        <p:attrNameLst>
+                                          <p:attrName>style.visibility</p:attrName>
+                                        </p:attrNameLst>
+                                      </p:cBhvr>
+                                      <p:to>
+                                        <p:strVal val="visible"/>
+                                      </p:to>
+                                    </p:set>
+                                    <p:animEffect transition="in" filter="fade">
+                                      <p:cBhvr>
+                                        <p:cTn id="15" dur="450"/>
+                                        <p:tgtEl>
+                                          <p:spTgt spid="4"/>
+                                        </p:tgtEl>
+                                      </p:cBhvr>
+                                    </p:animEffect>
+                                    <p:anim calcmode="lin" valueType="num">
+                                      <p:cBhvr additive="base">
+                                        <p:cTn id="16" dur="450" fill="hold"/>
+                                        <p:tgtEl>
+                                          <p:spTgt spid="4"/>
+                                        </p:tgtEl>
+                                        <p:attrNameLst>
+                                          <p:attrName>ppt_y</p:attrName>
+                                        </p:attrNameLst>
+                                      </p:cBhvr>
+                                      <p:tavLst>
+                                        <p:tav tm="0">
+                                          <p:val>
+                                            <p:strVal val="#ppt_y+0.025"/>
+                                          </p:val>
+                                        </p:tav>
+                                        <p:tav tm="100000">
+                                          <p:val>
+                                            <p:strVal val="#ppt_y"/>
+                                          </p:val>
+                                        </p:tav>
+                                      </p:tavLst>
+                                    </p:anim>
+                                  </p:childTnLst>
+                                </p:cTn>
+                              </p:par>
+                              <p:par>
+                                <p:cTn id="17" presetID="10" presetClass="entr" presetSubtype="0" fill="hold" grpId="0" nodeType="withEffect">
+                                  <p:stCondLst>
+                                    <p:cond delay="480"/>
+                                  </p:stCondLst>
+                                  <p:childTnLst>
+                                    <p:set>
+                                      <p:cBhvr>
+                                        <p:cTn id="18" dur="1" fill="hold">
+                                          <p:stCondLst>
+                                            <p:cond delay="0"/>
+                                          </p:stCondLst>
+                                        </p:cTn>
+                                        <p:tgtEl>
+                                          <p:spTgt spid="5"/>
+                                        </p:tgtEl>
+                                        <p:attrNameLst>
+                                          <p:attrName>style.visibility</p:attrName>
+                                        </p:attrNameLst>
+                                      </p:cBhvr>
+                                      <p:to>
+                                        <p:strVal val="visible"/>
+                                      </p:to>
+                                    </p:set>
+                                    <p:animEffect transition="in" filter="fade">
+                                      <p:cBhvr>
+                                        <p:cTn id="19" dur="450"/>
+                                        <p:tgtEl>
+                                          <p:spTgt spid="5"/>
+                                        </p:tgtEl>
+                                      </p:cBhvr>
+                                    </p:animEffect>
+                                    <p:anim calcmode="lin" valueType="num">
+                                      <p:cBhvr additive="base">
+                                        <p:cTn id="20" dur="450" fill="hold"/>
+                                        <p:tgtEl>
+                                          <p:spTgt spid="5"/>
+                                        </p:tgtEl>
+                                        <p:attrNameLst>
+                                          <p:attrName>ppt_y</p:attrName>
+                                        </p:attrNameLst>
+                                      </p:cBhvr>
+                                      <p:tavLst>
+                                        <p:tav tm="0">
+                                          <p:val>
+                                            <p:strVal val="#ppt_y+0.025"/>
+                                          </p:val>
+                                        </p:tav>
+                                        <p:tav tm="100000">
+                                          <p:val>
+                                            <p:strVal val="#ppt_y"/>
+                                          </p:val>
+                                        </p:tav>
+                                      </p:tavLst>
+                                    </p:anim>
+                                  </p:childTnLst>
+                                </p:cTn>
+                              </p:par>
+                            </p:childTnLst>
+                          </p:cTn>
+                        </p:par>
+                      </p:childTnLst>
+                    </p:cTn>
+                  </p:par>
+                </p:childTnLst>
+              </p:cTn>
+              <p:prevCondLst>
+                <p:cond evt="onPrev" delay="0">
+                  <p:tgtEl>
+                    <p:sldTgt/>
+                  </p:tgtEl>
+                </p:cond>
+              </p:prevCondLst>
+              <p:nextCondLst>
+                <p:cond evt="onNext" delay="0">
+                  <p:tgtEl>
+                    <p:sldTgt/>
+                  </p:tgtEl>
+                </p:cond>
+              </p:nextCondLst>
+            </p:seq>
+          </p:childTnLst>
+        </p:cTn>
+      </p:par>
+    </p:tnLst>
+    <p:bldLst>
+      <p:bldP spid="2" grpId="0"/>
+      <p:bldP spid="3" grpId="0"/>
+      <p:bldP spid="4" grpId="0"/>
+      <p:bldP spid="5" grpId="0"/>
+    </p:bldLst>
+  </p:timing>
 </p:sld>
 </file>
 
@@ -4033,6 +7072,298 @@
   <p:clrMapOvr>
     <a:masterClrMapping/>
   </p:clrMapOvr>
+  <p:transition xmlns:p14="http://schemas.microsoft.com/office/powerpoint/2010/main" spd="slow" p14:dur="700">
+    <p:fade/>
+  </p:transition>
+  <p:timing xmlns:p="http://schemas.openxmlformats.org/presentationml/2006/main">
+    <p:tnLst>
+      <p:par>
+        <p:cTn id="1" dur="indefinite" restart="never" nodeType="tmRoot">
+          <p:childTnLst>
+            <p:seq concurrent="1" nextAc="seek">
+              <p:cTn id="2" dur="indefinite" nodeType="mainSeq">
+                <p:childTnLst>
+                  <p:par>
+                    <p:cTn id="3" fill="hold">
+                      <p:stCondLst>
+                        <p:cond delay="indefinite"/>
+                        <p:cond evt="onBegin" delay="0">
+                          <p:tn val="2"/>
+                        </p:cond>
+                      </p:stCondLst>
+                      <p:childTnLst>
+                        <p:par>
+                          <p:cTn id="4" fill="hold">
+                            <p:stCondLst>
+                              <p:cond delay="0"/>
+                            </p:stCondLst>
+                            <p:childTnLst>
+                              <p:par>
+                                <p:cTn id="5" presetID="10" presetClass="entr" presetSubtype="0" fill="hold" grpId="0" nodeType="withEffect">
+                                  <p:stCondLst>
+                                    <p:cond delay="0"/>
+                                  </p:stCondLst>
+                                  <p:childTnLst>
+                                    <p:set>
+                                      <p:cBhvr>
+                                        <p:cTn id="6" dur="1" fill="hold">
+                                          <p:stCondLst>
+                                            <p:cond delay="0"/>
+                                          </p:stCondLst>
+                                        </p:cTn>
+                                        <p:tgtEl>
+                                          <p:spTgt spid="2"/>
+                                        </p:tgtEl>
+                                        <p:attrNameLst>
+                                          <p:attrName>style.visibility</p:attrName>
+                                        </p:attrNameLst>
+                                      </p:cBhvr>
+                                      <p:to>
+                                        <p:strVal val="visible"/>
+                                      </p:to>
+                                    </p:set>
+                                    <p:animEffect transition="in" filter="fade">
+                                      <p:cBhvr>
+                                        <p:cTn id="7" dur="450"/>
+                                        <p:tgtEl>
+                                          <p:spTgt spid="2"/>
+                                        </p:tgtEl>
+                                      </p:cBhvr>
+                                    </p:animEffect>
+                                    <p:anim calcmode="lin" valueType="num">
+                                      <p:cBhvr additive="base">
+                                        <p:cTn id="8" dur="450" fill="hold"/>
+                                        <p:tgtEl>
+                                          <p:spTgt spid="2"/>
+                                        </p:tgtEl>
+                                        <p:attrNameLst>
+                                          <p:attrName>ppt_y</p:attrName>
+                                        </p:attrNameLst>
+                                      </p:cBhvr>
+                                      <p:tavLst>
+                                        <p:tav tm="0">
+                                          <p:val>
+                                            <p:strVal val="#ppt_y+0.025"/>
+                                          </p:val>
+                                        </p:tav>
+                                        <p:tav tm="100000">
+                                          <p:val>
+                                            <p:strVal val="#ppt_y"/>
+                                          </p:val>
+                                        </p:tav>
+                                      </p:tavLst>
+                                    </p:anim>
+                                  </p:childTnLst>
+                                </p:cTn>
+                              </p:par>
+                              <p:par>
+                                <p:cTn id="9" presetID="10" presetClass="entr" presetSubtype="0" fill="hold" grpId="0" nodeType="withEffect">
+                                  <p:stCondLst>
+                                    <p:cond delay="160"/>
+                                  </p:stCondLst>
+                                  <p:childTnLst>
+                                    <p:set>
+                                      <p:cBhvr>
+                                        <p:cTn id="10" dur="1" fill="hold">
+                                          <p:stCondLst>
+                                            <p:cond delay="0"/>
+                                          </p:stCondLst>
+                                        </p:cTn>
+                                        <p:tgtEl>
+                                          <p:spTgt spid="3"/>
+                                        </p:tgtEl>
+                                        <p:attrNameLst>
+                                          <p:attrName>style.visibility</p:attrName>
+                                        </p:attrNameLst>
+                                      </p:cBhvr>
+                                      <p:to>
+                                        <p:strVal val="visible"/>
+                                      </p:to>
+                                    </p:set>
+                                    <p:animEffect transition="in" filter="fade">
+                                      <p:cBhvr>
+                                        <p:cTn id="11" dur="450"/>
+                                        <p:tgtEl>
+                                          <p:spTgt spid="3"/>
+                                        </p:tgtEl>
+                                      </p:cBhvr>
+                                    </p:animEffect>
+                                    <p:anim calcmode="lin" valueType="num">
+                                      <p:cBhvr additive="base">
+                                        <p:cTn id="12" dur="450" fill="hold"/>
+                                        <p:tgtEl>
+                                          <p:spTgt spid="3"/>
+                                        </p:tgtEl>
+                                        <p:attrNameLst>
+                                          <p:attrName>ppt_y</p:attrName>
+                                        </p:attrNameLst>
+                                      </p:cBhvr>
+                                      <p:tavLst>
+                                        <p:tav tm="0">
+                                          <p:val>
+                                            <p:strVal val="#ppt_y+0.025"/>
+                                          </p:val>
+                                        </p:tav>
+                                        <p:tav tm="100000">
+                                          <p:val>
+                                            <p:strVal val="#ppt_y"/>
+                                          </p:val>
+                                        </p:tav>
+                                      </p:tavLst>
+                                    </p:anim>
+                                  </p:childTnLst>
+                                </p:cTn>
+                              </p:par>
+                              <p:par>
+                                <p:cTn id="13" presetID="10" presetClass="entr" presetSubtype="0" fill="hold" grpId="0" nodeType="withEffect">
+                                  <p:stCondLst>
+                                    <p:cond delay="320"/>
+                                  </p:stCondLst>
+                                  <p:childTnLst>
+                                    <p:set>
+                                      <p:cBhvr>
+                                        <p:cTn id="14" dur="1" fill="hold">
+                                          <p:stCondLst>
+                                            <p:cond delay="0"/>
+                                          </p:stCondLst>
+                                        </p:cTn>
+                                        <p:tgtEl>
+                                          <p:spTgt spid="4"/>
+                                        </p:tgtEl>
+                                        <p:attrNameLst>
+                                          <p:attrName>style.visibility</p:attrName>
+                                        </p:attrNameLst>
+                                      </p:cBhvr>
+                                      <p:to>
+                                        <p:strVal val="visible"/>
+                                      </p:to>
+                                    </p:set>
+                                    <p:animEffect transition="in" filter="fade">
+                                      <p:cBhvr>
+                                        <p:cTn id="15" dur="450"/>
+                                        <p:tgtEl>
+                                          <p:spTgt spid="4"/>
+                                        </p:tgtEl>
+                                      </p:cBhvr>
+                                    </p:animEffect>
+                                    <p:anim calcmode="lin" valueType="num">
+                                      <p:cBhvr additive="base">
+                                        <p:cTn id="16" dur="450" fill="hold"/>
+                                        <p:tgtEl>
+                                          <p:spTgt spid="4"/>
+                                        </p:tgtEl>
+                                        <p:attrNameLst>
+                                          <p:attrName>ppt_y</p:attrName>
+                                        </p:attrNameLst>
+                                      </p:cBhvr>
+                                      <p:tavLst>
+                                        <p:tav tm="0">
+                                          <p:val>
+                                            <p:strVal val="#ppt_y+0.025"/>
+                                          </p:val>
+                                        </p:tav>
+                                        <p:tav tm="100000">
+                                          <p:val>
+                                            <p:strVal val="#ppt_y"/>
+                                          </p:val>
+                                        </p:tav>
+                                      </p:tavLst>
+                                    </p:anim>
+                                  </p:childTnLst>
+                                </p:cTn>
+                              </p:par>
+                              <p:par>
+                                <p:cTn id="17" presetID="10" presetClass="entr" presetSubtype="0" fill="hold" grpId="0" nodeType="withEffect">
+                                  <p:stCondLst>
+                                    <p:cond delay="480"/>
+                                  </p:stCondLst>
+                                  <p:childTnLst>
+                                    <p:set>
+                                      <p:cBhvr>
+                                        <p:cTn id="18" dur="1" fill="hold">
+                                          <p:stCondLst>
+                                            <p:cond delay="0"/>
+                                          </p:stCondLst>
+                                        </p:cTn>
+                                        <p:tgtEl>
+                                          <p:spTgt spid="5"/>
+                                        </p:tgtEl>
+                                        <p:attrNameLst>
+                                          <p:attrName>style.visibility</p:attrName>
+                                        </p:attrNameLst>
+                                      </p:cBhvr>
+                                      <p:to>
+                                        <p:strVal val="visible"/>
+                                      </p:to>
+                                    </p:set>
+                                    <p:animEffect transition="in" filter="fade">
+                                      <p:cBhvr>
+                                        <p:cTn id="19" dur="450"/>
+                                        <p:tgtEl>
+                                          <p:spTgt spid="5"/>
+                                        </p:tgtEl>
+                                      </p:cBhvr>
+                                    </p:animEffect>
+                                    <p:anim calcmode="lin" valueType="num">
+                                      <p:cBhvr additive="base">
+                                        <p:cTn id="20" dur="450" fill="hold"/>
+                                        <p:tgtEl>
+                                          <p:spTgt spid="5"/>
+                                        </p:tgtEl>
+                                        <p:attrNameLst>
+                                          <p:attrName>ppt_y</p:attrName>
+                                        </p:attrNameLst>
+                                      </p:cBhvr>
+                                      <p:tavLst>
+                                        <p:tav tm="0">
+                                          <p:val>
+                                            <p:strVal val="#ppt_y+0.025"/>
+                                          </p:val>
+                                        </p:tav>
+                                        <p:tav tm="100000">
+                                          <p:val>
+                                            <p:strVal val="#ppt_y"/>
+                                          </p:val>
+                                        </p:tav>
+                                      </p:tavLst>
+                                    </p:anim>
+                                  </p:childTnLst>
+                                </p:cTn>
+                              </p:par>
+                            </p:childTnLst>
+                          </p:cTn>
+                        </p:par>
+                      </p:childTnLst>
+                    </p:cTn>
+                  </p:par>
+                </p:childTnLst>
+              </p:cTn>
+              <p:prevCondLst>
+                <p:cond evt="onPrev" delay="0">
+                  <p:tgtEl>
+                    <p:sldTgt/>
+                  </p:tgtEl>
+                </p:cond>
+              </p:prevCondLst>
+              <p:nextCondLst>
+                <p:cond evt="onNext" delay="0">
+                  <p:tgtEl>
+                    <p:sldTgt/>
+                  </p:tgtEl>
+                </p:cond>
+              </p:nextCondLst>
+            </p:seq>
+          </p:childTnLst>
+        </p:cTn>
+      </p:par>
+    </p:tnLst>
+    <p:bldLst>
+      <p:bldP spid="2" grpId="0"/>
+      <p:bldP spid="3" grpId="0"/>
+      <p:bldP spid="4" grpId="0"/>
+      <p:bldP spid="5" grpId="0"/>
+    </p:bldLst>
+  </p:timing>
 </p:sld>
 </file>
 
@@ -4615,6 +7946,1116 @@
   <p:clrMapOvr>
     <a:masterClrMapping/>
   </p:clrMapOvr>
+  <p:transition xmlns:p14="http://schemas.microsoft.com/office/powerpoint/2010/main" spd="slow" p14:dur="700">
+    <p:fade/>
+  </p:transition>
+  <p:timing xmlns:p="http://schemas.openxmlformats.org/presentationml/2006/main">
+    <p:tnLst>
+      <p:par>
+        <p:cTn id="1" dur="indefinite" restart="never" nodeType="tmRoot">
+          <p:childTnLst>
+            <p:seq concurrent="1" nextAc="seek">
+              <p:cTn id="2" dur="indefinite" nodeType="mainSeq">
+                <p:childTnLst>
+                  <p:par>
+                    <p:cTn id="3" fill="hold">
+                      <p:stCondLst>
+                        <p:cond delay="indefinite"/>
+                        <p:cond evt="onBegin" delay="0">
+                          <p:tn val="2"/>
+                        </p:cond>
+                      </p:stCondLst>
+                      <p:childTnLst>
+                        <p:par>
+                          <p:cTn id="4" fill="hold">
+                            <p:stCondLst>
+                              <p:cond delay="0"/>
+                            </p:stCondLst>
+                            <p:childTnLst>
+                              <p:par>
+                                <p:cTn id="5" presetID="10" presetClass="entr" presetSubtype="0" fill="hold" grpId="0" nodeType="withEffect">
+                                  <p:stCondLst>
+                                    <p:cond delay="0"/>
+                                  </p:stCondLst>
+                                  <p:childTnLst>
+                                    <p:set>
+                                      <p:cBhvr>
+                                        <p:cTn id="6" dur="1" fill="hold">
+                                          <p:stCondLst>
+                                            <p:cond delay="0"/>
+                                          </p:stCondLst>
+                                        </p:cTn>
+                                        <p:tgtEl>
+                                          <p:spTgt spid="2"/>
+                                        </p:tgtEl>
+                                        <p:attrNameLst>
+                                          <p:attrName>style.visibility</p:attrName>
+                                        </p:attrNameLst>
+                                      </p:cBhvr>
+                                      <p:to>
+                                        <p:strVal val="visible"/>
+                                      </p:to>
+                                    </p:set>
+                                    <p:animEffect transition="in" filter="fade">
+                                      <p:cBhvr>
+                                        <p:cTn id="7" dur="450"/>
+                                        <p:tgtEl>
+                                          <p:spTgt spid="2"/>
+                                        </p:tgtEl>
+                                      </p:cBhvr>
+                                    </p:animEffect>
+                                    <p:anim calcmode="lin" valueType="num">
+                                      <p:cBhvr additive="base">
+                                        <p:cTn id="8" dur="450" fill="hold"/>
+                                        <p:tgtEl>
+                                          <p:spTgt spid="2"/>
+                                        </p:tgtEl>
+                                        <p:attrNameLst>
+                                          <p:attrName>ppt_y</p:attrName>
+                                        </p:attrNameLst>
+                                      </p:cBhvr>
+                                      <p:tavLst>
+                                        <p:tav tm="0">
+                                          <p:val>
+                                            <p:strVal val="#ppt_y+0.025"/>
+                                          </p:val>
+                                        </p:tav>
+                                        <p:tav tm="100000">
+                                          <p:val>
+                                            <p:strVal val="#ppt_y"/>
+                                          </p:val>
+                                        </p:tav>
+                                      </p:tavLst>
+                                    </p:anim>
+                                  </p:childTnLst>
+                                </p:cTn>
+                              </p:par>
+                              <p:par>
+                                <p:cTn id="9" presetID="10" presetClass="entr" presetSubtype="0" fill="hold" grpId="0" nodeType="withEffect">
+                                  <p:stCondLst>
+                                    <p:cond delay="64"/>
+                                  </p:stCondLst>
+                                  <p:childTnLst>
+                                    <p:set>
+                                      <p:cBhvr>
+                                        <p:cTn id="10" dur="1" fill="hold">
+                                          <p:stCondLst>
+                                            <p:cond delay="0"/>
+                                          </p:stCondLst>
+                                        </p:cTn>
+                                        <p:tgtEl>
+                                          <p:spTgt spid="3"/>
+                                        </p:tgtEl>
+                                        <p:attrNameLst>
+                                          <p:attrName>style.visibility</p:attrName>
+                                        </p:attrNameLst>
+                                      </p:cBhvr>
+                                      <p:to>
+                                        <p:strVal val="visible"/>
+                                      </p:to>
+                                    </p:set>
+                                    <p:animEffect transition="in" filter="fade">
+                                      <p:cBhvr>
+                                        <p:cTn id="11" dur="450"/>
+                                        <p:tgtEl>
+                                          <p:spTgt spid="3"/>
+                                        </p:tgtEl>
+                                      </p:cBhvr>
+                                    </p:animEffect>
+                                    <p:anim calcmode="lin" valueType="num">
+                                      <p:cBhvr additive="base">
+                                        <p:cTn id="12" dur="450" fill="hold"/>
+                                        <p:tgtEl>
+                                          <p:spTgt spid="3"/>
+                                        </p:tgtEl>
+                                        <p:attrNameLst>
+                                          <p:attrName>ppt_y</p:attrName>
+                                        </p:attrNameLst>
+                                      </p:cBhvr>
+                                      <p:tavLst>
+                                        <p:tav tm="0">
+                                          <p:val>
+                                            <p:strVal val="#ppt_y+0.025"/>
+                                          </p:val>
+                                        </p:tav>
+                                        <p:tav tm="100000">
+                                          <p:val>
+                                            <p:strVal val="#ppt_y"/>
+                                          </p:val>
+                                        </p:tav>
+                                      </p:tavLst>
+                                    </p:anim>
+                                  </p:childTnLst>
+                                </p:cTn>
+                              </p:par>
+                              <p:par>
+                                <p:cTn id="13" presetID="10" presetClass="entr" presetSubtype="0" fill="hold" grpId="0" nodeType="withEffect">
+                                  <p:stCondLst>
+                                    <p:cond delay="128"/>
+                                  </p:stCondLst>
+                                  <p:childTnLst>
+                                    <p:set>
+                                      <p:cBhvr>
+                                        <p:cTn id="14" dur="1" fill="hold">
+                                          <p:stCondLst>
+                                            <p:cond delay="0"/>
+                                          </p:stCondLst>
+                                        </p:cTn>
+                                        <p:tgtEl>
+                                          <p:spTgt spid="4"/>
+                                        </p:tgtEl>
+                                        <p:attrNameLst>
+                                          <p:attrName>style.visibility</p:attrName>
+                                        </p:attrNameLst>
+                                      </p:cBhvr>
+                                      <p:to>
+                                        <p:strVal val="visible"/>
+                                      </p:to>
+                                    </p:set>
+                                    <p:animEffect transition="in" filter="fade">
+                                      <p:cBhvr>
+                                        <p:cTn id="15" dur="450"/>
+                                        <p:tgtEl>
+                                          <p:spTgt spid="4"/>
+                                        </p:tgtEl>
+                                      </p:cBhvr>
+                                    </p:animEffect>
+                                    <p:anim calcmode="lin" valueType="num">
+                                      <p:cBhvr additive="base">
+                                        <p:cTn id="16" dur="450" fill="hold"/>
+                                        <p:tgtEl>
+                                          <p:spTgt spid="4"/>
+                                        </p:tgtEl>
+                                        <p:attrNameLst>
+                                          <p:attrName>ppt_y</p:attrName>
+                                        </p:attrNameLst>
+                                      </p:cBhvr>
+                                      <p:tavLst>
+                                        <p:tav tm="0">
+                                          <p:val>
+                                            <p:strVal val="#ppt_y+0.025"/>
+                                          </p:val>
+                                        </p:tav>
+                                        <p:tav tm="100000">
+                                          <p:val>
+                                            <p:strVal val="#ppt_y"/>
+                                          </p:val>
+                                        </p:tav>
+                                      </p:tavLst>
+                                    </p:anim>
+                                  </p:childTnLst>
+                                </p:cTn>
+                              </p:par>
+                              <p:par>
+                                <p:cTn id="17" presetID="10" presetClass="entr" presetSubtype="0" fill="hold" grpId="0" nodeType="withEffect">
+                                  <p:stCondLst>
+                                    <p:cond delay="192"/>
+                                  </p:stCondLst>
+                                  <p:childTnLst>
+                                    <p:set>
+                                      <p:cBhvr>
+                                        <p:cTn id="18" dur="1" fill="hold">
+                                          <p:stCondLst>
+                                            <p:cond delay="0"/>
+                                          </p:stCondLst>
+                                        </p:cTn>
+                                        <p:tgtEl>
+                                          <p:spTgt spid="7"/>
+                                        </p:tgtEl>
+                                        <p:attrNameLst>
+                                          <p:attrName>style.visibility</p:attrName>
+                                        </p:attrNameLst>
+                                      </p:cBhvr>
+                                      <p:to>
+                                        <p:strVal val="visible"/>
+                                      </p:to>
+                                    </p:set>
+                                    <p:animEffect transition="in" filter="fade">
+                                      <p:cBhvr>
+                                        <p:cTn id="19" dur="450"/>
+                                        <p:tgtEl>
+                                          <p:spTgt spid="7"/>
+                                        </p:tgtEl>
+                                      </p:cBhvr>
+                                    </p:animEffect>
+                                    <p:anim calcmode="lin" valueType="num">
+                                      <p:cBhvr additive="base">
+                                        <p:cTn id="20" dur="450" fill="hold"/>
+                                        <p:tgtEl>
+                                          <p:spTgt spid="7"/>
+                                        </p:tgtEl>
+                                        <p:attrNameLst>
+                                          <p:attrName>ppt_y</p:attrName>
+                                        </p:attrNameLst>
+                                      </p:cBhvr>
+                                      <p:tavLst>
+                                        <p:tav tm="0">
+                                          <p:val>
+                                            <p:strVal val="#ppt_y+0.025"/>
+                                          </p:val>
+                                        </p:tav>
+                                        <p:tav tm="100000">
+                                          <p:val>
+                                            <p:strVal val="#ppt_y"/>
+                                          </p:val>
+                                        </p:tav>
+                                      </p:tavLst>
+                                    </p:anim>
+                                  </p:childTnLst>
+                                </p:cTn>
+                              </p:par>
+                              <p:par>
+                                <p:cTn id="21" presetID="10" presetClass="entr" presetSubtype="0" fill="hold" grpId="0" nodeType="withEffect">
+                                  <p:stCondLst>
+                                    <p:cond delay="256"/>
+                                  </p:stCondLst>
+                                  <p:childTnLst>
+                                    <p:set>
+                                      <p:cBhvr>
+                                        <p:cTn id="22" dur="1" fill="hold">
+                                          <p:stCondLst>
+                                            <p:cond delay="0"/>
+                                          </p:stCondLst>
+                                        </p:cTn>
+                                        <p:tgtEl>
+                                          <p:spTgt spid="5"/>
+                                        </p:tgtEl>
+                                        <p:attrNameLst>
+                                          <p:attrName>style.visibility</p:attrName>
+                                        </p:attrNameLst>
+                                      </p:cBhvr>
+                                      <p:to>
+                                        <p:strVal val="visible"/>
+                                      </p:to>
+                                    </p:set>
+                                    <p:animEffect transition="in" filter="fade">
+                                      <p:cBhvr>
+                                        <p:cTn id="23" dur="450"/>
+                                        <p:tgtEl>
+                                          <p:spTgt spid="5"/>
+                                        </p:tgtEl>
+                                      </p:cBhvr>
+                                    </p:animEffect>
+                                    <p:anim calcmode="lin" valueType="num">
+                                      <p:cBhvr additive="base">
+                                        <p:cTn id="24" dur="450" fill="hold"/>
+                                        <p:tgtEl>
+                                          <p:spTgt spid="5"/>
+                                        </p:tgtEl>
+                                        <p:attrNameLst>
+                                          <p:attrName>ppt_y</p:attrName>
+                                        </p:attrNameLst>
+                                      </p:cBhvr>
+                                      <p:tavLst>
+                                        <p:tav tm="0">
+                                          <p:val>
+                                            <p:strVal val="#ppt_y+0.025"/>
+                                          </p:val>
+                                        </p:tav>
+                                        <p:tav tm="100000">
+                                          <p:val>
+                                            <p:strVal val="#ppt_y"/>
+                                          </p:val>
+                                        </p:tav>
+                                      </p:tavLst>
+                                    </p:anim>
+                                  </p:childTnLst>
+                                </p:cTn>
+                              </p:par>
+                              <p:par>
+                                <p:cTn id="25" presetID="10" presetClass="entr" presetSubtype="0" fill="hold" grpId="0" nodeType="withEffect">
+                                  <p:stCondLst>
+                                    <p:cond delay="320"/>
+                                  </p:stCondLst>
+                                  <p:childTnLst>
+                                    <p:set>
+                                      <p:cBhvr>
+                                        <p:cTn id="26" dur="1" fill="hold">
+                                          <p:stCondLst>
+                                            <p:cond delay="0"/>
+                                          </p:stCondLst>
+                                        </p:cTn>
+                                        <p:tgtEl>
+                                          <p:spTgt spid="6"/>
+                                        </p:tgtEl>
+                                        <p:attrNameLst>
+                                          <p:attrName>style.visibility</p:attrName>
+                                        </p:attrNameLst>
+                                      </p:cBhvr>
+                                      <p:to>
+                                        <p:strVal val="visible"/>
+                                      </p:to>
+                                    </p:set>
+                                    <p:animEffect transition="in" filter="fade">
+                                      <p:cBhvr>
+                                        <p:cTn id="27" dur="450"/>
+                                        <p:tgtEl>
+                                          <p:spTgt spid="6"/>
+                                        </p:tgtEl>
+                                      </p:cBhvr>
+                                    </p:animEffect>
+                                    <p:anim calcmode="lin" valueType="num">
+                                      <p:cBhvr additive="base">
+                                        <p:cTn id="28" dur="450" fill="hold"/>
+                                        <p:tgtEl>
+                                          <p:spTgt spid="6"/>
+                                        </p:tgtEl>
+                                        <p:attrNameLst>
+                                          <p:attrName>ppt_y</p:attrName>
+                                        </p:attrNameLst>
+                                      </p:cBhvr>
+                                      <p:tavLst>
+                                        <p:tav tm="0">
+                                          <p:val>
+                                            <p:strVal val="#ppt_y+0.025"/>
+                                          </p:val>
+                                        </p:tav>
+                                        <p:tav tm="100000">
+                                          <p:val>
+                                            <p:strVal val="#ppt_y"/>
+                                          </p:val>
+                                        </p:tav>
+                                      </p:tavLst>
+                                    </p:anim>
+                                  </p:childTnLst>
+                                </p:cTn>
+                              </p:par>
+                              <p:par>
+                                <p:cTn id="29" presetID="10" presetClass="entr" presetSubtype="0" fill="hold" grpId="0" nodeType="withEffect">
+                                  <p:stCondLst>
+                                    <p:cond delay="384"/>
+                                  </p:stCondLst>
+                                  <p:childTnLst>
+                                    <p:set>
+                                      <p:cBhvr>
+                                        <p:cTn id="30" dur="1" fill="hold">
+                                          <p:stCondLst>
+                                            <p:cond delay="0"/>
+                                          </p:stCondLst>
+                                        </p:cTn>
+                                        <p:tgtEl>
+                                          <p:spTgt spid="8"/>
+                                        </p:tgtEl>
+                                        <p:attrNameLst>
+                                          <p:attrName>style.visibility</p:attrName>
+                                        </p:attrNameLst>
+                                      </p:cBhvr>
+                                      <p:to>
+                                        <p:strVal val="visible"/>
+                                      </p:to>
+                                    </p:set>
+                                    <p:animEffect transition="in" filter="fade">
+                                      <p:cBhvr>
+                                        <p:cTn id="31" dur="450"/>
+                                        <p:tgtEl>
+                                          <p:spTgt spid="8"/>
+                                        </p:tgtEl>
+                                      </p:cBhvr>
+                                    </p:animEffect>
+                                    <p:anim calcmode="lin" valueType="num">
+                                      <p:cBhvr additive="base">
+                                        <p:cTn id="32" dur="450" fill="hold"/>
+                                        <p:tgtEl>
+                                          <p:spTgt spid="8"/>
+                                        </p:tgtEl>
+                                        <p:attrNameLst>
+                                          <p:attrName>ppt_y</p:attrName>
+                                        </p:attrNameLst>
+                                      </p:cBhvr>
+                                      <p:tavLst>
+                                        <p:tav tm="0">
+                                          <p:val>
+                                            <p:strVal val="#ppt_y+0.025"/>
+                                          </p:val>
+                                        </p:tav>
+                                        <p:tav tm="100000">
+                                          <p:val>
+                                            <p:strVal val="#ppt_y"/>
+                                          </p:val>
+                                        </p:tav>
+                                      </p:tavLst>
+                                    </p:anim>
+                                  </p:childTnLst>
+                                </p:cTn>
+                              </p:par>
+                              <p:par>
+                                <p:cTn id="33" presetID="10" presetClass="entr" presetSubtype="0" fill="hold" grpId="0" nodeType="withEffect">
+                                  <p:stCondLst>
+                                    <p:cond delay="448"/>
+                                  </p:stCondLst>
+                                  <p:childTnLst>
+                                    <p:set>
+                                      <p:cBhvr>
+                                        <p:cTn id="34" dur="1" fill="hold">
+                                          <p:stCondLst>
+                                            <p:cond delay="0"/>
+                                          </p:stCondLst>
+                                        </p:cTn>
+                                        <p:tgtEl>
+                                          <p:spTgt spid="11"/>
+                                        </p:tgtEl>
+                                        <p:attrNameLst>
+                                          <p:attrName>style.visibility</p:attrName>
+                                        </p:attrNameLst>
+                                      </p:cBhvr>
+                                      <p:to>
+                                        <p:strVal val="visible"/>
+                                      </p:to>
+                                    </p:set>
+                                    <p:animEffect transition="in" filter="fade">
+                                      <p:cBhvr>
+                                        <p:cTn id="35" dur="450"/>
+                                        <p:tgtEl>
+                                          <p:spTgt spid="11"/>
+                                        </p:tgtEl>
+                                      </p:cBhvr>
+                                    </p:animEffect>
+                                    <p:anim calcmode="lin" valueType="num">
+                                      <p:cBhvr additive="base">
+                                        <p:cTn id="36" dur="450" fill="hold"/>
+                                        <p:tgtEl>
+                                          <p:spTgt spid="11"/>
+                                        </p:tgtEl>
+                                        <p:attrNameLst>
+                                          <p:attrName>ppt_y</p:attrName>
+                                        </p:attrNameLst>
+                                      </p:cBhvr>
+                                      <p:tavLst>
+                                        <p:tav tm="0">
+                                          <p:val>
+                                            <p:strVal val="#ppt_y+0.025"/>
+                                          </p:val>
+                                        </p:tav>
+                                        <p:tav tm="100000">
+                                          <p:val>
+                                            <p:strVal val="#ppt_y"/>
+                                          </p:val>
+                                        </p:tav>
+                                      </p:tavLst>
+                                    </p:anim>
+                                  </p:childTnLst>
+                                </p:cTn>
+                              </p:par>
+                              <p:par>
+                                <p:cTn id="37" presetID="10" presetClass="entr" presetSubtype="0" fill="hold" grpId="0" nodeType="withEffect">
+                                  <p:stCondLst>
+                                    <p:cond delay="512"/>
+                                  </p:stCondLst>
+                                  <p:childTnLst>
+                                    <p:set>
+                                      <p:cBhvr>
+                                        <p:cTn id="38" dur="1" fill="hold">
+                                          <p:stCondLst>
+                                            <p:cond delay="0"/>
+                                          </p:stCondLst>
+                                        </p:cTn>
+                                        <p:tgtEl>
+                                          <p:spTgt spid="9"/>
+                                        </p:tgtEl>
+                                        <p:attrNameLst>
+                                          <p:attrName>style.visibility</p:attrName>
+                                        </p:attrNameLst>
+                                      </p:cBhvr>
+                                      <p:to>
+                                        <p:strVal val="visible"/>
+                                      </p:to>
+                                    </p:set>
+                                    <p:animEffect transition="in" filter="fade">
+                                      <p:cBhvr>
+                                        <p:cTn id="39" dur="450"/>
+                                        <p:tgtEl>
+                                          <p:spTgt spid="9"/>
+                                        </p:tgtEl>
+                                      </p:cBhvr>
+                                    </p:animEffect>
+                                    <p:anim calcmode="lin" valueType="num">
+                                      <p:cBhvr additive="base">
+                                        <p:cTn id="40" dur="450" fill="hold"/>
+                                        <p:tgtEl>
+                                          <p:spTgt spid="9"/>
+                                        </p:tgtEl>
+                                        <p:attrNameLst>
+                                          <p:attrName>ppt_y</p:attrName>
+                                        </p:attrNameLst>
+                                      </p:cBhvr>
+                                      <p:tavLst>
+                                        <p:tav tm="0">
+                                          <p:val>
+                                            <p:strVal val="#ppt_y+0.025"/>
+                                          </p:val>
+                                        </p:tav>
+                                        <p:tav tm="100000">
+                                          <p:val>
+                                            <p:strVal val="#ppt_y"/>
+                                          </p:val>
+                                        </p:tav>
+                                      </p:tavLst>
+                                    </p:anim>
+                                  </p:childTnLst>
+                                </p:cTn>
+                              </p:par>
+                              <p:par>
+                                <p:cTn id="41" presetID="10" presetClass="entr" presetSubtype="0" fill="hold" grpId="0" nodeType="withEffect">
+                                  <p:stCondLst>
+                                    <p:cond delay="576"/>
+                                  </p:stCondLst>
+                                  <p:childTnLst>
+                                    <p:set>
+                                      <p:cBhvr>
+                                        <p:cTn id="42" dur="1" fill="hold">
+                                          <p:stCondLst>
+                                            <p:cond delay="0"/>
+                                          </p:stCondLst>
+                                        </p:cTn>
+                                        <p:tgtEl>
+                                          <p:spTgt spid="10"/>
+                                        </p:tgtEl>
+                                        <p:attrNameLst>
+                                          <p:attrName>style.visibility</p:attrName>
+                                        </p:attrNameLst>
+                                      </p:cBhvr>
+                                      <p:to>
+                                        <p:strVal val="visible"/>
+                                      </p:to>
+                                    </p:set>
+                                    <p:animEffect transition="in" filter="fade">
+                                      <p:cBhvr>
+                                        <p:cTn id="43" dur="450"/>
+                                        <p:tgtEl>
+                                          <p:spTgt spid="10"/>
+                                        </p:tgtEl>
+                                      </p:cBhvr>
+                                    </p:animEffect>
+                                    <p:anim calcmode="lin" valueType="num">
+                                      <p:cBhvr additive="base">
+                                        <p:cTn id="44" dur="450" fill="hold"/>
+                                        <p:tgtEl>
+                                          <p:spTgt spid="10"/>
+                                        </p:tgtEl>
+                                        <p:attrNameLst>
+                                          <p:attrName>ppt_y</p:attrName>
+                                        </p:attrNameLst>
+                                      </p:cBhvr>
+                                      <p:tavLst>
+                                        <p:tav tm="0">
+                                          <p:val>
+                                            <p:strVal val="#ppt_y+0.025"/>
+                                          </p:val>
+                                        </p:tav>
+                                        <p:tav tm="100000">
+                                          <p:val>
+                                            <p:strVal val="#ppt_y"/>
+                                          </p:val>
+                                        </p:tav>
+                                      </p:tavLst>
+                                    </p:anim>
+                                  </p:childTnLst>
+                                </p:cTn>
+                              </p:par>
+                              <p:par>
+                                <p:cTn id="45" presetID="10" presetClass="entr" presetSubtype="0" fill="hold" grpId="0" nodeType="withEffect">
+                                  <p:stCondLst>
+                                    <p:cond delay="640"/>
+                                  </p:stCondLst>
+                                  <p:childTnLst>
+                                    <p:set>
+                                      <p:cBhvr>
+                                        <p:cTn id="46" dur="1" fill="hold">
+                                          <p:stCondLst>
+                                            <p:cond delay="0"/>
+                                          </p:stCondLst>
+                                        </p:cTn>
+                                        <p:tgtEl>
+                                          <p:spTgt spid="12"/>
+                                        </p:tgtEl>
+                                        <p:attrNameLst>
+                                          <p:attrName>style.visibility</p:attrName>
+                                        </p:attrNameLst>
+                                      </p:cBhvr>
+                                      <p:to>
+                                        <p:strVal val="visible"/>
+                                      </p:to>
+                                    </p:set>
+                                    <p:animEffect transition="in" filter="fade">
+                                      <p:cBhvr>
+                                        <p:cTn id="47" dur="450"/>
+                                        <p:tgtEl>
+                                          <p:spTgt spid="12"/>
+                                        </p:tgtEl>
+                                      </p:cBhvr>
+                                    </p:animEffect>
+                                    <p:anim calcmode="lin" valueType="num">
+                                      <p:cBhvr additive="base">
+                                        <p:cTn id="48" dur="450" fill="hold"/>
+                                        <p:tgtEl>
+                                          <p:spTgt spid="12"/>
+                                        </p:tgtEl>
+                                        <p:attrNameLst>
+                                          <p:attrName>ppt_y</p:attrName>
+                                        </p:attrNameLst>
+                                      </p:cBhvr>
+                                      <p:tavLst>
+                                        <p:tav tm="0">
+                                          <p:val>
+                                            <p:strVal val="#ppt_y+0.025"/>
+                                          </p:val>
+                                        </p:tav>
+                                        <p:tav tm="100000">
+                                          <p:val>
+                                            <p:strVal val="#ppt_y"/>
+                                          </p:val>
+                                        </p:tav>
+                                      </p:tavLst>
+                                    </p:anim>
+                                  </p:childTnLst>
+                                </p:cTn>
+                              </p:par>
+                              <p:par>
+                                <p:cTn id="49" presetID="10" presetClass="entr" presetSubtype="0" fill="hold" grpId="0" nodeType="withEffect">
+                                  <p:stCondLst>
+                                    <p:cond delay="704"/>
+                                  </p:stCondLst>
+                                  <p:childTnLst>
+                                    <p:set>
+                                      <p:cBhvr>
+                                        <p:cTn id="50" dur="1" fill="hold">
+                                          <p:stCondLst>
+                                            <p:cond delay="0"/>
+                                          </p:stCondLst>
+                                        </p:cTn>
+                                        <p:tgtEl>
+                                          <p:spTgt spid="15"/>
+                                        </p:tgtEl>
+                                        <p:attrNameLst>
+                                          <p:attrName>style.visibility</p:attrName>
+                                        </p:attrNameLst>
+                                      </p:cBhvr>
+                                      <p:to>
+                                        <p:strVal val="visible"/>
+                                      </p:to>
+                                    </p:set>
+                                    <p:animEffect transition="in" filter="fade">
+                                      <p:cBhvr>
+                                        <p:cTn id="51" dur="450"/>
+                                        <p:tgtEl>
+                                          <p:spTgt spid="15"/>
+                                        </p:tgtEl>
+                                      </p:cBhvr>
+                                    </p:animEffect>
+                                    <p:anim calcmode="lin" valueType="num">
+                                      <p:cBhvr additive="base">
+                                        <p:cTn id="52" dur="450" fill="hold"/>
+                                        <p:tgtEl>
+                                          <p:spTgt spid="15"/>
+                                        </p:tgtEl>
+                                        <p:attrNameLst>
+                                          <p:attrName>ppt_y</p:attrName>
+                                        </p:attrNameLst>
+                                      </p:cBhvr>
+                                      <p:tavLst>
+                                        <p:tav tm="0">
+                                          <p:val>
+                                            <p:strVal val="#ppt_y+0.025"/>
+                                          </p:val>
+                                        </p:tav>
+                                        <p:tav tm="100000">
+                                          <p:val>
+                                            <p:strVal val="#ppt_y"/>
+                                          </p:val>
+                                        </p:tav>
+                                      </p:tavLst>
+                                    </p:anim>
+                                  </p:childTnLst>
+                                </p:cTn>
+                              </p:par>
+                              <p:par>
+                                <p:cTn id="53" presetID="10" presetClass="entr" presetSubtype="0" fill="hold" grpId="0" nodeType="withEffect">
+                                  <p:stCondLst>
+                                    <p:cond delay="768"/>
+                                  </p:stCondLst>
+                                  <p:childTnLst>
+                                    <p:set>
+                                      <p:cBhvr>
+                                        <p:cTn id="54" dur="1" fill="hold">
+                                          <p:stCondLst>
+                                            <p:cond delay="0"/>
+                                          </p:stCondLst>
+                                        </p:cTn>
+                                        <p:tgtEl>
+                                          <p:spTgt spid="13"/>
+                                        </p:tgtEl>
+                                        <p:attrNameLst>
+                                          <p:attrName>style.visibility</p:attrName>
+                                        </p:attrNameLst>
+                                      </p:cBhvr>
+                                      <p:to>
+                                        <p:strVal val="visible"/>
+                                      </p:to>
+                                    </p:set>
+                                    <p:animEffect transition="in" filter="fade">
+                                      <p:cBhvr>
+                                        <p:cTn id="55" dur="450"/>
+                                        <p:tgtEl>
+                                          <p:spTgt spid="13"/>
+                                        </p:tgtEl>
+                                      </p:cBhvr>
+                                    </p:animEffect>
+                                    <p:anim calcmode="lin" valueType="num">
+                                      <p:cBhvr additive="base">
+                                        <p:cTn id="56" dur="450" fill="hold"/>
+                                        <p:tgtEl>
+                                          <p:spTgt spid="13"/>
+                                        </p:tgtEl>
+                                        <p:attrNameLst>
+                                          <p:attrName>ppt_y</p:attrName>
+                                        </p:attrNameLst>
+                                      </p:cBhvr>
+                                      <p:tavLst>
+                                        <p:tav tm="0">
+                                          <p:val>
+                                            <p:strVal val="#ppt_y+0.025"/>
+                                          </p:val>
+                                        </p:tav>
+                                        <p:tav tm="100000">
+                                          <p:val>
+                                            <p:strVal val="#ppt_y"/>
+                                          </p:val>
+                                        </p:tav>
+                                      </p:tavLst>
+                                    </p:anim>
+                                  </p:childTnLst>
+                                </p:cTn>
+                              </p:par>
+                              <p:par>
+                                <p:cTn id="57" presetID="10" presetClass="entr" presetSubtype="0" fill="hold" grpId="0" nodeType="withEffect">
+                                  <p:stCondLst>
+                                    <p:cond delay="832"/>
+                                  </p:stCondLst>
+                                  <p:childTnLst>
+                                    <p:set>
+                                      <p:cBhvr>
+                                        <p:cTn id="58" dur="1" fill="hold">
+                                          <p:stCondLst>
+                                            <p:cond delay="0"/>
+                                          </p:stCondLst>
+                                        </p:cTn>
+                                        <p:tgtEl>
+                                          <p:spTgt spid="14"/>
+                                        </p:tgtEl>
+                                        <p:attrNameLst>
+                                          <p:attrName>style.visibility</p:attrName>
+                                        </p:attrNameLst>
+                                      </p:cBhvr>
+                                      <p:to>
+                                        <p:strVal val="visible"/>
+                                      </p:to>
+                                    </p:set>
+                                    <p:animEffect transition="in" filter="fade">
+                                      <p:cBhvr>
+                                        <p:cTn id="59" dur="450"/>
+                                        <p:tgtEl>
+                                          <p:spTgt spid="14"/>
+                                        </p:tgtEl>
+                                      </p:cBhvr>
+                                    </p:animEffect>
+                                    <p:anim calcmode="lin" valueType="num">
+                                      <p:cBhvr additive="base">
+                                        <p:cTn id="60" dur="450" fill="hold"/>
+                                        <p:tgtEl>
+                                          <p:spTgt spid="14"/>
+                                        </p:tgtEl>
+                                        <p:attrNameLst>
+                                          <p:attrName>ppt_y</p:attrName>
+                                        </p:attrNameLst>
+                                      </p:cBhvr>
+                                      <p:tavLst>
+                                        <p:tav tm="0">
+                                          <p:val>
+                                            <p:strVal val="#ppt_y+0.025"/>
+                                          </p:val>
+                                        </p:tav>
+                                        <p:tav tm="100000">
+                                          <p:val>
+                                            <p:strVal val="#ppt_y"/>
+                                          </p:val>
+                                        </p:tav>
+                                      </p:tavLst>
+                                    </p:anim>
+                                  </p:childTnLst>
+                                </p:cTn>
+                              </p:par>
+                              <p:par>
+                                <p:cTn id="61" presetID="10" presetClass="entr" presetSubtype="0" fill="hold" grpId="0" nodeType="withEffect">
+                                  <p:stCondLst>
+                                    <p:cond delay="896"/>
+                                  </p:stCondLst>
+                                  <p:childTnLst>
+                                    <p:set>
+                                      <p:cBhvr>
+                                        <p:cTn id="62" dur="1" fill="hold">
+                                          <p:stCondLst>
+                                            <p:cond delay="0"/>
+                                          </p:stCondLst>
+                                        </p:cTn>
+                                        <p:tgtEl>
+                                          <p:spTgt spid="16"/>
+                                        </p:tgtEl>
+                                        <p:attrNameLst>
+                                          <p:attrName>style.visibility</p:attrName>
+                                        </p:attrNameLst>
+                                      </p:cBhvr>
+                                      <p:to>
+                                        <p:strVal val="visible"/>
+                                      </p:to>
+                                    </p:set>
+                                    <p:animEffect transition="in" filter="fade">
+                                      <p:cBhvr>
+                                        <p:cTn id="63" dur="450"/>
+                                        <p:tgtEl>
+                                          <p:spTgt spid="16"/>
+                                        </p:tgtEl>
+                                      </p:cBhvr>
+                                    </p:animEffect>
+                                    <p:anim calcmode="lin" valueType="num">
+                                      <p:cBhvr additive="base">
+                                        <p:cTn id="64" dur="450" fill="hold"/>
+                                        <p:tgtEl>
+                                          <p:spTgt spid="16"/>
+                                        </p:tgtEl>
+                                        <p:attrNameLst>
+                                          <p:attrName>ppt_y</p:attrName>
+                                        </p:attrNameLst>
+                                      </p:cBhvr>
+                                      <p:tavLst>
+                                        <p:tav tm="0">
+                                          <p:val>
+                                            <p:strVal val="#ppt_y+0.025"/>
+                                          </p:val>
+                                        </p:tav>
+                                        <p:tav tm="100000">
+                                          <p:val>
+                                            <p:strVal val="#ppt_y"/>
+                                          </p:val>
+                                        </p:tav>
+                                      </p:tavLst>
+                                    </p:anim>
+                                  </p:childTnLst>
+                                </p:cTn>
+                              </p:par>
+                              <p:par>
+                                <p:cTn id="65" presetID="10" presetClass="entr" presetSubtype="0" fill="hold" grpId="0" nodeType="withEffect">
+                                  <p:stCondLst>
+                                    <p:cond delay="960"/>
+                                  </p:stCondLst>
+                                  <p:childTnLst>
+                                    <p:set>
+                                      <p:cBhvr>
+                                        <p:cTn id="66" dur="1" fill="hold">
+                                          <p:stCondLst>
+                                            <p:cond delay="0"/>
+                                          </p:stCondLst>
+                                        </p:cTn>
+                                        <p:tgtEl>
+                                          <p:spTgt spid="19"/>
+                                        </p:tgtEl>
+                                        <p:attrNameLst>
+                                          <p:attrName>style.visibility</p:attrName>
+                                        </p:attrNameLst>
+                                      </p:cBhvr>
+                                      <p:to>
+                                        <p:strVal val="visible"/>
+                                      </p:to>
+                                    </p:set>
+                                    <p:animEffect transition="in" filter="fade">
+                                      <p:cBhvr>
+                                        <p:cTn id="67" dur="450"/>
+                                        <p:tgtEl>
+                                          <p:spTgt spid="19"/>
+                                        </p:tgtEl>
+                                      </p:cBhvr>
+                                    </p:animEffect>
+                                    <p:anim calcmode="lin" valueType="num">
+                                      <p:cBhvr additive="base">
+                                        <p:cTn id="68" dur="450" fill="hold"/>
+                                        <p:tgtEl>
+                                          <p:spTgt spid="19"/>
+                                        </p:tgtEl>
+                                        <p:attrNameLst>
+                                          <p:attrName>ppt_y</p:attrName>
+                                        </p:attrNameLst>
+                                      </p:cBhvr>
+                                      <p:tavLst>
+                                        <p:tav tm="0">
+                                          <p:val>
+                                            <p:strVal val="#ppt_y+0.025"/>
+                                          </p:val>
+                                        </p:tav>
+                                        <p:tav tm="100000">
+                                          <p:val>
+                                            <p:strVal val="#ppt_y"/>
+                                          </p:val>
+                                        </p:tav>
+                                      </p:tavLst>
+                                    </p:anim>
+                                  </p:childTnLst>
+                                </p:cTn>
+                              </p:par>
+                              <p:par>
+                                <p:cTn id="69" presetID="10" presetClass="entr" presetSubtype="0" fill="hold" grpId="0" nodeType="withEffect">
+                                  <p:stCondLst>
+                                    <p:cond delay="1024"/>
+                                  </p:stCondLst>
+                                  <p:childTnLst>
+                                    <p:set>
+                                      <p:cBhvr>
+                                        <p:cTn id="70" dur="1" fill="hold">
+                                          <p:stCondLst>
+                                            <p:cond delay="0"/>
+                                          </p:stCondLst>
+                                        </p:cTn>
+                                        <p:tgtEl>
+                                          <p:spTgt spid="17"/>
+                                        </p:tgtEl>
+                                        <p:attrNameLst>
+                                          <p:attrName>style.visibility</p:attrName>
+                                        </p:attrNameLst>
+                                      </p:cBhvr>
+                                      <p:to>
+                                        <p:strVal val="visible"/>
+                                      </p:to>
+                                    </p:set>
+                                    <p:animEffect transition="in" filter="fade">
+                                      <p:cBhvr>
+                                        <p:cTn id="71" dur="450"/>
+                                        <p:tgtEl>
+                                          <p:spTgt spid="17"/>
+                                        </p:tgtEl>
+                                      </p:cBhvr>
+                                    </p:animEffect>
+                                    <p:anim calcmode="lin" valueType="num">
+                                      <p:cBhvr additive="base">
+                                        <p:cTn id="72" dur="450" fill="hold"/>
+                                        <p:tgtEl>
+                                          <p:spTgt spid="17"/>
+                                        </p:tgtEl>
+                                        <p:attrNameLst>
+                                          <p:attrName>ppt_y</p:attrName>
+                                        </p:attrNameLst>
+                                      </p:cBhvr>
+                                      <p:tavLst>
+                                        <p:tav tm="0">
+                                          <p:val>
+                                            <p:strVal val="#ppt_y+0.025"/>
+                                          </p:val>
+                                        </p:tav>
+                                        <p:tav tm="100000">
+                                          <p:val>
+                                            <p:strVal val="#ppt_y"/>
+                                          </p:val>
+                                        </p:tav>
+                                      </p:tavLst>
+                                    </p:anim>
+                                  </p:childTnLst>
+                                </p:cTn>
+                              </p:par>
+                              <p:par>
+                                <p:cTn id="73" presetID="10" presetClass="entr" presetSubtype="0" fill="hold" grpId="0" nodeType="withEffect">
+                                  <p:stCondLst>
+                                    <p:cond delay="1088"/>
+                                  </p:stCondLst>
+                                  <p:childTnLst>
+                                    <p:set>
+                                      <p:cBhvr>
+                                        <p:cTn id="74" dur="1" fill="hold">
+                                          <p:stCondLst>
+                                            <p:cond delay="0"/>
+                                          </p:stCondLst>
+                                        </p:cTn>
+                                        <p:tgtEl>
+                                          <p:spTgt spid="18"/>
+                                        </p:tgtEl>
+                                        <p:attrNameLst>
+                                          <p:attrName>style.visibility</p:attrName>
+                                        </p:attrNameLst>
+                                      </p:cBhvr>
+                                      <p:to>
+                                        <p:strVal val="visible"/>
+                                      </p:to>
+                                    </p:set>
+                                    <p:animEffect transition="in" filter="fade">
+                                      <p:cBhvr>
+                                        <p:cTn id="75" dur="450"/>
+                                        <p:tgtEl>
+                                          <p:spTgt spid="18"/>
+                                        </p:tgtEl>
+                                      </p:cBhvr>
+                                    </p:animEffect>
+                                    <p:anim calcmode="lin" valueType="num">
+                                      <p:cBhvr additive="base">
+                                        <p:cTn id="76" dur="450" fill="hold"/>
+                                        <p:tgtEl>
+                                          <p:spTgt spid="18"/>
+                                        </p:tgtEl>
+                                        <p:attrNameLst>
+                                          <p:attrName>ppt_y</p:attrName>
+                                        </p:attrNameLst>
+                                      </p:cBhvr>
+                                      <p:tavLst>
+                                        <p:tav tm="0">
+                                          <p:val>
+                                            <p:strVal val="#ppt_y+0.025"/>
+                                          </p:val>
+                                        </p:tav>
+                                        <p:tav tm="100000">
+                                          <p:val>
+                                            <p:strVal val="#ppt_y"/>
+                                          </p:val>
+                                        </p:tav>
+                                      </p:tavLst>
+                                    </p:anim>
+                                  </p:childTnLst>
+                                </p:cTn>
+                              </p:par>
+                            </p:childTnLst>
+                          </p:cTn>
+                        </p:par>
+                      </p:childTnLst>
+                    </p:cTn>
+                  </p:par>
+                </p:childTnLst>
+              </p:cTn>
+              <p:prevCondLst>
+                <p:cond evt="onPrev" delay="0">
+                  <p:tgtEl>
+                    <p:sldTgt/>
+                  </p:tgtEl>
+                </p:cond>
+              </p:prevCondLst>
+              <p:nextCondLst>
+                <p:cond evt="onNext" delay="0">
+                  <p:tgtEl>
+                    <p:sldTgt/>
+                  </p:tgtEl>
+                </p:cond>
+              </p:nextCondLst>
+            </p:seq>
+          </p:childTnLst>
+        </p:cTn>
+      </p:par>
+    </p:tnLst>
+    <p:bldLst>
+      <p:bldP spid="2" grpId="0"/>
+      <p:bldP spid="3" grpId="0"/>
+      <p:bldP spid="4" grpId="0"/>
+      <p:bldP spid="7" grpId="0"/>
+      <p:bldP spid="8" grpId="0"/>
+      <p:bldP spid="11" grpId="0"/>
+      <p:bldP spid="12" grpId="0"/>
+      <p:bldP spid="15" grpId="0"/>
+      <p:bldP spid="16" grpId="0"/>
+      <p:bldP spid="19" grpId="0"/>
+    </p:bldLst>
+  </p:timing>
 </p:sld>
 </file>
 
@@ -4929,6 +9370,475 @@
   <p:clrMapOvr>
     <a:masterClrMapping/>
   </p:clrMapOvr>
+  <p:transition xmlns:p14="http://schemas.microsoft.com/office/powerpoint/2010/main" spd="slow" p14:dur="700">
+    <p:fade/>
+  </p:transition>
+  <p:timing xmlns:p="http://schemas.openxmlformats.org/presentationml/2006/main">
+    <p:tnLst>
+      <p:par>
+        <p:cTn id="1" dur="indefinite" restart="never" nodeType="tmRoot">
+          <p:childTnLst>
+            <p:seq concurrent="1" nextAc="seek">
+              <p:cTn id="2" dur="indefinite" nodeType="mainSeq">
+                <p:childTnLst>
+                  <p:par>
+                    <p:cTn id="3" fill="hold">
+                      <p:stCondLst>
+                        <p:cond delay="indefinite"/>
+                        <p:cond evt="onBegin" delay="0">
+                          <p:tn val="2"/>
+                        </p:cond>
+                      </p:stCondLst>
+                      <p:childTnLst>
+                        <p:par>
+                          <p:cTn id="4" fill="hold">
+                            <p:stCondLst>
+                              <p:cond delay="0"/>
+                            </p:stCondLst>
+                            <p:childTnLst>
+                              <p:par>
+                                <p:cTn id="5" presetID="10" presetClass="entr" presetSubtype="0" fill="hold" grpId="0" nodeType="withEffect">
+                                  <p:stCondLst>
+                                    <p:cond delay="0"/>
+                                  </p:stCondLst>
+                                  <p:childTnLst>
+                                    <p:set>
+                                      <p:cBhvr>
+                                        <p:cTn id="6" dur="1" fill="hold">
+                                          <p:stCondLst>
+                                            <p:cond delay="0"/>
+                                          </p:stCondLst>
+                                        </p:cTn>
+                                        <p:tgtEl>
+                                          <p:spTgt spid="2"/>
+                                        </p:tgtEl>
+                                        <p:attrNameLst>
+                                          <p:attrName>style.visibility</p:attrName>
+                                        </p:attrNameLst>
+                                      </p:cBhvr>
+                                      <p:to>
+                                        <p:strVal val="visible"/>
+                                      </p:to>
+                                    </p:set>
+                                    <p:animEffect transition="in" filter="fade">
+                                      <p:cBhvr>
+                                        <p:cTn id="7" dur="450"/>
+                                        <p:tgtEl>
+                                          <p:spTgt spid="2"/>
+                                        </p:tgtEl>
+                                      </p:cBhvr>
+                                    </p:animEffect>
+                                    <p:anim calcmode="lin" valueType="num">
+                                      <p:cBhvr additive="base">
+                                        <p:cTn id="8" dur="450" fill="hold"/>
+                                        <p:tgtEl>
+                                          <p:spTgt spid="2"/>
+                                        </p:tgtEl>
+                                        <p:attrNameLst>
+                                          <p:attrName>ppt_y</p:attrName>
+                                        </p:attrNameLst>
+                                      </p:cBhvr>
+                                      <p:tavLst>
+                                        <p:tav tm="0">
+                                          <p:val>
+                                            <p:strVal val="#ppt_y+0.025"/>
+                                          </p:val>
+                                        </p:tav>
+                                        <p:tav tm="100000">
+                                          <p:val>
+                                            <p:strVal val="#ppt_y"/>
+                                          </p:val>
+                                        </p:tav>
+                                      </p:tavLst>
+                                    </p:anim>
+                                  </p:childTnLst>
+                                </p:cTn>
+                              </p:par>
+                              <p:par>
+                                <p:cTn id="9" presetID="10" presetClass="entr" presetSubtype="0" fill="hold" grpId="0" nodeType="withEffect">
+                                  <p:stCondLst>
+                                    <p:cond delay="160"/>
+                                  </p:stCondLst>
+                                  <p:childTnLst>
+                                    <p:set>
+                                      <p:cBhvr>
+                                        <p:cTn id="10" dur="1" fill="hold">
+                                          <p:stCondLst>
+                                            <p:cond delay="0"/>
+                                          </p:stCondLst>
+                                        </p:cTn>
+                                        <p:tgtEl>
+                                          <p:spTgt spid="3"/>
+                                        </p:tgtEl>
+                                        <p:attrNameLst>
+                                          <p:attrName>style.visibility</p:attrName>
+                                        </p:attrNameLst>
+                                      </p:cBhvr>
+                                      <p:to>
+                                        <p:strVal val="visible"/>
+                                      </p:to>
+                                    </p:set>
+                                    <p:animEffect transition="in" filter="fade">
+                                      <p:cBhvr>
+                                        <p:cTn id="11" dur="450"/>
+                                        <p:tgtEl>
+                                          <p:spTgt spid="3"/>
+                                        </p:tgtEl>
+                                      </p:cBhvr>
+                                    </p:animEffect>
+                                    <p:anim calcmode="lin" valueType="num">
+                                      <p:cBhvr additive="base">
+                                        <p:cTn id="12" dur="450" fill="hold"/>
+                                        <p:tgtEl>
+                                          <p:spTgt spid="3"/>
+                                        </p:tgtEl>
+                                        <p:attrNameLst>
+                                          <p:attrName>ppt_y</p:attrName>
+                                        </p:attrNameLst>
+                                      </p:cBhvr>
+                                      <p:tavLst>
+                                        <p:tav tm="0">
+                                          <p:val>
+                                            <p:strVal val="#ppt_y+0.025"/>
+                                          </p:val>
+                                        </p:tav>
+                                        <p:tav tm="100000">
+                                          <p:val>
+                                            <p:strVal val="#ppt_y"/>
+                                          </p:val>
+                                        </p:tav>
+                                      </p:tavLst>
+                                    </p:anim>
+                                  </p:childTnLst>
+                                </p:cTn>
+                              </p:par>
+                              <p:par>
+                                <p:cTn id="13" presetID="10" presetClass="entr" presetSubtype="0" fill="hold" grpId="0" nodeType="withEffect">
+                                  <p:stCondLst>
+                                    <p:cond delay="320"/>
+                                  </p:stCondLst>
+                                  <p:childTnLst>
+                                    <p:set>
+                                      <p:cBhvr>
+                                        <p:cTn id="14" dur="1" fill="hold">
+                                          <p:stCondLst>
+                                            <p:cond delay="0"/>
+                                          </p:stCondLst>
+                                        </p:cTn>
+                                        <p:tgtEl>
+                                          <p:spTgt spid="5"/>
+                                        </p:tgtEl>
+                                        <p:attrNameLst>
+                                          <p:attrName>style.visibility</p:attrName>
+                                        </p:attrNameLst>
+                                      </p:cBhvr>
+                                      <p:to>
+                                        <p:strVal val="visible"/>
+                                      </p:to>
+                                    </p:set>
+                                    <p:animEffect transition="in" filter="fade">
+                                      <p:cBhvr>
+                                        <p:cTn id="15" dur="450"/>
+                                        <p:tgtEl>
+                                          <p:spTgt spid="5"/>
+                                        </p:tgtEl>
+                                      </p:cBhvr>
+                                    </p:animEffect>
+                                    <p:anim calcmode="lin" valueType="num">
+                                      <p:cBhvr additive="base">
+                                        <p:cTn id="16" dur="450" fill="hold"/>
+                                        <p:tgtEl>
+                                          <p:spTgt spid="5"/>
+                                        </p:tgtEl>
+                                        <p:attrNameLst>
+                                          <p:attrName>ppt_y</p:attrName>
+                                        </p:attrNameLst>
+                                      </p:cBhvr>
+                                      <p:tavLst>
+                                        <p:tav tm="0">
+                                          <p:val>
+                                            <p:strVal val="#ppt_y+0.025"/>
+                                          </p:val>
+                                        </p:tav>
+                                        <p:tav tm="100000">
+                                          <p:val>
+                                            <p:strVal val="#ppt_y"/>
+                                          </p:val>
+                                        </p:tav>
+                                      </p:tavLst>
+                                    </p:anim>
+                                  </p:childTnLst>
+                                </p:cTn>
+                              </p:par>
+                              <p:par>
+                                <p:cTn id="17" presetID="10" presetClass="entr" presetSubtype="0" fill="hold" grpId="0" nodeType="withEffect">
+                                  <p:stCondLst>
+                                    <p:cond delay="480"/>
+                                  </p:stCondLst>
+                                  <p:childTnLst>
+                                    <p:set>
+                                      <p:cBhvr>
+                                        <p:cTn id="18" dur="1" fill="hold">
+                                          <p:stCondLst>
+                                            <p:cond delay="0"/>
+                                          </p:stCondLst>
+                                        </p:cTn>
+                                        <p:tgtEl>
+                                          <p:spTgt spid="7"/>
+                                        </p:tgtEl>
+                                        <p:attrNameLst>
+                                          <p:attrName>style.visibility</p:attrName>
+                                        </p:attrNameLst>
+                                      </p:cBhvr>
+                                      <p:to>
+                                        <p:strVal val="visible"/>
+                                      </p:to>
+                                    </p:set>
+                                    <p:animEffect transition="in" filter="fade">
+                                      <p:cBhvr>
+                                        <p:cTn id="19" dur="450"/>
+                                        <p:tgtEl>
+                                          <p:spTgt spid="7"/>
+                                        </p:tgtEl>
+                                      </p:cBhvr>
+                                    </p:animEffect>
+                                    <p:anim calcmode="lin" valueType="num">
+                                      <p:cBhvr additive="base">
+                                        <p:cTn id="20" dur="450" fill="hold"/>
+                                        <p:tgtEl>
+                                          <p:spTgt spid="7"/>
+                                        </p:tgtEl>
+                                        <p:attrNameLst>
+                                          <p:attrName>ppt_y</p:attrName>
+                                        </p:attrNameLst>
+                                      </p:cBhvr>
+                                      <p:tavLst>
+                                        <p:tav tm="0">
+                                          <p:val>
+                                            <p:strVal val="#ppt_y+0.025"/>
+                                          </p:val>
+                                        </p:tav>
+                                        <p:tav tm="100000">
+                                          <p:val>
+                                            <p:strVal val="#ppt_y"/>
+                                          </p:val>
+                                        </p:tav>
+                                      </p:tavLst>
+                                    </p:anim>
+                                  </p:childTnLst>
+                                </p:cTn>
+                              </p:par>
+                              <p:par>
+                                <p:cTn id="21" presetID="10" presetClass="entr" presetSubtype="0" fill="hold" grpId="0" nodeType="withEffect">
+                                  <p:stCondLst>
+                                    <p:cond delay="640"/>
+                                  </p:stCondLst>
+                                  <p:childTnLst>
+                                    <p:set>
+                                      <p:cBhvr>
+                                        <p:cTn id="22" dur="1" fill="hold">
+                                          <p:stCondLst>
+                                            <p:cond delay="0"/>
+                                          </p:stCondLst>
+                                        </p:cTn>
+                                        <p:tgtEl>
+                                          <p:spTgt spid="4"/>
+                                        </p:tgtEl>
+                                        <p:attrNameLst>
+                                          <p:attrName>style.visibility</p:attrName>
+                                        </p:attrNameLst>
+                                      </p:cBhvr>
+                                      <p:to>
+                                        <p:strVal val="visible"/>
+                                      </p:to>
+                                    </p:set>
+                                    <p:animEffect transition="in" filter="fade">
+                                      <p:cBhvr>
+                                        <p:cTn id="23" dur="450"/>
+                                        <p:tgtEl>
+                                          <p:spTgt spid="4"/>
+                                        </p:tgtEl>
+                                      </p:cBhvr>
+                                    </p:animEffect>
+                                    <p:anim calcmode="lin" valueType="num">
+                                      <p:cBhvr additive="base">
+                                        <p:cTn id="24" dur="450" fill="hold"/>
+                                        <p:tgtEl>
+                                          <p:spTgt spid="4"/>
+                                        </p:tgtEl>
+                                        <p:attrNameLst>
+                                          <p:attrName>ppt_y</p:attrName>
+                                        </p:attrNameLst>
+                                      </p:cBhvr>
+                                      <p:tavLst>
+                                        <p:tav tm="0">
+                                          <p:val>
+                                            <p:strVal val="#ppt_y+0.025"/>
+                                          </p:val>
+                                        </p:tav>
+                                        <p:tav tm="100000">
+                                          <p:val>
+                                            <p:strVal val="#ppt_y"/>
+                                          </p:val>
+                                        </p:tav>
+                                      </p:tavLst>
+                                    </p:anim>
+                                  </p:childTnLst>
+                                </p:cTn>
+                              </p:par>
+                              <p:par>
+                                <p:cTn id="25" presetID="10" presetClass="entr" presetSubtype="0" fill="hold" grpId="0" nodeType="withEffect">
+                                  <p:stCondLst>
+                                    <p:cond delay="800"/>
+                                  </p:stCondLst>
+                                  <p:childTnLst>
+                                    <p:set>
+                                      <p:cBhvr>
+                                        <p:cTn id="26" dur="1" fill="hold">
+                                          <p:stCondLst>
+                                            <p:cond delay="0"/>
+                                          </p:stCondLst>
+                                        </p:cTn>
+                                        <p:tgtEl>
+                                          <p:spTgt spid="6"/>
+                                        </p:tgtEl>
+                                        <p:attrNameLst>
+                                          <p:attrName>style.visibility</p:attrName>
+                                        </p:attrNameLst>
+                                      </p:cBhvr>
+                                      <p:to>
+                                        <p:strVal val="visible"/>
+                                      </p:to>
+                                    </p:set>
+                                    <p:animEffect transition="in" filter="fade">
+                                      <p:cBhvr>
+                                        <p:cTn id="27" dur="450"/>
+                                        <p:tgtEl>
+                                          <p:spTgt spid="6"/>
+                                        </p:tgtEl>
+                                      </p:cBhvr>
+                                    </p:animEffect>
+                                    <p:anim calcmode="lin" valueType="num">
+                                      <p:cBhvr additive="base">
+                                        <p:cTn id="28" dur="450" fill="hold"/>
+                                        <p:tgtEl>
+                                          <p:spTgt spid="6"/>
+                                        </p:tgtEl>
+                                        <p:attrNameLst>
+                                          <p:attrName>ppt_y</p:attrName>
+                                        </p:attrNameLst>
+                                      </p:cBhvr>
+                                      <p:tavLst>
+                                        <p:tav tm="0">
+                                          <p:val>
+                                            <p:strVal val="#ppt_y+0.025"/>
+                                          </p:val>
+                                        </p:tav>
+                                        <p:tav tm="100000">
+                                          <p:val>
+                                            <p:strVal val="#ppt_y"/>
+                                          </p:val>
+                                        </p:tav>
+                                      </p:tavLst>
+                                    </p:anim>
+                                  </p:childTnLst>
+                                </p:cTn>
+                              </p:par>
+                              <p:par>
+                                <p:cTn id="29" presetID="10" presetClass="entr" presetSubtype="0" fill="hold" grpId="0" nodeType="withEffect">
+                                  <p:stCondLst>
+                                    <p:cond delay="960"/>
+                                  </p:stCondLst>
+                                  <p:childTnLst>
+                                    <p:set>
+                                      <p:cBhvr>
+                                        <p:cTn id="30" dur="1" fill="hold">
+                                          <p:stCondLst>
+                                            <p:cond delay="0"/>
+                                          </p:stCondLst>
+                                        </p:cTn>
+                                        <p:tgtEl>
+                                          <p:spTgt spid="8"/>
+                                        </p:tgtEl>
+                                        <p:attrNameLst>
+                                          <p:attrName>style.visibility</p:attrName>
+                                        </p:attrNameLst>
+                                      </p:cBhvr>
+                                      <p:to>
+                                        <p:strVal val="visible"/>
+                                      </p:to>
+                                    </p:set>
+                                    <p:animEffect transition="in" filter="fade">
+                                      <p:cBhvr>
+                                        <p:cTn id="31" dur="450"/>
+                                        <p:tgtEl>
+                                          <p:spTgt spid="8"/>
+                                        </p:tgtEl>
+                                      </p:cBhvr>
+                                    </p:animEffect>
+                                    <p:anim calcmode="lin" valueType="num">
+                                      <p:cBhvr additive="base">
+                                        <p:cTn id="32" dur="450" fill="hold"/>
+                                        <p:tgtEl>
+                                          <p:spTgt spid="8"/>
+                                        </p:tgtEl>
+                                        <p:attrNameLst>
+                                          <p:attrName>ppt_y</p:attrName>
+                                        </p:attrNameLst>
+                                      </p:cBhvr>
+                                      <p:tavLst>
+                                        <p:tav tm="0">
+                                          <p:val>
+                                            <p:strVal val="#ppt_y+0.025"/>
+                                          </p:val>
+                                        </p:tav>
+                                        <p:tav tm="100000">
+                                          <p:val>
+                                            <p:strVal val="#ppt_y"/>
+                                          </p:val>
+                                        </p:tav>
+                                      </p:tavLst>
+                                    </p:anim>
+                                  </p:childTnLst>
+                                </p:cTn>
+                              </p:par>
+                            </p:childTnLst>
+                          </p:cTn>
+                        </p:par>
+                      </p:childTnLst>
+                    </p:cTn>
+                  </p:par>
+                </p:childTnLst>
+              </p:cTn>
+              <p:prevCondLst>
+                <p:cond evt="onPrev" delay="0">
+                  <p:tgtEl>
+                    <p:sldTgt/>
+                  </p:tgtEl>
+                </p:cond>
+              </p:prevCondLst>
+              <p:nextCondLst>
+                <p:cond evt="onNext" delay="0">
+                  <p:tgtEl>
+                    <p:sldTgt/>
+                  </p:tgtEl>
+                </p:cond>
+              </p:nextCondLst>
+            </p:seq>
+          </p:childTnLst>
+        </p:cTn>
+      </p:par>
+    </p:tnLst>
+    <p:bldLst>
+      <p:bldP spid="2" grpId="0"/>
+      <p:bldP spid="3" grpId="0"/>
+      <p:bldP spid="5" grpId="0"/>
+      <p:bldP spid="7" grpId="0"/>
+      <p:bldP spid="4" grpId="0"/>
+      <p:bldP spid="6" grpId="0"/>
+      <p:bldP spid="8" grpId="0"/>
+    </p:bldLst>
+  </p:timing>
 </p:sld>
 </file>
 
@@ -5301,6 +10211,474 @@
   <p:clrMapOvr>
     <a:masterClrMapping/>
   </p:clrMapOvr>
+  <p:transition xmlns:p14="http://schemas.microsoft.com/office/powerpoint/2010/main" spd="slow" p14:dur="700">
+    <p:fade/>
+  </p:transition>
+  <p:timing xmlns:p="http://schemas.openxmlformats.org/presentationml/2006/main">
+    <p:tnLst>
+      <p:par>
+        <p:cTn id="1" dur="indefinite" restart="never" nodeType="tmRoot">
+          <p:childTnLst>
+            <p:seq concurrent="1" nextAc="seek">
+              <p:cTn id="2" dur="indefinite" nodeType="mainSeq">
+                <p:childTnLst>
+                  <p:par>
+                    <p:cTn id="3" fill="hold">
+                      <p:stCondLst>
+                        <p:cond delay="indefinite"/>
+                        <p:cond evt="onBegin" delay="0">
+                          <p:tn val="2"/>
+                        </p:cond>
+                      </p:stCondLst>
+                      <p:childTnLst>
+                        <p:par>
+                          <p:cTn id="4" fill="hold">
+                            <p:stCondLst>
+                              <p:cond delay="0"/>
+                            </p:stCondLst>
+                            <p:childTnLst>
+                              <p:par>
+                                <p:cTn id="5" presetID="10" presetClass="entr" presetSubtype="0" fill="hold" grpId="0" nodeType="withEffect">
+                                  <p:stCondLst>
+                                    <p:cond delay="0"/>
+                                  </p:stCondLst>
+                                  <p:childTnLst>
+                                    <p:set>
+                                      <p:cBhvr>
+                                        <p:cTn id="6" dur="1" fill="hold">
+                                          <p:stCondLst>
+                                            <p:cond delay="0"/>
+                                          </p:stCondLst>
+                                        </p:cTn>
+                                        <p:tgtEl>
+                                          <p:spTgt spid="2"/>
+                                        </p:tgtEl>
+                                        <p:attrNameLst>
+                                          <p:attrName>style.visibility</p:attrName>
+                                        </p:attrNameLst>
+                                      </p:cBhvr>
+                                      <p:to>
+                                        <p:strVal val="visible"/>
+                                      </p:to>
+                                    </p:set>
+                                    <p:animEffect transition="in" filter="fade">
+                                      <p:cBhvr>
+                                        <p:cTn id="7" dur="450"/>
+                                        <p:tgtEl>
+                                          <p:spTgt spid="2"/>
+                                        </p:tgtEl>
+                                      </p:cBhvr>
+                                    </p:animEffect>
+                                    <p:anim calcmode="lin" valueType="num">
+                                      <p:cBhvr additive="base">
+                                        <p:cTn id="8" dur="450" fill="hold"/>
+                                        <p:tgtEl>
+                                          <p:spTgt spid="2"/>
+                                        </p:tgtEl>
+                                        <p:attrNameLst>
+                                          <p:attrName>ppt_y</p:attrName>
+                                        </p:attrNameLst>
+                                      </p:cBhvr>
+                                      <p:tavLst>
+                                        <p:tav tm="0">
+                                          <p:val>
+                                            <p:strVal val="#ppt_y+0.025"/>
+                                          </p:val>
+                                        </p:tav>
+                                        <p:tav tm="100000">
+                                          <p:val>
+                                            <p:strVal val="#ppt_y"/>
+                                          </p:val>
+                                        </p:tav>
+                                      </p:tavLst>
+                                    </p:anim>
+                                  </p:childTnLst>
+                                </p:cTn>
+                              </p:par>
+                              <p:par>
+                                <p:cTn id="9" presetID="10" presetClass="entr" presetSubtype="0" fill="hold" grpId="0" nodeType="withEffect">
+                                  <p:stCondLst>
+                                    <p:cond delay="160"/>
+                                  </p:stCondLst>
+                                  <p:childTnLst>
+                                    <p:set>
+                                      <p:cBhvr>
+                                        <p:cTn id="10" dur="1" fill="hold">
+                                          <p:stCondLst>
+                                            <p:cond delay="0"/>
+                                          </p:stCondLst>
+                                        </p:cTn>
+                                        <p:tgtEl>
+                                          <p:spTgt spid="3"/>
+                                        </p:tgtEl>
+                                        <p:attrNameLst>
+                                          <p:attrName>style.visibility</p:attrName>
+                                        </p:attrNameLst>
+                                      </p:cBhvr>
+                                      <p:to>
+                                        <p:strVal val="visible"/>
+                                      </p:to>
+                                    </p:set>
+                                    <p:animEffect transition="in" filter="fade">
+                                      <p:cBhvr>
+                                        <p:cTn id="11" dur="450"/>
+                                        <p:tgtEl>
+                                          <p:spTgt spid="3"/>
+                                        </p:tgtEl>
+                                      </p:cBhvr>
+                                    </p:animEffect>
+                                    <p:anim calcmode="lin" valueType="num">
+                                      <p:cBhvr additive="base">
+                                        <p:cTn id="12" dur="450" fill="hold"/>
+                                        <p:tgtEl>
+                                          <p:spTgt spid="3"/>
+                                        </p:tgtEl>
+                                        <p:attrNameLst>
+                                          <p:attrName>ppt_y</p:attrName>
+                                        </p:attrNameLst>
+                                      </p:cBhvr>
+                                      <p:tavLst>
+                                        <p:tav tm="0">
+                                          <p:val>
+                                            <p:strVal val="#ppt_y+0.025"/>
+                                          </p:val>
+                                        </p:tav>
+                                        <p:tav tm="100000">
+                                          <p:val>
+                                            <p:strVal val="#ppt_y"/>
+                                          </p:val>
+                                        </p:tav>
+                                      </p:tavLst>
+                                    </p:anim>
+                                  </p:childTnLst>
+                                </p:cTn>
+                              </p:par>
+                              <p:par>
+                                <p:cTn id="13" presetID="10" presetClass="entr" presetSubtype="0" fill="hold" grpId="0" nodeType="withEffect">
+                                  <p:stCondLst>
+                                    <p:cond delay="320"/>
+                                  </p:stCondLst>
+                                  <p:childTnLst>
+                                    <p:set>
+                                      <p:cBhvr>
+                                        <p:cTn id="14" dur="1" fill="hold">
+                                          <p:stCondLst>
+                                            <p:cond delay="0"/>
+                                          </p:stCondLst>
+                                        </p:cTn>
+                                        <p:tgtEl>
+                                          <p:spTgt spid="8"/>
+                                        </p:tgtEl>
+                                        <p:attrNameLst>
+                                          <p:attrName>style.visibility</p:attrName>
+                                        </p:attrNameLst>
+                                      </p:cBhvr>
+                                      <p:to>
+                                        <p:strVal val="visible"/>
+                                      </p:to>
+                                    </p:set>
+                                    <p:animEffect transition="in" filter="fade">
+                                      <p:cBhvr>
+                                        <p:cTn id="15" dur="450"/>
+                                        <p:tgtEl>
+                                          <p:spTgt spid="8"/>
+                                        </p:tgtEl>
+                                      </p:cBhvr>
+                                    </p:animEffect>
+                                    <p:anim calcmode="lin" valueType="num">
+                                      <p:cBhvr additive="base">
+                                        <p:cTn id="16" dur="450" fill="hold"/>
+                                        <p:tgtEl>
+                                          <p:spTgt spid="8"/>
+                                        </p:tgtEl>
+                                        <p:attrNameLst>
+                                          <p:attrName>ppt_y</p:attrName>
+                                        </p:attrNameLst>
+                                      </p:cBhvr>
+                                      <p:tavLst>
+                                        <p:tav tm="0">
+                                          <p:val>
+                                            <p:strVal val="#ppt_y+0.025"/>
+                                          </p:val>
+                                        </p:tav>
+                                        <p:tav tm="100000">
+                                          <p:val>
+                                            <p:strVal val="#ppt_y"/>
+                                          </p:val>
+                                        </p:tav>
+                                      </p:tavLst>
+                                    </p:anim>
+                                  </p:childTnLst>
+                                </p:cTn>
+                              </p:par>
+                              <p:par>
+                                <p:cTn id="17" presetID="10" presetClass="entr" presetSubtype="0" fill="hold" grpId="0" nodeType="withEffect">
+                                  <p:stCondLst>
+                                    <p:cond delay="480"/>
+                                  </p:stCondLst>
+                                  <p:childTnLst>
+                                    <p:set>
+                                      <p:cBhvr>
+                                        <p:cTn id="18" dur="1" fill="hold">
+                                          <p:stCondLst>
+                                            <p:cond delay="0"/>
+                                          </p:stCondLst>
+                                        </p:cTn>
+                                        <p:tgtEl>
+                                          <p:spTgt spid="4"/>
+                                        </p:tgtEl>
+                                        <p:attrNameLst>
+                                          <p:attrName>style.visibility</p:attrName>
+                                        </p:attrNameLst>
+                                      </p:cBhvr>
+                                      <p:to>
+                                        <p:strVal val="visible"/>
+                                      </p:to>
+                                    </p:set>
+                                    <p:animEffect transition="in" filter="fade">
+                                      <p:cBhvr>
+                                        <p:cTn id="19" dur="450"/>
+                                        <p:tgtEl>
+                                          <p:spTgt spid="4"/>
+                                        </p:tgtEl>
+                                      </p:cBhvr>
+                                    </p:animEffect>
+                                    <p:anim calcmode="lin" valueType="num">
+                                      <p:cBhvr additive="base">
+                                        <p:cTn id="20" dur="450" fill="hold"/>
+                                        <p:tgtEl>
+                                          <p:spTgt spid="4"/>
+                                        </p:tgtEl>
+                                        <p:attrNameLst>
+                                          <p:attrName>ppt_y</p:attrName>
+                                        </p:attrNameLst>
+                                      </p:cBhvr>
+                                      <p:tavLst>
+                                        <p:tav tm="0">
+                                          <p:val>
+                                            <p:strVal val="#ppt_y+0.025"/>
+                                          </p:val>
+                                        </p:tav>
+                                        <p:tav tm="100000">
+                                          <p:val>
+                                            <p:strVal val="#ppt_y"/>
+                                          </p:val>
+                                        </p:tav>
+                                      </p:tavLst>
+                                    </p:anim>
+                                  </p:childTnLst>
+                                </p:cTn>
+                              </p:par>
+                              <p:par>
+                                <p:cTn id="21" presetID="10" presetClass="entr" presetSubtype="0" fill="hold" grpId="0" nodeType="withEffect">
+                                  <p:stCondLst>
+                                    <p:cond delay="640"/>
+                                  </p:stCondLst>
+                                  <p:childTnLst>
+                                    <p:set>
+                                      <p:cBhvr>
+                                        <p:cTn id="22" dur="1" fill="hold">
+                                          <p:stCondLst>
+                                            <p:cond delay="0"/>
+                                          </p:stCondLst>
+                                        </p:cTn>
+                                        <p:tgtEl>
+                                          <p:spTgt spid="5"/>
+                                        </p:tgtEl>
+                                        <p:attrNameLst>
+                                          <p:attrName>style.visibility</p:attrName>
+                                        </p:attrNameLst>
+                                      </p:cBhvr>
+                                      <p:to>
+                                        <p:strVal val="visible"/>
+                                      </p:to>
+                                    </p:set>
+                                    <p:animEffect transition="in" filter="fade">
+                                      <p:cBhvr>
+                                        <p:cTn id="23" dur="450"/>
+                                        <p:tgtEl>
+                                          <p:spTgt spid="5"/>
+                                        </p:tgtEl>
+                                      </p:cBhvr>
+                                    </p:animEffect>
+                                    <p:anim calcmode="lin" valueType="num">
+                                      <p:cBhvr additive="base">
+                                        <p:cTn id="24" dur="450" fill="hold"/>
+                                        <p:tgtEl>
+                                          <p:spTgt spid="5"/>
+                                        </p:tgtEl>
+                                        <p:attrNameLst>
+                                          <p:attrName>ppt_y</p:attrName>
+                                        </p:attrNameLst>
+                                      </p:cBhvr>
+                                      <p:tavLst>
+                                        <p:tav tm="0">
+                                          <p:val>
+                                            <p:strVal val="#ppt_y+0.025"/>
+                                          </p:val>
+                                        </p:tav>
+                                        <p:tav tm="100000">
+                                          <p:val>
+                                            <p:strVal val="#ppt_y"/>
+                                          </p:val>
+                                        </p:tav>
+                                      </p:tavLst>
+                                    </p:anim>
+                                  </p:childTnLst>
+                                </p:cTn>
+                              </p:par>
+                              <p:par>
+                                <p:cTn id="25" presetID="10" presetClass="entr" presetSubtype="0" fill="hold" grpId="0" nodeType="withEffect">
+                                  <p:stCondLst>
+                                    <p:cond delay="800"/>
+                                  </p:stCondLst>
+                                  <p:childTnLst>
+                                    <p:set>
+                                      <p:cBhvr>
+                                        <p:cTn id="26" dur="1" fill="hold">
+                                          <p:stCondLst>
+                                            <p:cond delay="0"/>
+                                          </p:stCondLst>
+                                        </p:cTn>
+                                        <p:tgtEl>
+                                          <p:spTgt spid="6"/>
+                                        </p:tgtEl>
+                                        <p:attrNameLst>
+                                          <p:attrName>style.visibility</p:attrName>
+                                        </p:attrNameLst>
+                                      </p:cBhvr>
+                                      <p:to>
+                                        <p:strVal val="visible"/>
+                                      </p:to>
+                                    </p:set>
+                                    <p:animEffect transition="in" filter="fade">
+                                      <p:cBhvr>
+                                        <p:cTn id="27" dur="450"/>
+                                        <p:tgtEl>
+                                          <p:spTgt spid="6"/>
+                                        </p:tgtEl>
+                                      </p:cBhvr>
+                                    </p:animEffect>
+                                    <p:anim calcmode="lin" valueType="num">
+                                      <p:cBhvr additive="base">
+                                        <p:cTn id="28" dur="450" fill="hold"/>
+                                        <p:tgtEl>
+                                          <p:spTgt spid="6"/>
+                                        </p:tgtEl>
+                                        <p:attrNameLst>
+                                          <p:attrName>ppt_y</p:attrName>
+                                        </p:attrNameLst>
+                                      </p:cBhvr>
+                                      <p:tavLst>
+                                        <p:tav tm="0">
+                                          <p:val>
+                                            <p:strVal val="#ppt_y+0.025"/>
+                                          </p:val>
+                                        </p:tav>
+                                        <p:tav tm="100000">
+                                          <p:val>
+                                            <p:strVal val="#ppt_y"/>
+                                          </p:val>
+                                        </p:tav>
+                                      </p:tavLst>
+                                    </p:anim>
+                                  </p:childTnLst>
+                                </p:cTn>
+                              </p:par>
+                              <p:par>
+                                <p:cTn id="29" presetID="10" presetClass="entr" presetSubtype="0" fill="hold" grpId="0" nodeType="withEffect">
+                                  <p:stCondLst>
+                                    <p:cond delay="960"/>
+                                  </p:stCondLst>
+                                  <p:childTnLst>
+                                    <p:set>
+                                      <p:cBhvr>
+                                        <p:cTn id="30" dur="1" fill="hold">
+                                          <p:stCondLst>
+                                            <p:cond delay="0"/>
+                                          </p:stCondLst>
+                                        </p:cTn>
+                                        <p:tgtEl>
+                                          <p:spTgt spid="7"/>
+                                        </p:tgtEl>
+                                        <p:attrNameLst>
+                                          <p:attrName>style.visibility</p:attrName>
+                                        </p:attrNameLst>
+                                      </p:cBhvr>
+                                      <p:to>
+                                        <p:strVal val="visible"/>
+                                      </p:to>
+                                    </p:set>
+                                    <p:animEffect transition="in" filter="fade">
+                                      <p:cBhvr>
+                                        <p:cTn id="31" dur="450"/>
+                                        <p:tgtEl>
+                                          <p:spTgt spid="7"/>
+                                        </p:tgtEl>
+                                      </p:cBhvr>
+                                    </p:animEffect>
+                                    <p:anim calcmode="lin" valueType="num">
+                                      <p:cBhvr additive="base">
+                                        <p:cTn id="32" dur="450" fill="hold"/>
+                                        <p:tgtEl>
+                                          <p:spTgt spid="7"/>
+                                        </p:tgtEl>
+                                        <p:attrNameLst>
+                                          <p:attrName>ppt_y</p:attrName>
+                                        </p:attrNameLst>
+                                      </p:cBhvr>
+                                      <p:tavLst>
+                                        <p:tav tm="0">
+                                          <p:val>
+                                            <p:strVal val="#ppt_y+0.025"/>
+                                          </p:val>
+                                        </p:tav>
+                                        <p:tav tm="100000">
+                                          <p:val>
+                                            <p:strVal val="#ppt_y"/>
+                                          </p:val>
+                                        </p:tav>
+                                      </p:tavLst>
+                                    </p:anim>
+                                  </p:childTnLst>
+                                </p:cTn>
+                              </p:par>
+                            </p:childTnLst>
+                          </p:cTn>
+                        </p:par>
+                      </p:childTnLst>
+                    </p:cTn>
+                  </p:par>
+                </p:childTnLst>
+              </p:cTn>
+              <p:prevCondLst>
+                <p:cond evt="onPrev" delay="0">
+                  <p:tgtEl>
+                    <p:sldTgt/>
+                  </p:tgtEl>
+                </p:cond>
+              </p:prevCondLst>
+              <p:nextCondLst>
+                <p:cond evt="onNext" delay="0">
+                  <p:tgtEl>
+                    <p:sldTgt/>
+                  </p:tgtEl>
+                </p:cond>
+              </p:nextCondLst>
+            </p:seq>
+          </p:childTnLst>
+        </p:cTn>
+      </p:par>
+    </p:tnLst>
+    <p:bldLst>
+      <p:bldP spid="2" grpId="0"/>
+      <p:bldP spid="3" grpId="0"/>
+      <p:bldP spid="4" grpId="0"/>
+      <p:bldP spid="5" grpId="0"/>
+      <p:bldP spid="6" grpId="0"/>
+      <p:bldP spid="7" grpId="0"/>
+    </p:bldLst>
+  </p:timing>
 </p:sld>
 </file>
 
@@ -5414,6 +10792,180 @@
   <p:clrMapOvr>
     <a:masterClrMapping/>
   </p:clrMapOvr>
+  <p:transition xmlns:p14="http://schemas.microsoft.com/office/powerpoint/2010/main" spd="slow" p14:dur="700">
+    <p:fade/>
+  </p:transition>
+  <p:timing xmlns:p="http://schemas.openxmlformats.org/presentationml/2006/main">
+    <p:tnLst>
+      <p:par>
+        <p:cTn id="1" dur="indefinite" restart="never" nodeType="tmRoot">
+          <p:childTnLst>
+            <p:seq concurrent="1" nextAc="seek">
+              <p:cTn id="2" dur="indefinite" nodeType="mainSeq">
+                <p:childTnLst>
+                  <p:par>
+                    <p:cTn id="3" fill="hold">
+                      <p:stCondLst>
+                        <p:cond delay="indefinite"/>
+                        <p:cond evt="onBegin" delay="0">
+                          <p:tn val="2"/>
+                        </p:cond>
+                      </p:stCondLst>
+                      <p:childTnLst>
+                        <p:par>
+                          <p:cTn id="4" fill="hold">
+                            <p:stCondLst>
+                              <p:cond delay="0"/>
+                            </p:stCondLst>
+                            <p:childTnLst>
+                              <p:par>
+                                <p:cTn id="5" presetID="10" presetClass="entr" presetSubtype="0" fill="hold" grpId="0" nodeType="withEffect">
+                                  <p:stCondLst>
+                                    <p:cond delay="0"/>
+                                  </p:stCondLst>
+                                  <p:childTnLst>
+                                    <p:set>
+                                      <p:cBhvr>
+                                        <p:cTn id="6" dur="1" fill="hold">
+                                          <p:stCondLst>
+                                            <p:cond delay="0"/>
+                                          </p:stCondLst>
+                                        </p:cTn>
+                                        <p:tgtEl>
+                                          <p:spTgt spid="2"/>
+                                        </p:tgtEl>
+                                        <p:attrNameLst>
+                                          <p:attrName>style.visibility</p:attrName>
+                                        </p:attrNameLst>
+                                      </p:cBhvr>
+                                      <p:to>
+                                        <p:strVal val="visible"/>
+                                      </p:to>
+                                    </p:set>
+                                    <p:animEffect transition="in" filter="fade">
+                                      <p:cBhvr>
+                                        <p:cTn id="7" dur="450"/>
+                                        <p:tgtEl>
+                                          <p:spTgt spid="2"/>
+                                        </p:tgtEl>
+                                      </p:cBhvr>
+                                    </p:animEffect>
+                                    <p:anim calcmode="lin" valueType="num">
+                                      <p:cBhvr additive="base">
+                                        <p:cTn id="8" dur="450" fill="hold"/>
+                                        <p:tgtEl>
+                                          <p:spTgt spid="2"/>
+                                        </p:tgtEl>
+                                        <p:attrNameLst>
+                                          <p:attrName>ppt_y</p:attrName>
+                                        </p:attrNameLst>
+                                      </p:cBhvr>
+                                      <p:tavLst>
+                                        <p:tav tm="0">
+                                          <p:val>
+                                            <p:strVal val="#ppt_y+0.025"/>
+                                          </p:val>
+                                        </p:tav>
+                                        <p:tav tm="100000">
+                                          <p:val>
+                                            <p:strVal val="#ppt_y"/>
+                                          </p:val>
+                                        </p:tav>
+                                      </p:tavLst>
+                                    </p:anim>
+                                  </p:childTnLst>
+                                </p:cTn>
+                              </p:par>
+                              <p:par>
+                                <p:cTn id="9" presetID="10" presetClass="entr" presetSubtype="0" fill="hold" grpId="0" nodeType="withEffect">
+                                  <p:stCondLst>
+                                    <p:cond delay="160"/>
+                                  </p:stCondLst>
+                                  <p:childTnLst>
+                                    <p:set>
+                                      <p:cBhvr>
+                                        <p:cTn id="10" dur="1" fill="hold">
+                                          <p:stCondLst>
+                                            <p:cond delay="0"/>
+                                          </p:stCondLst>
+                                        </p:cTn>
+                                        <p:tgtEl>
+                                          <p:spTgt spid="3"/>
+                                        </p:tgtEl>
+                                        <p:attrNameLst>
+                                          <p:attrName>style.visibility</p:attrName>
+                                        </p:attrNameLst>
+                                      </p:cBhvr>
+                                      <p:to>
+                                        <p:strVal val="visible"/>
+                                      </p:to>
+                                    </p:set>
+                                    <p:animEffect transition="in" filter="fade">
+                                      <p:cBhvr>
+                                        <p:cTn id="11" dur="450"/>
+                                        <p:tgtEl>
+                                          <p:spTgt spid="3"/>
+                                        </p:tgtEl>
+                                      </p:cBhvr>
+                                    </p:animEffect>
+                                    <p:anim calcmode="lin" valueType="num">
+                                      <p:cBhvr additive="base">
+                                        <p:cTn id="12" dur="450" fill="hold"/>
+                                        <p:tgtEl>
+                                          <p:spTgt spid="3"/>
+                                        </p:tgtEl>
+                                        <p:attrNameLst>
+                                          <p:attrName>ppt_y</p:attrName>
+                                        </p:attrNameLst>
+                                      </p:cBhvr>
+                                      <p:tavLst>
+                                        <p:tav tm="0">
+                                          <p:val>
+                                            <p:strVal val="#ppt_y+0.025"/>
+                                          </p:val>
+                                        </p:tav>
+                                        <p:tav tm="100000">
+                                          <p:val>
+                                            <p:strVal val="#ppt_y"/>
+                                          </p:val>
+                                        </p:tav>
+                                      </p:tavLst>
+                                    </p:anim>
+                                  </p:childTnLst>
+                                </p:cTn>
+                              </p:par>
+                            </p:childTnLst>
+                          </p:cTn>
+                        </p:par>
+                      </p:childTnLst>
+                    </p:cTn>
+                  </p:par>
+                </p:childTnLst>
+              </p:cTn>
+              <p:prevCondLst>
+                <p:cond evt="onPrev" delay="0">
+                  <p:tgtEl>
+                    <p:sldTgt/>
+                  </p:tgtEl>
+                </p:cond>
+              </p:prevCondLst>
+              <p:nextCondLst>
+                <p:cond evt="onNext" delay="0">
+                  <p:tgtEl>
+                    <p:sldTgt/>
+                  </p:tgtEl>
+                </p:cond>
+              </p:nextCondLst>
+            </p:seq>
+          </p:childTnLst>
+        </p:cTn>
+      </p:par>
+    </p:tnLst>
+    <p:bldLst>
+      <p:bldP spid="2" grpId="0"/>
+      <p:bldP spid="3" grpId="0"/>
+    </p:bldLst>
+  </p:timing>
 </p:sld>
 </file>
 

--- a/assets/showcase/business-review/Annual-Review.pptx
+++ b/assets/showcase/business-review/Annual-Review.pptx
@@ -2104,7 +2104,7 @@
   <p:clrMapOvr>
     <a:masterClrMapping/>
   </p:clrMapOvr>
-  <p:transition xmlns:p14="http://schemas.microsoft.com/office/powerpoint/2010/main" spd="slow" p14:dur="700">
+  <p:transition xmlns:p14="http://schemas.microsoft.com/office/powerpoint/2010/main" spd="slow" p14:dur="420">
     <p:fade/>
   </p:transition>
   <p:timing xmlns:p="http://schemas.openxmlformats.org/presentationml/2006/main">
@@ -2156,7 +2156,7 @@
                                     </p:set>
                                     <p:animEffect transition="in" filter="fade">
                                       <p:cBhvr>
-                                        <p:cTn id="7" dur="450"/>
+                                        <p:cTn id="7" dur="320"/>
                                         <p:tgtEl>
                                           <p:spTgt spid="2"/>
                                         </p:tgtEl>
@@ -2164,7 +2164,7 @@
                                     </p:animEffect>
                                     <p:anim calcmode="lin" valueType="num">
                                       <p:cBhvr additive="base">
-                                        <p:cTn id="8" dur="450" fill="hold"/>
+                                        <p:cTn id="8" dur="320" fill="hold"/>
                                         <p:tgtEl>
                                           <p:spTgt spid="2"/>
                                         </p:tgtEl>
@@ -2175,7 +2175,7 @@
                                       <p:tavLst>
                                         <p:tav tm="0">
                                           <p:val>
-                                            <p:strVal val="#ppt_y+0.025"/>
+                                            <p:strVal val="#ppt_y+0.015"/>
                                           </p:val>
                                         </p:tav>
                                         <p:tav tm="100000">
@@ -2191,7 +2191,7 @@
                               <p:par>
                                 <p:cTn id="9" presetID="10" presetClass="entr" presetSubtype="0" fill="hold" grpId="0" nodeType="withEffect">
                                   <p:stCondLst>
-                                    <p:cond delay="160"/>
+                                    <p:cond delay="110"/>
                                   </p:stCondLst>
                                   <p:childTnLst>
                                     <p:set>
@@ -2214,7 +2214,7 @@
                                     </p:set>
                                     <p:animEffect transition="in" filter="fade">
                                       <p:cBhvr>
-                                        <p:cTn id="11" dur="450"/>
+                                        <p:cTn id="11" dur="320"/>
                                         <p:tgtEl>
                                           <p:spTgt spid="3"/>
                                         </p:tgtEl>
@@ -2222,7 +2222,7 @@
                                     </p:animEffect>
                                     <p:anim calcmode="lin" valueType="num">
                                       <p:cBhvr additive="base">
-                                        <p:cTn id="12" dur="450" fill="hold"/>
+                                        <p:cTn id="12" dur="320" fill="hold"/>
                                         <p:tgtEl>
                                           <p:spTgt spid="3"/>
                                         </p:tgtEl>
@@ -2233,7 +2233,7 @@
                                       <p:tavLst>
                                         <p:tav tm="0">
                                           <p:val>
-                                            <p:strVal val="#ppt_y+0.025"/>
+                                            <p:strVal val="#ppt_y+0.015"/>
                                           </p:val>
                                         </p:tav>
                                         <p:tav tm="100000">
@@ -2249,7 +2249,7 @@
                               <p:par>
                                 <p:cTn id="13" presetID="10" presetClass="entr" presetSubtype="0" fill="hold" grpId="0" nodeType="withEffect">
                                   <p:stCondLst>
-                                    <p:cond delay="320"/>
+                                    <p:cond delay="220"/>
                                   </p:stCondLst>
                                   <p:childTnLst>
                                     <p:set>
@@ -2272,7 +2272,7 @@
                                     </p:set>
                                     <p:animEffect transition="in" filter="fade">
                                       <p:cBhvr>
-                                        <p:cTn id="15" dur="450"/>
+                                        <p:cTn id="15" dur="320"/>
                                         <p:tgtEl>
                                           <p:spTgt spid="4"/>
                                         </p:tgtEl>
@@ -2280,7 +2280,7 @@
                                     </p:animEffect>
                                     <p:anim calcmode="lin" valueType="num">
                                       <p:cBhvr additive="base">
-                                        <p:cTn id="16" dur="450" fill="hold"/>
+                                        <p:cTn id="16" dur="320" fill="hold"/>
                                         <p:tgtEl>
                                           <p:spTgt spid="4"/>
                                         </p:tgtEl>
@@ -2291,7 +2291,7 @@
                                       <p:tavLst>
                                         <p:tav tm="0">
                                           <p:val>
-                                            <p:strVal val="#ppt_y+0.025"/>
+                                            <p:strVal val="#ppt_y+0.015"/>
                                           </p:val>
                                         </p:tav>
                                         <p:tav tm="100000">
@@ -2307,7 +2307,7 @@
                               <p:par>
                                 <p:cTn id="17" presetID="10" presetClass="entr" presetSubtype="0" fill="hold" grpId="0" nodeType="withEffect">
                                   <p:stCondLst>
-                                    <p:cond delay="480"/>
+                                    <p:cond delay="330"/>
                                   </p:stCondLst>
                                   <p:childTnLst>
                                     <p:set>
@@ -2330,7 +2330,7 @@
                                     </p:set>
                                     <p:animEffect transition="in" filter="fade">
                                       <p:cBhvr>
-                                        <p:cTn id="19" dur="450"/>
+                                        <p:cTn id="19" dur="320"/>
                                         <p:tgtEl>
                                           <p:spTgt spid="5"/>
                                         </p:tgtEl>
@@ -2338,7 +2338,7 @@
                                     </p:animEffect>
                                     <p:anim calcmode="lin" valueType="num">
                                       <p:cBhvr additive="base">
-                                        <p:cTn id="20" dur="450" fill="hold"/>
+                                        <p:cTn id="20" dur="320" fill="hold"/>
                                         <p:tgtEl>
                                           <p:spTgt spid="5"/>
                                         </p:tgtEl>
@@ -2349,7 +2349,7 @@
                                       <p:tavLst>
                                         <p:tav tm="0">
                                           <p:val>
-                                            <p:strVal val="#ppt_y+0.025"/>
+                                            <p:strVal val="#ppt_y+0.015"/>
                                           </p:val>
                                         </p:tav>
                                         <p:tav tm="100000">
@@ -2545,7 +2545,7 @@
   <p:clrMapOvr>
     <a:masterClrMapping/>
   </p:clrMapOvr>
-  <p:transition xmlns:p14="http://schemas.microsoft.com/office/powerpoint/2010/main" spd="slow" p14:dur="700">
+  <p:transition xmlns:p14="http://schemas.microsoft.com/office/powerpoint/2010/main" spd="slow" p14:dur="420">
     <p:fade/>
   </p:transition>
   <p:timing xmlns:p="http://schemas.openxmlformats.org/presentationml/2006/main">
@@ -2597,7 +2597,7 @@
                                     </p:set>
                                     <p:animEffect transition="in" filter="fade">
                                       <p:cBhvr>
-                                        <p:cTn id="7" dur="450"/>
+                                        <p:cTn id="7" dur="320"/>
                                         <p:tgtEl>
                                           <p:spTgt spid="2"/>
                                         </p:tgtEl>
@@ -2605,7 +2605,7 @@
                                     </p:animEffect>
                                     <p:anim calcmode="lin" valueType="num">
                                       <p:cBhvr additive="base">
-                                        <p:cTn id="8" dur="450" fill="hold"/>
+                                        <p:cTn id="8" dur="320" fill="hold"/>
                                         <p:tgtEl>
                                           <p:spTgt spid="2"/>
                                         </p:tgtEl>
@@ -2616,7 +2616,7 @@
                                       <p:tavLst>
                                         <p:tav tm="0">
                                           <p:val>
-                                            <p:strVal val="#ppt_y+0.025"/>
+                                            <p:strVal val="#ppt_y+0.015"/>
                                           </p:val>
                                         </p:tav>
                                         <p:tav tm="100000">
@@ -2632,7 +2632,7 @@
                               <p:par>
                                 <p:cTn id="9" presetID="10" presetClass="entr" presetSubtype="0" fill="hold" grpId="0" nodeType="withEffect">
                                   <p:stCondLst>
-                                    <p:cond delay="160"/>
+                                    <p:cond delay="110"/>
                                   </p:stCondLst>
                                   <p:childTnLst>
                                     <p:set>
@@ -2655,7 +2655,7 @@
                                     </p:set>
                                     <p:animEffect transition="in" filter="fade">
                                       <p:cBhvr>
-                                        <p:cTn id="11" dur="450"/>
+                                        <p:cTn id="11" dur="320"/>
                                         <p:tgtEl>
                                           <p:spTgt spid="3"/>
                                         </p:tgtEl>
@@ -2663,7 +2663,7 @@
                                     </p:animEffect>
                                     <p:anim calcmode="lin" valueType="num">
                                       <p:cBhvr additive="base">
-                                        <p:cTn id="12" dur="450" fill="hold"/>
+                                        <p:cTn id="12" dur="320" fill="hold"/>
                                         <p:tgtEl>
                                           <p:spTgt spid="3"/>
                                         </p:tgtEl>
@@ -2674,7 +2674,7 @@
                                       <p:tavLst>
                                         <p:tav tm="0">
                                           <p:val>
-                                            <p:strVal val="#ppt_y+0.025"/>
+                                            <p:strVal val="#ppt_y+0.015"/>
                                           </p:val>
                                         </p:tav>
                                         <p:tav tm="100000">
@@ -2690,7 +2690,7 @@
                               <p:par>
                                 <p:cTn id="13" presetID="10" presetClass="entr" presetSubtype="0" fill="hold" grpId="0" nodeType="withEffect">
                                   <p:stCondLst>
-                                    <p:cond delay="320"/>
+                                    <p:cond delay="220"/>
                                   </p:stCondLst>
                                   <p:childTnLst>
                                     <p:set>
@@ -2713,7 +2713,7 @@
                                     </p:set>
                                     <p:animEffect transition="in" filter="fade">
                                       <p:cBhvr>
-                                        <p:cTn id="15" dur="450"/>
+                                        <p:cTn id="15" dur="320"/>
                                         <p:tgtEl>
                                           <p:spTgt spid="4"/>
                                         </p:tgtEl>
@@ -2721,7 +2721,7 @@
                                     </p:animEffect>
                                     <p:anim calcmode="lin" valueType="num">
                                       <p:cBhvr additive="base">
-                                        <p:cTn id="16" dur="450" fill="hold"/>
+                                        <p:cTn id="16" dur="320" fill="hold"/>
                                         <p:tgtEl>
                                           <p:spTgt spid="4"/>
                                         </p:tgtEl>
@@ -2732,7 +2732,7 @@
                                       <p:tavLst>
                                         <p:tav tm="0">
                                           <p:val>
-                                            <p:strVal val="#ppt_y+0.025"/>
+                                            <p:strVal val="#ppt_y+0.015"/>
                                           </p:val>
                                         </p:tav>
                                         <p:tav tm="100000">
@@ -3092,7 +3092,7 @@
   <p:clrMapOvr>
     <a:masterClrMapping/>
   </p:clrMapOvr>
-  <p:transition xmlns:p14="http://schemas.microsoft.com/office/powerpoint/2010/main" spd="slow" p14:dur="700">
+  <p:transition xmlns:p14="http://schemas.microsoft.com/office/powerpoint/2010/main" spd="slow" p14:dur="420">
     <p:fade/>
   </p:transition>
   <p:timing xmlns:p="http://schemas.openxmlformats.org/presentationml/2006/main">
@@ -3144,7 +3144,7 @@
                                     </p:set>
                                     <p:animEffect transition="in" filter="fade">
                                       <p:cBhvr>
-                                        <p:cTn id="7" dur="450"/>
+                                        <p:cTn id="7" dur="320"/>
                                         <p:tgtEl>
                                           <p:spTgt spid="2"/>
                                         </p:tgtEl>
@@ -3152,7 +3152,7 @@
                                     </p:animEffect>
                                     <p:anim calcmode="lin" valueType="num">
                                       <p:cBhvr additive="base">
-                                        <p:cTn id="8" dur="450" fill="hold"/>
+                                        <p:cTn id="8" dur="320" fill="hold"/>
                                         <p:tgtEl>
                                           <p:spTgt spid="2"/>
                                         </p:tgtEl>
@@ -3163,7 +3163,7 @@
                                       <p:tavLst>
                                         <p:tav tm="0">
                                           <p:val>
-                                            <p:strVal val="#ppt_y+0.025"/>
+                                            <p:strVal val="#ppt_y+0.015"/>
                                           </p:val>
                                         </p:tav>
                                         <p:tav tm="100000">
@@ -3179,7 +3179,7 @@
                               <p:par>
                                 <p:cTn id="9" presetID="10" presetClass="entr" presetSubtype="0" fill="hold" grpId="0" nodeType="withEffect">
                                   <p:stCondLst>
-                                    <p:cond delay="160"/>
+                                    <p:cond delay="110"/>
                                   </p:stCondLst>
                                   <p:childTnLst>
                                     <p:set>
@@ -3202,7 +3202,7 @@
                                     </p:set>
                                     <p:animEffect transition="in" filter="fade">
                                       <p:cBhvr>
-                                        <p:cTn id="11" dur="450"/>
+                                        <p:cTn id="11" dur="320"/>
                                         <p:tgtEl>
                                           <p:spTgt spid="3"/>
                                         </p:tgtEl>
@@ -3210,7 +3210,7 @@
                                     </p:animEffect>
                                     <p:anim calcmode="lin" valueType="num">
                                       <p:cBhvr additive="base">
-                                        <p:cTn id="12" dur="450" fill="hold"/>
+                                        <p:cTn id="12" dur="320" fill="hold"/>
                                         <p:tgtEl>
                                           <p:spTgt spid="3"/>
                                         </p:tgtEl>
@@ -3221,7 +3221,7 @@
                                       <p:tavLst>
                                         <p:tav tm="0">
                                           <p:val>
-                                            <p:strVal val="#ppt_y+0.025"/>
+                                            <p:strVal val="#ppt_y+0.015"/>
                                           </p:val>
                                         </p:tav>
                                         <p:tav tm="100000">
@@ -3237,7 +3237,7 @@
                               <p:par>
                                 <p:cTn id="13" presetID="10" presetClass="entr" presetSubtype="0" fill="hold" grpId="0" nodeType="withEffect">
                                   <p:stCondLst>
-                                    <p:cond delay="320"/>
+                                    <p:cond delay="220"/>
                                   </p:stCondLst>
                                   <p:childTnLst>
                                     <p:set>
@@ -3260,7 +3260,7 @@
                                     </p:set>
                                     <p:animEffect transition="in" filter="fade">
                                       <p:cBhvr>
-                                        <p:cTn id="15" dur="450"/>
+                                        <p:cTn id="15" dur="320"/>
                                         <p:tgtEl>
                                           <p:spTgt spid="5"/>
                                         </p:tgtEl>
@@ -3268,7 +3268,7 @@
                                     </p:animEffect>
                                     <p:anim calcmode="lin" valueType="num">
                                       <p:cBhvr additive="base">
-                                        <p:cTn id="16" dur="450" fill="hold"/>
+                                        <p:cTn id="16" dur="320" fill="hold"/>
                                         <p:tgtEl>
                                           <p:spTgt spid="5"/>
                                         </p:tgtEl>
@@ -3279,7 +3279,7 @@
                                       <p:tavLst>
                                         <p:tav tm="0">
                                           <p:val>
-                                            <p:strVal val="#ppt_y+0.025"/>
+                                            <p:strVal val="#ppt_y+0.015"/>
                                           </p:val>
                                         </p:tav>
                                         <p:tav tm="100000">
@@ -3295,7 +3295,7 @@
                               <p:par>
                                 <p:cTn id="17" presetID="10" presetClass="entr" presetSubtype="0" fill="hold" grpId="0" nodeType="withEffect">
                                   <p:stCondLst>
-                                    <p:cond delay="480"/>
+                                    <p:cond delay="330"/>
                                   </p:stCondLst>
                                   <p:childTnLst>
                                     <p:set>
@@ -3318,7 +3318,7 @@
                                     </p:set>
                                     <p:animEffect transition="in" filter="fade">
                                       <p:cBhvr>
-                                        <p:cTn id="19" dur="450"/>
+                                        <p:cTn id="19" dur="320"/>
                                         <p:tgtEl>
                                           <p:spTgt spid="7"/>
                                         </p:tgtEl>
@@ -3326,7 +3326,7 @@
                                     </p:animEffect>
                                     <p:anim calcmode="lin" valueType="num">
                                       <p:cBhvr additive="base">
-                                        <p:cTn id="20" dur="450" fill="hold"/>
+                                        <p:cTn id="20" dur="320" fill="hold"/>
                                         <p:tgtEl>
                                           <p:spTgt spid="7"/>
                                         </p:tgtEl>
@@ -3337,7 +3337,7 @@
                                       <p:tavLst>
                                         <p:tav tm="0">
                                           <p:val>
-                                            <p:strVal val="#ppt_y+0.025"/>
+                                            <p:strVal val="#ppt_y+0.015"/>
                                           </p:val>
                                         </p:tav>
                                         <p:tav tm="100000">
@@ -3353,7 +3353,7 @@
                               <p:par>
                                 <p:cTn id="21" presetID="10" presetClass="entr" presetSubtype="0" fill="hold" grpId="0" nodeType="withEffect">
                                   <p:stCondLst>
-                                    <p:cond delay="640"/>
+                                    <p:cond delay="440"/>
                                   </p:stCondLst>
                                   <p:childTnLst>
                                     <p:set>
@@ -3376,7 +3376,7 @@
                                     </p:set>
                                     <p:animEffect transition="in" filter="fade">
                                       <p:cBhvr>
-                                        <p:cTn id="23" dur="450"/>
+                                        <p:cTn id="23" dur="320"/>
                                         <p:tgtEl>
                                           <p:spTgt spid="4"/>
                                         </p:tgtEl>
@@ -3384,7 +3384,7 @@
                                     </p:animEffect>
                                     <p:anim calcmode="lin" valueType="num">
                                       <p:cBhvr additive="base">
-                                        <p:cTn id="24" dur="450" fill="hold"/>
+                                        <p:cTn id="24" dur="320" fill="hold"/>
                                         <p:tgtEl>
                                           <p:spTgt spid="4"/>
                                         </p:tgtEl>
@@ -3395,7 +3395,7 @@
                                       <p:tavLst>
                                         <p:tav tm="0">
                                           <p:val>
-                                            <p:strVal val="#ppt_y+0.025"/>
+                                            <p:strVal val="#ppt_y+0.015"/>
                                           </p:val>
                                         </p:tav>
                                         <p:tav tm="100000">
@@ -3411,7 +3411,7 @@
                               <p:par>
                                 <p:cTn id="25" presetID="10" presetClass="entr" presetSubtype="0" fill="hold" grpId="0" nodeType="withEffect">
                                   <p:stCondLst>
-                                    <p:cond delay="800"/>
+                                    <p:cond delay="550"/>
                                   </p:stCondLst>
                                   <p:childTnLst>
                                     <p:set>
@@ -3434,7 +3434,7 @@
                                     </p:set>
                                     <p:animEffect transition="in" filter="fade">
                                       <p:cBhvr>
-                                        <p:cTn id="27" dur="450"/>
+                                        <p:cTn id="27" dur="320"/>
                                         <p:tgtEl>
                                           <p:spTgt spid="6"/>
                                         </p:tgtEl>
@@ -3442,7 +3442,7 @@
                                     </p:animEffect>
                                     <p:anim calcmode="lin" valueType="num">
                                       <p:cBhvr additive="base">
-                                        <p:cTn id="28" dur="450" fill="hold"/>
+                                        <p:cTn id="28" dur="320" fill="hold"/>
                                         <p:tgtEl>
                                           <p:spTgt spid="6"/>
                                         </p:tgtEl>
@@ -3453,7 +3453,7 @@
                                       <p:tavLst>
                                         <p:tav tm="0">
                                           <p:val>
-                                            <p:strVal val="#ppt_y+0.025"/>
+                                            <p:strVal val="#ppt_y+0.015"/>
                                           </p:val>
                                         </p:tav>
                                         <p:tav tm="100000">
@@ -3469,7 +3469,7 @@
                               <p:par>
                                 <p:cTn id="29" presetID="10" presetClass="entr" presetSubtype="0" fill="hold" grpId="0" nodeType="withEffect">
                                   <p:stCondLst>
-                                    <p:cond delay="960"/>
+                                    <p:cond delay="660"/>
                                   </p:stCondLst>
                                   <p:childTnLst>
                                     <p:set>
@@ -3492,7 +3492,7 @@
                                     </p:set>
                                     <p:animEffect transition="in" filter="fade">
                                       <p:cBhvr>
-                                        <p:cTn id="31" dur="450"/>
+                                        <p:cTn id="31" dur="320"/>
                                         <p:tgtEl>
                                           <p:spTgt spid="8"/>
                                         </p:tgtEl>
@@ -3500,7 +3500,7 @@
                                     </p:animEffect>
                                     <p:anim calcmode="lin" valueType="num">
                                       <p:cBhvr additive="base">
-                                        <p:cTn id="32" dur="450" fill="hold"/>
+                                        <p:cTn id="32" dur="320" fill="hold"/>
                                         <p:tgtEl>
                                           <p:spTgt spid="8"/>
                                         </p:tgtEl>
@@ -3511,7 +3511,7 @@
                                       <p:tavLst>
                                         <p:tav tm="0">
                                           <p:val>
-                                            <p:strVal val="#ppt_y+0.025"/>
+                                            <p:strVal val="#ppt_y+0.015"/>
                                           </p:val>
                                         </p:tav>
                                         <p:tav tm="100000">
@@ -3668,7 +3668,7 @@
       </p:sp>
       <p:sp>
         <p:nvSpPr>
-          <p:cNvPr id="4" name="Shape 2"/>
+          <p:cNvPr id="4" name="anim:wipe"/>
           <p:cNvSpPr/>
           <p:nvPr/>
         </p:nvSpPr>
@@ -4251,7 +4251,7 @@
   <p:clrMapOvr>
     <a:masterClrMapping/>
   </p:clrMapOvr>
-  <p:transition xmlns:p14="http://schemas.microsoft.com/office/powerpoint/2010/main" spd="slow" p14:dur="700">
+  <p:transition xmlns:p14="http://schemas.microsoft.com/office/powerpoint/2010/main" spd="slow" p14:dur="420">
     <p:fade/>
   </p:transition>
   <p:timing xmlns:p="http://schemas.openxmlformats.org/presentationml/2006/main">
@@ -4303,7 +4303,7 @@
                                     </p:set>
                                     <p:animEffect transition="in" filter="fade">
                                       <p:cBhvr>
-                                        <p:cTn id="7" dur="450"/>
+                                        <p:cTn id="7" dur="320"/>
                                         <p:tgtEl>
                                           <p:spTgt spid="2"/>
                                         </p:tgtEl>
@@ -4311,7 +4311,7 @@
                                     </p:animEffect>
                                     <p:anim calcmode="lin" valueType="num">
                                       <p:cBhvr additive="base">
-                                        <p:cTn id="8" dur="450" fill="hold"/>
+                                        <p:cTn id="8" dur="320" fill="hold"/>
                                         <p:tgtEl>
                                           <p:spTgt spid="2"/>
                                         </p:tgtEl>
@@ -4322,7 +4322,7 @@
                                       <p:tavLst>
                                         <p:tav tm="0">
                                           <p:val>
-                                            <p:strVal val="#ppt_y+0.025"/>
+                                            <p:strVal val="#ppt_y+0.015"/>
                                           </p:val>
                                         </p:tav>
                                         <p:tav tm="100000">
@@ -4338,7 +4338,7 @@
                               <p:par>
                                 <p:cTn id="9" presetID="10" presetClass="entr" presetSubtype="0" fill="hold" grpId="0" nodeType="withEffect">
                                   <p:stCondLst>
-                                    <p:cond delay="61"/>
+                                    <p:cond delay="66"/>
                                   </p:stCondLst>
                                   <p:childTnLst>
                                     <p:set>
@@ -4361,7 +4361,7 @@
                                     </p:set>
                                     <p:animEffect transition="in" filter="fade">
                                       <p:cBhvr>
-                                        <p:cTn id="11" dur="450"/>
+                                        <p:cTn id="11" dur="320"/>
                                         <p:tgtEl>
                                           <p:spTgt spid="3"/>
                                         </p:tgtEl>
@@ -4369,7 +4369,7 @@
                                     </p:animEffect>
                                     <p:anim calcmode="lin" valueType="num">
                                       <p:cBhvr additive="base">
-                                        <p:cTn id="12" dur="450" fill="hold"/>
+                                        <p:cTn id="12" dur="320" fill="hold"/>
                                         <p:tgtEl>
                                           <p:spTgt spid="3"/>
                                         </p:tgtEl>
@@ -4380,7 +4380,7 @@
                                       <p:tavLst>
                                         <p:tav tm="0">
                                           <p:val>
-                                            <p:strVal val="#ppt_y+0.025"/>
+                                            <p:strVal val="#ppt_y+0.015"/>
                                           </p:val>
                                         </p:tav>
                                         <p:tav tm="100000">
@@ -4396,7 +4396,7 @@
                               <p:par>
                                 <p:cTn id="13" presetID="10" presetClass="entr" presetSubtype="0" fill="hold" grpId="0" nodeType="withEffect">
                                   <p:stCondLst>
-                                    <p:cond delay="122"/>
+                                    <p:cond delay="132"/>
                                   </p:stCondLst>
                                   <p:childTnLst>
                                     <p:set>
@@ -4419,7 +4419,7 @@
                                     </p:set>
                                     <p:animEffect transition="in" filter="fade">
                                       <p:cBhvr>
-                                        <p:cTn id="15" dur="450"/>
+                                        <p:cTn id="15" dur="320"/>
                                         <p:tgtEl>
                                           <p:spTgt spid="6"/>
                                         </p:tgtEl>
@@ -4427,7 +4427,7 @@
                                     </p:animEffect>
                                     <p:anim calcmode="lin" valueType="num">
                                       <p:cBhvr additive="base">
-                                        <p:cTn id="16" dur="450" fill="hold"/>
+                                        <p:cTn id="16" dur="320" fill="hold"/>
                                         <p:tgtEl>
                                           <p:spTgt spid="6"/>
                                         </p:tgtEl>
@@ -4438,7 +4438,7 @@
                                       <p:tavLst>
                                         <p:tav tm="0">
                                           <p:val>
-                                            <p:strVal val="#ppt_y+0.025"/>
+                                            <p:strVal val="#ppt_y+0.015"/>
                                           </p:val>
                                         </p:tav>
                                         <p:tav tm="100000">
@@ -4454,7 +4454,7 @@
                               <p:par>
                                 <p:cTn id="17" presetID="10" presetClass="entr" presetSubtype="0" fill="hold" grpId="0" nodeType="withEffect">
                                   <p:stCondLst>
-                                    <p:cond delay="183"/>
+                                    <p:cond delay="198"/>
                                   </p:stCondLst>
                                   <p:childTnLst>
                                     <p:set>
@@ -4477,7 +4477,7 @@
                                     </p:set>
                                     <p:animEffect transition="in" filter="fade">
                                       <p:cBhvr>
-                                        <p:cTn id="19" dur="450"/>
+                                        <p:cTn id="19" dur="320"/>
                                         <p:tgtEl>
                                           <p:spTgt spid="10"/>
                                         </p:tgtEl>
@@ -4485,7 +4485,7 @@
                                     </p:animEffect>
                                     <p:anim calcmode="lin" valueType="num">
                                       <p:cBhvr additive="base">
-                                        <p:cTn id="20" dur="450" fill="hold"/>
+                                        <p:cTn id="20" dur="320" fill="hold"/>
                                         <p:tgtEl>
                                           <p:spTgt spid="10"/>
                                         </p:tgtEl>
@@ -4496,7 +4496,7 @@
                                       <p:tavLst>
                                         <p:tav tm="0">
                                           <p:val>
-                                            <p:strVal val="#ppt_y+0.025"/>
+                                            <p:strVal val="#ppt_y+0.015"/>
                                           </p:val>
                                         </p:tav>
                                         <p:tav tm="100000">
@@ -4512,7 +4512,7 @@
                               <p:par>
                                 <p:cTn id="21" presetID="10" presetClass="entr" presetSubtype="0" fill="hold" grpId="0" nodeType="withEffect">
                                   <p:stCondLst>
-                                    <p:cond delay="244"/>
+                                    <p:cond delay="264"/>
                                   </p:stCondLst>
                                   <p:childTnLst>
                                     <p:set>
@@ -4535,7 +4535,7 @@
                                     </p:set>
                                     <p:animEffect transition="in" filter="fade">
                                       <p:cBhvr>
-                                        <p:cTn id="23" dur="450"/>
+                                        <p:cTn id="23" dur="320"/>
                                         <p:tgtEl>
                                           <p:spTgt spid="14"/>
                                         </p:tgtEl>
@@ -4543,7 +4543,7 @@
                                     </p:animEffect>
                                     <p:anim calcmode="lin" valueType="num">
                                       <p:cBhvr additive="base">
-                                        <p:cTn id="24" dur="450" fill="hold"/>
+                                        <p:cTn id="24" dur="320" fill="hold"/>
                                         <p:tgtEl>
                                           <p:spTgt spid="14"/>
                                         </p:tgtEl>
@@ -4554,7 +4554,7 @@
                                       <p:tavLst>
                                         <p:tav tm="0">
                                           <p:val>
-                                            <p:strVal val="#ppt_y+0.025"/>
+                                            <p:strVal val="#ppt_y+0.015"/>
                                           </p:val>
                                         </p:tav>
                                         <p:tav tm="100000">
@@ -4570,7 +4570,7 @@
                               <p:par>
                                 <p:cTn id="25" presetID="10" presetClass="entr" presetSubtype="0" fill="hold" grpId="0" nodeType="withEffect">
                                   <p:stCondLst>
-                                    <p:cond delay="305"/>
+                                    <p:cond delay="330"/>
                                   </p:stCondLst>
                                   <p:childTnLst>
                                     <p:set>
@@ -4593,7 +4593,7 @@
                                     </p:set>
                                     <p:animEffect transition="in" filter="fade">
                                       <p:cBhvr>
-                                        <p:cTn id="27" dur="450"/>
+                                        <p:cTn id="27" dur="320"/>
                                         <p:tgtEl>
                                           <p:spTgt spid="18"/>
                                         </p:tgtEl>
@@ -4601,7 +4601,7 @@
                                     </p:animEffect>
                                     <p:anim calcmode="lin" valueType="num">
                                       <p:cBhvr additive="base">
-                                        <p:cTn id="28" dur="450" fill="hold"/>
+                                        <p:cTn id="28" dur="320" fill="hold"/>
                                         <p:tgtEl>
                                           <p:spTgt spid="18"/>
                                         </p:tgtEl>
@@ -4612,7 +4612,7 @@
                                       <p:tavLst>
                                         <p:tav tm="0">
                                           <p:val>
-                                            <p:strVal val="#ppt_y+0.025"/>
+                                            <p:strVal val="#ppt_y+0.015"/>
                                           </p:val>
                                         </p:tav>
                                         <p:tav tm="100000">
@@ -4628,7 +4628,7 @@
                               <p:par>
                                 <p:cTn id="29" presetID="10" presetClass="entr" presetSubtype="0" fill="hold" grpId="0" nodeType="withEffect">
                                   <p:stCondLst>
-                                    <p:cond delay="366"/>
+                                    <p:cond delay="396"/>
                                   </p:stCondLst>
                                   <p:childTnLst>
                                     <p:set>
@@ -4651,17 +4651,192 @@
                                     </p:set>
                                     <p:animEffect transition="in" filter="fade">
                                       <p:cBhvr>
-                                        <p:cTn id="31" dur="450"/>
+                                        <p:cTn id="31" dur="320"/>
                                         <p:tgtEl>
                                           <p:spTgt spid="17"/>
+                                        </p:tgtEl>
+                                      </p:cBhvr>
+                                    </p:animEffect>
+                                  </p:childTnLst>
+                                </p:cTn>
+                              </p:par>
+                              <p:par>
+                                <p:cTn id="32" presetID="10" presetClass="entr" presetSubtype="0" fill="hold" grpId="0" nodeType="withEffect">
+                                  <p:stCondLst>
+                                    <p:cond delay="462"/>
+                                  </p:stCondLst>
+                                  <p:childTnLst>
+                                    <p:set>
+                                      <p:cBhvr>
+                                        <p:cTn id="33" dur="1" fill="hold">
+                                          <p:stCondLst>
+                                            <p:cond delay="0"/>
+                                          </p:stCondLst>
+                                        </p:cTn>
+                                        <p:tgtEl>
+                                          <p:spTgt spid="5"/>
+                                        </p:tgtEl>
+                                        <p:attrNameLst>
+                                          <p:attrName>style.visibility</p:attrName>
+                                        </p:attrNameLst>
+                                      </p:cBhvr>
+                                      <p:to>
+                                        <p:strVal val="visible"/>
+                                      </p:to>
+                                    </p:set>
+                                    <p:animEffect transition="in" filter="fade">
+                                      <p:cBhvr>
+                                        <p:cTn id="34" dur="320"/>
+                                        <p:tgtEl>
+                                          <p:spTgt spid="5"/>
+                                        </p:tgtEl>
+                                      </p:cBhvr>
+                                    </p:animEffect>
+                                  </p:childTnLst>
+                                </p:cTn>
+                              </p:par>
+                              <p:par>
+                                <p:cTn id="35" presetID="10" presetClass="entr" presetSubtype="0" fill="hold" grpId="0" nodeType="withEffect">
+                                  <p:stCondLst>
+                                    <p:cond delay="528"/>
+                                  </p:stCondLst>
+                                  <p:childTnLst>
+                                    <p:set>
+                                      <p:cBhvr>
+                                        <p:cTn id="36" dur="1" fill="hold">
+                                          <p:stCondLst>
+                                            <p:cond delay="0"/>
+                                          </p:stCondLst>
+                                        </p:cTn>
+                                        <p:tgtEl>
+                                          <p:spTgt spid="9"/>
+                                        </p:tgtEl>
+                                        <p:attrNameLst>
+                                          <p:attrName>style.visibility</p:attrName>
+                                        </p:attrNameLst>
+                                      </p:cBhvr>
+                                      <p:to>
+                                        <p:strVal val="visible"/>
+                                      </p:to>
+                                    </p:set>
+                                    <p:animEffect transition="in" filter="fade">
+                                      <p:cBhvr>
+                                        <p:cTn id="37" dur="320"/>
+                                        <p:tgtEl>
+                                          <p:spTgt spid="9"/>
+                                        </p:tgtEl>
+                                      </p:cBhvr>
+                                    </p:animEffect>
+                                  </p:childTnLst>
+                                </p:cTn>
+                              </p:par>
+                              <p:par>
+                                <p:cTn id="38" presetID="10" presetClass="entr" presetSubtype="0" fill="hold" grpId="0" nodeType="withEffect">
+                                  <p:stCondLst>
+                                    <p:cond delay="594"/>
+                                  </p:stCondLst>
+                                  <p:childTnLst>
+                                    <p:set>
+                                      <p:cBhvr>
+                                        <p:cTn id="39" dur="1" fill="hold">
+                                          <p:stCondLst>
+                                            <p:cond delay="0"/>
+                                          </p:stCondLst>
+                                        </p:cTn>
+                                        <p:tgtEl>
+                                          <p:spTgt spid="13"/>
+                                        </p:tgtEl>
+                                        <p:attrNameLst>
+                                          <p:attrName>style.visibility</p:attrName>
+                                        </p:attrNameLst>
+                                      </p:cBhvr>
+                                      <p:to>
+                                        <p:strVal val="visible"/>
+                                      </p:to>
+                                    </p:set>
+                                    <p:animEffect transition="in" filter="fade">
+                                      <p:cBhvr>
+                                        <p:cTn id="40" dur="320"/>
+                                        <p:tgtEl>
+                                          <p:spTgt spid="13"/>
+                                        </p:tgtEl>
+                                      </p:cBhvr>
+                                    </p:animEffect>
+                                  </p:childTnLst>
+                                </p:cTn>
+                              </p:par>
+                              <p:par>
+                                <p:cTn id="41" presetID="10" presetClass="entr" presetSubtype="0" fill="hold" grpId="0" nodeType="withEffect">
+                                  <p:stCondLst>
+                                    <p:cond delay="660"/>
+                                  </p:stCondLst>
+                                  <p:childTnLst>
+                                    <p:set>
+                                      <p:cBhvr>
+                                        <p:cTn id="42" dur="1" fill="hold">
+                                          <p:stCondLst>
+                                            <p:cond delay="0"/>
+                                          </p:stCondLst>
+                                        </p:cTn>
+                                        <p:tgtEl>
+                                          <p:spTgt spid="4"/>
+                                        </p:tgtEl>
+                                        <p:attrNameLst>
+                                          <p:attrName>style.visibility</p:attrName>
+                                        </p:attrNameLst>
+                                      </p:cBhvr>
+                                      <p:to>
+                                        <p:strVal val="visible"/>
+                                      </p:to>
+                                    </p:set>
+                                    <p:animEffect transition="in" filter="wipe(left)">
+                                      <p:cBhvr>
+                                        <p:cTn id="43" dur="320"/>
+                                        <p:tgtEl>
+                                          <p:spTgt spid="4"/>
+                                        </p:tgtEl>
+                                      </p:cBhvr>
+                                    </p:animEffect>
+                                  </p:childTnLst>
+                                </p:cTn>
+                              </p:par>
+                              <p:par>
+                                <p:cTn id="44" presetID="10" presetClass="entr" presetSubtype="0" fill="hold" grpId="0" nodeType="withEffect">
+                                  <p:stCondLst>
+                                    <p:cond delay="726"/>
+                                  </p:stCondLst>
+                                  <p:childTnLst>
+                                    <p:set>
+                                      <p:cBhvr>
+                                        <p:cTn id="45" dur="1" fill="hold">
+                                          <p:stCondLst>
+                                            <p:cond delay="0"/>
+                                          </p:stCondLst>
+                                        </p:cTn>
+                                        <p:tgtEl>
+                                          <p:spTgt spid="7"/>
+                                        </p:tgtEl>
+                                        <p:attrNameLst>
+                                          <p:attrName>style.visibility</p:attrName>
+                                        </p:attrNameLst>
+                                      </p:cBhvr>
+                                      <p:to>
+                                        <p:strVal val="visible"/>
+                                      </p:to>
+                                    </p:set>
+                                    <p:animEffect transition="in" filter="fade">
+                                      <p:cBhvr>
+                                        <p:cTn id="46" dur="320"/>
+                                        <p:tgtEl>
+                                          <p:spTgt spid="7"/>
                                         </p:tgtEl>
                                       </p:cBhvr>
                                     </p:animEffect>
                                     <p:anim calcmode="lin" valueType="num">
                                       <p:cBhvr additive="base">
-                                        <p:cTn id="32" dur="450" fill="hold"/>
-                                        <p:tgtEl>
-                                          <p:spTgt spid="17"/>
+                                        <p:cTn id="47" dur="320" fill="hold"/>
+                                        <p:tgtEl>
+                                          <p:spTgt spid="7"/>
                                         </p:tgtEl>
                                         <p:attrNameLst>
                                           <p:attrName>ppt_y</p:attrName>
@@ -4670,7 +4845,7 @@
                                       <p:tavLst>
                                         <p:tav tm="0">
                                           <p:val>
-                                            <p:strVal val="#ppt_y+0.025"/>
+                                            <p:strVal val="#ppt_y+0.015"/>
                                           </p:val>
                                         </p:tav>
                                         <p:tav tm="100000">
@@ -4684,20 +4859,20 @@
                                 </p:cTn>
                               </p:par>
                               <p:par>
-                                <p:cTn id="33" presetID="10" presetClass="entr" presetSubtype="0" fill="hold" grpId="0" nodeType="withEffect">
+                                <p:cTn id="48" presetID="10" presetClass="entr" presetSubtype="0" fill="hold" grpId="0" nodeType="withEffect">
                                   <p:stCondLst>
-                                    <p:cond delay="427"/>
+                                    <p:cond delay="792"/>
                                   </p:stCondLst>
                                   <p:childTnLst>
                                     <p:set>
                                       <p:cBhvr>
-                                        <p:cTn id="34" dur="1" fill="hold">
+                                        <p:cTn id="49" dur="1" fill="hold">
                                           <p:stCondLst>
                                             <p:cond delay="0"/>
                                           </p:stCondLst>
                                         </p:cTn>
                                         <p:tgtEl>
-                                          <p:spTgt spid="5"/>
+                                          <p:spTgt spid="11"/>
                                         </p:tgtEl>
                                         <p:attrNameLst>
                                           <p:attrName>style.visibility</p:attrName>
@@ -4709,17 +4884,17 @@
                                     </p:set>
                                     <p:animEffect transition="in" filter="fade">
                                       <p:cBhvr>
-                                        <p:cTn id="35" dur="450"/>
-                                        <p:tgtEl>
-                                          <p:spTgt spid="5"/>
+                                        <p:cTn id="50" dur="320"/>
+                                        <p:tgtEl>
+                                          <p:spTgt spid="11"/>
                                         </p:tgtEl>
                                       </p:cBhvr>
                                     </p:animEffect>
                                     <p:anim calcmode="lin" valueType="num">
                                       <p:cBhvr additive="base">
-                                        <p:cTn id="36" dur="450" fill="hold"/>
-                                        <p:tgtEl>
-                                          <p:spTgt spid="5"/>
+                                        <p:cTn id="51" dur="320" fill="hold"/>
+                                        <p:tgtEl>
+                                          <p:spTgt spid="11"/>
                                         </p:tgtEl>
                                         <p:attrNameLst>
                                           <p:attrName>ppt_y</p:attrName>
@@ -4728,7 +4903,7 @@
                                       <p:tavLst>
                                         <p:tav tm="0">
                                           <p:val>
-                                            <p:strVal val="#ppt_y+0.025"/>
+                                            <p:strVal val="#ppt_y+0.015"/>
                                           </p:val>
                                         </p:tav>
                                         <p:tav tm="100000">
@@ -4742,20 +4917,20 @@
                                 </p:cTn>
                               </p:par>
                               <p:par>
-                                <p:cTn id="37" presetID="10" presetClass="entr" presetSubtype="0" fill="hold" grpId="0" nodeType="withEffect">
+                                <p:cTn id="52" presetID="10" presetClass="entr" presetSubtype="0" fill="hold" grpId="0" nodeType="withEffect">
                                   <p:stCondLst>
-                                    <p:cond delay="488"/>
+                                    <p:cond delay="858"/>
                                   </p:stCondLst>
                                   <p:childTnLst>
                                     <p:set>
                                       <p:cBhvr>
-                                        <p:cTn id="38" dur="1" fill="hold">
+                                        <p:cTn id="53" dur="1" fill="hold">
                                           <p:stCondLst>
                                             <p:cond delay="0"/>
                                           </p:stCondLst>
                                         </p:cTn>
                                         <p:tgtEl>
-                                          <p:spTgt spid="9"/>
+                                          <p:spTgt spid="15"/>
                                         </p:tgtEl>
                                         <p:attrNameLst>
                                           <p:attrName>style.visibility</p:attrName>
@@ -4767,17 +4942,17 @@
                                     </p:set>
                                     <p:animEffect transition="in" filter="fade">
                                       <p:cBhvr>
-                                        <p:cTn id="39" dur="450"/>
-                                        <p:tgtEl>
-                                          <p:spTgt spid="9"/>
+                                        <p:cTn id="54" dur="320"/>
+                                        <p:tgtEl>
+                                          <p:spTgt spid="15"/>
                                         </p:tgtEl>
                                       </p:cBhvr>
                                     </p:animEffect>
                                     <p:anim calcmode="lin" valueType="num">
                                       <p:cBhvr additive="base">
-                                        <p:cTn id="40" dur="450" fill="hold"/>
-                                        <p:tgtEl>
-                                          <p:spTgt spid="9"/>
+                                        <p:cTn id="55" dur="320" fill="hold"/>
+                                        <p:tgtEl>
+                                          <p:spTgt spid="15"/>
                                         </p:tgtEl>
                                         <p:attrNameLst>
                                           <p:attrName>ppt_y</p:attrName>
@@ -4786,7 +4961,7 @@
                                       <p:tavLst>
                                         <p:tav tm="0">
                                           <p:val>
-                                            <p:strVal val="#ppt_y+0.025"/>
+                                            <p:strVal val="#ppt_y+0.015"/>
                                           </p:val>
                                         </p:tav>
                                         <p:tav tm="100000">
@@ -4800,20 +4975,20 @@
                                 </p:cTn>
                               </p:par>
                               <p:par>
-                                <p:cTn id="41" presetID="10" presetClass="entr" presetSubtype="0" fill="hold" grpId="0" nodeType="withEffect">
+                                <p:cTn id="56" presetID="10" presetClass="entr" presetSubtype="0" fill="hold" grpId="0" nodeType="withEffect">
                                   <p:stCondLst>
-                                    <p:cond delay="549"/>
+                                    <p:cond delay="924"/>
                                   </p:stCondLst>
                                   <p:childTnLst>
                                     <p:set>
                                       <p:cBhvr>
-                                        <p:cTn id="42" dur="1" fill="hold">
+                                        <p:cTn id="57" dur="1" fill="hold">
                                           <p:stCondLst>
                                             <p:cond delay="0"/>
                                           </p:stCondLst>
                                         </p:cTn>
                                         <p:tgtEl>
-                                          <p:spTgt spid="13"/>
+                                          <p:spTgt spid="19"/>
                                         </p:tgtEl>
                                         <p:attrNameLst>
                                           <p:attrName>style.visibility</p:attrName>
@@ -4825,17 +5000,17 @@
                                     </p:set>
                                     <p:animEffect transition="in" filter="fade">
                                       <p:cBhvr>
-                                        <p:cTn id="43" dur="450"/>
-                                        <p:tgtEl>
-                                          <p:spTgt spid="13"/>
+                                        <p:cTn id="58" dur="320"/>
+                                        <p:tgtEl>
+                                          <p:spTgt spid="19"/>
                                         </p:tgtEl>
                                       </p:cBhvr>
                                     </p:animEffect>
                                     <p:anim calcmode="lin" valueType="num">
                                       <p:cBhvr additive="base">
-                                        <p:cTn id="44" dur="450" fill="hold"/>
-                                        <p:tgtEl>
-                                          <p:spTgt spid="13"/>
+                                        <p:cTn id="59" dur="320" fill="hold"/>
+                                        <p:tgtEl>
+                                          <p:spTgt spid="19"/>
                                         </p:tgtEl>
                                         <p:attrNameLst>
                                           <p:attrName>ppt_y</p:attrName>
@@ -4844,7 +5019,7 @@
                                       <p:tavLst>
                                         <p:tav tm="0">
                                           <p:val>
-                                            <p:strVal val="#ppt_y+0.025"/>
+                                            <p:strVal val="#ppt_y+0.015"/>
                                           </p:val>
                                         </p:tav>
                                         <p:tav tm="100000">
@@ -4858,20 +5033,20 @@
                                 </p:cTn>
                               </p:par>
                               <p:par>
-                                <p:cTn id="45" presetID="10" presetClass="entr" presetSubtype="0" fill="hold" grpId="0" nodeType="withEffect">
+                                <p:cTn id="60" presetID="10" presetClass="entr" presetSubtype="0" fill="hold" grpId="0" nodeType="withEffect">
                                   <p:stCondLst>
-                                    <p:cond delay="610"/>
+                                    <p:cond delay="990"/>
                                   </p:stCondLst>
                                   <p:childTnLst>
                                     <p:set>
                                       <p:cBhvr>
-                                        <p:cTn id="46" dur="1" fill="hold">
+                                        <p:cTn id="61" dur="1" fill="hold">
                                           <p:stCondLst>
                                             <p:cond delay="0"/>
                                           </p:stCondLst>
                                         </p:cTn>
                                         <p:tgtEl>
-                                          <p:spTgt spid="4"/>
+                                          <p:spTgt spid="8"/>
                                         </p:tgtEl>
                                         <p:attrNameLst>
                                           <p:attrName>style.visibility</p:attrName>
@@ -4883,17 +5058,17 @@
                                     </p:set>
                                     <p:animEffect transition="in" filter="fade">
                                       <p:cBhvr>
-                                        <p:cTn id="47" dur="450"/>
-                                        <p:tgtEl>
-                                          <p:spTgt spid="4"/>
+                                        <p:cTn id="62" dur="320"/>
+                                        <p:tgtEl>
+                                          <p:spTgt spid="8"/>
                                         </p:tgtEl>
                                       </p:cBhvr>
                                     </p:animEffect>
                                     <p:anim calcmode="lin" valueType="num">
                                       <p:cBhvr additive="base">
-                                        <p:cTn id="48" dur="450" fill="hold"/>
-                                        <p:tgtEl>
-                                          <p:spTgt spid="4"/>
+                                        <p:cTn id="63" dur="320" fill="hold"/>
+                                        <p:tgtEl>
+                                          <p:spTgt spid="8"/>
                                         </p:tgtEl>
                                         <p:attrNameLst>
                                           <p:attrName>ppt_y</p:attrName>
@@ -4902,7 +5077,7 @@
                                       <p:tavLst>
                                         <p:tav tm="0">
                                           <p:val>
-                                            <p:strVal val="#ppt_y+0.025"/>
+                                            <p:strVal val="#ppt_y+0.015"/>
                                           </p:val>
                                         </p:tav>
                                         <p:tav tm="100000">
@@ -4916,20 +5091,20 @@
                                 </p:cTn>
                               </p:par>
                               <p:par>
-                                <p:cTn id="49" presetID="10" presetClass="entr" presetSubtype="0" fill="hold" grpId="0" nodeType="withEffect">
+                                <p:cTn id="64" presetID="10" presetClass="entr" presetSubtype="0" fill="hold" grpId="0" nodeType="withEffect">
                                   <p:stCondLst>
-                                    <p:cond delay="671"/>
+                                    <p:cond delay="1056"/>
                                   </p:stCondLst>
                                   <p:childTnLst>
                                     <p:set>
                                       <p:cBhvr>
-                                        <p:cTn id="50" dur="1" fill="hold">
+                                        <p:cTn id="65" dur="1" fill="hold">
                                           <p:stCondLst>
                                             <p:cond delay="0"/>
                                           </p:stCondLst>
                                         </p:cTn>
                                         <p:tgtEl>
-                                          <p:spTgt spid="7"/>
+                                          <p:spTgt spid="12"/>
                                         </p:tgtEl>
                                         <p:attrNameLst>
                                           <p:attrName>style.visibility</p:attrName>
@@ -4941,17 +5116,17 @@
                                     </p:set>
                                     <p:animEffect transition="in" filter="fade">
                                       <p:cBhvr>
-                                        <p:cTn id="51" dur="450"/>
-                                        <p:tgtEl>
-                                          <p:spTgt spid="7"/>
+                                        <p:cTn id="66" dur="320"/>
+                                        <p:tgtEl>
+                                          <p:spTgt spid="12"/>
                                         </p:tgtEl>
                                       </p:cBhvr>
                                     </p:animEffect>
                                     <p:anim calcmode="lin" valueType="num">
                                       <p:cBhvr additive="base">
-                                        <p:cTn id="52" dur="450" fill="hold"/>
-                                        <p:tgtEl>
-                                          <p:spTgt spid="7"/>
+                                        <p:cTn id="67" dur="320" fill="hold"/>
+                                        <p:tgtEl>
+                                          <p:spTgt spid="12"/>
                                         </p:tgtEl>
                                         <p:attrNameLst>
                                           <p:attrName>ppt_y</p:attrName>
@@ -4960,7 +5135,7 @@
                                       <p:tavLst>
                                         <p:tav tm="0">
                                           <p:val>
-                                            <p:strVal val="#ppt_y+0.025"/>
+                                            <p:strVal val="#ppt_y+0.015"/>
                                           </p:val>
                                         </p:tav>
                                         <p:tav tm="100000">
@@ -4974,20 +5149,20 @@
                                 </p:cTn>
                               </p:par>
                               <p:par>
-                                <p:cTn id="53" presetID="10" presetClass="entr" presetSubtype="0" fill="hold" grpId="0" nodeType="withEffect">
+                                <p:cTn id="68" presetID="10" presetClass="entr" presetSubtype="0" fill="hold" grpId="0" nodeType="withEffect">
                                   <p:stCondLst>
-                                    <p:cond delay="732"/>
+                                    <p:cond delay="1122"/>
                                   </p:stCondLst>
                                   <p:childTnLst>
                                     <p:set>
                                       <p:cBhvr>
-                                        <p:cTn id="54" dur="1" fill="hold">
+                                        <p:cTn id="69" dur="1" fill="hold">
                                           <p:stCondLst>
                                             <p:cond delay="0"/>
                                           </p:stCondLst>
                                         </p:cTn>
                                         <p:tgtEl>
-                                          <p:spTgt spid="11"/>
+                                          <p:spTgt spid="16"/>
                                         </p:tgtEl>
                                         <p:attrNameLst>
                                           <p:attrName>style.visibility</p:attrName>
@@ -4999,17 +5174,17 @@
                                     </p:set>
                                     <p:animEffect transition="in" filter="fade">
                                       <p:cBhvr>
-                                        <p:cTn id="55" dur="450"/>
-                                        <p:tgtEl>
-                                          <p:spTgt spid="11"/>
+                                        <p:cTn id="70" dur="320"/>
+                                        <p:tgtEl>
+                                          <p:spTgt spid="16"/>
                                         </p:tgtEl>
                                       </p:cBhvr>
                                     </p:animEffect>
                                     <p:anim calcmode="lin" valueType="num">
                                       <p:cBhvr additive="base">
-                                        <p:cTn id="56" dur="450" fill="hold"/>
-                                        <p:tgtEl>
-                                          <p:spTgt spid="11"/>
+                                        <p:cTn id="71" dur="320" fill="hold"/>
+                                        <p:tgtEl>
+                                          <p:spTgt spid="16"/>
                                         </p:tgtEl>
                                         <p:attrNameLst>
                                           <p:attrName>ppt_y</p:attrName>
@@ -5018,7 +5193,7 @@
                                       <p:tavLst>
                                         <p:tav tm="0">
                                           <p:val>
-                                            <p:strVal val="#ppt_y+0.025"/>
+                                            <p:strVal val="#ppt_y+0.015"/>
                                           </p:val>
                                         </p:tav>
                                         <p:tav tm="100000">
@@ -5032,20 +5207,20 @@
                                 </p:cTn>
                               </p:par>
                               <p:par>
-                                <p:cTn id="57" presetID="10" presetClass="entr" presetSubtype="0" fill="hold" grpId="0" nodeType="withEffect">
+                                <p:cTn id="72" presetID="10" presetClass="entr" presetSubtype="0" fill="hold" grpId="0" nodeType="withEffect">
                                   <p:stCondLst>
-                                    <p:cond delay="793"/>
+                                    <p:cond delay="1188"/>
                                   </p:stCondLst>
                                   <p:childTnLst>
                                     <p:set>
                                       <p:cBhvr>
-                                        <p:cTn id="58" dur="1" fill="hold">
+                                        <p:cTn id="73" dur="1" fill="hold">
                                           <p:stCondLst>
                                             <p:cond delay="0"/>
                                           </p:stCondLst>
                                         </p:cTn>
                                         <p:tgtEl>
-                                          <p:spTgt spid="15"/>
+                                          <p:spTgt spid="20"/>
                                         </p:tgtEl>
                                         <p:attrNameLst>
                                           <p:attrName>style.visibility</p:attrName>
@@ -5057,17 +5232,17 @@
                                     </p:set>
                                     <p:animEffect transition="in" filter="fade">
                                       <p:cBhvr>
-                                        <p:cTn id="59" dur="450"/>
-                                        <p:tgtEl>
-                                          <p:spTgt spid="15"/>
+                                        <p:cTn id="74" dur="320"/>
+                                        <p:tgtEl>
+                                          <p:spTgt spid="20"/>
                                         </p:tgtEl>
                                       </p:cBhvr>
                                     </p:animEffect>
                                     <p:anim calcmode="lin" valueType="num">
                                       <p:cBhvr additive="base">
-                                        <p:cTn id="60" dur="450" fill="hold"/>
-                                        <p:tgtEl>
-                                          <p:spTgt spid="15"/>
+                                        <p:cTn id="75" dur="320" fill="hold"/>
+                                        <p:tgtEl>
+                                          <p:spTgt spid="20"/>
                                         </p:tgtEl>
                                         <p:attrNameLst>
                                           <p:attrName>ppt_y</p:attrName>
@@ -5076,297 +5251,7 @@
                                       <p:tavLst>
                                         <p:tav tm="0">
                                           <p:val>
-                                            <p:strVal val="#ppt_y+0.025"/>
-                                          </p:val>
-                                        </p:tav>
-                                        <p:tav tm="100000">
-                                          <p:val>
-                                            <p:strVal val="#ppt_y"/>
-                                          </p:val>
-                                        </p:tav>
-                                      </p:tavLst>
-                                    </p:anim>
-                                  </p:childTnLst>
-                                </p:cTn>
-                              </p:par>
-                              <p:par>
-                                <p:cTn id="61" presetID="10" presetClass="entr" presetSubtype="0" fill="hold" grpId="0" nodeType="withEffect">
-                                  <p:stCondLst>
-                                    <p:cond delay="854"/>
-                                  </p:stCondLst>
-                                  <p:childTnLst>
-                                    <p:set>
-                                      <p:cBhvr>
-                                        <p:cTn id="62" dur="1" fill="hold">
-                                          <p:stCondLst>
-                                            <p:cond delay="0"/>
-                                          </p:stCondLst>
-                                        </p:cTn>
-                                        <p:tgtEl>
-                                          <p:spTgt spid="19"/>
-                                        </p:tgtEl>
-                                        <p:attrNameLst>
-                                          <p:attrName>style.visibility</p:attrName>
-                                        </p:attrNameLst>
-                                      </p:cBhvr>
-                                      <p:to>
-                                        <p:strVal val="visible"/>
-                                      </p:to>
-                                    </p:set>
-                                    <p:animEffect transition="in" filter="fade">
-                                      <p:cBhvr>
-                                        <p:cTn id="63" dur="450"/>
-                                        <p:tgtEl>
-                                          <p:spTgt spid="19"/>
-                                        </p:tgtEl>
-                                      </p:cBhvr>
-                                    </p:animEffect>
-                                    <p:anim calcmode="lin" valueType="num">
-                                      <p:cBhvr additive="base">
-                                        <p:cTn id="64" dur="450" fill="hold"/>
-                                        <p:tgtEl>
-                                          <p:spTgt spid="19"/>
-                                        </p:tgtEl>
-                                        <p:attrNameLst>
-                                          <p:attrName>ppt_y</p:attrName>
-                                        </p:attrNameLst>
-                                      </p:cBhvr>
-                                      <p:tavLst>
-                                        <p:tav tm="0">
-                                          <p:val>
-                                            <p:strVal val="#ppt_y+0.025"/>
-                                          </p:val>
-                                        </p:tav>
-                                        <p:tav tm="100000">
-                                          <p:val>
-                                            <p:strVal val="#ppt_y"/>
-                                          </p:val>
-                                        </p:tav>
-                                      </p:tavLst>
-                                    </p:anim>
-                                  </p:childTnLst>
-                                </p:cTn>
-                              </p:par>
-                              <p:par>
-                                <p:cTn id="65" presetID="10" presetClass="entr" presetSubtype="0" fill="hold" grpId="0" nodeType="withEffect">
-                                  <p:stCondLst>
-                                    <p:cond delay="915"/>
-                                  </p:stCondLst>
-                                  <p:childTnLst>
-                                    <p:set>
-                                      <p:cBhvr>
-                                        <p:cTn id="66" dur="1" fill="hold">
-                                          <p:stCondLst>
-                                            <p:cond delay="0"/>
-                                          </p:stCondLst>
-                                        </p:cTn>
-                                        <p:tgtEl>
-                                          <p:spTgt spid="8"/>
-                                        </p:tgtEl>
-                                        <p:attrNameLst>
-                                          <p:attrName>style.visibility</p:attrName>
-                                        </p:attrNameLst>
-                                      </p:cBhvr>
-                                      <p:to>
-                                        <p:strVal val="visible"/>
-                                      </p:to>
-                                    </p:set>
-                                    <p:animEffect transition="in" filter="fade">
-                                      <p:cBhvr>
-                                        <p:cTn id="67" dur="450"/>
-                                        <p:tgtEl>
-                                          <p:spTgt spid="8"/>
-                                        </p:tgtEl>
-                                      </p:cBhvr>
-                                    </p:animEffect>
-                                    <p:anim calcmode="lin" valueType="num">
-                                      <p:cBhvr additive="base">
-                                        <p:cTn id="68" dur="450" fill="hold"/>
-                                        <p:tgtEl>
-                                          <p:spTgt spid="8"/>
-                                        </p:tgtEl>
-                                        <p:attrNameLst>
-                                          <p:attrName>ppt_y</p:attrName>
-                                        </p:attrNameLst>
-                                      </p:cBhvr>
-                                      <p:tavLst>
-                                        <p:tav tm="0">
-                                          <p:val>
-                                            <p:strVal val="#ppt_y+0.025"/>
-                                          </p:val>
-                                        </p:tav>
-                                        <p:tav tm="100000">
-                                          <p:val>
-                                            <p:strVal val="#ppt_y"/>
-                                          </p:val>
-                                        </p:tav>
-                                      </p:tavLst>
-                                    </p:anim>
-                                  </p:childTnLst>
-                                </p:cTn>
-                              </p:par>
-                              <p:par>
-                                <p:cTn id="69" presetID="10" presetClass="entr" presetSubtype="0" fill="hold" grpId="0" nodeType="withEffect">
-                                  <p:stCondLst>
-                                    <p:cond delay="976"/>
-                                  </p:stCondLst>
-                                  <p:childTnLst>
-                                    <p:set>
-                                      <p:cBhvr>
-                                        <p:cTn id="70" dur="1" fill="hold">
-                                          <p:stCondLst>
-                                            <p:cond delay="0"/>
-                                          </p:stCondLst>
-                                        </p:cTn>
-                                        <p:tgtEl>
-                                          <p:spTgt spid="12"/>
-                                        </p:tgtEl>
-                                        <p:attrNameLst>
-                                          <p:attrName>style.visibility</p:attrName>
-                                        </p:attrNameLst>
-                                      </p:cBhvr>
-                                      <p:to>
-                                        <p:strVal val="visible"/>
-                                      </p:to>
-                                    </p:set>
-                                    <p:animEffect transition="in" filter="fade">
-                                      <p:cBhvr>
-                                        <p:cTn id="71" dur="450"/>
-                                        <p:tgtEl>
-                                          <p:spTgt spid="12"/>
-                                        </p:tgtEl>
-                                      </p:cBhvr>
-                                    </p:animEffect>
-                                    <p:anim calcmode="lin" valueType="num">
-                                      <p:cBhvr additive="base">
-                                        <p:cTn id="72" dur="450" fill="hold"/>
-                                        <p:tgtEl>
-                                          <p:spTgt spid="12"/>
-                                        </p:tgtEl>
-                                        <p:attrNameLst>
-                                          <p:attrName>ppt_y</p:attrName>
-                                        </p:attrNameLst>
-                                      </p:cBhvr>
-                                      <p:tavLst>
-                                        <p:tav tm="0">
-                                          <p:val>
-                                            <p:strVal val="#ppt_y+0.025"/>
-                                          </p:val>
-                                        </p:tav>
-                                        <p:tav tm="100000">
-                                          <p:val>
-                                            <p:strVal val="#ppt_y"/>
-                                          </p:val>
-                                        </p:tav>
-                                      </p:tavLst>
-                                    </p:anim>
-                                  </p:childTnLst>
-                                </p:cTn>
-                              </p:par>
-                              <p:par>
-                                <p:cTn id="73" presetID="10" presetClass="entr" presetSubtype="0" fill="hold" grpId="0" nodeType="withEffect">
-                                  <p:stCondLst>
-                                    <p:cond delay="1037"/>
-                                  </p:stCondLst>
-                                  <p:childTnLst>
-                                    <p:set>
-                                      <p:cBhvr>
-                                        <p:cTn id="74" dur="1" fill="hold">
-                                          <p:stCondLst>
-                                            <p:cond delay="0"/>
-                                          </p:stCondLst>
-                                        </p:cTn>
-                                        <p:tgtEl>
-                                          <p:spTgt spid="16"/>
-                                        </p:tgtEl>
-                                        <p:attrNameLst>
-                                          <p:attrName>style.visibility</p:attrName>
-                                        </p:attrNameLst>
-                                      </p:cBhvr>
-                                      <p:to>
-                                        <p:strVal val="visible"/>
-                                      </p:to>
-                                    </p:set>
-                                    <p:animEffect transition="in" filter="fade">
-                                      <p:cBhvr>
-                                        <p:cTn id="75" dur="450"/>
-                                        <p:tgtEl>
-                                          <p:spTgt spid="16"/>
-                                        </p:tgtEl>
-                                      </p:cBhvr>
-                                    </p:animEffect>
-                                    <p:anim calcmode="lin" valueType="num">
-                                      <p:cBhvr additive="base">
-                                        <p:cTn id="76" dur="450" fill="hold"/>
-                                        <p:tgtEl>
-                                          <p:spTgt spid="16"/>
-                                        </p:tgtEl>
-                                        <p:attrNameLst>
-                                          <p:attrName>ppt_y</p:attrName>
-                                        </p:attrNameLst>
-                                      </p:cBhvr>
-                                      <p:tavLst>
-                                        <p:tav tm="0">
-                                          <p:val>
-                                            <p:strVal val="#ppt_y+0.025"/>
-                                          </p:val>
-                                        </p:tav>
-                                        <p:tav tm="100000">
-                                          <p:val>
-                                            <p:strVal val="#ppt_y"/>
-                                          </p:val>
-                                        </p:tav>
-                                      </p:tavLst>
-                                    </p:anim>
-                                  </p:childTnLst>
-                                </p:cTn>
-                              </p:par>
-                              <p:par>
-                                <p:cTn id="77" presetID="10" presetClass="entr" presetSubtype="0" fill="hold" grpId="0" nodeType="withEffect">
-                                  <p:stCondLst>
-                                    <p:cond delay="1098"/>
-                                  </p:stCondLst>
-                                  <p:childTnLst>
-                                    <p:set>
-                                      <p:cBhvr>
-                                        <p:cTn id="78" dur="1" fill="hold">
-                                          <p:stCondLst>
-                                            <p:cond delay="0"/>
-                                          </p:stCondLst>
-                                        </p:cTn>
-                                        <p:tgtEl>
-                                          <p:spTgt spid="20"/>
-                                        </p:tgtEl>
-                                        <p:attrNameLst>
-                                          <p:attrName>style.visibility</p:attrName>
-                                        </p:attrNameLst>
-                                      </p:cBhvr>
-                                      <p:to>
-                                        <p:strVal val="visible"/>
-                                      </p:to>
-                                    </p:set>
-                                    <p:animEffect transition="in" filter="fade">
-                                      <p:cBhvr>
-                                        <p:cTn id="79" dur="450"/>
-                                        <p:tgtEl>
-                                          <p:spTgt spid="20"/>
-                                        </p:tgtEl>
-                                      </p:cBhvr>
-                                    </p:animEffect>
-                                    <p:anim calcmode="lin" valueType="num">
-                                      <p:cBhvr additive="base">
-                                        <p:cTn id="80" dur="450" fill="hold"/>
-                                        <p:tgtEl>
-                                          <p:spTgt spid="20"/>
-                                        </p:tgtEl>
-                                        <p:attrNameLst>
-                                          <p:attrName>ppt_y</p:attrName>
-                                        </p:attrNameLst>
-                                      </p:cBhvr>
-                                      <p:tavLst>
-                                        <p:tav tm="0">
-                                          <p:val>
-                                            <p:strVal val="#ppt_y+0.025"/>
+                                            <p:strVal val="#ppt_y+0.015"/>
                                           </p:val>
                                         </p:tav>
                                         <p:tav tm="100000">
@@ -5572,7 +5457,7 @@
   <p:clrMapOvr>
     <a:masterClrMapping/>
   </p:clrMapOvr>
-  <p:transition xmlns:p14="http://schemas.microsoft.com/office/powerpoint/2010/main" spd="slow" p14:dur="700">
+  <p:transition xmlns:p14="http://schemas.microsoft.com/office/powerpoint/2010/main" spd="slow" p14:dur="420">
     <p:fade/>
   </p:transition>
   <p:timing xmlns:p="http://schemas.openxmlformats.org/presentationml/2006/main">
@@ -5624,7 +5509,7 @@
                                     </p:set>
                                     <p:animEffect transition="in" filter="fade">
                                       <p:cBhvr>
-                                        <p:cTn id="7" dur="450"/>
+                                        <p:cTn id="7" dur="320"/>
                                         <p:tgtEl>
                                           <p:spTgt spid="2"/>
                                         </p:tgtEl>
@@ -5632,7 +5517,7 @@
                                     </p:animEffect>
                                     <p:anim calcmode="lin" valueType="num">
                                       <p:cBhvr additive="base">
-                                        <p:cTn id="8" dur="450" fill="hold"/>
+                                        <p:cTn id="8" dur="320" fill="hold"/>
                                         <p:tgtEl>
                                           <p:spTgt spid="2"/>
                                         </p:tgtEl>
@@ -5643,7 +5528,7 @@
                                       <p:tavLst>
                                         <p:tav tm="0">
                                           <p:val>
-                                            <p:strVal val="#ppt_y+0.025"/>
+                                            <p:strVal val="#ppt_y+0.015"/>
                                           </p:val>
                                         </p:tav>
                                         <p:tav tm="100000">
@@ -5659,7 +5544,7 @@
                               <p:par>
                                 <p:cTn id="9" presetID="10" presetClass="entr" presetSubtype="0" fill="hold" grpId="0" nodeType="withEffect">
                                   <p:stCondLst>
-                                    <p:cond delay="160"/>
+                                    <p:cond delay="110"/>
                                   </p:stCondLst>
                                   <p:childTnLst>
                                     <p:set>
@@ -5682,7 +5567,7 @@
                                     </p:set>
                                     <p:animEffect transition="in" filter="fade">
                                       <p:cBhvr>
-                                        <p:cTn id="11" dur="450"/>
+                                        <p:cTn id="11" dur="320"/>
                                         <p:tgtEl>
                                           <p:spTgt spid="3"/>
                                         </p:tgtEl>
@@ -5690,7 +5575,7 @@
                                     </p:animEffect>
                                     <p:anim calcmode="lin" valueType="num">
                                       <p:cBhvr additive="base">
-                                        <p:cTn id="12" dur="450" fill="hold"/>
+                                        <p:cTn id="12" dur="320" fill="hold"/>
                                         <p:tgtEl>
                                           <p:spTgt spid="3"/>
                                         </p:tgtEl>
@@ -5701,7 +5586,7 @@
                                       <p:tavLst>
                                         <p:tav tm="0">
                                           <p:val>
-                                            <p:strVal val="#ppt_y+0.025"/>
+                                            <p:strVal val="#ppt_y+0.015"/>
                                           </p:val>
                                         </p:tav>
                                         <p:tav tm="100000">
@@ -5717,7 +5602,7 @@
                               <p:par>
                                 <p:cTn id="13" presetID="10" presetClass="entr" presetSubtype="0" fill="hold" grpId="0" nodeType="withEffect">
                                   <p:stCondLst>
-                                    <p:cond delay="320"/>
+                                    <p:cond delay="220"/>
                                   </p:stCondLst>
                                   <p:childTnLst>
                                     <p:set>
@@ -5740,7 +5625,7 @@
                                     </p:set>
                                     <p:animEffect transition="in" filter="fade">
                                       <p:cBhvr>
-                                        <p:cTn id="15" dur="450"/>
+                                        <p:cTn id="15" dur="320"/>
                                         <p:tgtEl>
                                           <p:spTgt spid="4"/>
                                         </p:tgtEl>
@@ -5748,7 +5633,7 @@
                                     </p:animEffect>
                                     <p:anim calcmode="lin" valueType="num">
                                       <p:cBhvr additive="base">
-                                        <p:cTn id="16" dur="450" fill="hold"/>
+                                        <p:cTn id="16" dur="320" fill="hold"/>
                                         <p:tgtEl>
                                           <p:spTgt spid="4"/>
                                         </p:tgtEl>
@@ -5759,7 +5644,7 @@
                                       <p:tavLst>
                                         <p:tav tm="0">
                                           <p:val>
-                                            <p:strVal val="#ppt_y+0.025"/>
+                                            <p:strVal val="#ppt_y+0.015"/>
                                           </p:val>
                                         </p:tav>
                                         <p:tav tm="100000">
@@ -5879,7 +5764,7 @@
   <p:clrMapOvr>
     <a:masterClrMapping/>
   </p:clrMapOvr>
-  <p:transition xmlns:p14="http://schemas.microsoft.com/office/powerpoint/2010/main" spd="slow" p14:dur="700">
+  <p:transition xmlns:p14="http://schemas.microsoft.com/office/powerpoint/2010/main" spd="slow" p14:dur="420">
     <p:fade/>
   </p:transition>
   <p:timing xmlns:p="http://schemas.openxmlformats.org/presentationml/2006/main">
@@ -5931,7 +5816,7 @@
                                     </p:set>
                                     <p:animEffect transition="in" filter="fade">
                                       <p:cBhvr>
-                                        <p:cTn id="7" dur="450"/>
+                                        <p:cTn id="7" dur="320"/>
                                         <p:tgtEl>
                                           <p:spTgt spid="2"/>
                                         </p:tgtEl>
@@ -5939,7 +5824,7 @@
                                     </p:animEffect>
                                     <p:anim calcmode="lin" valueType="num">
                                       <p:cBhvr additive="base">
-                                        <p:cTn id="8" dur="450" fill="hold"/>
+                                        <p:cTn id="8" dur="320" fill="hold"/>
                                         <p:tgtEl>
                                           <p:spTgt spid="2"/>
                                         </p:tgtEl>
@@ -5950,7 +5835,7 @@
                                       <p:tavLst>
                                         <p:tav tm="0">
                                           <p:val>
-                                            <p:strVal val="#ppt_y+0.025"/>
+                                            <p:strVal val="#ppt_y+0.015"/>
                                           </p:val>
                                         </p:tav>
                                         <p:tav tm="100000">
@@ -6143,7 +6028,7 @@
   <p:clrMapOvr>
     <a:masterClrMapping/>
   </p:clrMapOvr>
-  <p:transition xmlns:p14="http://schemas.microsoft.com/office/powerpoint/2010/main" spd="slow" p14:dur="700">
+  <p:transition xmlns:p14="http://schemas.microsoft.com/office/powerpoint/2010/main" spd="slow" p14:dur="420">
     <p:fade/>
   </p:transition>
   <p:timing xmlns:p="http://schemas.openxmlformats.org/presentationml/2006/main">
@@ -6195,7 +6080,7 @@
                                     </p:set>
                                     <p:animEffect transition="in" filter="fade">
                                       <p:cBhvr>
-                                        <p:cTn id="7" dur="450"/>
+                                        <p:cTn id="7" dur="320"/>
                                         <p:tgtEl>
                                           <p:spTgt spid="2"/>
                                         </p:tgtEl>
@@ -6203,7 +6088,7 @@
                                     </p:animEffect>
                                     <p:anim calcmode="lin" valueType="num">
                                       <p:cBhvr additive="base">
-                                        <p:cTn id="8" dur="450" fill="hold"/>
+                                        <p:cTn id="8" dur="320" fill="hold"/>
                                         <p:tgtEl>
                                           <p:spTgt spid="2"/>
                                         </p:tgtEl>
@@ -6214,7 +6099,7 @@
                                       <p:tavLst>
                                         <p:tav tm="0">
                                           <p:val>
-                                            <p:strVal val="#ppt_y+0.025"/>
+                                            <p:strVal val="#ppt_y+0.015"/>
                                           </p:val>
                                         </p:tav>
                                         <p:tav tm="100000">
@@ -6230,7 +6115,7 @@
                               <p:par>
                                 <p:cTn id="9" presetID="10" presetClass="entr" presetSubtype="0" fill="hold" grpId="0" nodeType="withEffect">
                                   <p:stCondLst>
-                                    <p:cond delay="160"/>
+                                    <p:cond delay="110"/>
                                   </p:stCondLst>
                                   <p:childTnLst>
                                     <p:set>
@@ -6253,7 +6138,7 @@
                                     </p:set>
                                     <p:animEffect transition="in" filter="fade">
                                       <p:cBhvr>
-                                        <p:cTn id="11" dur="450"/>
+                                        <p:cTn id="11" dur="320"/>
                                         <p:tgtEl>
                                           <p:spTgt spid="3"/>
                                         </p:tgtEl>
@@ -6261,7 +6146,7 @@
                                     </p:animEffect>
                                     <p:anim calcmode="lin" valueType="num">
                                       <p:cBhvr additive="base">
-                                        <p:cTn id="12" dur="450" fill="hold"/>
+                                        <p:cTn id="12" dur="320" fill="hold"/>
                                         <p:tgtEl>
                                           <p:spTgt spid="3"/>
                                         </p:tgtEl>
@@ -6272,7 +6157,7 @@
                                       <p:tavLst>
                                         <p:tav tm="0">
                                           <p:val>
-                                            <p:strVal val="#ppt_y+0.025"/>
+                                            <p:strVal val="#ppt_y+0.015"/>
                                           </p:val>
                                         </p:tav>
                                         <p:tav tm="100000">
@@ -6288,7 +6173,7 @@
                               <p:par>
                                 <p:cTn id="13" presetID="10" presetClass="entr" presetSubtype="0" fill="hold" grpId="0" nodeType="withEffect">
                                   <p:stCondLst>
-                                    <p:cond delay="320"/>
+                                    <p:cond delay="220"/>
                                   </p:stCondLst>
                                   <p:childTnLst>
                                     <p:set>
@@ -6311,7 +6196,7 @@
                                     </p:set>
                                     <p:animEffect transition="in" filter="fade">
                                       <p:cBhvr>
-                                        <p:cTn id="15" dur="450"/>
+                                        <p:cTn id="15" dur="320"/>
                                         <p:tgtEl>
                                           <p:spTgt spid="4"/>
                                         </p:tgtEl>
@@ -6319,7 +6204,7 @@
                                     </p:animEffect>
                                     <p:anim calcmode="lin" valueType="num">
                                       <p:cBhvr additive="base">
-                                        <p:cTn id="16" dur="450" fill="hold"/>
+                                        <p:cTn id="16" dur="320" fill="hold"/>
                                         <p:tgtEl>
                                           <p:spTgt spid="4"/>
                                         </p:tgtEl>
@@ -6330,7 +6215,7 @@
                                       <p:tavLst>
                                         <p:tav tm="0">
                                           <p:val>
-                                            <p:strVal val="#ppt_y+0.025"/>
+                                            <p:strVal val="#ppt_y+0.015"/>
                                           </p:val>
                                         </p:tav>
                                         <p:tav tm="100000">
@@ -6578,7 +6463,7 @@
   <p:clrMapOvr>
     <a:masterClrMapping/>
   </p:clrMapOvr>
-  <p:transition xmlns:p14="http://schemas.microsoft.com/office/powerpoint/2010/main" spd="slow" p14:dur="700">
+  <p:transition xmlns:p14="http://schemas.microsoft.com/office/powerpoint/2010/main" spd="slow" p14:dur="420">
     <p:fade/>
   </p:transition>
   <p:timing xmlns:p="http://schemas.openxmlformats.org/presentationml/2006/main">
@@ -6630,7 +6515,7 @@
                                     </p:set>
                                     <p:animEffect transition="in" filter="fade">
                                       <p:cBhvr>
-                                        <p:cTn id="7" dur="450"/>
+                                        <p:cTn id="7" dur="320"/>
                                         <p:tgtEl>
                                           <p:spTgt spid="2"/>
                                         </p:tgtEl>
@@ -6638,7 +6523,7 @@
                                     </p:animEffect>
                                     <p:anim calcmode="lin" valueType="num">
                                       <p:cBhvr additive="base">
-                                        <p:cTn id="8" dur="450" fill="hold"/>
+                                        <p:cTn id="8" dur="320" fill="hold"/>
                                         <p:tgtEl>
                                           <p:spTgt spid="2"/>
                                         </p:tgtEl>
@@ -6649,7 +6534,7 @@
                                       <p:tavLst>
                                         <p:tav tm="0">
                                           <p:val>
-                                            <p:strVal val="#ppt_y+0.025"/>
+                                            <p:strVal val="#ppt_y+0.015"/>
                                           </p:val>
                                         </p:tav>
                                         <p:tav tm="100000">
@@ -6665,7 +6550,7 @@
                               <p:par>
                                 <p:cTn id="9" presetID="10" presetClass="entr" presetSubtype="0" fill="hold" grpId="0" nodeType="withEffect">
                                   <p:stCondLst>
-                                    <p:cond delay="160"/>
+                                    <p:cond delay="110"/>
                                   </p:stCondLst>
                                   <p:childTnLst>
                                     <p:set>
@@ -6688,7 +6573,7 @@
                                     </p:set>
                                     <p:animEffect transition="in" filter="fade">
                                       <p:cBhvr>
-                                        <p:cTn id="11" dur="450"/>
+                                        <p:cTn id="11" dur="320"/>
                                         <p:tgtEl>
                                           <p:spTgt spid="3"/>
                                         </p:tgtEl>
@@ -6696,7 +6581,7 @@
                                     </p:animEffect>
                                     <p:anim calcmode="lin" valueType="num">
                                       <p:cBhvr additive="base">
-                                        <p:cTn id="12" dur="450" fill="hold"/>
+                                        <p:cTn id="12" dur="320" fill="hold"/>
                                         <p:tgtEl>
                                           <p:spTgt spid="3"/>
                                         </p:tgtEl>
@@ -6707,7 +6592,7 @@
                                       <p:tavLst>
                                         <p:tav tm="0">
                                           <p:val>
-                                            <p:strVal val="#ppt_y+0.025"/>
+                                            <p:strVal val="#ppt_y+0.015"/>
                                           </p:val>
                                         </p:tav>
                                         <p:tav tm="100000">
@@ -6723,7 +6608,7 @@
                               <p:par>
                                 <p:cTn id="13" presetID="10" presetClass="entr" presetSubtype="0" fill="hold" grpId="0" nodeType="withEffect">
                                   <p:stCondLst>
-                                    <p:cond delay="320"/>
+                                    <p:cond delay="220"/>
                                   </p:stCondLst>
                                   <p:childTnLst>
                                     <p:set>
@@ -6746,7 +6631,7 @@
                                     </p:set>
                                     <p:animEffect transition="in" filter="fade">
                                       <p:cBhvr>
-                                        <p:cTn id="15" dur="450"/>
+                                        <p:cTn id="15" dur="320"/>
                                         <p:tgtEl>
                                           <p:spTgt spid="4"/>
                                         </p:tgtEl>
@@ -6754,7 +6639,7 @@
                                     </p:animEffect>
                                     <p:anim calcmode="lin" valueType="num">
                                       <p:cBhvr additive="base">
-                                        <p:cTn id="16" dur="450" fill="hold"/>
+                                        <p:cTn id="16" dur="320" fill="hold"/>
                                         <p:tgtEl>
                                           <p:spTgt spid="4"/>
                                         </p:tgtEl>
@@ -6765,7 +6650,7 @@
                                       <p:tavLst>
                                         <p:tav tm="0">
                                           <p:val>
-                                            <p:strVal val="#ppt_y+0.025"/>
+                                            <p:strVal val="#ppt_y+0.015"/>
                                           </p:val>
                                         </p:tav>
                                         <p:tav tm="100000">
@@ -6781,7 +6666,7 @@
                               <p:par>
                                 <p:cTn id="17" presetID="10" presetClass="entr" presetSubtype="0" fill="hold" grpId="0" nodeType="withEffect">
                                   <p:stCondLst>
-                                    <p:cond delay="480"/>
+                                    <p:cond delay="330"/>
                                   </p:stCondLst>
                                   <p:childTnLst>
                                     <p:set>
@@ -6804,7 +6689,7 @@
                                     </p:set>
                                     <p:animEffect transition="in" filter="fade">
                                       <p:cBhvr>
-                                        <p:cTn id="19" dur="450"/>
+                                        <p:cTn id="19" dur="320"/>
                                         <p:tgtEl>
                                           <p:spTgt spid="5"/>
                                         </p:tgtEl>
@@ -6812,7 +6697,7 @@
                                     </p:animEffect>
                                     <p:anim calcmode="lin" valueType="num">
                                       <p:cBhvr additive="base">
-                                        <p:cTn id="20" dur="450" fill="hold"/>
+                                        <p:cTn id="20" dur="320" fill="hold"/>
                                         <p:tgtEl>
                                           <p:spTgt spid="5"/>
                                         </p:tgtEl>
@@ -6823,7 +6708,7 @@
                                       <p:tavLst>
                                         <p:tav tm="0">
                                           <p:val>
-                                            <p:strVal val="#ppt_y+0.025"/>
+                                            <p:strVal val="#ppt_y+0.015"/>
                                           </p:val>
                                         </p:tav>
                                         <p:tav tm="100000">
@@ -7072,7 +6957,7 @@
   <p:clrMapOvr>
     <a:masterClrMapping/>
   </p:clrMapOvr>
-  <p:transition xmlns:p14="http://schemas.microsoft.com/office/powerpoint/2010/main" spd="slow" p14:dur="700">
+  <p:transition xmlns:p14="http://schemas.microsoft.com/office/powerpoint/2010/main" spd="slow" p14:dur="420">
     <p:fade/>
   </p:transition>
   <p:timing xmlns:p="http://schemas.openxmlformats.org/presentationml/2006/main">
@@ -7124,7 +7009,7 @@
                                     </p:set>
                                     <p:animEffect transition="in" filter="fade">
                                       <p:cBhvr>
-                                        <p:cTn id="7" dur="450"/>
+                                        <p:cTn id="7" dur="320"/>
                                         <p:tgtEl>
                                           <p:spTgt spid="2"/>
                                         </p:tgtEl>
@@ -7132,7 +7017,7 @@
                                     </p:animEffect>
                                     <p:anim calcmode="lin" valueType="num">
                                       <p:cBhvr additive="base">
-                                        <p:cTn id="8" dur="450" fill="hold"/>
+                                        <p:cTn id="8" dur="320" fill="hold"/>
                                         <p:tgtEl>
                                           <p:spTgt spid="2"/>
                                         </p:tgtEl>
@@ -7143,7 +7028,7 @@
                                       <p:tavLst>
                                         <p:tav tm="0">
                                           <p:val>
-                                            <p:strVal val="#ppt_y+0.025"/>
+                                            <p:strVal val="#ppt_y+0.015"/>
                                           </p:val>
                                         </p:tav>
                                         <p:tav tm="100000">
@@ -7159,7 +7044,7 @@
                               <p:par>
                                 <p:cTn id="9" presetID="10" presetClass="entr" presetSubtype="0" fill="hold" grpId="0" nodeType="withEffect">
                                   <p:stCondLst>
-                                    <p:cond delay="160"/>
+                                    <p:cond delay="110"/>
                                   </p:stCondLst>
                                   <p:childTnLst>
                                     <p:set>
@@ -7182,7 +7067,7 @@
                                     </p:set>
                                     <p:animEffect transition="in" filter="fade">
                                       <p:cBhvr>
-                                        <p:cTn id="11" dur="450"/>
+                                        <p:cTn id="11" dur="320"/>
                                         <p:tgtEl>
                                           <p:spTgt spid="3"/>
                                         </p:tgtEl>
@@ -7190,7 +7075,7 @@
                                     </p:animEffect>
                                     <p:anim calcmode="lin" valueType="num">
                                       <p:cBhvr additive="base">
-                                        <p:cTn id="12" dur="450" fill="hold"/>
+                                        <p:cTn id="12" dur="320" fill="hold"/>
                                         <p:tgtEl>
                                           <p:spTgt spid="3"/>
                                         </p:tgtEl>
@@ -7201,7 +7086,7 @@
                                       <p:tavLst>
                                         <p:tav tm="0">
                                           <p:val>
-                                            <p:strVal val="#ppt_y+0.025"/>
+                                            <p:strVal val="#ppt_y+0.015"/>
                                           </p:val>
                                         </p:tav>
                                         <p:tav tm="100000">
@@ -7217,7 +7102,7 @@
                               <p:par>
                                 <p:cTn id="13" presetID="10" presetClass="entr" presetSubtype="0" fill="hold" grpId="0" nodeType="withEffect">
                                   <p:stCondLst>
-                                    <p:cond delay="320"/>
+                                    <p:cond delay="220"/>
                                   </p:stCondLst>
                                   <p:childTnLst>
                                     <p:set>
@@ -7240,7 +7125,7 @@
                                     </p:set>
                                     <p:animEffect transition="in" filter="fade">
                                       <p:cBhvr>
-                                        <p:cTn id="15" dur="450"/>
+                                        <p:cTn id="15" dur="320"/>
                                         <p:tgtEl>
                                           <p:spTgt spid="4"/>
                                         </p:tgtEl>
@@ -7248,7 +7133,7 @@
                                     </p:animEffect>
                                     <p:anim calcmode="lin" valueType="num">
                                       <p:cBhvr additive="base">
-                                        <p:cTn id="16" dur="450" fill="hold"/>
+                                        <p:cTn id="16" dur="320" fill="hold"/>
                                         <p:tgtEl>
                                           <p:spTgt spid="4"/>
                                         </p:tgtEl>
@@ -7259,7 +7144,7 @@
                                       <p:tavLst>
                                         <p:tav tm="0">
                                           <p:val>
-                                            <p:strVal val="#ppt_y+0.025"/>
+                                            <p:strVal val="#ppt_y+0.015"/>
                                           </p:val>
                                         </p:tav>
                                         <p:tav tm="100000">
@@ -7275,7 +7160,7 @@
                               <p:par>
                                 <p:cTn id="17" presetID="10" presetClass="entr" presetSubtype="0" fill="hold" grpId="0" nodeType="withEffect">
                                   <p:stCondLst>
-                                    <p:cond delay="480"/>
+                                    <p:cond delay="330"/>
                                   </p:stCondLst>
                                   <p:childTnLst>
                                     <p:set>
@@ -7298,7 +7183,7 @@
                                     </p:set>
                                     <p:animEffect transition="in" filter="fade">
                                       <p:cBhvr>
-                                        <p:cTn id="19" dur="450"/>
+                                        <p:cTn id="19" dur="320"/>
                                         <p:tgtEl>
                                           <p:spTgt spid="5"/>
                                         </p:tgtEl>
@@ -7306,7 +7191,7 @@
                                     </p:animEffect>
                                     <p:anim calcmode="lin" valueType="num">
                                       <p:cBhvr additive="base">
-                                        <p:cTn id="20" dur="450" fill="hold"/>
+                                        <p:cTn id="20" dur="320" fill="hold"/>
                                         <p:tgtEl>
                                           <p:spTgt spid="5"/>
                                         </p:tgtEl>
@@ -7317,7 +7202,7 @@
                                       <p:tavLst>
                                         <p:tav tm="0">
                                           <p:val>
-                                            <p:strVal val="#ppt_y+0.025"/>
+                                            <p:strVal val="#ppt_y+0.015"/>
                                           </p:val>
                                         </p:tav>
                                         <p:tav tm="100000">
@@ -7510,7 +7395,7 @@
       </p:sp>
       <p:sp>
         <p:nvSpPr>
-          <p:cNvPr id="5" name="Shape 3"/>
+          <p:cNvPr id="5" name="anim:wipe"/>
           <p:cNvSpPr/>
           <p:nvPr/>
         </p:nvSpPr>
@@ -7530,7 +7415,7 @@
       </p:sp>
       <p:sp>
         <p:nvSpPr>
-          <p:cNvPr id="6" name="Shape 4"/>
+          <p:cNvPr id="6" name="anim:wipe"/>
           <p:cNvSpPr/>
           <p:nvPr/>
         </p:nvSpPr>
@@ -7628,7 +7513,7 @@
       </p:sp>
       <p:sp>
         <p:nvSpPr>
-          <p:cNvPr id="9" name="Shape 7"/>
+          <p:cNvPr id="9" name="anim:wipe"/>
           <p:cNvSpPr/>
           <p:nvPr/>
         </p:nvSpPr>
@@ -7648,7 +7533,7 @@
       </p:sp>
       <p:sp>
         <p:nvSpPr>
-          <p:cNvPr id="10" name="Shape 8"/>
+          <p:cNvPr id="10" name="anim:wipe"/>
           <p:cNvSpPr/>
           <p:nvPr/>
         </p:nvSpPr>
@@ -7746,7 +7631,7 @@
       </p:sp>
       <p:sp>
         <p:nvSpPr>
-          <p:cNvPr id="13" name="Shape 11"/>
+          <p:cNvPr id="13" name="anim:wipe"/>
           <p:cNvSpPr/>
           <p:nvPr/>
         </p:nvSpPr>
@@ -7766,7 +7651,7 @@
       </p:sp>
       <p:sp>
         <p:nvSpPr>
-          <p:cNvPr id="14" name="Shape 12"/>
+          <p:cNvPr id="14" name="anim:wipe"/>
           <p:cNvSpPr/>
           <p:nvPr/>
         </p:nvSpPr>
@@ -7864,7 +7749,7 @@
       </p:sp>
       <p:sp>
         <p:nvSpPr>
-          <p:cNvPr id="17" name="Shape 15"/>
+          <p:cNvPr id="17" name="anim:wipe"/>
           <p:cNvSpPr/>
           <p:nvPr/>
         </p:nvSpPr>
@@ -7884,7 +7769,7 @@
       </p:sp>
       <p:sp>
         <p:nvSpPr>
-          <p:cNvPr id="18" name="Shape 16"/>
+          <p:cNvPr id="18" name="anim:wipe"/>
           <p:cNvSpPr/>
           <p:nvPr/>
         </p:nvSpPr>
@@ -7946,7 +7831,7 @@
   <p:clrMapOvr>
     <a:masterClrMapping/>
   </p:clrMapOvr>
-  <p:transition xmlns:p14="http://schemas.microsoft.com/office/powerpoint/2010/main" spd="slow" p14:dur="700">
+  <p:transition xmlns:p14="http://schemas.microsoft.com/office/powerpoint/2010/main" spd="slow" p14:dur="420">
     <p:fade/>
   </p:transition>
   <p:timing xmlns:p="http://schemas.openxmlformats.org/presentationml/2006/main">
@@ -7998,7 +7883,7 @@
                                     </p:set>
                                     <p:animEffect transition="in" filter="fade">
                                       <p:cBhvr>
-                                        <p:cTn id="7" dur="450"/>
+                                        <p:cTn id="7" dur="320"/>
                                         <p:tgtEl>
                                           <p:spTgt spid="2"/>
                                         </p:tgtEl>
@@ -8006,7 +7891,7 @@
                                     </p:animEffect>
                                     <p:anim calcmode="lin" valueType="num">
                                       <p:cBhvr additive="base">
-                                        <p:cTn id="8" dur="450" fill="hold"/>
+                                        <p:cTn id="8" dur="320" fill="hold"/>
                                         <p:tgtEl>
                                           <p:spTgt spid="2"/>
                                         </p:tgtEl>
@@ -8017,7 +7902,7 @@
                                       <p:tavLst>
                                         <p:tav tm="0">
                                           <p:val>
-                                            <p:strVal val="#ppt_y+0.025"/>
+                                            <p:strVal val="#ppt_y+0.015"/>
                                           </p:val>
                                         </p:tav>
                                         <p:tav tm="100000">
@@ -8033,7 +7918,7 @@
                               <p:par>
                                 <p:cTn id="9" presetID="10" presetClass="entr" presetSubtype="0" fill="hold" grpId="0" nodeType="withEffect">
                                   <p:stCondLst>
-                                    <p:cond delay="64"/>
+                                    <p:cond delay="70"/>
                                   </p:stCondLst>
                                   <p:childTnLst>
                                     <p:set>
@@ -8056,7 +7941,7 @@
                                     </p:set>
                                     <p:animEffect transition="in" filter="fade">
                                       <p:cBhvr>
-                                        <p:cTn id="11" dur="450"/>
+                                        <p:cTn id="11" dur="320"/>
                                         <p:tgtEl>
                                           <p:spTgt spid="3"/>
                                         </p:tgtEl>
@@ -8064,7 +7949,7 @@
                                     </p:animEffect>
                                     <p:anim calcmode="lin" valueType="num">
                                       <p:cBhvr additive="base">
-                                        <p:cTn id="12" dur="450" fill="hold"/>
+                                        <p:cTn id="12" dur="320" fill="hold"/>
                                         <p:tgtEl>
                                           <p:spTgt spid="3"/>
                                         </p:tgtEl>
@@ -8075,7 +7960,7 @@
                                       <p:tavLst>
                                         <p:tav tm="0">
                                           <p:val>
-                                            <p:strVal val="#ppt_y+0.025"/>
+                                            <p:strVal val="#ppt_y+0.015"/>
                                           </p:val>
                                         </p:tav>
                                         <p:tav tm="100000">
@@ -8091,7 +7976,7 @@
                               <p:par>
                                 <p:cTn id="13" presetID="10" presetClass="entr" presetSubtype="0" fill="hold" grpId="0" nodeType="withEffect">
                                   <p:stCondLst>
-                                    <p:cond delay="128"/>
+                                    <p:cond delay="140"/>
                                   </p:stCondLst>
                                   <p:childTnLst>
                                     <p:set>
@@ -8114,7 +7999,7 @@
                                     </p:set>
                                     <p:animEffect transition="in" filter="fade">
                                       <p:cBhvr>
-                                        <p:cTn id="15" dur="450"/>
+                                        <p:cTn id="15" dur="320"/>
                                         <p:tgtEl>
                                           <p:spTgt spid="4"/>
                                         </p:tgtEl>
@@ -8122,7 +8007,7 @@
                                     </p:animEffect>
                                     <p:anim calcmode="lin" valueType="num">
                                       <p:cBhvr additive="base">
-                                        <p:cTn id="16" dur="450" fill="hold"/>
+                                        <p:cTn id="16" dur="320" fill="hold"/>
                                         <p:tgtEl>
                                           <p:spTgt spid="4"/>
                                         </p:tgtEl>
@@ -8133,7 +8018,7 @@
                                       <p:tavLst>
                                         <p:tav tm="0">
                                           <p:val>
-                                            <p:strVal val="#ppt_y+0.025"/>
+                                            <p:strVal val="#ppt_y+0.015"/>
                                           </p:val>
                                         </p:tav>
                                         <p:tav tm="100000">
@@ -8149,7 +8034,7 @@
                               <p:par>
                                 <p:cTn id="17" presetID="10" presetClass="entr" presetSubtype="0" fill="hold" grpId="0" nodeType="withEffect">
                                   <p:stCondLst>
-                                    <p:cond delay="192"/>
+                                    <p:cond delay="210"/>
                                   </p:stCondLst>
                                   <p:childTnLst>
                                     <p:set>
@@ -8172,7 +8057,7 @@
                                     </p:set>
                                     <p:animEffect transition="in" filter="fade">
                                       <p:cBhvr>
-                                        <p:cTn id="19" dur="450"/>
+                                        <p:cTn id="19" dur="320"/>
                                         <p:tgtEl>
                                           <p:spTgt spid="7"/>
                                         </p:tgtEl>
@@ -8180,7 +8065,7 @@
                                     </p:animEffect>
                                     <p:anim calcmode="lin" valueType="num">
                                       <p:cBhvr additive="base">
-                                        <p:cTn id="20" dur="450" fill="hold"/>
+                                        <p:cTn id="20" dur="320" fill="hold"/>
                                         <p:tgtEl>
                                           <p:spTgt spid="7"/>
                                         </p:tgtEl>
@@ -8191,7 +8076,7 @@
                                       <p:tavLst>
                                         <p:tav tm="0">
                                           <p:val>
-                                            <p:strVal val="#ppt_y+0.025"/>
+                                            <p:strVal val="#ppt_y+0.015"/>
                                           </p:val>
                                         </p:tav>
                                         <p:tav tm="100000">
@@ -8207,7 +8092,7 @@
                               <p:par>
                                 <p:cTn id="21" presetID="10" presetClass="entr" presetSubtype="0" fill="hold" grpId="0" nodeType="withEffect">
                                   <p:stCondLst>
-                                    <p:cond delay="256"/>
+                                    <p:cond delay="280"/>
                                   </p:stCondLst>
                                   <p:childTnLst>
                                     <p:set>
@@ -8228,19 +8113,89 @@
                                         <p:strVal val="visible"/>
                                       </p:to>
                                     </p:set>
+                                    <p:animEffect transition="in" filter="wipe(left)">
+                                      <p:cBhvr>
+                                        <p:cTn id="23" dur="320"/>
+                                        <p:tgtEl>
+                                          <p:spTgt spid="5"/>
+                                        </p:tgtEl>
+                                      </p:cBhvr>
+                                    </p:animEffect>
+                                  </p:childTnLst>
+                                </p:cTn>
+                              </p:par>
+                              <p:par>
+                                <p:cTn id="24" presetID="10" presetClass="entr" presetSubtype="0" fill="hold" grpId="0" nodeType="withEffect">
+                                  <p:stCondLst>
+                                    <p:cond delay="350"/>
+                                  </p:stCondLst>
+                                  <p:childTnLst>
+                                    <p:set>
+                                      <p:cBhvr>
+                                        <p:cTn id="25" dur="1" fill="hold">
+                                          <p:stCondLst>
+                                            <p:cond delay="0"/>
+                                          </p:stCondLst>
+                                        </p:cTn>
+                                        <p:tgtEl>
+                                          <p:spTgt spid="6"/>
+                                        </p:tgtEl>
+                                        <p:attrNameLst>
+                                          <p:attrName>style.visibility</p:attrName>
+                                        </p:attrNameLst>
+                                      </p:cBhvr>
+                                      <p:to>
+                                        <p:strVal val="visible"/>
+                                      </p:to>
+                                    </p:set>
+                                    <p:animEffect transition="in" filter="wipe(left)">
+                                      <p:cBhvr>
+                                        <p:cTn id="26" dur="320"/>
+                                        <p:tgtEl>
+                                          <p:spTgt spid="6"/>
+                                        </p:tgtEl>
+                                      </p:cBhvr>
+                                    </p:animEffect>
+                                  </p:childTnLst>
+                                </p:cTn>
+                              </p:par>
+                              <p:par>
+                                <p:cTn id="27" presetID="10" presetClass="entr" presetSubtype="0" fill="hold" grpId="0" nodeType="withEffect">
+                                  <p:stCondLst>
+                                    <p:cond delay="420"/>
+                                  </p:stCondLst>
+                                  <p:childTnLst>
+                                    <p:set>
+                                      <p:cBhvr>
+                                        <p:cTn id="28" dur="1" fill="hold">
+                                          <p:stCondLst>
+                                            <p:cond delay="0"/>
+                                          </p:stCondLst>
+                                        </p:cTn>
+                                        <p:tgtEl>
+                                          <p:spTgt spid="8"/>
+                                        </p:tgtEl>
+                                        <p:attrNameLst>
+                                          <p:attrName>style.visibility</p:attrName>
+                                        </p:attrNameLst>
+                                      </p:cBhvr>
+                                      <p:to>
+                                        <p:strVal val="visible"/>
+                                      </p:to>
+                                    </p:set>
                                     <p:animEffect transition="in" filter="fade">
                                       <p:cBhvr>
-                                        <p:cTn id="23" dur="450"/>
-                                        <p:tgtEl>
-                                          <p:spTgt spid="5"/>
+                                        <p:cTn id="29" dur="320"/>
+                                        <p:tgtEl>
+                                          <p:spTgt spid="8"/>
                                         </p:tgtEl>
                                       </p:cBhvr>
                                     </p:animEffect>
                                     <p:anim calcmode="lin" valueType="num">
                                       <p:cBhvr additive="base">
-                                        <p:cTn id="24" dur="450" fill="hold"/>
-                                        <p:tgtEl>
-                                          <p:spTgt spid="5"/>
+                                        <p:cTn id="30" dur="320" fill="hold"/>
+                                        <p:tgtEl>
+                                          <p:spTgt spid="8"/>
                                         </p:tgtEl>
                                         <p:attrNameLst>
                                           <p:attrName>ppt_y</p:attrName>
@@ -8249,7 +8204,7 @@
                                       <p:tavLst>
                                         <p:tav tm="0">
                                           <p:val>
-                                            <p:strVal val="#ppt_y+0.025"/>
+                                            <p:strVal val="#ppt_y+0.015"/>
                                           </p:val>
                                         </p:tav>
                                         <p:tav tm="100000">
@@ -8263,20 +8218,20 @@
                                 </p:cTn>
                               </p:par>
                               <p:par>
-                                <p:cTn id="25" presetID="10" presetClass="entr" presetSubtype="0" fill="hold" grpId="0" nodeType="withEffect">
+                                <p:cTn id="31" presetID="10" presetClass="entr" presetSubtype="0" fill="hold" grpId="0" nodeType="withEffect">
                                   <p:stCondLst>
-                                    <p:cond delay="320"/>
+                                    <p:cond delay="490"/>
                                   </p:stCondLst>
                                   <p:childTnLst>
                                     <p:set>
                                       <p:cBhvr>
-                                        <p:cTn id="26" dur="1" fill="hold">
+                                        <p:cTn id="32" dur="1" fill="hold">
                                           <p:stCondLst>
                                             <p:cond delay="0"/>
                                           </p:stCondLst>
                                         </p:cTn>
                                         <p:tgtEl>
-                                          <p:spTgt spid="6"/>
+                                          <p:spTgt spid="11"/>
                                         </p:tgtEl>
                                         <p:attrNameLst>
                                           <p:attrName>style.visibility</p:attrName>
@@ -8288,17 +8243,17 @@
                                     </p:set>
                                     <p:animEffect transition="in" filter="fade">
                                       <p:cBhvr>
-                                        <p:cTn id="27" dur="450"/>
-                                        <p:tgtEl>
-                                          <p:spTgt spid="6"/>
+                                        <p:cTn id="33" dur="320"/>
+                                        <p:tgtEl>
+                                          <p:spTgt spid="11"/>
                                         </p:tgtEl>
                                       </p:cBhvr>
                                     </p:animEffect>
                                     <p:anim calcmode="lin" valueType="num">
                                       <p:cBhvr additive="base">
-                                        <p:cTn id="28" dur="450" fill="hold"/>
-                                        <p:tgtEl>
-                                          <p:spTgt spid="6"/>
+                                        <p:cTn id="34" dur="320" fill="hold"/>
+                                        <p:tgtEl>
+                                          <p:spTgt spid="11"/>
                                         </p:tgtEl>
                                         <p:attrNameLst>
                                           <p:attrName>ppt_y</p:attrName>
@@ -8307,7 +8262,7 @@
                                       <p:tavLst>
                                         <p:tav tm="0">
                                           <p:val>
-                                            <p:strVal val="#ppt_y+0.025"/>
+                                            <p:strVal val="#ppt_y+0.015"/>
                                           </p:val>
                                         </p:tav>
                                         <p:tav tm="100000">
@@ -8321,20 +8276,20 @@
                                 </p:cTn>
                               </p:par>
                               <p:par>
-                                <p:cTn id="29" presetID="10" presetClass="entr" presetSubtype="0" fill="hold" grpId="0" nodeType="withEffect">
+                                <p:cTn id="35" presetID="10" presetClass="entr" presetSubtype="0" fill="hold" grpId="0" nodeType="withEffect">
                                   <p:stCondLst>
-                                    <p:cond delay="384"/>
+                                    <p:cond delay="560"/>
                                   </p:stCondLst>
                                   <p:childTnLst>
                                     <p:set>
                                       <p:cBhvr>
-                                        <p:cTn id="30" dur="1" fill="hold">
+                                        <p:cTn id="36" dur="1" fill="hold">
                                           <p:stCondLst>
                                             <p:cond delay="0"/>
                                           </p:stCondLst>
                                         </p:cTn>
                                         <p:tgtEl>
-                                          <p:spTgt spid="8"/>
+                                          <p:spTgt spid="9"/>
                                         </p:tgtEl>
                                         <p:attrNameLst>
                                           <p:attrName>style.visibility</p:attrName>
@@ -8344,55 +8299,32 @@
                                         <p:strVal val="visible"/>
                                       </p:to>
                                     </p:set>
-                                    <p:animEffect transition="in" filter="fade">
-                                      <p:cBhvr>
-                                        <p:cTn id="31" dur="450"/>
-                                        <p:tgtEl>
-                                          <p:spTgt spid="8"/>
+                                    <p:animEffect transition="in" filter="wipe(left)">
+                                      <p:cBhvr>
+                                        <p:cTn id="37" dur="320"/>
+                                        <p:tgtEl>
+                                          <p:spTgt spid="9"/>
                                         </p:tgtEl>
                                       </p:cBhvr>
                                     </p:animEffect>
-                                    <p:anim calcmode="lin" valueType="num">
-                                      <p:cBhvr additive="base">
-                                        <p:cTn id="32" dur="450" fill="hold"/>
-                                        <p:tgtEl>
-                                          <p:spTgt spid="8"/>
-                                        </p:tgtEl>
-                                        <p:attrNameLst>
-                                          <p:attrName>ppt_y</p:attrName>
-                                        </p:attrNameLst>
-                                      </p:cBhvr>
-                                      <p:tavLst>
-                                        <p:tav tm="0">
-                                          <p:val>
-                                            <p:strVal val="#ppt_y+0.025"/>
-                                          </p:val>
-                                        </p:tav>
-                                        <p:tav tm="100000">
-                                          <p:val>
-                                            <p:strVal val="#ppt_y"/>
-                                          </p:val>
-                                        </p:tav>
-                                      </p:tavLst>
-                                    </p:anim>
                                   </p:childTnLst>
                                 </p:cTn>
                               </p:par>
                               <p:par>
-                                <p:cTn id="33" presetID="10" presetClass="entr" presetSubtype="0" fill="hold" grpId="0" nodeType="withEffect">
+                                <p:cTn id="38" presetID="10" presetClass="entr" presetSubtype="0" fill="hold" grpId="0" nodeType="withEffect">
                                   <p:stCondLst>
-                                    <p:cond delay="448"/>
+                                    <p:cond delay="630"/>
                                   </p:stCondLst>
                                   <p:childTnLst>
                                     <p:set>
                                       <p:cBhvr>
-                                        <p:cTn id="34" dur="1" fill="hold">
+                                        <p:cTn id="39" dur="1" fill="hold">
                                           <p:stCondLst>
                                             <p:cond delay="0"/>
                                           </p:stCondLst>
                                         </p:cTn>
                                         <p:tgtEl>
-                                          <p:spTgt spid="11"/>
+                                          <p:spTgt spid="10"/>
                                         </p:tgtEl>
                                         <p:attrNameLst>
                                           <p:attrName>style.visibility</p:attrName>
@@ -8402,102 +8334,21 @@
                                         <p:strVal val="visible"/>
                                       </p:to>
                                     </p:set>
-                                    <p:animEffect transition="in" filter="fade">
-                                      <p:cBhvr>
-                                        <p:cTn id="35" dur="450"/>
-                                        <p:tgtEl>
-                                          <p:spTgt spid="11"/>
+                                    <p:animEffect transition="in" filter="wipe(left)">
+                                      <p:cBhvr>
+                                        <p:cTn id="40" dur="320"/>
+                                        <p:tgtEl>
+                                          <p:spTgt spid="10"/>
                                         </p:tgtEl>
                                       </p:cBhvr>
                                     </p:animEffect>
-                                    <p:anim calcmode="lin" valueType="num">
-                                      <p:cBhvr additive="base">
-                                        <p:cTn id="36" dur="450" fill="hold"/>
-                                        <p:tgtEl>
-                                          <p:spTgt spid="11"/>
-                                        </p:tgtEl>
-                                        <p:attrNameLst>
-                                          <p:attrName>ppt_y</p:attrName>
-                                        </p:attrNameLst>
-                                      </p:cBhvr>
-                                      <p:tavLst>
-                                        <p:tav tm="0">
-                                          <p:val>
-                                            <p:strVal val="#ppt_y+0.025"/>
-                                          </p:val>
-                                        </p:tav>
-                                        <p:tav tm="100000">
-                                          <p:val>
-                                            <p:strVal val="#ppt_y"/>
-                                          </p:val>
-                                        </p:tav>
-                                      </p:tavLst>
-                                    </p:anim>
-                                  </p:childTnLst>
-                                </p:cTn>
-                              </p:par>
-                              <p:par>
-                                <p:cTn id="37" presetID="10" presetClass="entr" presetSubtype="0" fill="hold" grpId="0" nodeType="withEffect">
-                                  <p:stCondLst>
-                                    <p:cond delay="512"/>
-                                  </p:stCondLst>
-                                  <p:childTnLst>
-                                    <p:set>
-                                      <p:cBhvr>
-                                        <p:cTn id="38" dur="1" fill="hold">
-                                          <p:stCondLst>
-                                            <p:cond delay="0"/>
-                                          </p:stCondLst>
-                                        </p:cTn>
-                                        <p:tgtEl>
-                                          <p:spTgt spid="9"/>
-                                        </p:tgtEl>
-                                        <p:attrNameLst>
-                                          <p:attrName>style.visibility</p:attrName>
-                                        </p:attrNameLst>
-                                      </p:cBhvr>
-                                      <p:to>
-                                        <p:strVal val="visible"/>
-                                      </p:to>
-                                    </p:set>
-                                    <p:animEffect transition="in" filter="fade">
-                                      <p:cBhvr>
-                                        <p:cTn id="39" dur="450"/>
-                                        <p:tgtEl>
-                                          <p:spTgt spid="9"/>
-                                        </p:tgtEl>
-                                      </p:cBhvr>
-                                    </p:animEffect>
-                                    <p:anim calcmode="lin" valueType="num">
-                                      <p:cBhvr additive="base">
-                                        <p:cTn id="40" dur="450" fill="hold"/>
-                                        <p:tgtEl>
-                                          <p:spTgt spid="9"/>
-                                        </p:tgtEl>
-                                        <p:attrNameLst>
-                                          <p:attrName>ppt_y</p:attrName>
-                                        </p:attrNameLst>
-                                      </p:cBhvr>
-                                      <p:tavLst>
-                                        <p:tav tm="0">
-                                          <p:val>
-                                            <p:strVal val="#ppt_y+0.025"/>
-                                          </p:val>
-                                        </p:tav>
-                                        <p:tav tm="100000">
-                                          <p:val>
-                                            <p:strVal val="#ppt_y"/>
-                                          </p:val>
-                                        </p:tav>
-                                      </p:tavLst>
-                                    </p:anim>
                                   </p:childTnLst>
                                 </p:cTn>
                               </p:par>
                               <p:par>
                                 <p:cTn id="41" presetID="10" presetClass="entr" presetSubtype="0" fill="hold" grpId="0" nodeType="withEffect">
                                   <p:stCondLst>
-                                    <p:cond delay="576"/>
+                                    <p:cond delay="700"/>
                                   </p:stCondLst>
                                   <p:childTnLst>
                                     <p:set>
@@ -8508,7 +8359,7 @@
                                           </p:stCondLst>
                                         </p:cTn>
                                         <p:tgtEl>
-                                          <p:spTgt spid="10"/>
+                                          <p:spTgt spid="12"/>
                                         </p:tgtEl>
                                         <p:attrNameLst>
                                           <p:attrName>style.visibility</p:attrName>
@@ -8520,17 +8371,17 @@
                                     </p:set>
                                     <p:animEffect transition="in" filter="fade">
                                       <p:cBhvr>
-                                        <p:cTn id="43" dur="450"/>
-                                        <p:tgtEl>
-                                          <p:spTgt spid="10"/>
+                                        <p:cTn id="43" dur="320"/>
+                                        <p:tgtEl>
+                                          <p:spTgt spid="12"/>
                                         </p:tgtEl>
                                       </p:cBhvr>
                                     </p:animEffect>
                                     <p:anim calcmode="lin" valueType="num">
                                       <p:cBhvr additive="base">
-                                        <p:cTn id="44" dur="450" fill="hold"/>
-                                        <p:tgtEl>
-                                          <p:spTgt spid="10"/>
+                                        <p:cTn id="44" dur="320" fill="hold"/>
+                                        <p:tgtEl>
+                                          <p:spTgt spid="12"/>
                                         </p:tgtEl>
                                         <p:attrNameLst>
                                           <p:attrName>ppt_y</p:attrName>
@@ -8539,7 +8390,7 @@
                                       <p:tavLst>
                                         <p:tav tm="0">
                                           <p:val>
-                                            <p:strVal val="#ppt_y+0.025"/>
+                                            <p:strVal val="#ppt_y+0.015"/>
                                           </p:val>
                                         </p:tav>
                                         <p:tav tm="100000">
@@ -8555,7 +8406,7 @@
                               <p:par>
                                 <p:cTn id="45" presetID="10" presetClass="entr" presetSubtype="0" fill="hold" grpId="0" nodeType="withEffect">
                                   <p:stCondLst>
-                                    <p:cond delay="640"/>
+                                    <p:cond delay="770"/>
                                   </p:stCondLst>
                                   <p:childTnLst>
                                     <p:set>
@@ -8566,7 +8417,7 @@
                                           </p:stCondLst>
                                         </p:cTn>
                                         <p:tgtEl>
-                                          <p:spTgt spid="12"/>
+                                          <p:spTgt spid="15"/>
                                         </p:tgtEl>
                                         <p:attrNameLst>
                                           <p:attrName>style.visibility</p:attrName>
@@ -8578,17 +8429,17 @@
                                     </p:set>
                                     <p:animEffect transition="in" filter="fade">
                                       <p:cBhvr>
-                                        <p:cTn id="47" dur="450"/>
-                                        <p:tgtEl>
-                                          <p:spTgt spid="12"/>
+                                        <p:cTn id="47" dur="320"/>
+                                        <p:tgtEl>
+                                          <p:spTgt spid="15"/>
                                         </p:tgtEl>
                                       </p:cBhvr>
                                     </p:animEffect>
                                     <p:anim calcmode="lin" valueType="num">
                                       <p:cBhvr additive="base">
-                                        <p:cTn id="48" dur="450" fill="hold"/>
-                                        <p:tgtEl>
-                                          <p:spTgt spid="12"/>
+                                        <p:cTn id="48" dur="320" fill="hold"/>
+                                        <p:tgtEl>
+                                          <p:spTgt spid="15"/>
                                         </p:tgtEl>
                                         <p:attrNameLst>
                                           <p:attrName>ppt_y</p:attrName>
@@ -8597,7 +8448,7 @@
                                       <p:tavLst>
                                         <p:tav tm="0">
                                           <p:val>
-                                            <p:strVal val="#ppt_y+0.025"/>
+                                            <p:strVal val="#ppt_y+0.015"/>
                                           </p:val>
                                         </p:tav>
                                         <p:tav tm="100000">
@@ -8613,7 +8464,7 @@
                               <p:par>
                                 <p:cTn id="49" presetID="10" presetClass="entr" presetSubtype="0" fill="hold" grpId="0" nodeType="withEffect">
                                   <p:stCondLst>
-                                    <p:cond delay="704"/>
+                                    <p:cond delay="840"/>
                                   </p:stCondLst>
                                   <p:childTnLst>
                                     <p:set>
@@ -8624,7 +8475,77 @@
                                           </p:stCondLst>
                                         </p:cTn>
                                         <p:tgtEl>
-                                          <p:spTgt spid="15"/>
+                                          <p:spTgt spid="13"/>
+                                        </p:tgtEl>
+                                        <p:attrNameLst>
+                                          <p:attrName>style.visibility</p:attrName>
+                                        </p:attrNameLst>
+                                      </p:cBhvr>
+                                      <p:to>
+                                        <p:strVal val="visible"/>
+                                      </p:to>
+                                    </p:set>
+                                    <p:animEffect transition="in" filter="wipe(left)">
+                                      <p:cBhvr>
+                                        <p:cTn id="51" dur="320"/>
+                                        <p:tgtEl>
+                                          <p:spTgt spid="13"/>
+                                        </p:tgtEl>
+                                      </p:cBhvr>
+                                    </p:animEffect>
+                                  </p:childTnLst>
+                                </p:cTn>
+                              </p:par>
+                              <p:par>
+                                <p:cTn id="52" presetID="10" presetClass="entr" presetSubtype="0" fill="hold" grpId="0" nodeType="withEffect">
+                                  <p:stCondLst>
+                                    <p:cond delay="910"/>
+                                  </p:stCondLst>
+                                  <p:childTnLst>
+                                    <p:set>
+                                      <p:cBhvr>
+                                        <p:cTn id="53" dur="1" fill="hold">
+                                          <p:stCondLst>
+                                            <p:cond delay="0"/>
+                                          </p:stCondLst>
+                                        </p:cTn>
+                                        <p:tgtEl>
+                                          <p:spTgt spid="14"/>
+                                        </p:tgtEl>
+                                        <p:attrNameLst>
+                                          <p:attrName>style.visibility</p:attrName>
+                                        </p:attrNameLst>
+                                      </p:cBhvr>
+                                      <p:to>
+                                        <p:strVal val="visible"/>
+                                      </p:to>
+                                    </p:set>
+                                    <p:animEffect transition="in" filter="wipe(left)">
+                                      <p:cBhvr>
+                                        <p:cTn id="54" dur="320"/>
+                                        <p:tgtEl>
+                                          <p:spTgt spid="14"/>
+                                        </p:tgtEl>
+                                      </p:cBhvr>
+                                    </p:animEffect>
+                                  </p:childTnLst>
+                                </p:cTn>
+                              </p:par>
+                              <p:par>
+                                <p:cTn id="55" presetID="10" presetClass="entr" presetSubtype="0" fill="hold" grpId="0" nodeType="withEffect">
+                                  <p:stCondLst>
+                                    <p:cond delay="980"/>
+                                  </p:stCondLst>
+                                  <p:childTnLst>
+                                    <p:set>
+                                      <p:cBhvr>
+                                        <p:cTn id="56" dur="1" fill="hold">
+                                          <p:stCondLst>
+                                            <p:cond delay="0"/>
+                                          </p:stCondLst>
+                                        </p:cTn>
+                                        <p:tgtEl>
+                                          <p:spTgt spid="16"/>
                                         </p:tgtEl>
                                         <p:attrNameLst>
                                           <p:attrName>style.visibility</p:attrName>
@@ -8636,17 +8557,17 @@
                                     </p:set>
                                     <p:animEffect transition="in" filter="fade">
                                       <p:cBhvr>
-                                        <p:cTn id="51" dur="450"/>
-                                        <p:tgtEl>
-                                          <p:spTgt spid="15"/>
+                                        <p:cTn id="57" dur="320"/>
+                                        <p:tgtEl>
+                                          <p:spTgt spid="16"/>
                                         </p:tgtEl>
                                       </p:cBhvr>
                                     </p:animEffect>
                                     <p:anim calcmode="lin" valueType="num">
                                       <p:cBhvr additive="base">
-                                        <p:cTn id="52" dur="450" fill="hold"/>
-                                        <p:tgtEl>
-                                          <p:spTgt spid="15"/>
+                                        <p:cTn id="58" dur="320" fill="hold"/>
+                                        <p:tgtEl>
+                                          <p:spTgt spid="16"/>
                                         </p:tgtEl>
                                         <p:attrNameLst>
                                           <p:attrName>ppt_y</p:attrName>
@@ -8655,7 +8576,7 @@
                                       <p:tavLst>
                                         <p:tav tm="0">
                                           <p:val>
-                                            <p:strVal val="#ppt_y+0.025"/>
+                                            <p:strVal val="#ppt_y+0.015"/>
                                           </p:val>
                                         </p:tav>
                                         <p:tav tm="100000">
@@ -8669,20 +8590,20 @@
                                 </p:cTn>
                               </p:par>
                               <p:par>
-                                <p:cTn id="53" presetID="10" presetClass="entr" presetSubtype="0" fill="hold" grpId="0" nodeType="withEffect">
+                                <p:cTn id="59" presetID="10" presetClass="entr" presetSubtype="0" fill="hold" grpId="0" nodeType="withEffect">
                                   <p:stCondLst>
-                                    <p:cond delay="768"/>
+                                    <p:cond delay="1050"/>
                                   </p:stCondLst>
                                   <p:childTnLst>
                                     <p:set>
                                       <p:cBhvr>
-                                        <p:cTn id="54" dur="1" fill="hold">
+                                        <p:cTn id="60" dur="1" fill="hold">
                                           <p:stCondLst>
                                             <p:cond delay="0"/>
                                           </p:stCondLst>
                                         </p:cTn>
                                         <p:tgtEl>
-                                          <p:spTgt spid="13"/>
+                                          <p:spTgt spid="19"/>
                                         </p:tgtEl>
                                         <p:attrNameLst>
                                           <p:attrName>style.visibility</p:attrName>
@@ -8694,17 +8615,17 @@
                                     </p:set>
                                     <p:animEffect transition="in" filter="fade">
                                       <p:cBhvr>
-                                        <p:cTn id="55" dur="450"/>
-                                        <p:tgtEl>
-                                          <p:spTgt spid="13"/>
+                                        <p:cTn id="61" dur="320"/>
+                                        <p:tgtEl>
+                                          <p:spTgt spid="19"/>
                                         </p:tgtEl>
                                       </p:cBhvr>
                                     </p:animEffect>
                                     <p:anim calcmode="lin" valueType="num">
                                       <p:cBhvr additive="base">
-                                        <p:cTn id="56" dur="450" fill="hold"/>
-                                        <p:tgtEl>
-                                          <p:spTgt spid="13"/>
+                                        <p:cTn id="62" dur="320" fill="hold"/>
+                                        <p:tgtEl>
+                                          <p:spTgt spid="19"/>
                                         </p:tgtEl>
                                         <p:attrNameLst>
                                           <p:attrName>ppt_y</p:attrName>
@@ -8713,7 +8634,7 @@
                                       <p:tavLst>
                                         <p:tav tm="0">
                                           <p:val>
-                                            <p:strVal val="#ppt_y+0.025"/>
+                                            <p:strVal val="#ppt_y+0.015"/>
                                           </p:val>
                                         </p:tav>
                                         <p:tav tm="100000">
@@ -8727,20 +8648,20 @@
                                 </p:cTn>
                               </p:par>
                               <p:par>
-                                <p:cTn id="57" presetID="10" presetClass="entr" presetSubtype="0" fill="hold" grpId="0" nodeType="withEffect">
+                                <p:cTn id="63" presetID="10" presetClass="entr" presetSubtype="0" fill="hold" grpId="0" nodeType="withEffect">
                                   <p:stCondLst>
-                                    <p:cond delay="832"/>
+                                    <p:cond delay="1120"/>
                                   </p:stCondLst>
                                   <p:childTnLst>
                                     <p:set>
                                       <p:cBhvr>
-                                        <p:cTn id="58" dur="1" fill="hold">
+                                        <p:cTn id="64" dur="1" fill="hold">
                                           <p:stCondLst>
                                             <p:cond delay="0"/>
                                           </p:stCondLst>
                                         </p:cTn>
                                         <p:tgtEl>
-                                          <p:spTgt spid="14"/>
+                                          <p:spTgt spid="17"/>
                                         </p:tgtEl>
                                         <p:attrNameLst>
                                           <p:attrName>style.visibility</p:attrName>
@@ -8750,55 +8671,32 @@
                                         <p:strVal val="visible"/>
                                       </p:to>
                                     </p:set>
-                                    <p:animEffect transition="in" filter="fade">
-                                      <p:cBhvr>
-                                        <p:cTn id="59" dur="450"/>
-                                        <p:tgtEl>
-                                          <p:spTgt spid="14"/>
+                                    <p:animEffect transition="in" filter="wipe(left)">
+                                      <p:cBhvr>
+                                        <p:cTn id="65" dur="320"/>
+                                        <p:tgtEl>
+                                          <p:spTgt spid="17"/>
                                         </p:tgtEl>
                                       </p:cBhvr>
                                     </p:animEffect>
-                                    <p:anim calcmode="lin" valueType="num">
-                                      <p:cBhvr additive="base">
-                                        <p:cTn id="60" dur="450" fill="hold"/>
-                                        <p:tgtEl>
-                                          <p:spTgt spid="14"/>
-                                        </p:tgtEl>
-                                        <p:attrNameLst>
-                                          <p:attrName>ppt_y</p:attrName>
-                                        </p:attrNameLst>
-                                      </p:cBhvr>
-                                      <p:tavLst>
-                                        <p:tav tm="0">
-                                          <p:val>
-                                            <p:strVal val="#ppt_y+0.025"/>
-                                          </p:val>
-                                        </p:tav>
-                                        <p:tav tm="100000">
-                                          <p:val>
-                                            <p:strVal val="#ppt_y"/>
-                                          </p:val>
-                                        </p:tav>
-                                      </p:tavLst>
-                                    </p:anim>
                                   </p:childTnLst>
                                 </p:cTn>
                               </p:par>
                               <p:par>
-                                <p:cTn id="61" presetID="10" presetClass="entr" presetSubtype="0" fill="hold" grpId="0" nodeType="withEffect">
+                                <p:cTn id="66" presetID="10" presetClass="entr" presetSubtype="0" fill="hold" grpId="0" nodeType="withEffect">
                                   <p:stCondLst>
-                                    <p:cond delay="896"/>
+                                    <p:cond delay="1190"/>
                                   </p:stCondLst>
                                   <p:childTnLst>
                                     <p:set>
                                       <p:cBhvr>
-                                        <p:cTn id="62" dur="1" fill="hold">
+                                        <p:cTn id="67" dur="1" fill="hold">
                                           <p:stCondLst>
                                             <p:cond delay="0"/>
                                           </p:stCondLst>
                                         </p:cTn>
                                         <p:tgtEl>
-                                          <p:spTgt spid="16"/>
+                                          <p:spTgt spid="18"/>
                                         </p:tgtEl>
                                         <p:attrNameLst>
                                           <p:attrName>style.visibility</p:attrName>
@@ -8808,211 +8706,14 @@
                                         <p:strVal val="visible"/>
                                       </p:to>
                                     </p:set>
-                                    <p:animEffect transition="in" filter="fade">
-                                      <p:cBhvr>
-                                        <p:cTn id="63" dur="450"/>
-                                        <p:tgtEl>
-                                          <p:spTgt spid="16"/>
+                                    <p:animEffect transition="in" filter="wipe(left)">
+                                      <p:cBhvr>
+                                        <p:cTn id="68" dur="320"/>
+                                        <p:tgtEl>
+                                          <p:spTgt spid="18"/>
                                         </p:tgtEl>
                                       </p:cBhvr>
                                     </p:animEffect>
-                                    <p:anim calcmode="lin" valueType="num">
-                                      <p:cBhvr additive="base">
-                                        <p:cTn id="64" dur="450" fill="hold"/>
-                                        <p:tgtEl>
-                                          <p:spTgt spid="16"/>
-                                        </p:tgtEl>
-                                        <p:attrNameLst>
-                                          <p:attrName>ppt_y</p:attrName>
-                                        </p:attrNameLst>
-                                      </p:cBhvr>
-                                      <p:tavLst>
-                                        <p:tav tm="0">
-                                          <p:val>
-                                            <p:strVal val="#ppt_y+0.025"/>
-                                          </p:val>
-                                        </p:tav>
-                                        <p:tav tm="100000">
-                                          <p:val>
-                                            <p:strVal val="#ppt_y"/>
-                                          </p:val>
-                                        </p:tav>
-                                      </p:tavLst>
-                                    </p:anim>
-                                  </p:childTnLst>
-                                </p:cTn>
-                              </p:par>
-                              <p:par>
-                                <p:cTn id="65" presetID="10" presetClass="entr" presetSubtype="0" fill="hold" grpId="0" nodeType="withEffect">
-                                  <p:stCondLst>
-                                    <p:cond delay="960"/>
-                                  </p:stCondLst>
-                                  <p:childTnLst>
-                                    <p:set>
-                                      <p:cBhvr>
-                                        <p:cTn id="66" dur="1" fill="hold">
-                                          <p:stCondLst>
-                                            <p:cond delay="0"/>
-                                          </p:stCondLst>
-                                        </p:cTn>
-                                        <p:tgtEl>
-                                          <p:spTgt spid="19"/>
-                                        </p:tgtEl>
-                                        <p:attrNameLst>
-                                          <p:attrName>style.visibility</p:attrName>
-                                        </p:attrNameLst>
-                                      </p:cBhvr>
-                                      <p:to>
-                                        <p:strVal val="visible"/>
-                                      </p:to>
-                                    </p:set>
-                                    <p:animEffect transition="in" filter="fade">
-                                      <p:cBhvr>
-                                        <p:cTn id="67" dur="450"/>
-                                        <p:tgtEl>
-                                          <p:spTgt spid="19"/>
-                                        </p:tgtEl>
-                                      </p:cBhvr>
-                                    </p:animEffect>
-                                    <p:anim calcmode="lin" valueType="num">
-                                      <p:cBhvr additive="base">
-                                        <p:cTn id="68" dur="450" fill="hold"/>
-                                        <p:tgtEl>
-                                          <p:spTgt spid="19"/>
-                                        </p:tgtEl>
-                                        <p:attrNameLst>
-                                          <p:attrName>ppt_y</p:attrName>
-                                        </p:attrNameLst>
-                                      </p:cBhvr>
-                                      <p:tavLst>
-                                        <p:tav tm="0">
-                                          <p:val>
-                                            <p:strVal val="#ppt_y+0.025"/>
-                                          </p:val>
-                                        </p:tav>
-                                        <p:tav tm="100000">
-                                          <p:val>
-                                            <p:strVal val="#ppt_y"/>
-                                          </p:val>
-                                        </p:tav>
-                                      </p:tavLst>
-                                    </p:anim>
-                                  </p:childTnLst>
-                                </p:cTn>
-                              </p:par>
-                              <p:par>
-                                <p:cTn id="69" presetID="10" presetClass="entr" presetSubtype="0" fill="hold" grpId="0" nodeType="withEffect">
-                                  <p:stCondLst>
-                                    <p:cond delay="1024"/>
-                                  </p:stCondLst>
-                                  <p:childTnLst>
-                                    <p:set>
-                                      <p:cBhvr>
-                                        <p:cTn id="70" dur="1" fill="hold">
-                                          <p:stCondLst>
-                                            <p:cond delay="0"/>
-                                          </p:stCondLst>
-                                        </p:cTn>
-                                        <p:tgtEl>
-                                          <p:spTgt spid="17"/>
-                                        </p:tgtEl>
-                                        <p:attrNameLst>
-                                          <p:attrName>style.visibility</p:attrName>
-                                        </p:attrNameLst>
-                                      </p:cBhvr>
-                                      <p:to>
-                                        <p:strVal val="visible"/>
-                                      </p:to>
-                                    </p:set>
-                                    <p:animEffect transition="in" filter="fade">
-                                      <p:cBhvr>
-                                        <p:cTn id="71" dur="450"/>
-                                        <p:tgtEl>
-                                          <p:spTgt spid="17"/>
-                                        </p:tgtEl>
-                                      </p:cBhvr>
-                                    </p:animEffect>
-                                    <p:anim calcmode="lin" valueType="num">
-                                      <p:cBhvr additive="base">
-                                        <p:cTn id="72" dur="450" fill="hold"/>
-                                        <p:tgtEl>
-                                          <p:spTgt spid="17"/>
-                                        </p:tgtEl>
-                                        <p:attrNameLst>
-                                          <p:attrName>ppt_y</p:attrName>
-                                        </p:attrNameLst>
-                                      </p:cBhvr>
-                                      <p:tavLst>
-                                        <p:tav tm="0">
-                                          <p:val>
-                                            <p:strVal val="#ppt_y+0.025"/>
-                                          </p:val>
-                                        </p:tav>
-                                        <p:tav tm="100000">
-                                          <p:val>
-                                            <p:strVal val="#ppt_y"/>
-                                          </p:val>
-                                        </p:tav>
-                                      </p:tavLst>
-                                    </p:anim>
-                                  </p:childTnLst>
-                                </p:cTn>
-                              </p:par>
-                              <p:par>
-                                <p:cTn id="73" presetID="10" presetClass="entr" presetSubtype="0" fill="hold" grpId="0" nodeType="withEffect">
-                                  <p:stCondLst>
-                                    <p:cond delay="1088"/>
-                                  </p:stCondLst>
-                                  <p:childTnLst>
-                                    <p:set>
-                                      <p:cBhvr>
-                                        <p:cTn id="74" dur="1" fill="hold">
-                                          <p:stCondLst>
-                                            <p:cond delay="0"/>
-                                          </p:stCondLst>
-                                        </p:cTn>
-                                        <p:tgtEl>
-                                          <p:spTgt spid="18"/>
-                                        </p:tgtEl>
-                                        <p:attrNameLst>
-                                          <p:attrName>style.visibility</p:attrName>
-                                        </p:attrNameLst>
-                                      </p:cBhvr>
-                                      <p:to>
-                                        <p:strVal val="visible"/>
-                                      </p:to>
-                                    </p:set>
-                                    <p:animEffect transition="in" filter="fade">
-                                      <p:cBhvr>
-                                        <p:cTn id="75" dur="450"/>
-                                        <p:tgtEl>
-                                          <p:spTgt spid="18"/>
-                                        </p:tgtEl>
-                                      </p:cBhvr>
-                                    </p:animEffect>
-                                    <p:anim calcmode="lin" valueType="num">
-                                      <p:cBhvr additive="base">
-                                        <p:cTn id="76" dur="450" fill="hold"/>
-                                        <p:tgtEl>
-                                          <p:spTgt spid="18"/>
-                                        </p:tgtEl>
-                                        <p:attrNameLst>
-                                          <p:attrName>ppt_y</p:attrName>
-                                        </p:attrNameLst>
-                                      </p:cBhvr>
-                                      <p:tavLst>
-                                        <p:tav tm="0">
-                                          <p:val>
-                                            <p:strVal val="#ppt_y+0.025"/>
-                                          </p:val>
-                                        </p:tav>
-                                        <p:tav tm="100000">
-                                          <p:val>
-                                            <p:strVal val="#ppt_y"/>
-                                          </p:val>
-                                        </p:tav>
-                                      </p:tavLst>
-                                    </p:anim>
                                   </p:childTnLst>
                                 </p:cTn>
                               </p:par>
@@ -9370,7 +9071,7 @@
   <p:clrMapOvr>
     <a:masterClrMapping/>
   </p:clrMapOvr>
-  <p:transition xmlns:p14="http://schemas.microsoft.com/office/powerpoint/2010/main" spd="slow" p14:dur="700">
+  <p:transition xmlns:p14="http://schemas.microsoft.com/office/powerpoint/2010/main" spd="slow" p14:dur="420">
     <p:fade/>
   </p:transition>
   <p:timing xmlns:p="http://schemas.openxmlformats.org/presentationml/2006/main">
@@ -9422,7 +9123,7 @@
                                     </p:set>
                                     <p:animEffect transition="in" filter="fade">
                                       <p:cBhvr>
-                                        <p:cTn id="7" dur="450"/>
+                                        <p:cTn id="7" dur="320"/>
                                         <p:tgtEl>
                                           <p:spTgt spid="2"/>
                                         </p:tgtEl>
@@ -9430,7 +9131,7 @@
                                     </p:animEffect>
                                     <p:anim calcmode="lin" valueType="num">
                                       <p:cBhvr additive="base">
-                                        <p:cTn id="8" dur="450" fill="hold"/>
+                                        <p:cTn id="8" dur="320" fill="hold"/>
                                         <p:tgtEl>
                                           <p:spTgt spid="2"/>
                                         </p:tgtEl>
@@ -9441,7 +9142,7 @@
                                       <p:tavLst>
                                         <p:tav tm="0">
                                           <p:val>
-                                            <p:strVal val="#ppt_y+0.025"/>
+                                            <p:strVal val="#ppt_y+0.015"/>
                                           </p:val>
                                         </p:tav>
                                         <p:tav tm="100000">
@@ -9457,7 +9158,7 @@
                               <p:par>
                                 <p:cTn id="9" presetID="10" presetClass="entr" presetSubtype="0" fill="hold" grpId="0" nodeType="withEffect">
                                   <p:stCondLst>
-                                    <p:cond delay="160"/>
+                                    <p:cond delay="110"/>
                                   </p:stCondLst>
                                   <p:childTnLst>
                                     <p:set>
@@ -9480,7 +9181,7 @@
                                     </p:set>
                                     <p:animEffect transition="in" filter="fade">
                                       <p:cBhvr>
-                                        <p:cTn id="11" dur="450"/>
+                                        <p:cTn id="11" dur="320"/>
                                         <p:tgtEl>
                                           <p:spTgt spid="3"/>
                                         </p:tgtEl>
@@ -9488,7 +9189,7 @@
                                     </p:animEffect>
                                     <p:anim calcmode="lin" valueType="num">
                                       <p:cBhvr additive="base">
-                                        <p:cTn id="12" dur="450" fill="hold"/>
+                                        <p:cTn id="12" dur="320" fill="hold"/>
                                         <p:tgtEl>
                                           <p:spTgt spid="3"/>
                                         </p:tgtEl>
@@ -9499,7 +9200,7 @@
                                       <p:tavLst>
                                         <p:tav tm="0">
                                           <p:val>
-                                            <p:strVal val="#ppt_y+0.025"/>
+                                            <p:strVal val="#ppt_y+0.015"/>
                                           </p:val>
                                         </p:tav>
                                         <p:tav tm="100000">
@@ -9515,7 +9216,7 @@
                               <p:par>
                                 <p:cTn id="13" presetID="10" presetClass="entr" presetSubtype="0" fill="hold" grpId="0" nodeType="withEffect">
                                   <p:stCondLst>
-                                    <p:cond delay="320"/>
+                                    <p:cond delay="220"/>
                                   </p:stCondLst>
                                   <p:childTnLst>
                                     <p:set>
@@ -9538,7 +9239,7 @@
                                     </p:set>
                                     <p:animEffect transition="in" filter="fade">
                                       <p:cBhvr>
-                                        <p:cTn id="15" dur="450"/>
+                                        <p:cTn id="15" dur="320"/>
                                         <p:tgtEl>
                                           <p:spTgt spid="5"/>
                                         </p:tgtEl>
@@ -9546,7 +9247,7 @@
                                     </p:animEffect>
                                     <p:anim calcmode="lin" valueType="num">
                                       <p:cBhvr additive="base">
-                                        <p:cTn id="16" dur="450" fill="hold"/>
+                                        <p:cTn id="16" dur="320" fill="hold"/>
                                         <p:tgtEl>
                                           <p:spTgt spid="5"/>
                                         </p:tgtEl>
@@ -9557,7 +9258,7 @@
                                       <p:tavLst>
                                         <p:tav tm="0">
                                           <p:val>
-                                            <p:strVal val="#ppt_y+0.025"/>
+                                            <p:strVal val="#ppt_y+0.015"/>
                                           </p:val>
                                         </p:tav>
                                         <p:tav tm="100000">
@@ -9573,7 +9274,7 @@
                               <p:par>
                                 <p:cTn id="17" presetID="10" presetClass="entr" presetSubtype="0" fill="hold" grpId="0" nodeType="withEffect">
                                   <p:stCondLst>
-                                    <p:cond delay="480"/>
+                                    <p:cond delay="330"/>
                                   </p:stCondLst>
                                   <p:childTnLst>
                                     <p:set>
@@ -9596,7 +9297,7 @@
                                     </p:set>
                                     <p:animEffect transition="in" filter="fade">
                                       <p:cBhvr>
-                                        <p:cTn id="19" dur="450"/>
+                                        <p:cTn id="19" dur="320"/>
                                         <p:tgtEl>
                                           <p:spTgt spid="7"/>
                                         </p:tgtEl>
@@ -9604,7 +9305,7 @@
                                     </p:animEffect>
                                     <p:anim calcmode="lin" valueType="num">
                                       <p:cBhvr additive="base">
-                                        <p:cTn id="20" dur="450" fill="hold"/>
+                                        <p:cTn id="20" dur="320" fill="hold"/>
                                         <p:tgtEl>
                                           <p:spTgt spid="7"/>
                                         </p:tgtEl>
@@ -9615,7 +9316,7 @@
                                       <p:tavLst>
                                         <p:tav tm="0">
                                           <p:val>
-                                            <p:strVal val="#ppt_y+0.025"/>
+                                            <p:strVal val="#ppt_y+0.015"/>
                                           </p:val>
                                         </p:tav>
                                         <p:tav tm="100000">
@@ -9631,7 +9332,7 @@
                               <p:par>
                                 <p:cTn id="21" presetID="10" presetClass="entr" presetSubtype="0" fill="hold" grpId="0" nodeType="withEffect">
                                   <p:stCondLst>
-                                    <p:cond delay="640"/>
+                                    <p:cond delay="440"/>
                                   </p:stCondLst>
                                   <p:childTnLst>
                                     <p:set>
@@ -9654,7 +9355,7 @@
                                     </p:set>
                                     <p:animEffect transition="in" filter="fade">
                                       <p:cBhvr>
-                                        <p:cTn id="23" dur="450"/>
+                                        <p:cTn id="23" dur="320"/>
                                         <p:tgtEl>
                                           <p:spTgt spid="4"/>
                                         </p:tgtEl>
@@ -9662,7 +9363,7 @@
                                     </p:animEffect>
                                     <p:anim calcmode="lin" valueType="num">
                                       <p:cBhvr additive="base">
-                                        <p:cTn id="24" dur="450" fill="hold"/>
+                                        <p:cTn id="24" dur="320" fill="hold"/>
                                         <p:tgtEl>
                                           <p:spTgt spid="4"/>
                                         </p:tgtEl>
@@ -9673,7 +9374,7 @@
                                       <p:tavLst>
                                         <p:tav tm="0">
                                           <p:val>
-                                            <p:strVal val="#ppt_y+0.025"/>
+                                            <p:strVal val="#ppt_y+0.015"/>
                                           </p:val>
                                         </p:tav>
                                         <p:tav tm="100000">
@@ -9689,7 +9390,7 @@
                               <p:par>
                                 <p:cTn id="25" presetID="10" presetClass="entr" presetSubtype="0" fill="hold" grpId="0" nodeType="withEffect">
                                   <p:stCondLst>
-                                    <p:cond delay="800"/>
+                                    <p:cond delay="550"/>
                                   </p:stCondLst>
                                   <p:childTnLst>
                                     <p:set>
@@ -9712,7 +9413,7 @@
                                     </p:set>
                                     <p:animEffect transition="in" filter="fade">
                                       <p:cBhvr>
-                                        <p:cTn id="27" dur="450"/>
+                                        <p:cTn id="27" dur="320"/>
                                         <p:tgtEl>
                                           <p:spTgt spid="6"/>
                                         </p:tgtEl>
@@ -9720,7 +9421,7 @@
                                     </p:animEffect>
                                     <p:anim calcmode="lin" valueType="num">
                                       <p:cBhvr additive="base">
-                                        <p:cTn id="28" dur="450" fill="hold"/>
+                                        <p:cTn id="28" dur="320" fill="hold"/>
                                         <p:tgtEl>
                                           <p:spTgt spid="6"/>
                                         </p:tgtEl>
@@ -9731,7 +9432,7 @@
                                       <p:tavLst>
                                         <p:tav tm="0">
                                           <p:val>
-                                            <p:strVal val="#ppt_y+0.025"/>
+                                            <p:strVal val="#ppt_y+0.015"/>
                                           </p:val>
                                         </p:tav>
                                         <p:tav tm="100000">
@@ -9747,7 +9448,7 @@
                               <p:par>
                                 <p:cTn id="29" presetID="10" presetClass="entr" presetSubtype="0" fill="hold" grpId="0" nodeType="withEffect">
                                   <p:stCondLst>
-                                    <p:cond delay="960"/>
+                                    <p:cond delay="660"/>
                                   </p:stCondLst>
                                   <p:childTnLst>
                                     <p:set>
@@ -9770,7 +9471,7 @@
                                     </p:set>
                                     <p:animEffect transition="in" filter="fade">
                                       <p:cBhvr>
-                                        <p:cTn id="31" dur="450"/>
+                                        <p:cTn id="31" dur="320"/>
                                         <p:tgtEl>
                                           <p:spTgt spid="8"/>
                                         </p:tgtEl>
@@ -9778,7 +9479,7 @@
                                     </p:animEffect>
                                     <p:anim calcmode="lin" valueType="num">
                                       <p:cBhvr additive="base">
-                                        <p:cTn id="32" dur="450" fill="hold"/>
+                                        <p:cTn id="32" dur="320" fill="hold"/>
                                         <p:tgtEl>
                                           <p:spTgt spid="8"/>
                                         </p:tgtEl>
@@ -9789,7 +9490,7 @@
                                       <p:tavLst>
                                         <p:tav tm="0">
                                           <p:val>
-                                            <p:strVal val="#ppt_y+0.025"/>
+                                            <p:strVal val="#ppt_y+0.015"/>
                                           </p:val>
                                         </p:tav>
                                         <p:tav tm="100000">
@@ -10188,7 +9889,7 @@
       </p:sp>
       <p:sp>
         <p:nvSpPr>
-          <p:cNvPr id="8" name="Shape 6"/>
+          <p:cNvPr id="8" name="anim:wipe"/>
           <p:cNvSpPr/>
           <p:nvPr/>
         </p:nvSpPr>
@@ -10211,7 +9912,7 @@
   <p:clrMapOvr>
     <a:masterClrMapping/>
   </p:clrMapOvr>
-  <p:transition xmlns:p14="http://schemas.microsoft.com/office/powerpoint/2010/main" spd="slow" p14:dur="700">
+  <p:transition xmlns:p14="http://schemas.microsoft.com/office/powerpoint/2010/main" spd="slow" p14:dur="420">
     <p:fade/>
   </p:transition>
   <p:timing xmlns:p="http://schemas.openxmlformats.org/presentationml/2006/main">
@@ -10263,7 +9964,7 @@
                                     </p:set>
                                     <p:animEffect transition="in" filter="fade">
                                       <p:cBhvr>
-                                        <p:cTn id="7" dur="450"/>
+                                        <p:cTn id="7" dur="320"/>
                                         <p:tgtEl>
                                           <p:spTgt spid="2"/>
                                         </p:tgtEl>
@@ -10271,7 +9972,7 @@
                                     </p:animEffect>
                                     <p:anim calcmode="lin" valueType="num">
                                       <p:cBhvr additive="base">
-                                        <p:cTn id="8" dur="450" fill="hold"/>
+                                        <p:cTn id="8" dur="320" fill="hold"/>
                                         <p:tgtEl>
                                           <p:spTgt spid="2"/>
                                         </p:tgtEl>
@@ -10282,7 +9983,7 @@
                                       <p:tavLst>
                                         <p:tav tm="0">
                                           <p:val>
-                                            <p:strVal val="#ppt_y+0.025"/>
+                                            <p:strVal val="#ppt_y+0.015"/>
                                           </p:val>
                                         </p:tav>
                                         <p:tav tm="100000">
@@ -10298,7 +9999,7 @@
                               <p:par>
                                 <p:cTn id="9" presetID="10" presetClass="entr" presetSubtype="0" fill="hold" grpId="0" nodeType="withEffect">
                                   <p:stCondLst>
-                                    <p:cond delay="160"/>
+                                    <p:cond delay="110"/>
                                   </p:stCondLst>
                                   <p:childTnLst>
                                     <p:set>
@@ -10321,7 +10022,7 @@
                                     </p:set>
                                     <p:animEffect transition="in" filter="fade">
                                       <p:cBhvr>
-                                        <p:cTn id="11" dur="450"/>
+                                        <p:cTn id="11" dur="320"/>
                                         <p:tgtEl>
                                           <p:spTgt spid="3"/>
                                         </p:tgtEl>
@@ -10329,7 +10030,7 @@
                                     </p:animEffect>
                                     <p:anim calcmode="lin" valueType="num">
                                       <p:cBhvr additive="base">
-                                        <p:cTn id="12" dur="450" fill="hold"/>
+                                        <p:cTn id="12" dur="320" fill="hold"/>
                                         <p:tgtEl>
                                           <p:spTgt spid="3"/>
                                         </p:tgtEl>
@@ -10340,7 +10041,7 @@
                                       <p:tavLst>
                                         <p:tav tm="0">
                                           <p:val>
-                                            <p:strVal val="#ppt_y+0.025"/>
+                                            <p:strVal val="#ppt_y+0.015"/>
                                           </p:val>
                                         </p:tav>
                                         <p:tav tm="100000">
@@ -10356,7 +10057,7 @@
                               <p:par>
                                 <p:cTn id="13" presetID="10" presetClass="entr" presetSubtype="0" fill="hold" grpId="0" nodeType="withEffect">
                                   <p:stCondLst>
-                                    <p:cond delay="320"/>
+                                    <p:cond delay="220"/>
                                   </p:stCondLst>
                                   <p:childTnLst>
                                     <p:set>
@@ -10377,19 +10078,54 @@
                                         <p:strVal val="visible"/>
                                       </p:to>
                                     </p:set>
+                                    <p:animEffect transition="in" filter="wipe(left)">
+                                      <p:cBhvr>
+                                        <p:cTn id="15" dur="320"/>
+                                        <p:tgtEl>
+                                          <p:spTgt spid="8"/>
+                                        </p:tgtEl>
+                                      </p:cBhvr>
+                                    </p:animEffect>
+                                  </p:childTnLst>
+                                </p:cTn>
+                              </p:par>
+                              <p:par>
+                                <p:cTn id="16" presetID="10" presetClass="entr" presetSubtype="0" fill="hold" grpId="0" nodeType="withEffect">
+                                  <p:stCondLst>
+                                    <p:cond delay="330"/>
+                                  </p:stCondLst>
+                                  <p:childTnLst>
+                                    <p:set>
+                                      <p:cBhvr>
+                                        <p:cTn id="17" dur="1" fill="hold">
+                                          <p:stCondLst>
+                                            <p:cond delay="0"/>
+                                          </p:stCondLst>
+                                        </p:cTn>
+                                        <p:tgtEl>
+                                          <p:spTgt spid="4"/>
+                                        </p:tgtEl>
+                                        <p:attrNameLst>
+                                          <p:attrName>style.visibility</p:attrName>
+                                        </p:attrNameLst>
+                                      </p:cBhvr>
+                                      <p:to>
+                                        <p:strVal val="visible"/>
+                                      </p:to>
+                                    </p:set>
                                     <p:animEffect transition="in" filter="fade">
                                       <p:cBhvr>
-                                        <p:cTn id="15" dur="450"/>
-                                        <p:tgtEl>
-                                          <p:spTgt spid="8"/>
+                                        <p:cTn id="18" dur="320"/>
+                                        <p:tgtEl>
+                                          <p:spTgt spid="4"/>
                                         </p:tgtEl>
                                       </p:cBhvr>
                                     </p:animEffect>
                                     <p:anim calcmode="lin" valueType="num">
                                       <p:cBhvr additive="base">
-                                        <p:cTn id="16" dur="450" fill="hold"/>
-                                        <p:tgtEl>
-                                          <p:spTgt spid="8"/>
+                                        <p:cTn id="19" dur="320" fill="hold"/>
+                                        <p:tgtEl>
+                                          <p:spTgt spid="4"/>
                                         </p:tgtEl>
                                         <p:attrNameLst>
                                           <p:attrName>ppt_y</p:attrName>
@@ -10398,7 +10134,7 @@
                                       <p:tavLst>
                                         <p:tav tm="0">
                                           <p:val>
-                                            <p:strVal val="#ppt_y+0.025"/>
+                                            <p:strVal val="#ppt_y+0.015"/>
                                           </p:val>
                                         </p:tav>
                                         <p:tav tm="100000">
@@ -10412,20 +10148,20 @@
                                 </p:cTn>
                               </p:par>
                               <p:par>
-                                <p:cTn id="17" presetID="10" presetClass="entr" presetSubtype="0" fill="hold" grpId="0" nodeType="withEffect">
+                                <p:cTn id="20" presetID="10" presetClass="entr" presetSubtype="0" fill="hold" grpId="0" nodeType="withEffect">
                                   <p:stCondLst>
-                                    <p:cond delay="480"/>
+                                    <p:cond delay="440"/>
                                   </p:stCondLst>
                                   <p:childTnLst>
                                     <p:set>
                                       <p:cBhvr>
-                                        <p:cTn id="18" dur="1" fill="hold">
+                                        <p:cTn id="21" dur="1" fill="hold">
                                           <p:stCondLst>
                                             <p:cond delay="0"/>
                                           </p:stCondLst>
                                         </p:cTn>
                                         <p:tgtEl>
-                                          <p:spTgt spid="4"/>
+                                          <p:spTgt spid="5"/>
                                         </p:tgtEl>
                                         <p:attrNameLst>
                                           <p:attrName>style.visibility</p:attrName>
@@ -10437,17 +10173,17 @@
                                     </p:set>
                                     <p:animEffect transition="in" filter="fade">
                                       <p:cBhvr>
-                                        <p:cTn id="19" dur="450"/>
-                                        <p:tgtEl>
-                                          <p:spTgt spid="4"/>
+                                        <p:cTn id="22" dur="320"/>
+                                        <p:tgtEl>
+                                          <p:spTgt spid="5"/>
                                         </p:tgtEl>
                                       </p:cBhvr>
                                     </p:animEffect>
                                     <p:anim calcmode="lin" valueType="num">
                                       <p:cBhvr additive="base">
-                                        <p:cTn id="20" dur="450" fill="hold"/>
-                                        <p:tgtEl>
-                                          <p:spTgt spid="4"/>
+                                        <p:cTn id="23" dur="320" fill="hold"/>
+                                        <p:tgtEl>
+                                          <p:spTgt spid="5"/>
                                         </p:tgtEl>
                                         <p:attrNameLst>
                                           <p:attrName>ppt_y</p:attrName>
@@ -10456,7 +10192,7 @@
                                       <p:tavLst>
                                         <p:tav tm="0">
                                           <p:val>
-                                            <p:strVal val="#ppt_y+0.025"/>
+                                            <p:strVal val="#ppt_y+0.015"/>
                                           </p:val>
                                         </p:tav>
                                         <p:tav tm="100000">
@@ -10470,20 +10206,20 @@
                                 </p:cTn>
                               </p:par>
                               <p:par>
-                                <p:cTn id="21" presetID="10" presetClass="entr" presetSubtype="0" fill="hold" grpId="0" nodeType="withEffect">
+                                <p:cTn id="24" presetID="10" presetClass="entr" presetSubtype="0" fill="hold" grpId="0" nodeType="withEffect">
                                   <p:stCondLst>
-                                    <p:cond delay="640"/>
+                                    <p:cond delay="550"/>
                                   </p:stCondLst>
                                   <p:childTnLst>
                                     <p:set>
                                       <p:cBhvr>
-                                        <p:cTn id="22" dur="1" fill="hold">
+                                        <p:cTn id="25" dur="1" fill="hold">
                                           <p:stCondLst>
                                             <p:cond delay="0"/>
                                           </p:stCondLst>
                                         </p:cTn>
                                         <p:tgtEl>
-                                          <p:spTgt spid="5"/>
+                                          <p:spTgt spid="6"/>
                                         </p:tgtEl>
                                         <p:attrNameLst>
                                           <p:attrName>style.visibility</p:attrName>
@@ -10495,17 +10231,17 @@
                                     </p:set>
                                     <p:animEffect transition="in" filter="fade">
                                       <p:cBhvr>
-                                        <p:cTn id="23" dur="450"/>
-                                        <p:tgtEl>
-                                          <p:spTgt spid="5"/>
+                                        <p:cTn id="26" dur="320"/>
+                                        <p:tgtEl>
+                                          <p:spTgt spid="6"/>
                                         </p:tgtEl>
                                       </p:cBhvr>
                                     </p:animEffect>
                                     <p:anim calcmode="lin" valueType="num">
                                       <p:cBhvr additive="base">
-                                        <p:cTn id="24" dur="450" fill="hold"/>
-                                        <p:tgtEl>
-                                          <p:spTgt spid="5"/>
+                                        <p:cTn id="27" dur="320" fill="hold"/>
+                                        <p:tgtEl>
+                                          <p:spTgt spid="6"/>
                                         </p:tgtEl>
                                         <p:attrNameLst>
                                           <p:attrName>ppt_y</p:attrName>
@@ -10514,7 +10250,7 @@
                                       <p:tavLst>
                                         <p:tav tm="0">
                                           <p:val>
-                                            <p:strVal val="#ppt_y+0.025"/>
+                                            <p:strVal val="#ppt_y+0.015"/>
                                           </p:val>
                                         </p:tav>
                                         <p:tav tm="100000">
@@ -10528,20 +10264,20 @@
                                 </p:cTn>
                               </p:par>
                               <p:par>
-                                <p:cTn id="25" presetID="10" presetClass="entr" presetSubtype="0" fill="hold" grpId="0" nodeType="withEffect">
+                                <p:cTn id="28" presetID="10" presetClass="entr" presetSubtype="0" fill="hold" grpId="0" nodeType="withEffect">
                                   <p:stCondLst>
-                                    <p:cond delay="800"/>
+                                    <p:cond delay="660"/>
                                   </p:stCondLst>
                                   <p:childTnLst>
                                     <p:set>
                                       <p:cBhvr>
-                                        <p:cTn id="26" dur="1" fill="hold">
+                                        <p:cTn id="29" dur="1" fill="hold">
                                           <p:stCondLst>
                                             <p:cond delay="0"/>
                                           </p:stCondLst>
                                         </p:cTn>
                                         <p:tgtEl>
-                                          <p:spTgt spid="6"/>
+                                          <p:spTgt spid="7"/>
                                         </p:tgtEl>
                                         <p:attrNameLst>
                                           <p:attrName>style.visibility</p:attrName>
@@ -10553,17 +10289,17 @@
                                     </p:set>
                                     <p:animEffect transition="in" filter="fade">
                                       <p:cBhvr>
-                                        <p:cTn id="27" dur="450"/>
-                                        <p:tgtEl>
-                                          <p:spTgt spid="6"/>
+                                        <p:cTn id="30" dur="320"/>
+                                        <p:tgtEl>
+                                          <p:spTgt spid="7"/>
                                         </p:tgtEl>
                                       </p:cBhvr>
                                     </p:animEffect>
                                     <p:anim calcmode="lin" valueType="num">
                                       <p:cBhvr additive="base">
-                                        <p:cTn id="28" dur="450" fill="hold"/>
-                                        <p:tgtEl>
-                                          <p:spTgt spid="6"/>
+                                        <p:cTn id="31" dur="320" fill="hold"/>
+                                        <p:tgtEl>
+                                          <p:spTgt spid="7"/>
                                         </p:tgtEl>
                                         <p:attrNameLst>
                                           <p:attrName>ppt_y</p:attrName>
@@ -10572,65 +10308,7 @@
                                       <p:tavLst>
                                         <p:tav tm="0">
                                           <p:val>
-                                            <p:strVal val="#ppt_y+0.025"/>
-                                          </p:val>
-                                        </p:tav>
-                                        <p:tav tm="100000">
-                                          <p:val>
-                                            <p:strVal val="#ppt_y"/>
-                                          </p:val>
-                                        </p:tav>
-                                      </p:tavLst>
-                                    </p:anim>
-                                  </p:childTnLst>
-                                </p:cTn>
-                              </p:par>
-                              <p:par>
-                                <p:cTn id="29" presetID="10" presetClass="entr" presetSubtype="0" fill="hold" grpId="0" nodeType="withEffect">
-                                  <p:stCondLst>
-                                    <p:cond delay="960"/>
-                                  </p:stCondLst>
-                                  <p:childTnLst>
-                                    <p:set>
-                                      <p:cBhvr>
-                                        <p:cTn id="30" dur="1" fill="hold">
-                                          <p:stCondLst>
-                                            <p:cond delay="0"/>
-                                          </p:stCondLst>
-                                        </p:cTn>
-                                        <p:tgtEl>
-                                          <p:spTgt spid="7"/>
-                                        </p:tgtEl>
-                                        <p:attrNameLst>
-                                          <p:attrName>style.visibility</p:attrName>
-                                        </p:attrNameLst>
-                                      </p:cBhvr>
-                                      <p:to>
-                                        <p:strVal val="visible"/>
-                                      </p:to>
-                                    </p:set>
-                                    <p:animEffect transition="in" filter="fade">
-                                      <p:cBhvr>
-                                        <p:cTn id="31" dur="450"/>
-                                        <p:tgtEl>
-                                          <p:spTgt spid="7"/>
-                                        </p:tgtEl>
-                                      </p:cBhvr>
-                                    </p:animEffect>
-                                    <p:anim calcmode="lin" valueType="num">
-                                      <p:cBhvr additive="base">
-                                        <p:cTn id="32" dur="450" fill="hold"/>
-                                        <p:tgtEl>
-                                          <p:spTgt spid="7"/>
-                                        </p:tgtEl>
-                                        <p:attrNameLst>
-                                          <p:attrName>ppt_y</p:attrName>
-                                        </p:attrNameLst>
-                                      </p:cBhvr>
-                                      <p:tavLst>
-                                        <p:tav tm="0">
-                                          <p:val>
-                                            <p:strVal val="#ppt_y+0.025"/>
+                                            <p:strVal val="#ppt_y+0.015"/>
                                           </p:val>
                                         </p:tav>
                                         <p:tav tm="100000">
@@ -10792,7 +10470,7 @@
   <p:clrMapOvr>
     <a:masterClrMapping/>
   </p:clrMapOvr>
-  <p:transition xmlns:p14="http://schemas.microsoft.com/office/powerpoint/2010/main" spd="slow" p14:dur="700">
+  <p:transition xmlns:p14="http://schemas.microsoft.com/office/powerpoint/2010/main" spd="slow" p14:dur="420">
     <p:fade/>
   </p:transition>
   <p:timing xmlns:p="http://schemas.openxmlformats.org/presentationml/2006/main">
@@ -10844,7 +10522,7 @@
                                     </p:set>
                                     <p:animEffect transition="in" filter="fade">
                                       <p:cBhvr>
-                                        <p:cTn id="7" dur="450"/>
+                                        <p:cTn id="7" dur="320"/>
                                         <p:tgtEl>
                                           <p:spTgt spid="2"/>
                                         </p:tgtEl>
@@ -10852,7 +10530,7 @@
                                     </p:animEffect>
                                     <p:anim calcmode="lin" valueType="num">
                                       <p:cBhvr additive="base">
-                                        <p:cTn id="8" dur="450" fill="hold"/>
+                                        <p:cTn id="8" dur="320" fill="hold"/>
                                         <p:tgtEl>
                                           <p:spTgt spid="2"/>
                                         </p:tgtEl>
@@ -10863,7 +10541,7 @@
                                       <p:tavLst>
                                         <p:tav tm="0">
                                           <p:val>
-                                            <p:strVal val="#ppt_y+0.025"/>
+                                            <p:strVal val="#ppt_y+0.015"/>
                                           </p:val>
                                         </p:tav>
                                         <p:tav tm="100000">
@@ -10879,7 +10557,7 @@
                               <p:par>
                                 <p:cTn id="9" presetID="10" presetClass="entr" presetSubtype="0" fill="hold" grpId="0" nodeType="withEffect">
                                   <p:stCondLst>
-                                    <p:cond delay="160"/>
+                                    <p:cond delay="110"/>
                                   </p:stCondLst>
                                   <p:childTnLst>
                                     <p:set>
@@ -10902,7 +10580,7 @@
                                     </p:set>
                                     <p:animEffect transition="in" filter="fade">
                                       <p:cBhvr>
-                                        <p:cTn id="11" dur="450"/>
+                                        <p:cTn id="11" dur="320"/>
                                         <p:tgtEl>
                                           <p:spTgt spid="3"/>
                                         </p:tgtEl>
@@ -10910,7 +10588,7 @@
                                     </p:animEffect>
                                     <p:anim calcmode="lin" valueType="num">
                                       <p:cBhvr additive="base">
-                                        <p:cTn id="12" dur="450" fill="hold"/>
+                                        <p:cTn id="12" dur="320" fill="hold"/>
                                         <p:tgtEl>
                                           <p:spTgt spid="3"/>
                                         </p:tgtEl>
@@ -10921,7 +10599,7 @@
                                       <p:tavLst>
                                         <p:tav tm="0">
                                           <p:val>
-                                            <p:strVal val="#ppt_y+0.025"/>
+                                            <p:strVal val="#ppt_y+0.015"/>
                                           </p:val>
                                         </p:tav>
                                         <p:tav tm="100000">

--- a/assets/showcase/business-review/Annual-Review.pptx
+++ b/assets/showcase/business-review/Annual-Review.pptx
@@ -2156,7 +2156,7 @@
                                     </p:set>
                                     <p:animEffect transition="in" filter="fade">
                                       <p:cBhvr>
-                                        <p:cTn id="7" dur="320"/>
+                                        <p:cTn id="7" dur="292"/>
                                         <p:tgtEl>
                                           <p:spTgt spid="2"/>
                                         </p:tgtEl>
@@ -2164,7 +2164,7 @@
                                     </p:animEffect>
                                     <p:anim calcmode="lin" valueType="num">
                                       <p:cBhvr additive="base">
-                                        <p:cTn id="8" dur="320" fill="hold"/>
+                                        <p:cTn id="8" dur="292" fill="hold" decel="80000"/>
                                         <p:tgtEl>
                                           <p:spTgt spid="2"/>
                                         </p:tgtEl>
@@ -2214,7 +2214,7 @@
                                     </p:set>
                                     <p:animEffect transition="in" filter="fade">
                                       <p:cBhvr>
-                                        <p:cTn id="11" dur="320"/>
+                                        <p:cTn id="11" dur="369"/>
                                         <p:tgtEl>
                                           <p:spTgt spid="3"/>
                                         </p:tgtEl>
@@ -2222,7 +2222,7 @@
                                     </p:animEffect>
                                     <p:anim calcmode="lin" valueType="num">
                                       <p:cBhvr additive="base">
-                                        <p:cTn id="12" dur="320" fill="hold"/>
+                                        <p:cTn id="12" dur="369" fill="hold" decel="80000"/>
                                         <p:tgtEl>
                                           <p:spTgt spid="3"/>
                                         </p:tgtEl>
@@ -2272,7 +2272,7 @@
                                     </p:set>
                                     <p:animEffect transition="in" filter="fade">
                                       <p:cBhvr>
-                                        <p:cTn id="15" dur="320"/>
+                                        <p:cTn id="15" dur="302"/>
                                         <p:tgtEl>
                                           <p:spTgt spid="4"/>
                                         </p:tgtEl>
@@ -2280,7 +2280,7 @@
                                     </p:animEffect>
                                     <p:anim calcmode="lin" valueType="num">
                                       <p:cBhvr additive="base">
-                                        <p:cTn id="16" dur="320" fill="hold"/>
+                                        <p:cTn id="16" dur="302" fill="hold" decel="80000"/>
                                         <p:tgtEl>
                                           <p:spTgt spid="4"/>
                                         </p:tgtEl>
@@ -2330,7 +2330,7 @@
                                     </p:set>
                                     <p:animEffect transition="in" filter="fade">
                                       <p:cBhvr>
-                                        <p:cTn id="19" dur="320"/>
+                                        <p:cTn id="19" dur="292"/>
                                         <p:tgtEl>
                                           <p:spTgt spid="5"/>
                                         </p:tgtEl>
@@ -2338,7 +2338,7 @@
                                     </p:animEffect>
                                     <p:anim calcmode="lin" valueType="num">
                                       <p:cBhvr additive="base">
-                                        <p:cTn id="20" dur="320" fill="hold"/>
+                                        <p:cTn id="20" dur="292" fill="hold" decel="80000"/>
                                         <p:tgtEl>
                                           <p:spTgt spid="5"/>
                                         </p:tgtEl>
@@ -2597,7 +2597,7 @@
                                     </p:set>
                                     <p:animEffect transition="in" filter="fade">
                                       <p:cBhvr>
-                                        <p:cTn id="7" dur="320"/>
+                                        <p:cTn id="7" dur="359"/>
                                         <p:tgtEl>
                                           <p:spTgt spid="2"/>
                                         </p:tgtEl>
@@ -2605,7 +2605,7 @@
                                     </p:animEffect>
                                     <p:anim calcmode="lin" valueType="num">
                                       <p:cBhvr additive="base">
-                                        <p:cTn id="8" dur="320" fill="hold"/>
+                                        <p:cTn id="8" dur="359" fill="hold" decel="80000"/>
                                         <p:tgtEl>
                                           <p:spTgt spid="2"/>
                                         </p:tgtEl>
@@ -2655,7 +2655,7 @@
                                     </p:set>
                                     <p:animEffect transition="in" filter="fade">
                                       <p:cBhvr>
-                                        <p:cTn id="11" dur="320"/>
+                                        <p:cTn id="11" dur="338"/>
                                         <p:tgtEl>
                                           <p:spTgt spid="3"/>
                                         </p:tgtEl>
@@ -2663,7 +2663,7 @@
                                     </p:animEffect>
                                     <p:anim calcmode="lin" valueType="num">
                                       <p:cBhvr additive="base">
-                                        <p:cTn id="12" dur="320" fill="hold"/>
+                                        <p:cTn id="12" dur="338" fill="hold" decel="80000"/>
                                         <p:tgtEl>
                                           <p:spTgt spid="3"/>
                                         </p:tgtEl>
@@ -2713,7 +2713,7 @@
                                     </p:set>
                                     <p:animEffect transition="in" filter="fade">
                                       <p:cBhvr>
-                                        <p:cTn id="15" dur="320"/>
+                                        <p:cTn id="15" dur="302"/>
                                         <p:tgtEl>
                                           <p:spTgt spid="4"/>
                                         </p:tgtEl>
@@ -2721,7 +2721,7 @@
                                     </p:animEffect>
                                     <p:anim calcmode="lin" valueType="num">
                                       <p:cBhvr additive="base">
-                                        <p:cTn id="16" dur="320" fill="hold"/>
+                                        <p:cTn id="16" dur="302" fill="hold" decel="80000"/>
                                         <p:tgtEl>
                                           <p:spTgt spid="4"/>
                                         </p:tgtEl>
@@ -3144,7 +3144,7 @@
                                     </p:set>
                                     <p:animEffect transition="in" filter="fade">
                                       <p:cBhvr>
-                                        <p:cTn id="7" dur="320"/>
+                                        <p:cTn id="7" dur="312"/>
                                         <p:tgtEl>
                                           <p:spTgt spid="2"/>
                                         </p:tgtEl>
@@ -3152,7 +3152,7 @@
                                     </p:animEffect>
                                     <p:anim calcmode="lin" valueType="num">
                                       <p:cBhvr additive="base">
-                                        <p:cTn id="8" dur="320" fill="hold"/>
+                                        <p:cTn id="8" dur="312" fill="hold" decel="80000"/>
                                         <p:tgtEl>
                                           <p:spTgt spid="2"/>
                                         </p:tgtEl>
@@ -3202,7 +3202,7 @@
                                     </p:set>
                                     <p:animEffect transition="in" filter="fade">
                                       <p:cBhvr>
-                                        <p:cTn id="11" dur="320"/>
+                                        <p:cTn id="11" dur="302"/>
                                         <p:tgtEl>
                                           <p:spTgt spid="3"/>
                                         </p:tgtEl>
@@ -3210,7 +3210,7 @@
                                     </p:animEffect>
                                     <p:anim calcmode="lin" valueType="num">
                                       <p:cBhvr additive="base">
-                                        <p:cTn id="12" dur="320" fill="hold"/>
+                                        <p:cTn id="12" dur="302" fill="hold" decel="80000"/>
                                         <p:tgtEl>
                                           <p:spTgt spid="3"/>
                                         </p:tgtEl>
@@ -3237,7 +3237,7 @@
                               <p:par>
                                 <p:cTn id="13" presetID="10" presetClass="entr" presetSubtype="0" fill="hold" grpId="0" nodeType="withEffect">
                                   <p:stCondLst>
-                                    <p:cond delay="220"/>
+                                    <p:cond delay="150"/>
                                   </p:stCondLst>
                                   <p:childTnLst>
                                     <p:set>
@@ -3260,7 +3260,7 @@
                                     </p:set>
                                     <p:animEffect transition="in" filter="fade">
                                       <p:cBhvr>
-                                        <p:cTn id="15" dur="320"/>
+                                        <p:cTn id="15" dur="302"/>
                                         <p:tgtEl>
                                           <p:spTgt spid="5"/>
                                         </p:tgtEl>
@@ -3268,7 +3268,7 @@
                                     </p:animEffect>
                                     <p:anim calcmode="lin" valueType="num">
                                       <p:cBhvr additive="base">
-                                        <p:cTn id="16" dur="320" fill="hold"/>
+                                        <p:cTn id="16" dur="302" fill="hold" decel="80000"/>
                                         <p:tgtEl>
                                           <p:spTgt spid="5"/>
                                         </p:tgtEl>
@@ -3295,7 +3295,7 @@
                               <p:par>
                                 <p:cTn id="17" presetID="10" presetClass="entr" presetSubtype="0" fill="hold" grpId="0" nodeType="withEffect">
                                   <p:stCondLst>
-                                    <p:cond delay="330"/>
+                                    <p:cond delay="190"/>
                                   </p:stCondLst>
                                   <p:childTnLst>
                                     <p:set>
@@ -3318,7 +3318,7 @@
                                     </p:set>
                                     <p:animEffect transition="in" filter="fade">
                                       <p:cBhvr>
-                                        <p:cTn id="19" dur="320"/>
+                                        <p:cTn id="19" dur="302"/>
                                         <p:tgtEl>
                                           <p:spTgt spid="7"/>
                                         </p:tgtEl>
@@ -3326,7 +3326,7 @@
                                     </p:animEffect>
                                     <p:anim calcmode="lin" valueType="num">
                                       <p:cBhvr additive="base">
-                                        <p:cTn id="20" dur="320" fill="hold"/>
+                                        <p:cTn id="20" dur="302" fill="hold" decel="80000"/>
                                         <p:tgtEl>
                                           <p:spTgt spid="7"/>
                                         </p:tgtEl>
@@ -3353,7 +3353,7 @@
                               <p:par>
                                 <p:cTn id="21" presetID="10" presetClass="entr" presetSubtype="0" fill="hold" grpId="0" nodeType="withEffect">
                                   <p:stCondLst>
-                                    <p:cond delay="440"/>
+                                    <p:cond delay="220"/>
                                   </p:stCondLst>
                                   <p:childTnLst>
                                     <p:set>
@@ -3376,7 +3376,7 @@
                                     </p:set>
                                     <p:animEffect transition="in" filter="fade">
                                       <p:cBhvr>
-                                        <p:cTn id="23" dur="320"/>
+                                        <p:cTn id="23" dur="394"/>
                                         <p:tgtEl>
                                           <p:spTgt spid="4"/>
                                         </p:tgtEl>
@@ -3384,7 +3384,7 @@
                                     </p:animEffect>
                                     <p:anim calcmode="lin" valueType="num">
                                       <p:cBhvr additive="base">
-                                        <p:cTn id="24" dur="320" fill="hold"/>
+                                        <p:cTn id="24" dur="394" fill="hold" decel="80000"/>
                                         <p:tgtEl>
                                           <p:spTgt spid="4"/>
                                         </p:tgtEl>
@@ -3411,7 +3411,7 @@
                               <p:par>
                                 <p:cTn id="25" presetID="10" presetClass="entr" presetSubtype="0" fill="hold" grpId="0" nodeType="withEffect">
                                   <p:stCondLst>
-                                    <p:cond delay="550"/>
+                                    <p:cond delay="260"/>
                                   </p:stCondLst>
                                   <p:childTnLst>
                                     <p:set>
@@ -3434,7 +3434,7 @@
                                     </p:set>
                                     <p:animEffect transition="in" filter="fade">
                                       <p:cBhvr>
-                                        <p:cTn id="27" dur="320"/>
+                                        <p:cTn id="27" dur="394"/>
                                         <p:tgtEl>
                                           <p:spTgt spid="6"/>
                                         </p:tgtEl>
@@ -3442,7 +3442,7 @@
                                     </p:animEffect>
                                     <p:anim calcmode="lin" valueType="num">
                                       <p:cBhvr additive="base">
-                                        <p:cTn id="28" dur="320" fill="hold"/>
+                                        <p:cTn id="28" dur="394" fill="hold" decel="80000"/>
                                         <p:tgtEl>
                                           <p:spTgt spid="6"/>
                                         </p:tgtEl>
@@ -3469,7 +3469,7 @@
                               <p:par>
                                 <p:cTn id="29" presetID="10" presetClass="entr" presetSubtype="0" fill="hold" grpId="0" nodeType="withEffect">
                                   <p:stCondLst>
-                                    <p:cond delay="660"/>
+                                    <p:cond delay="300"/>
                                   </p:stCondLst>
                                   <p:childTnLst>
                                     <p:set>
@@ -3492,7 +3492,7 @@
                                     </p:set>
                                     <p:animEffect transition="in" filter="fade">
                                       <p:cBhvr>
-                                        <p:cTn id="31" dur="320"/>
+                                        <p:cTn id="31" dur="394"/>
                                         <p:tgtEl>
                                           <p:spTgt spid="8"/>
                                         </p:tgtEl>
@@ -3500,7 +3500,7 @@
                                     </p:animEffect>
                                     <p:anim calcmode="lin" valueType="num">
                                       <p:cBhvr additive="base">
-                                        <p:cTn id="32" dur="320" fill="hold"/>
+                                        <p:cTn id="32" dur="394" fill="hold" decel="80000"/>
                                         <p:tgtEl>
                                           <p:spTgt spid="8"/>
                                         </p:tgtEl>
@@ -4303,7 +4303,7 @@
                                     </p:set>
                                     <p:animEffect transition="in" filter="fade">
                                       <p:cBhvr>
-                                        <p:cTn id="7" dur="320"/>
+                                        <p:cTn id="7" dur="289"/>
                                         <p:tgtEl>
                                           <p:spTgt spid="2"/>
                                         </p:tgtEl>
@@ -4311,7 +4311,7 @@
                                     </p:animEffect>
                                     <p:anim calcmode="lin" valueType="num">
                                       <p:cBhvr additive="base">
-                                        <p:cTn id="8" dur="320" fill="hold"/>
+                                        <p:cTn id="8" dur="289" fill="hold" decel="80000"/>
                                         <p:tgtEl>
                                           <p:spTgt spid="2"/>
                                         </p:tgtEl>
@@ -4338,7 +4338,7 @@
                               <p:par>
                                 <p:cTn id="9" presetID="10" presetClass="entr" presetSubtype="0" fill="hold" grpId="0" nodeType="withEffect">
                                   <p:stCondLst>
-                                    <p:cond delay="66"/>
+                                    <p:cond delay="110"/>
                                   </p:stCondLst>
                                   <p:childTnLst>
                                     <p:set>
@@ -4361,7 +4361,7 @@
                                     </p:set>
                                     <p:animEffect transition="in" filter="fade">
                                       <p:cBhvr>
-                                        <p:cTn id="11" dur="320"/>
+                                        <p:cTn id="11" dur="312"/>
                                         <p:tgtEl>
                                           <p:spTgt spid="3"/>
                                         </p:tgtEl>
@@ -4369,7 +4369,7 @@
                                     </p:animEffect>
                                     <p:anim calcmode="lin" valueType="num">
                                       <p:cBhvr additive="base">
-                                        <p:cTn id="12" dur="320" fill="hold"/>
+                                        <p:cTn id="12" dur="312" fill="hold" decel="80000"/>
                                         <p:tgtEl>
                                           <p:spTgt spid="3"/>
                                         </p:tgtEl>
@@ -4396,7 +4396,7 @@
                               <p:par>
                                 <p:cTn id="13" presetID="10" presetClass="entr" presetSubtype="0" fill="hold" grpId="0" nodeType="withEffect">
                                   <p:stCondLst>
-                                    <p:cond delay="132"/>
+                                    <p:cond delay="220"/>
                                   </p:stCondLst>
                                   <p:childTnLst>
                                     <p:set>
@@ -4419,7 +4419,7 @@
                                     </p:set>
                                     <p:animEffect transition="in" filter="fade">
                                       <p:cBhvr>
-                                        <p:cTn id="15" dur="320"/>
+                                        <p:cTn id="15" dur="297"/>
                                         <p:tgtEl>
                                           <p:spTgt spid="6"/>
                                         </p:tgtEl>
@@ -4427,7 +4427,7 @@
                                     </p:animEffect>
                                     <p:anim calcmode="lin" valueType="num">
                                       <p:cBhvr additive="base">
-                                        <p:cTn id="16" dur="320" fill="hold"/>
+                                        <p:cTn id="16" dur="297" fill="hold" decel="80000"/>
                                         <p:tgtEl>
                                           <p:spTgt spid="6"/>
                                         </p:tgtEl>
@@ -4454,7 +4454,7 @@
                               <p:par>
                                 <p:cTn id="17" presetID="10" presetClass="entr" presetSubtype="0" fill="hold" grpId="0" nodeType="withEffect">
                                   <p:stCondLst>
-                                    <p:cond delay="198"/>
+                                    <p:cond delay="260"/>
                                   </p:stCondLst>
                                   <p:childTnLst>
                                     <p:set>
@@ -4477,7 +4477,7 @@
                                     </p:set>
                                     <p:animEffect transition="in" filter="fade">
                                       <p:cBhvr>
-                                        <p:cTn id="19" dur="320"/>
+                                        <p:cTn id="19" dur="297"/>
                                         <p:tgtEl>
                                           <p:spTgt spid="10"/>
                                         </p:tgtEl>
@@ -4485,7 +4485,7 @@
                                     </p:animEffect>
                                     <p:anim calcmode="lin" valueType="num">
                                       <p:cBhvr additive="base">
-                                        <p:cTn id="20" dur="320" fill="hold"/>
+                                        <p:cTn id="20" dur="297" fill="hold" decel="80000"/>
                                         <p:tgtEl>
                                           <p:spTgt spid="10"/>
                                         </p:tgtEl>
@@ -4512,7 +4512,7 @@
                               <p:par>
                                 <p:cTn id="21" presetID="10" presetClass="entr" presetSubtype="0" fill="hold" grpId="0" nodeType="withEffect">
                                   <p:stCondLst>
-                                    <p:cond delay="264"/>
+                                    <p:cond delay="300"/>
                                   </p:stCondLst>
                                   <p:childTnLst>
                                     <p:set>
@@ -4535,7 +4535,7 @@
                                     </p:set>
                                     <p:animEffect transition="in" filter="fade">
                                       <p:cBhvr>
-                                        <p:cTn id="23" dur="320"/>
+                                        <p:cTn id="23" dur="297"/>
                                         <p:tgtEl>
                                           <p:spTgt spid="14"/>
                                         </p:tgtEl>
@@ -4543,7 +4543,7 @@
                                     </p:animEffect>
                                     <p:anim calcmode="lin" valueType="num">
                                       <p:cBhvr additive="base">
-                                        <p:cTn id="24" dur="320" fill="hold"/>
+                                        <p:cTn id="24" dur="297" fill="hold" decel="80000"/>
                                         <p:tgtEl>
                                           <p:spTgt spid="14"/>
                                         </p:tgtEl>
@@ -4570,7 +4570,7 @@
                               <p:par>
                                 <p:cTn id="25" presetID="10" presetClass="entr" presetSubtype="0" fill="hold" grpId="0" nodeType="withEffect">
                                   <p:stCondLst>
-                                    <p:cond delay="330"/>
+                                    <p:cond delay="340"/>
                                   </p:stCondLst>
                                   <p:childTnLst>
                                     <p:set>
@@ -4593,7 +4593,7 @@
                                     </p:set>
                                     <p:animEffect transition="in" filter="fade">
                                       <p:cBhvr>
-                                        <p:cTn id="27" dur="320"/>
+                                        <p:cTn id="27" dur="297"/>
                                         <p:tgtEl>
                                           <p:spTgt spid="18"/>
                                         </p:tgtEl>
@@ -4601,7 +4601,7 @@
                                     </p:animEffect>
                                     <p:anim calcmode="lin" valueType="num">
                                       <p:cBhvr additive="base">
-                                        <p:cTn id="28" dur="320" fill="hold"/>
+                                        <p:cTn id="28" dur="297" fill="hold" decel="80000"/>
                                         <p:tgtEl>
                                           <p:spTgt spid="18"/>
                                         </p:tgtEl>
@@ -4628,7 +4628,7 @@
                               <p:par>
                                 <p:cTn id="29" presetID="10" presetClass="entr" presetSubtype="0" fill="hold" grpId="0" nodeType="withEffect">
                                   <p:stCondLst>
-                                    <p:cond delay="396"/>
+                                    <p:cond delay="330"/>
                                   </p:stCondLst>
                                   <p:childTnLst>
                                     <p:set>
@@ -4651,7 +4651,7 @@
                                     </p:set>
                                     <p:animEffect transition="in" filter="fade">
                                       <p:cBhvr>
-                                        <p:cTn id="31" dur="320"/>
+                                        <p:cTn id="31" dur="283"/>
                                         <p:tgtEl>
                                           <p:spTgt spid="17"/>
                                         </p:tgtEl>
@@ -4663,7 +4663,7 @@
                               <p:par>
                                 <p:cTn id="32" presetID="10" presetClass="entr" presetSubtype="0" fill="hold" grpId="0" nodeType="withEffect">
                                   <p:stCondLst>
-                                    <p:cond delay="462"/>
+                                    <p:cond delay="370"/>
                                   </p:stCondLst>
                                   <p:childTnLst>
                                     <p:set>
@@ -4686,7 +4686,7 @@
                                     </p:set>
                                     <p:animEffect transition="in" filter="fade">
                                       <p:cBhvr>
-                                        <p:cTn id="34" dur="320"/>
+                                        <p:cTn id="34" dur="280"/>
                                         <p:tgtEl>
                                           <p:spTgt spid="5"/>
                                         </p:tgtEl>
@@ -4698,7 +4698,7 @@
                               <p:par>
                                 <p:cTn id="35" presetID="10" presetClass="entr" presetSubtype="0" fill="hold" grpId="0" nodeType="withEffect">
                                   <p:stCondLst>
-                                    <p:cond delay="528"/>
+                                    <p:cond delay="410"/>
                                   </p:stCondLst>
                                   <p:childTnLst>
                                     <p:set>
@@ -4721,7 +4721,7 @@
                                     </p:set>
                                     <p:animEffect transition="in" filter="fade">
                                       <p:cBhvr>
-                                        <p:cTn id="37" dur="320"/>
+                                        <p:cTn id="37" dur="280"/>
                                         <p:tgtEl>
                                           <p:spTgt spid="9"/>
                                         </p:tgtEl>
@@ -4733,7 +4733,7 @@
                               <p:par>
                                 <p:cTn id="38" presetID="10" presetClass="entr" presetSubtype="0" fill="hold" grpId="0" nodeType="withEffect">
                                   <p:stCondLst>
-                                    <p:cond delay="594"/>
+                                    <p:cond delay="450"/>
                                   </p:stCondLst>
                                   <p:childTnLst>
                                     <p:set>
@@ -4756,7 +4756,7 @@
                                     </p:set>
                                     <p:animEffect transition="in" filter="fade">
                                       <p:cBhvr>
-                                        <p:cTn id="40" dur="320"/>
+                                        <p:cTn id="40" dur="280"/>
                                         <p:tgtEl>
                                           <p:spTgt spid="13"/>
                                         </p:tgtEl>
@@ -4768,7 +4768,7 @@
                               <p:par>
                                 <p:cTn id="41" presetID="10" presetClass="entr" presetSubtype="0" fill="hold" grpId="0" nodeType="withEffect">
                                   <p:stCondLst>
-                                    <p:cond delay="660"/>
+                                    <p:cond delay="490"/>
                                   </p:stCondLst>
                                   <p:childTnLst>
                                     <p:set>
@@ -4791,7 +4791,7 @@
                                     </p:set>
                                     <p:animEffect transition="in" filter="wipe(left)">
                                       <p:cBhvr>
-                                        <p:cTn id="43" dur="320"/>
+                                        <p:cTn id="43" dur="272"/>
                                         <p:tgtEl>
                                           <p:spTgt spid="4"/>
                                         </p:tgtEl>
@@ -4803,7 +4803,7 @@
                               <p:par>
                                 <p:cTn id="44" presetID="10" presetClass="entr" presetSubtype="0" fill="hold" grpId="0" nodeType="withEffect">
                                   <p:stCondLst>
-                                    <p:cond delay="726"/>
+                                    <p:cond delay="440"/>
                                   </p:stCondLst>
                                   <p:childTnLst>
                                     <p:set>
@@ -4826,7 +4826,7 @@
                                     </p:set>
                                     <p:animEffect transition="in" filter="fade">
                                       <p:cBhvr>
-                                        <p:cTn id="46" dur="320"/>
+                                        <p:cTn id="46" dur="297"/>
                                         <p:tgtEl>
                                           <p:spTgt spid="7"/>
                                         </p:tgtEl>
@@ -4834,7 +4834,7 @@
                                     </p:animEffect>
                                     <p:anim calcmode="lin" valueType="num">
                                       <p:cBhvr additive="base">
-                                        <p:cTn id="47" dur="320" fill="hold"/>
+                                        <p:cTn id="47" dur="297" fill="hold" decel="80000"/>
                                         <p:tgtEl>
                                           <p:spTgt spid="7"/>
                                         </p:tgtEl>
@@ -4861,7 +4861,7 @@
                               <p:par>
                                 <p:cTn id="48" presetID="10" presetClass="entr" presetSubtype="0" fill="hold" grpId="0" nodeType="withEffect">
                                   <p:stCondLst>
-                                    <p:cond delay="792"/>
+                                    <p:cond delay="480"/>
                                   </p:stCondLst>
                                   <p:childTnLst>
                                     <p:set>
@@ -4884,7 +4884,7 @@
                                     </p:set>
                                     <p:animEffect transition="in" filter="fade">
                                       <p:cBhvr>
-                                        <p:cTn id="50" dur="320"/>
+                                        <p:cTn id="50" dur="297"/>
                                         <p:tgtEl>
                                           <p:spTgt spid="11"/>
                                         </p:tgtEl>
@@ -4892,7 +4892,7 @@
                                     </p:animEffect>
                                     <p:anim calcmode="lin" valueType="num">
                                       <p:cBhvr additive="base">
-                                        <p:cTn id="51" dur="320" fill="hold"/>
+                                        <p:cTn id="51" dur="297" fill="hold" decel="80000"/>
                                         <p:tgtEl>
                                           <p:spTgt spid="11"/>
                                         </p:tgtEl>
@@ -4919,7 +4919,7 @@
                               <p:par>
                                 <p:cTn id="52" presetID="10" presetClass="entr" presetSubtype="0" fill="hold" grpId="0" nodeType="withEffect">
                                   <p:stCondLst>
-                                    <p:cond delay="858"/>
+                                    <p:cond delay="520"/>
                                   </p:stCondLst>
                                   <p:childTnLst>
                                     <p:set>
@@ -4942,7 +4942,7 @@
                                     </p:set>
                                     <p:animEffect transition="in" filter="fade">
                                       <p:cBhvr>
-                                        <p:cTn id="54" dur="320"/>
+                                        <p:cTn id="54" dur="297"/>
                                         <p:tgtEl>
                                           <p:spTgt spid="15"/>
                                         </p:tgtEl>
@@ -4950,7 +4950,7 @@
                                     </p:animEffect>
                                     <p:anim calcmode="lin" valueType="num">
                                       <p:cBhvr additive="base">
-                                        <p:cTn id="55" dur="320" fill="hold"/>
+                                        <p:cTn id="55" dur="297" fill="hold" decel="80000"/>
                                         <p:tgtEl>
                                           <p:spTgt spid="15"/>
                                         </p:tgtEl>
@@ -4977,7 +4977,7 @@
                               <p:par>
                                 <p:cTn id="56" presetID="10" presetClass="entr" presetSubtype="0" fill="hold" grpId="0" nodeType="withEffect">
                                   <p:stCondLst>
-                                    <p:cond delay="924"/>
+                                    <p:cond delay="560"/>
                                   </p:stCondLst>
                                   <p:childTnLst>
                                     <p:set>
@@ -5000,7 +5000,7 @@
                                     </p:set>
                                     <p:animEffect transition="in" filter="fade">
                                       <p:cBhvr>
-                                        <p:cTn id="58" dur="320"/>
+                                        <p:cTn id="58" dur="297"/>
                                         <p:tgtEl>
                                           <p:spTgt spid="19"/>
                                         </p:tgtEl>
@@ -5008,7 +5008,7 @@
                                     </p:animEffect>
                                     <p:anim calcmode="lin" valueType="num">
                                       <p:cBhvr additive="base">
-                                        <p:cTn id="59" dur="320" fill="hold"/>
+                                        <p:cTn id="59" dur="297" fill="hold" decel="80000"/>
                                         <p:tgtEl>
                                           <p:spTgt spid="19"/>
                                         </p:tgtEl>
@@ -5035,7 +5035,7 @@
                               <p:par>
                                 <p:cTn id="60" presetID="10" presetClass="entr" presetSubtype="0" fill="hold" grpId="0" nodeType="withEffect">
                                   <p:stCondLst>
-                                    <p:cond delay="990"/>
+                                    <p:cond delay="550"/>
                                   </p:stCondLst>
                                   <p:childTnLst>
                                     <p:set>
@@ -5058,7 +5058,7 @@
                                     </p:set>
                                     <p:animEffect transition="in" filter="fade">
                                       <p:cBhvr>
-                                        <p:cTn id="62" dur="320"/>
+                                        <p:cTn id="62" dur="359"/>
                                         <p:tgtEl>
                                           <p:spTgt spid="8"/>
                                         </p:tgtEl>
@@ -5066,7 +5066,7 @@
                                     </p:animEffect>
                                     <p:anim calcmode="lin" valueType="num">
                                       <p:cBhvr additive="base">
-                                        <p:cTn id="63" dur="320" fill="hold"/>
+                                        <p:cTn id="63" dur="359" fill="hold" decel="80000"/>
                                         <p:tgtEl>
                                           <p:spTgt spid="8"/>
                                         </p:tgtEl>
@@ -5093,7 +5093,7 @@
                               <p:par>
                                 <p:cTn id="64" presetID="10" presetClass="entr" presetSubtype="0" fill="hold" grpId="0" nodeType="withEffect">
                                   <p:stCondLst>
-                                    <p:cond delay="1056"/>
+                                    <p:cond delay="590"/>
                                   </p:stCondLst>
                                   <p:childTnLst>
                                     <p:set>
@@ -5116,7 +5116,7 @@
                                     </p:set>
                                     <p:animEffect transition="in" filter="fade">
                                       <p:cBhvr>
-                                        <p:cTn id="66" dur="320"/>
+                                        <p:cTn id="66" dur="359"/>
                                         <p:tgtEl>
                                           <p:spTgt spid="12"/>
                                         </p:tgtEl>
@@ -5124,7 +5124,7 @@
                                     </p:animEffect>
                                     <p:anim calcmode="lin" valueType="num">
                                       <p:cBhvr additive="base">
-                                        <p:cTn id="67" dur="320" fill="hold"/>
+                                        <p:cTn id="67" dur="359" fill="hold" decel="80000"/>
                                         <p:tgtEl>
                                           <p:spTgt spid="12"/>
                                         </p:tgtEl>
@@ -5151,7 +5151,7 @@
                               <p:par>
                                 <p:cTn id="68" presetID="10" presetClass="entr" presetSubtype="0" fill="hold" grpId="0" nodeType="withEffect">
                                   <p:stCondLst>
-                                    <p:cond delay="1122"/>
+                                    <p:cond delay="630"/>
                                   </p:stCondLst>
                                   <p:childTnLst>
                                     <p:set>
@@ -5174,7 +5174,7 @@
                                     </p:set>
                                     <p:animEffect transition="in" filter="fade">
                                       <p:cBhvr>
-                                        <p:cTn id="70" dur="320"/>
+                                        <p:cTn id="70" dur="359"/>
                                         <p:tgtEl>
                                           <p:spTgt spid="16"/>
                                         </p:tgtEl>
@@ -5182,7 +5182,7 @@
                                     </p:animEffect>
                                     <p:anim calcmode="lin" valueType="num">
                                       <p:cBhvr additive="base">
-                                        <p:cTn id="71" dur="320" fill="hold"/>
+                                        <p:cTn id="71" dur="359" fill="hold" decel="80000"/>
                                         <p:tgtEl>
                                           <p:spTgt spid="16"/>
                                         </p:tgtEl>
@@ -5209,7 +5209,7 @@
                               <p:par>
                                 <p:cTn id="72" presetID="10" presetClass="entr" presetSubtype="0" fill="hold" grpId="0" nodeType="withEffect">
                                   <p:stCondLst>
-                                    <p:cond delay="1188"/>
+                                    <p:cond delay="670"/>
                                   </p:stCondLst>
                                   <p:childTnLst>
                                     <p:set>
@@ -5232,7 +5232,7 @@
                                     </p:set>
                                     <p:animEffect transition="in" filter="fade">
                                       <p:cBhvr>
-                                        <p:cTn id="74" dur="320"/>
+                                        <p:cTn id="74" dur="359"/>
                                         <p:tgtEl>
                                           <p:spTgt spid="20"/>
                                         </p:tgtEl>
@@ -5240,7 +5240,7 @@
                                     </p:animEffect>
                                     <p:anim calcmode="lin" valueType="num">
                                       <p:cBhvr additive="base">
-                                        <p:cTn id="75" dur="320" fill="hold"/>
+                                        <p:cTn id="75" dur="359" fill="hold" decel="80000"/>
                                         <p:tgtEl>
                                           <p:spTgt spid="20"/>
                                         </p:tgtEl>
@@ -5509,7 +5509,7 @@
                                     </p:set>
                                     <p:animEffect transition="in" filter="fade">
                                       <p:cBhvr>
-                                        <p:cTn id="7" dur="320"/>
+                                        <p:cTn id="7" dur="348"/>
                                         <p:tgtEl>
                                           <p:spTgt spid="2"/>
                                         </p:tgtEl>
@@ -5517,7 +5517,7 @@
                                     </p:animEffect>
                                     <p:anim calcmode="lin" valueType="num">
                                       <p:cBhvr additive="base">
-                                        <p:cTn id="8" dur="320" fill="hold"/>
+                                        <p:cTn id="8" dur="348" fill="hold" decel="80000"/>
                                         <p:tgtEl>
                                           <p:spTgt spid="2"/>
                                         </p:tgtEl>
@@ -5567,7 +5567,7 @@
                                     </p:set>
                                     <p:animEffect transition="in" filter="fade">
                                       <p:cBhvr>
-                                        <p:cTn id="11" dur="320"/>
+                                        <p:cTn id="11" dur="302"/>
                                         <p:tgtEl>
                                           <p:spTgt spid="3"/>
                                         </p:tgtEl>
@@ -5575,7 +5575,7 @@
                                     </p:animEffect>
                                     <p:anim calcmode="lin" valueType="num">
                                       <p:cBhvr additive="base">
-                                        <p:cTn id="12" dur="320" fill="hold"/>
+                                        <p:cTn id="12" dur="302" fill="hold" decel="80000"/>
                                         <p:tgtEl>
                                           <p:spTgt spid="3"/>
                                         </p:tgtEl>
@@ -5625,7 +5625,7 @@
                                     </p:set>
                                     <p:animEffect transition="in" filter="fade">
                                       <p:cBhvr>
-                                        <p:cTn id="15" dur="320"/>
+                                        <p:cTn id="15" dur="292"/>
                                         <p:tgtEl>
                                           <p:spTgt spid="4"/>
                                         </p:tgtEl>
@@ -5633,7 +5633,7 @@
                                     </p:animEffect>
                                     <p:anim calcmode="lin" valueType="num">
                                       <p:cBhvr additive="base">
-                                        <p:cTn id="16" dur="320" fill="hold"/>
+                                        <p:cTn id="16" dur="292" fill="hold" decel="80000"/>
                                         <p:tgtEl>
                                           <p:spTgt spid="4"/>
                                         </p:tgtEl>
@@ -5816,7 +5816,7 @@
                                     </p:set>
                                     <p:animEffect transition="in" filter="fade">
                                       <p:cBhvr>
-                                        <p:cTn id="7" dur="320"/>
+                                        <p:cTn id="7" dur="604"/>
                                         <p:tgtEl>
                                           <p:spTgt spid="2"/>
                                         </p:tgtEl>
@@ -5824,7 +5824,7 @@
                                     </p:animEffect>
                                     <p:anim calcmode="lin" valueType="num">
                                       <p:cBhvr additive="base">
-                                        <p:cTn id="8" dur="320" fill="hold"/>
+                                        <p:cTn id="8" dur="604" fill="hold" decel="80000"/>
                                         <p:tgtEl>
                                           <p:spTgt spid="2"/>
                                         </p:tgtEl>
@@ -6080,7 +6080,7 @@
                                     </p:set>
                                     <p:animEffect transition="in" filter="fade">
                                       <p:cBhvr>
-                                        <p:cTn id="7" dur="320"/>
+                                        <p:cTn id="7" dur="359"/>
                                         <p:tgtEl>
                                           <p:spTgt spid="2"/>
                                         </p:tgtEl>
@@ -6088,7 +6088,7 @@
                                     </p:animEffect>
                                     <p:anim calcmode="lin" valueType="num">
                                       <p:cBhvr additive="base">
-                                        <p:cTn id="8" dur="320" fill="hold"/>
+                                        <p:cTn id="8" dur="359" fill="hold" decel="80000"/>
                                         <p:tgtEl>
                                           <p:spTgt spid="2"/>
                                         </p:tgtEl>
@@ -6138,7 +6138,7 @@
                                     </p:set>
                                     <p:animEffect transition="in" filter="fade">
                                       <p:cBhvr>
-                                        <p:cTn id="11" dur="320"/>
+                                        <p:cTn id="11" dur="338"/>
                                         <p:tgtEl>
                                           <p:spTgt spid="3"/>
                                         </p:tgtEl>
@@ -6146,7 +6146,7 @@
                                     </p:animEffect>
                                     <p:anim calcmode="lin" valueType="num">
                                       <p:cBhvr additive="base">
-                                        <p:cTn id="12" dur="320" fill="hold"/>
+                                        <p:cTn id="12" dur="338" fill="hold" decel="80000"/>
                                         <p:tgtEl>
                                           <p:spTgt spid="3"/>
                                         </p:tgtEl>
@@ -6196,7 +6196,7 @@
                                     </p:set>
                                     <p:animEffect transition="in" filter="fade">
                                       <p:cBhvr>
-                                        <p:cTn id="15" dur="320"/>
+                                        <p:cTn id="15" dur="302"/>
                                         <p:tgtEl>
                                           <p:spTgt spid="4"/>
                                         </p:tgtEl>
@@ -6204,7 +6204,7 @@
                                     </p:animEffect>
                                     <p:anim calcmode="lin" valueType="num">
                                       <p:cBhvr additive="base">
-                                        <p:cTn id="16" dur="320" fill="hold"/>
+                                        <p:cTn id="16" dur="302" fill="hold" decel="80000"/>
                                         <p:tgtEl>
                                           <p:spTgt spid="4"/>
                                         </p:tgtEl>
@@ -6515,7 +6515,7 @@
                                     </p:set>
                                     <p:animEffect transition="in" filter="fade">
                                       <p:cBhvr>
-                                        <p:cTn id="7" dur="320"/>
+                                        <p:cTn id="7" dur="292"/>
                                         <p:tgtEl>
                                           <p:spTgt spid="2"/>
                                         </p:tgtEl>
@@ -6523,7 +6523,7 @@
                                     </p:animEffect>
                                     <p:anim calcmode="lin" valueType="num">
                                       <p:cBhvr additive="base">
-                                        <p:cTn id="8" dur="320" fill="hold"/>
+                                        <p:cTn id="8" dur="292" fill="hold" decel="80000"/>
                                         <p:tgtEl>
                                           <p:spTgt spid="2"/>
                                         </p:tgtEl>
@@ -6573,7 +6573,7 @@
                                     </p:set>
                                     <p:animEffect transition="in" filter="fade">
                                       <p:cBhvr>
-                                        <p:cTn id="11" dur="320"/>
+                                        <p:cTn id="11" dur="389"/>
                                         <p:tgtEl>
                                           <p:spTgt spid="3"/>
                                         </p:tgtEl>
@@ -6581,7 +6581,7 @@
                                     </p:animEffect>
                                     <p:anim calcmode="lin" valueType="num">
                                       <p:cBhvr additive="base">
-                                        <p:cTn id="12" dur="320" fill="hold"/>
+                                        <p:cTn id="12" dur="389" fill="hold" decel="80000"/>
                                         <p:tgtEl>
                                           <p:spTgt spid="3"/>
                                         </p:tgtEl>
@@ -6631,7 +6631,7 @@
                                     </p:set>
                                     <p:animEffect transition="in" filter="fade">
                                       <p:cBhvr>
-                                        <p:cTn id="15" dur="320"/>
+                                        <p:cTn id="15" dur="307"/>
                                         <p:tgtEl>
                                           <p:spTgt spid="4"/>
                                         </p:tgtEl>
@@ -6639,7 +6639,7 @@
                                     </p:animEffect>
                                     <p:anim calcmode="lin" valueType="num">
                                       <p:cBhvr additive="base">
-                                        <p:cTn id="16" dur="320" fill="hold"/>
+                                        <p:cTn id="16" dur="307" fill="hold" decel="80000"/>
                                         <p:tgtEl>
                                           <p:spTgt spid="4"/>
                                         </p:tgtEl>
@@ -6689,7 +6689,7 @@
                                     </p:set>
                                     <p:animEffect transition="in" filter="fade">
                                       <p:cBhvr>
-                                        <p:cTn id="19" dur="320"/>
+                                        <p:cTn id="19" dur="318"/>
                                         <p:tgtEl>
                                           <p:spTgt spid="5"/>
                                         </p:tgtEl>
@@ -6697,7 +6697,7 @@
                                     </p:animEffect>
                                     <p:anim calcmode="lin" valueType="num">
                                       <p:cBhvr additive="base">
-                                        <p:cTn id="20" dur="320" fill="hold"/>
+                                        <p:cTn id="20" dur="318" fill="hold" decel="80000"/>
                                         <p:tgtEl>
                                           <p:spTgt spid="5"/>
                                         </p:tgtEl>
@@ -7009,7 +7009,7 @@
                                     </p:set>
                                     <p:animEffect transition="in" filter="fade">
                                       <p:cBhvr>
-                                        <p:cTn id="7" dur="320"/>
+                                        <p:cTn id="7" dur="292"/>
                                         <p:tgtEl>
                                           <p:spTgt spid="2"/>
                                         </p:tgtEl>
@@ -7017,7 +7017,7 @@
                                     </p:animEffect>
                                     <p:anim calcmode="lin" valueType="num">
                                       <p:cBhvr additive="base">
-                                        <p:cTn id="8" dur="320" fill="hold"/>
+                                        <p:cTn id="8" dur="292" fill="hold" decel="80000"/>
                                         <p:tgtEl>
                                           <p:spTgt spid="2"/>
                                         </p:tgtEl>
@@ -7067,7 +7067,7 @@
                                     </p:set>
                                     <p:animEffect transition="in" filter="fade">
                                       <p:cBhvr>
-                                        <p:cTn id="11" dur="320"/>
+                                        <p:cTn id="11" dur="389"/>
                                         <p:tgtEl>
                                           <p:spTgt spid="3"/>
                                         </p:tgtEl>
@@ -7075,7 +7075,7 @@
                                     </p:animEffect>
                                     <p:anim calcmode="lin" valueType="num">
                                       <p:cBhvr additive="base">
-                                        <p:cTn id="12" dur="320" fill="hold"/>
+                                        <p:cTn id="12" dur="389" fill="hold" decel="80000"/>
                                         <p:tgtEl>
                                           <p:spTgt spid="3"/>
                                         </p:tgtEl>
@@ -7125,7 +7125,7 @@
                                     </p:set>
                                     <p:animEffect transition="in" filter="fade">
                                       <p:cBhvr>
-                                        <p:cTn id="15" dur="320"/>
+                                        <p:cTn id="15" dur="307"/>
                                         <p:tgtEl>
                                           <p:spTgt spid="4"/>
                                         </p:tgtEl>
@@ -7133,7 +7133,7 @@
                                     </p:animEffect>
                                     <p:anim calcmode="lin" valueType="num">
                                       <p:cBhvr additive="base">
-                                        <p:cTn id="16" dur="320" fill="hold"/>
+                                        <p:cTn id="16" dur="307" fill="hold" decel="80000"/>
                                         <p:tgtEl>
                                           <p:spTgt spid="4"/>
                                         </p:tgtEl>
@@ -7183,7 +7183,7 @@
                                     </p:set>
                                     <p:animEffect transition="in" filter="fade">
                                       <p:cBhvr>
-                                        <p:cTn id="19" dur="320"/>
+                                        <p:cTn id="19" dur="318"/>
                                         <p:tgtEl>
                                           <p:spTgt spid="5"/>
                                         </p:tgtEl>
@@ -7191,7 +7191,7 @@
                                     </p:animEffect>
                                     <p:anim calcmode="lin" valueType="num">
                                       <p:cBhvr additive="base">
-                                        <p:cTn id="20" dur="320" fill="hold"/>
+                                        <p:cTn id="20" dur="318" fill="hold" decel="80000"/>
                                         <p:tgtEl>
                                           <p:spTgt spid="5"/>
                                         </p:tgtEl>
@@ -7883,7 +7883,7 @@
                                     </p:set>
                                     <p:animEffect transition="in" filter="fade">
                                       <p:cBhvr>
-                                        <p:cTn id="7" dur="320"/>
+                                        <p:cTn id="7" dur="289"/>
                                         <p:tgtEl>
                                           <p:spTgt spid="2"/>
                                         </p:tgtEl>
@@ -7891,7 +7891,7 @@
                                     </p:animEffect>
                                     <p:anim calcmode="lin" valueType="num">
                                       <p:cBhvr additive="base">
-                                        <p:cTn id="8" dur="320" fill="hold"/>
+                                        <p:cTn id="8" dur="289" fill="hold" decel="80000"/>
                                         <p:tgtEl>
                                           <p:spTgt spid="2"/>
                                         </p:tgtEl>
@@ -7918,7 +7918,7 @@
                               <p:par>
                                 <p:cTn id="9" presetID="10" presetClass="entr" presetSubtype="0" fill="hold" grpId="0" nodeType="withEffect">
                                   <p:stCondLst>
-                                    <p:cond delay="70"/>
+                                    <p:cond delay="110"/>
                                   </p:stCondLst>
                                   <p:childTnLst>
                                     <p:set>
@@ -7941,7 +7941,7 @@
                                     </p:set>
                                     <p:animEffect transition="in" filter="fade">
                                       <p:cBhvr>
-                                        <p:cTn id="11" dur="320"/>
+                                        <p:cTn id="11" dur="312"/>
                                         <p:tgtEl>
                                           <p:spTgt spid="3"/>
                                         </p:tgtEl>
@@ -7949,7 +7949,7 @@
                                     </p:animEffect>
                                     <p:anim calcmode="lin" valueType="num">
                                       <p:cBhvr additive="base">
-                                        <p:cTn id="12" dur="320" fill="hold"/>
+                                        <p:cTn id="12" dur="312" fill="hold" decel="80000"/>
                                         <p:tgtEl>
                                           <p:spTgt spid="3"/>
                                         </p:tgtEl>
@@ -7976,7 +7976,7 @@
                               <p:par>
                                 <p:cTn id="13" presetID="10" presetClass="entr" presetSubtype="0" fill="hold" grpId="0" nodeType="withEffect">
                                   <p:stCondLst>
-                                    <p:cond delay="140"/>
+                                    <p:cond delay="220"/>
                                   </p:stCondLst>
                                   <p:childTnLst>
                                     <p:set>
@@ -7999,7 +7999,7 @@
                                     </p:set>
                                     <p:animEffect transition="in" filter="fade">
                                       <p:cBhvr>
-                                        <p:cTn id="15" dur="320"/>
+                                        <p:cTn id="15" dur="309"/>
                                         <p:tgtEl>
                                           <p:spTgt spid="4"/>
                                         </p:tgtEl>
@@ -8007,7 +8007,7 @@
                                     </p:animEffect>
                                     <p:anim calcmode="lin" valueType="num">
                                       <p:cBhvr additive="base">
-                                        <p:cTn id="16" dur="320" fill="hold"/>
+                                        <p:cTn id="16" dur="309" fill="hold" decel="80000"/>
                                         <p:tgtEl>
                                           <p:spTgt spid="4"/>
                                         </p:tgtEl>
@@ -8034,7 +8034,7 @@
                               <p:par>
                                 <p:cTn id="17" presetID="10" presetClass="entr" presetSubtype="0" fill="hold" grpId="0" nodeType="withEffect">
                                   <p:stCondLst>
-                                    <p:cond delay="210"/>
+                                    <p:cond delay="260"/>
                                   </p:stCondLst>
                                   <p:childTnLst>
                                     <p:set>
@@ -8057,7 +8057,7 @@
                                     </p:set>
                                     <p:animEffect transition="in" filter="fade">
                                       <p:cBhvr>
-                                        <p:cTn id="19" dur="320"/>
+                                        <p:cTn id="19" dur="309"/>
                                         <p:tgtEl>
                                           <p:spTgt spid="7"/>
                                         </p:tgtEl>
@@ -8065,7 +8065,7 @@
                                     </p:animEffect>
                                     <p:anim calcmode="lin" valueType="num">
                                       <p:cBhvr additive="base">
-                                        <p:cTn id="20" dur="320" fill="hold"/>
+                                        <p:cTn id="20" dur="309" fill="hold" decel="80000"/>
                                         <p:tgtEl>
                                           <p:spTgt spid="7"/>
                                         </p:tgtEl>
@@ -8092,7 +8092,7 @@
                               <p:par>
                                 <p:cTn id="21" presetID="10" presetClass="entr" presetSubtype="0" fill="hold" grpId="0" nodeType="withEffect">
                                   <p:stCondLst>
-                                    <p:cond delay="280"/>
+                                    <p:cond delay="300"/>
                                   </p:stCondLst>
                                   <p:childTnLst>
                                     <p:set>
@@ -8115,7 +8115,7 @@
                                     </p:set>
                                     <p:animEffect transition="in" filter="wipe(left)">
                                       <p:cBhvr>
-                                        <p:cTn id="23" dur="320"/>
+                                        <p:cTn id="23" dur="292"/>
                                         <p:tgtEl>
                                           <p:spTgt spid="5"/>
                                         </p:tgtEl>
@@ -8127,7 +8127,7 @@
                               <p:par>
                                 <p:cTn id="24" presetID="10" presetClass="entr" presetSubtype="0" fill="hold" grpId="0" nodeType="withEffect">
                                   <p:stCondLst>
-                                    <p:cond delay="350"/>
+                                    <p:cond delay="340"/>
                                   </p:stCondLst>
                                   <p:childTnLst>
                                     <p:set>
@@ -8150,7 +8150,7 @@
                                     </p:set>
                                     <p:animEffect transition="in" filter="wipe(left)">
                                       <p:cBhvr>
-                                        <p:cTn id="26" dur="320"/>
+                                        <p:cTn id="26" dur="292"/>
                                         <p:tgtEl>
                                           <p:spTgt spid="6"/>
                                         </p:tgtEl>
@@ -8162,7 +8162,7 @@
                               <p:par>
                                 <p:cTn id="27" presetID="10" presetClass="entr" presetSubtype="0" fill="hold" grpId="0" nodeType="withEffect">
                                   <p:stCondLst>
-                                    <p:cond delay="420"/>
+                                    <p:cond delay="330"/>
                                   </p:stCondLst>
                                   <p:childTnLst>
                                     <p:set>
@@ -8185,7 +8185,7 @@
                                     </p:set>
                                     <p:animEffect transition="in" filter="fade">
                                       <p:cBhvr>
-                                        <p:cTn id="29" dur="320"/>
+                                        <p:cTn id="29" dur="309"/>
                                         <p:tgtEl>
                                           <p:spTgt spid="8"/>
                                         </p:tgtEl>
@@ -8193,7 +8193,7 @@
                                     </p:animEffect>
                                     <p:anim calcmode="lin" valueType="num">
                                       <p:cBhvr additive="base">
-                                        <p:cTn id="30" dur="320" fill="hold"/>
+                                        <p:cTn id="30" dur="309" fill="hold" decel="80000"/>
                                         <p:tgtEl>
                                           <p:spTgt spid="8"/>
                                         </p:tgtEl>
@@ -8220,7 +8220,7 @@
                               <p:par>
                                 <p:cTn id="31" presetID="10" presetClass="entr" presetSubtype="0" fill="hold" grpId="0" nodeType="withEffect">
                                   <p:stCondLst>
-                                    <p:cond delay="490"/>
+                                    <p:cond delay="370"/>
                                   </p:stCondLst>
                                   <p:childTnLst>
                                     <p:set>
@@ -8243,7 +8243,7 @@
                                     </p:set>
                                     <p:animEffect transition="in" filter="fade">
                                       <p:cBhvr>
-                                        <p:cTn id="33" dur="320"/>
+                                        <p:cTn id="33" dur="309"/>
                                         <p:tgtEl>
                                           <p:spTgt spid="11"/>
                                         </p:tgtEl>
@@ -8251,7 +8251,7 @@
                                     </p:animEffect>
                                     <p:anim calcmode="lin" valueType="num">
                                       <p:cBhvr additive="base">
-                                        <p:cTn id="34" dur="320" fill="hold"/>
+                                        <p:cTn id="34" dur="309" fill="hold" decel="80000"/>
                                         <p:tgtEl>
                                           <p:spTgt spid="11"/>
                                         </p:tgtEl>
@@ -8278,7 +8278,7 @@
                               <p:par>
                                 <p:cTn id="35" presetID="10" presetClass="entr" presetSubtype="0" fill="hold" grpId="0" nodeType="withEffect">
                                   <p:stCondLst>
-                                    <p:cond delay="560"/>
+                                    <p:cond delay="410"/>
                                   </p:stCondLst>
                                   <p:childTnLst>
                                     <p:set>
@@ -8301,7 +8301,7 @@
                                     </p:set>
                                     <p:animEffect transition="in" filter="wipe(left)">
                                       <p:cBhvr>
-                                        <p:cTn id="37" dur="320"/>
+                                        <p:cTn id="37" dur="292"/>
                                         <p:tgtEl>
                                           <p:spTgt spid="9"/>
                                         </p:tgtEl>
@@ -8313,7 +8313,7 @@
                               <p:par>
                                 <p:cTn id="38" presetID="10" presetClass="entr" presetSubtype="0" fill="hold" grpId="0" nodeType="withEffect">
                                   <p:stCondLst>
-                                    <p:cond delay="630"/>
+                                    <p:cond delay="450"/>
                                   </p:stCondLst>
                                   <p:childTnLst>
                                     <p:set>
@@ -8336,7 +8336,7 @@
                                     </p:set>
                                     <p:animEffect transition="in" filter="wipe(left)">
                                       <p:cBhvr>
-                                        <p:cTn id="40" dur="320"/>
+                                        <p:cTn id="40" dur="292"/>
                                         <p:tgtEl>
                                           <p:spTgt spid="10"/>
                                         </p:tgtEl>
@@ -8348,7 +8348,7 @@
                               <p:par>
                                 <p:cTn id="41" presetID="10" presetClass="entr" presetSubtype="0" fill="hold" grpId="0" nodeType="withEffect">
                                   <p:stCondLst>
-                                    <p:cond delay="700"/>
+                                    <p:cond delay="440"/>
                                   </p:stCondLst>
                                   <p:childTnLst>
                                     <p:set>
@@ -8371,7 +8371,7 @@
                                     </p:set>
                                     <p:animEffect transition="in" filter="fade">
                                       <p:cBhvr>
-                                        <p:cTn id="43" dur="320"/>
+                                        <p:cTn id="43" dur="309"/>
                                         <p:tgtEl>
                                           <p:spTgt spid="12"/>
                                         </p:tgtEl>
@@ -8379,7 +8379,7 @@
                                     </p:animEffect>
                                     <p:anim calcmode="lin" valueType="num">
                                       <p:cBhvr additive="base">
-                                        <p:cTn id="44" dur="320" fill="hold"/>
+                                        <p:cTn id="44" dur="309" fill="hold" decel="80000"/>
                                         <p:tgtEl>
                                           <p:spTgt spid="12"/>
                                         </p:tgtEl>
@@ -8406,7 +8406,7 @@
                               <p:par>
                                 <p:cTn id="45" presetID="10" presetClass="entr" presetSubtype="0" fill="hold" grpId="0" nodeType="withEffect">
                                   <p:stCondLst>
-                                    <p:cond delay="770"/>
+                                    <p:cond delay="480"/>
                                   </p:stCondLst>
                                   <p:childTnLst>
                                     <p:set>
@@ -8429,7 +8429,7 @@
                                     </p:set>
                                     <p:animEffect transition="in" filter="fade">
                                       <p:cBhvr>
-                                        <p:cTn id="47" dur="320"/>
+                                        <p:cTn id="47" dur="309"/>
                                         <p:tgtEl>
                                           <p:spTgt spid="15"/>
                                         </p:tgtEl>
@@ -8437,7 +8437,7 @@
                                     </p:animEffect>
                                     <p:anim calcmode="lin" valueType="num">
                                       <p:cBhvr additive="base">
-                                        <p:cTn id="48" dur="320" fill="hold"/>
+                                        <p:cTn id="48" dur="309" fill="hold" decel="80000"/>
                                         <p:tgtEl>
                                           <p:spTgt spid="15"/>
                                         </p:tgtEl>
@@ -8464,7 +8464,7 @@
                               <p:par>
                                 <p:cTn id="49" presetID="10" presetClass="entr" presetSubtype="0" fill="hold" grpId="0" nodeType="withEffect">
                                   <p:stCondLst>
-                                    <p:cond delay="840"/>
+                                    <p:cond delay="520"/>
                                   </p:stCondLst>
                                   <p:childTnLst>
                                     <p:set>
@@ -8487,7 +8487,7 @@
                                     </p:set>
                                     <p:animEffect transition="in" filter="wipe(left)">
                                       <p:cBhvr>
-                                        <p:cTn id="51" dur="320"/>
+                                        <p:cTn id="51" dur="292"/>
                                         <p:tgtEl>
                                           <p:spTgt spid="13"/>
                                         </p:tgtEl>
@@ -8499,7 +8499,7 @@
                               <p:par>
                                 <p:cTn id="52" presetID="10" presetClass="entr" presetSubtype="0" fill="hold" grpId="0" nodeType="withEffect">
                                   <p:stCondLst>
-                                    <p:cond delay="910"/>
+                                    <p:cond delay="560"/>
                                   </p:stCondLst>
                                   <p:childTnLst>
                                     <p:set>
@@ -8522,7 +8522,7 @@
                                     </p:set>
                                     <p:animEffect transition="in" filter="wipe(left)">
                                       <p:cBhvr>
-                                        <p:cTn id="54" dur="320"/>
+                                        <p:cTn id="54" dur="292"/>
                                         <p:tgtEl>
                                           <p:spTgt spid="14"/>
                                         </p:tgtEl>
@@ -8534,7 +8534,7 @@
                               <p:par>
                                 <p:cTn id="55" presetID="10" presetClass="entr" presetSubtype="0" fill="hold" grpId="0" nodeType="withEffect">
                                   <p:stCondLst>
-                                    <p:cond delay="980"/>
+                                    <p:cond delay="550"/>
                                   </p:stCondLst>
                                   <p:childTnLst>
                                     <p:set>
@@ -8557,7 +8557,7 @@
                                     </p:set>
                                     <p:animEffect transition="in" filter="fade">
                                       <p:cBhvr>
-                                        <p:cTn id="57" dur="320"/>
+                                        <p:cTn id="57" dur="309"/>
                                         <p:tgtEl>
                                           <p:spTgt spid="16"/>
                                         </p:tgtEl>
@@ -8565,7 +8565,7 @@
                                     </p:animEffect>
                                     <p:anim calcmode="lin" valueType="num">
                                       <p:cBhvr additive="base">
-                                        <p:cTn id="58" dur="320" fill="hold"/>
+                                        <p:cTn id="58" dur="309" fill="hold" decel="80000"/>
                                         <p:tgtEl>
                                           <p:spTgt spid="16"/>
                                         </p:tgtEl>
@@ -8592,7 +8592,7 @@
                               <p:par>
                                 <p:cTn id="59" presetID="10" presetClass="entr" presetSubtype="0" fill="hold" grpId="0" nodeType="withEffect">
                                   <p:stCondLst>
-                                    <p:cond delay="1050"/>
+                                    <p:cond delay="590"/>
                                   </p:stCondLst>
                                   <p:childTnLst>
                                     <p:set>
@@ -8615,7 +8615,7 @@
                                     </p:set>
                                     <p:animEffect transition="in" filter="fade">
                                       <p:cBhvr>
-                                        <p:cTn id="61" dur="320"/>
+                                        <p:cTn id="61" dur="309"/>
                                         <p:tgtEl>
                                           <p:spTgt spid="19"/>
                                         </p:tgtEl>
@@ -8623,7 +8623,7 @@
                                     </p:animEffect>
                                     <p:anim calcmode="lin" valueType="num">
                                       <p:cBhvr additive="base">
-                                        <p:cTn id="62" dur="320" fill="hold"/>
+                                        <p:cTn id="62" dur="309" fill="hold" decel="80000"/>
                                         <p:tgtEl>
                                           <p:spTgt spid="19"/>
                                         </p:tgtEl>
@@ -8650,7 +8650,7 @@
                               <p:par>
                                 <p:cTn id="63" presetID="10" presetClass="entr" presetSubtype="0" fill="hold" grpId="0" nodeType="withEffect">
                                   <p:stCondLst>
-                                    <p:cond delay="1120"/>
+                                    <p:cond delay="630"/>
                                   </p:stCondLst>
                                   <p:childTnLst>
                                     <p:set>
@@ -8673,7 +8673,7 @@
                                     </p:set>
                                     <p:animEffect transition="in" filter="wipe(left)">
                                       <p:cBhvr>
-                                        <p:cTn id="65" dur="320"/>
+                                        <p:cTn id="65" dur="292"/>
                                         <p:tgtEl>
                                           <p:spTgt spid="17"/>
                                         </p:tgtEl>
@@ -8685,7 +8685,7 @@
                               <p:par>
                                 <p:cTn id="66" presetID="10" presetClass="entr" presetSubtype="0" fill="hold" grpId="0" nodeType="withEffect">
                                   <p:stCondLst>
-                                    <p:cond delay="1190"/>
+                                    <p:cond delay="670"/>
                                   </p:stCondLst>
                                   <p:childTnLst>
                                     <p:set>
@@ -8708,7 +8708,7 @@
                                     </p:set>
                                     <p:animEffect transition="in" filter="wipe(left)">
                                       <p:cBhvr>
-                                        <p:cTn id="68" dur="320"/>
+                                        <p:cTn id="68" dur="292"/>
                                         <p:tgtEl>
                                           <p:spTgt spid="18"/>
                                         </p:tgtEl>
@@ -9123,7 +9123,7 @@
                                     </p:set>
                                     <p:animEffect transition="in" filter="fade">
                                       <p:cBhvr>
-                                        <p:cTn id="7" dur="320"/>
+                                        <p:cTn id="7" dur="312"/>
                                         <p:tgtEl>
                                           <p:spTgt spid="2"/>
                                         </p:tgtEl>
@@ -9131,7 +9131,7 @@
                                     </p:animEffect>
                                     <p:anim calcmode="lin" valueType="num">
                                       <p:cBhvr additive="base">
-                                        <p:cTn id="8" dur="320" fill="hold"/>
+                                        <p:cTn id="8" dur="312" fill="hold" decel="80000"/>
                                         <p:tgtEl>
                                           <p:spTgt spid="2"/>
                                         </p:tgtEl>
@@ -9181,7 +9181,7 @@
                                     </p:set>
                                     <p:animEffect transition="in" filter="fade">
                                       <p:cBhvr>
-                                        <p:cTn id="11" dur="320"/>
+                                        <p:cTn id="11" dur="302"/>
                                         <p:tgtEl>
                                           <p:spTgt spid="3"/>
                                         </p:tgtEl>
@@ -9189,7 +9189,7 @@
                                     </p:animEffect>
                                     <p:anim calcmode="lin" valueType="num">
                                       <p:cBhvr additive="base">
-                                        <p:cTn id="12" dur="320" fill="hold"/>
+                                        <p:cTn id="12" dur="302" fill="hold" decel="80000"/>
                                         <p:tgtEl>
                                           <p:spTgt spid="3"/>
                                         </p:tgtEl>
@@ -9216,7 +9216,7 @@
                               <p:par>
                                 <p:cTn id="13" presetID="10" presetClass="entr" presetSubtype="0" fill="hold" grpId="0" nodeType="withEffect">
                                   <p:stCondLst>
-                                    <p:cond delay="220"/>
+                                    <p:cond delay="150"/>
                                   </p:stCondLst>
                                   <p:childTnLst>
                                     <p:set>
@@ -9239,7 +9239,7 @@
                                     </p:set>
                                     <p:animEffect transition="in" filter="fade">
                                       <p:cBhvr>
-                                        <p:cTn id="15" dur="320"/>
+                                        <p:cTn id="15" dur="302"/>
                                         <p:tgtEl>
                                           <p:spTgt spid="5"/>
                                         </p:tgtEl>
@@ -9247,7 +9247,7 @@
                                     </p:animEffect>
                                     <p:anim calcmode="lin" valueType="num">
                                       <p:cBhvr additive="base">
-                                        <p:cTn id="16" dur="320" fill="hold"/>
+                                        <p:cTn id="16" dur="302" fill="hold" decel="80000"/>
                                         <p:tgtEl>
                                           <p:spTgt spid="5"/>
                                         </p:tgtEl>
@@ -9274,7 +9274,7 @@
                               <p:par>
                                 <p:cTn id="17" presetID="10" presetClass="entr" presetSubtype="0" fill="hold" grpId="0" nodeType="withEffect">
                                   <p:stCondLst>
-                                    <p:cond delay="330"/>
+                                    <p:cond delay="190"/>
                                   </p:stCondLst>
                                   <p:childTnLst>
                                     <p:set>
@@ -9297,7 +9297,7 @@
                                     </p:set>
                                     <p:animEffect transition="in" filter="fade">
                                       <p:cBhvr>
-                                        <p:cTn id="19" dur="320"/>
+                                        <p:cTn id="19" dur="302"/>
                                         <p:tgtEl>
                                           <p:spTgt spid="7"/>
                                         </p:tgtEl>
@@ -9305,7 +9305,7 @@
                                     </p:animEffect>
                                     <p:anim calcmode="lin" valueType="num">
                                       <p:cBhvr additive="base">
-                                        <p:cTn id="20" dur="320" fill="hold"/>
+                                        <p:cTn id="20" dur="302" fill="hold" decel="80000"/>
                                         <p:tgtEl>
                                           <p:spTgt spid="7"/>
                                         </p:tgtEl>
@@ -9332,7 +9332,7 @@
                               <p:par>
                                 <p:cTn id="21" presetID="10" presetClass="entr" presetSubtype="0" fill="hold" grpId="0" nodeType="withEffect">
                                   <p:stCondLst>
-                                    <p:cond delay="440"/>
+                                    <p:cond delay="220"/>
                                   </p:stCondLst>
                                   <p:childTnLst>
                                     <p:set>
@@ -9355,7 +9355,7 @@
                                     </p:set>
                                     <p:animEffect transition="in" filter="fade">
                                       <p:cBhvr>
-                                        <p:cTn id="23" dur="320"/>
+                                        <p:cTn id="23" dur="394"/>
                                         <p:tgtEl>
                                           <p:spTgt spid="4"/>
                                         </p:tgtEl>
@@ -9363,7 +9363,7 @@
                                     </p:animEffect>
                                     <p:anim calcmode="lin" valueType="num">
                                       <p:cBhvr additive="base">
-                                        <p:cTn id="24" dur="320" fill="hold"/>
+                                        <p:cTn id="24" dur="394" fill="hold" decel="80000"/>
                                         <p:tgtEl>
                                           <p:spTgt spid="4"/>
                                         </p:tgtEl>
@@ -9390,7 +9390,7 @@
                               <p:par>
                                 <p:cTn id="25" presetID="10" presetClass="entr" presetSubtype="0" fill="hold" grpId="0" nodeType="withEffect">
                                   <p:stCondLst>
-                                    <p:cond delay="550"/>
+                                    <p:cond delay="260"/>
                                   </p:stCondLst>
                                   <p:childTnLst>
                                     <p:set>
@@ -9413,7 +9413,7 @@
                                     </p:set>
                                     <p:animEffect transition="in" filter="fade">
                                       <p:cBhvr>
-                                        <p:cTn id="27" dur="320"/>
+                                        <p:cTn id="27" dur="394"/>
                                         <p:tgtEl>
                                           <p:spTgt spid="6"/>
                                         </p:tgtEl>
@@ -9421,7 +9421,7 @@
                                     </p:animEffect>
                                     <p:anim calcmode="lin" valueType="num">
                                       <p:cBhvr additive="base">
-                                        <p:cTn id="28" dur="320" fill="hold"/>
+                                        <p:cTn id="28" dur="394" fill="hold" decel="80000"/>
                                         <p:tgtEl>
                                           <p:spTgt spid="6"/>
                                         </p:tgtEl>
@@ -9448,7 +9448,7 @@
                               <p:par>
                                 <p:cTn id="29" presetID="10" presetClass="entr" presetSubtype="0" fill="hold" grpId="0" nodeType="withEffect">
                                   <p:stCondLst>
-                                    <p:cond delay="660"/>
+                                    <p:cond delay="300"/>
                                   </p:stCondLst>
                                   <p:childTnLst>
                                     <p:set>
@@ -9471,7 +9471,7 @@
                                     </p:set>
                                     <p:animEffect transition="in" filter="fade">
                                       <p:cBhvr>
-                                        <p:cTn id="31" dur="320"/>
+                                        <p:cTn id="31" dur="394"/>
                                         <p:tgtEl>
                                           <p:spTgt spid="8"/>
                                         </p:tgtEl>
@@ -9479,7 +9479,7 @@
                                     </p:animEffect>
                                     <p:anim calcmode="lin" valueType="num">
                                       <p:cBhvr additive="base">
-                                        <p:cTn id="32" dur="320" fill="hold"/>
+                                        <p:cTn id="32" dur="394" fill="hold" decel="80000"/>
                                         <p:tgtEl>
                                           <p:spTgt spid="8"/>
                                         </p:tgtEl>
@@ -9964,7 +9964,7 @@
                                     </p:set>
                                     <p:animEffect transition="in" filter="fade">
                                       <p:cBhvr>
-                                        <p:cTn id="7" dur="320"/>
+                                        <p:cTn id="7" dur="292"/>
                                         <p:tgtEl>
                                           <p:spTgt spid="2"/>
                                         </p:tgtEl>
@@ -9972,7 +9972,7 @@
                                     </p:animEffect>
                                     <p:anim calcmode="lin" valueType="num">
                                       <p:cBhvr additive="base">
-                                        <p:cTn id="8" dur="320" fill="hold"/>
+                                        <p:cTn id="8" dur="292" fill="hold" decel="80000"/>
                                         <p:tgtEl>
                                           <p:spTgt spid="2"/>
                                         </p:tgtEl>
@@ -9999,7 +9999,7 @@
                               <p:par>
                                 <p:cTn id="9" presetID="10" presetClass="entr" presetSubtype="0" fill="hold" grpId="0" nodeType="withEffect">
                                   <p:stCondLst>
-                                    <p:cond delay="110"/>
+                                    <p:cond delay="40"/>
                                   </p:stCondLst>
                                   <p:childTnLst>
                                     <p:set>
@@ -10022,7 +10022,7 @@
                                     </p:set>
                                     <p:animEffect transition="in" filter="fade">
                                       <p:cBhvr>
-                                        <p:cTn id="11" dur="320"/>
+                                        <p:cTn id="11" dur="292"/>
                                         <p:tgtEl>
                                           <p:spTgt spid="3"/>
                                         </p:tgtEl>
@@ -10030,7 +10030,7 @@
                                     </p:animEffect>
                                     <p:anim calcmode="lin" valueType="num">
                                       <p:cBhvr additive="base">
-                                        <p:cTn id="12" dur="320" fill="hold"/>
+                                        <p:cTn id="12" dur="292" fill="hold" decel="80000"/>
                                         <p:tgtEl>
                                           <p:spTgt spid="3"/>
                                         </p:tgtEl>
@@ -10057,7 +10057,7 @@
                               <p:par>
                                 <p:cTn id="13" presetID="10" presetClass="entr" presetSubtype="0" fill="hold" grpId="0" nodeType="withEffect">
                                   <p:stCondLst>
-                                    <p:cond delay="220"/>
+                                    <p:cond delay="110"/>
                                   </p:stCondLst>
                                   <p:childTnLst>
                                     <p:set>
@@ -10080,7 +10080,7 @@
                                     </p:set>
                                     <p:animEffect transition="in" filter="wipe(left)">
                                       <p:cBhvr>
-                                        <p:cTn id="15" dur="320"/>
+                                        <p:cTn id="15" dur="432"/>
                                         <p:tgtEl>
                                           <p:spTgt spid="8"/>
                                         </p:tgtEl>
@@ -10092,7 +10092,7 @@
                               <p:par>
                                 <p:cTn id="16" presetID="10" presetClass="entr" presetSubtype="0" fill="hold" grpId="0" nodeType="withEffect">
                                   <p:stCondLst>
-                                    <p:cond delay="330"/>
+                                    <p:cond delay="150"/>
                                   </p:stCondLst>
                                   <p:childTnLst>
                                     <p:set>
@@ -10115,7 +10115,7 @@
                                     </p:set>
                                     <p:animEffect transition="in" filter="fade">
                                       <p:cBhvr>
-                                        <p:cTn id="18" dur="320"/>
+                                        <p:cTn id="18" dur="328"/>
                                         <p:tgtEl>
                                           <p:spTgt spid="4"/>
                                         </p:tgtEl>
@@ -10123,7 +10123,7 @@
                                     </p:animEffect>
                                     <p:anim calcmode="lin" valueType="num">
                                       <p:cBhvr additive="base">
-                                        <p:cTn id="19" dur="320" fill="hold"/>
+                                        <p:cTn id="19" dur="328" fill="hold" decel="80000"/>
                                         <p:tgtEl>
                                           <p:spTgt spid="4"/>
                                         </p:tgtEl>
@@ -10150,7 +10150,7 @@
                               <p:par>
                                 <p:cTn id="20" presetID="10" presetClass="entr" presetSubtype="0" fill="hold" grpId="0" nodeType="withEffect">
                                   <p:stCondLst>
-                                    <p:cond delay="440"/>
+                                    <p:cond delay="190"/>
                                   </p:stCondLst>
                                   <p:childTnLst>
                                     <p:set>
@@ -10173,7 +10173,7 @@
                                     </p:set>
                                     <p:animEffect transition="in" filter="fade">
                                       <p:cBhvr>
-                                        <p:cTn id="22" dur="320"/>
+                                        <p:cTn id="22" dur="328"/>
                                         <p:tgtEl>
                                           <p:spTgt spid="5"/>
                                         </p:tgtEl>
@@ -10181,7 +10181,7 @@
                                     </p:animEffect>
                                     <p:anim calcmode="lin" valueType="num">
                                       <p:cBhvr additive="base">
-                                        <p:cTn id="23" dur="320" fill="hold"/>
+                                        <p:cTn id="23" dur="328" fill="hold" decel="80000"/>
                                         <p:tgtEl>
                                           <p:spTgt spid="5"/>
                                         </p:tgtEl>
@@ -10208,7 +10208,7 @@
                               <p:par>
                                 <p:cTn id="24" presetID="10" presetClass="entr" presetSubtype="0" fill="hold" grpId="0" nodeType="withEffect">
                                   <p:stCondLst>
-                                    <p:cond delay="550"/>
+                                    <p:cond delay="230"/>
                                   </p:stCondLst>
                                   <p:childTnLst>
                                     <p:set>
@@ -10231,7 +10231,7 @@
                                     </p:set>
                                     <p:animEffect transition="in" filter="fade">
                                       <p:cBhvr>
-                                        <p:cTn id="26" dur="320"/>
+                                        <p:cTn id="26" dur="432"/>
                                         <p:tgtEl>
                                           <p:spTgt spid="6"/>
                                         </p:tgtEl>
@@ -10239,7 +10239,7 @@
                                     </p:animEffect>
                                     <p:anim calcmode="lin" valueType="num">
                                       <p:cBhvr additive="base">
-                                        <p:cTn id="27" dur="320" fill="hold"/>
+                                        <p:cTn id="27" dur="432" fill="hold" decel="80000"/>
                                         <p:tgtEl>
                                           <p:spTgt spid="6"/>
                                         </p:tgtEl>
@@ -10266,7 +10266,7 @@
                               <p:par>
                                 <p:cTn id="28" presetID="10" presetClass="entr" presetSubtype="0" fill="hold" grpId="0" nodeType="withEffect">
                                   <p:stCondLst>
-                                    <p:cond delay="660"/>
+                                    <p:cond delay="270"/>
                                   </p:stCondLst>
                                   <p:childTnLst>
                                     <p:set>
@@ -10289,7 +10289,7 @@
                                     </p:set>
                                     <p:animEffect transition="in" filter="fade">
                                       <p:cBhvr>
-                                        <p:cTn id="30" dur="320"/>
+                                        <p:cTn id="30" dur="432"/>
                                         <p:tgtEl>
                                           <p:spTgt spid="7"/>
                                         </p:tgtEl>
@@ -10297,7 +10297,7 @@
                                     </p:animEffect>
                                     <p:anim calcmode="lin" valueType="num">
                                       <p:cBhvr additive="base">
-                                        <p:cTn id="31" dur="320" fill="hold"/>
+                                        <p:cTn id="31" dur="432" fill="hold" decel="80000"/>
                                         <p:tgtEl>
                                           <p:spTgt spid="7"/>
                                         </p:tgtEl>
@@ -10522,7 +10522,7 @@
                                     </p:set>
                                     <p:animEffect transition="in" filter="fade">
                                       <p:cBhvr>
-                                        <p:cTn id="7" dur="320"/>
+                                        <p:cTn id="7" dur="552"/>
                                         <p:tgtEl>
                                           <p:spTgt spid="2"/>
                                         </p:tgtEl>
@@ -10530,7 +10530,7 @@
                                     </p:animEffect>
                                     <p:anim calcmode="lin" valueType="num">
                                       <p:cBhvr additive="base">
-                                        <p:cTn id="8" dur="320" fill="hold"/>
+                                        <p:cTn id="8" dur="552" fill="hold" decel="80000"/>
                                         <p:tgtEl>
                                           <p:spTgt spid="2"/>
                                         </p:tgtEl>
@@ -10580,7 +10580,7 @@
                                     </p:set>
                                     <p:animEffect transition="in" filter="fade">
                                       <p:cBhvr>
-                                        <p:cTn id="11" dur="320"/>
+                                        <p:cTn id="11" dur="416"/>
                                         <p:tgtEl>
                                           <p:spTgt spid="3"/>
                                         </p:tgtEl>
@@ -10588,7 +10588,7 @@
                                     </p:animEffect>
                                     <p:anim calcmode="lin" valueType="num">
                                       <p:cBhvr additive="base">
-                                        <p:cTn id="12" dur="320" fill="hold"/>
+                                        <p:cTn id="12" dur="416" fill="hold" decel="80000"/>
                                         <p:tgtEl>
                                           <p:spTgt spid="3"/>
                                         </p:tgtEl>
